--- a/docs/Final Submission/Final Presentation.pptx
+++ b/docs/Final Submission/Final Presentation.pptx
@@ -5,14 +5,10 @@
     <p:sldMasterId id="2147483972" r:id="rId1"/>
   </p:sldMasterIdLst>
   <p:notesMasterIdLst>
-    <p:notesMasterId r:id="rId7"/>
+    <p:notesMasterId r:id="rId3"/>
   </p:notesMasterIdLst>
   <p:sldIdLst>
     <p:sldId id="256" r:id="rId2"/>
-    <p:sldId id="257" r:id="rId3"/>
-    <p:sldId id="258" r:id="rId4"/>
-    <p:sldId id="259" r:id="rId5"/>
-    <p:sldId id="260" r:id="rId6"/>
   </p:sldIdLst>
   <p:sldSz cx="12192000" cy="6858000"/>
   <p:notesSz cx="6858000" cy="9144000"/>
@@ -117,2594 +113,6 @@
     </p:ext>
   </p:extLst>
 </p:presentation>
-</file>
-
-<file path=ppt/diagrams/colors1.xml><?xml version="1.0" encoding="utf-8"?>
-<dgm:colorsDef xmlns:dgm="http://schemas.openxmlformats.org/drawingml/2006/diagram" xmlns:a="http://schemas.openxmlformats.org/drawingml/2006/main" uniqueId="urn:microsoft.com/office/officeart/2005/8/colors/accent0_1">
-  <dgm:title val=""/>
-  <dgm:desc val=""/>
-  <dgm:catLst>
-    <dgm:cat type="mainScheme" pri="10100"/>
-  </dgm:catLst>
-  <dgm:styleLbl name="node0">
-    <dgm:fillClrLst meth="repeat">
-      <a:schemeClr val="lt1"/>
-    </dgm:fillClrLst>
-    <dgm:linClrLst meth="repeat">
-      <a:schemeClr val="dk1">
-        <a:shade val="80000"/>
-      </a:schemeClr>
-    </dgm:linClrLst>
-    <dgm:effectClrLst/>
-    <dgm:txLinClrLst/>
-    <dgm:txFillClrLst meth="repeat">
-      <a:schemeClr val="dk1"/>
-    </dgm:txFillClrLst>
-    <dgm:txEffectClrLst/>
-  </dgm:styleLbl>
-  <dgm:styleLbl name="node1">
-    <dgm:fillClrLst meth="repeat">
-      <a:schemeClr val="lt1"/>
-    </dgm:fillClrLst>
-    <dgm:linClrLst meth="repeat">
-      <a:schemeClr val="dk1">
-        <a:shade val="80000"/>
-      </a:schemeClr>
-    </dgm:linClrLst>
-    <dgm:effectClrLst/>
-    <dgm:txLinClrLst/>
-    <dgm:txFillClrLst meth="repeat">
-      <a:schemeClr val="dk1"/>
-    </dgm:txFillClrLst>
-    <dgm:txEffectClrLst/>
-  </dgm:styleLbl>
-  <dgm:styleLbl name="alignNode1">
-    <dgm:fillClrLst meth="repeat">
-      <a:schemeClr val="lt1"/>
-    </dgm:fillClrLst>
-    <dgm:linClrLst meth="repeat">
-      <a:schemeClr val="dk1">
-        <a:shade val="80000"/>
-      </a:schemeClr>
-    </dgm:linClrLst>
-    <dgm:effectClrLst/>
-    <dgm:txLinClrLst/>
-    <dgm:txFillClrLst meth="repeat">
-      <a:schemeClr val="dk1"/>
-    </dgm:txFillClrLst>
-    <dgm:txEffectClrLst/>
-  </dgm:styleLbl>
-  <dgm:styleLbl name="lnNode1">
-    <dgm:fillClrLst meth="repeat">
-      <a:schemeClr val="lt1"/>
-    </dgm:fillClrLst>
-    <dgm:linClrLst meth="repeat">
-      <a:schemeClr val="dk1">
-        <a:shade val="80000"/>
-      </a:schemeClr>
-    </dgm:linClrLst>
-    <dgm:effectClrLst/>
-    <dgm:txLinClrLst/>
-    <dgm:txFillClrLst meth="repeat">
-      <a:schemeClr val="dk1"/>
-    </dgm:txFillClrLst>
-    <dgm:txEffectClrLst/>
-  </dgm:styleLbl>
-  <dgm:styleLbl name="vennNode1">
-    <dgm:fillClrLst meth="repeat">
-      <a:schemeClr val="lt1">
-        <a:alpha val="50000"/>
-      </a:schemeClr>
-    </dgm:fillClrLst>
-    <dgm:linClrLst meth="repeat">
-      <a:schemeClr val="dk1">
-        <a:shade val="80000"/>
-      </a:schemeClr>
-    </dgm:linClrLst>
-    <dgm:effectClrLst/>
-    <dgm:txLinClrLst/>
-    <dgm:txFillClrLst/>
-    <dgm:txEffectClrLst/>
-  </dgm:styleLbl>
-  <dgm:styleLbl name="node2">
-    <dgm:fillClrLst meth="repeat">
-      <a:schemeClr val="lt1"/>
-    </dgm:fillClrLst>
-    <dgm:linClrLst meth="repeat">
-      <a:schemeClr val="dk1">
-        <a:shade val="80000"/>
-      </a:schemeClr>
-    </dgm:linClrLst>
-    <dgm:effectClrLst/>
-    <dgm:txLinClrLst/>
-    <dgm:txFillClrLst meth="repeat">
-      <a:schemeClr val="dk1"/>
-    </dgm:txFillClrLst>
-    <dgm:txEffectClrLst/>
-  </dgm:styleLbl>
-  <dgm:styleLbl name="node3">
-    <dgm:fillClrLst meth="repeat">
-      <a:schemeClr val="lt1"/>
-    </dgm:fillClrLst>
-    <dgm:linClrLst meth="repeat">
-      <a:schemeClr val="dk1">
-        <a:shade val="80000"/>
-      </a:schemeClr>
-    </dgm:linClrLst>
-    <dgm:effectClrLst/>
-    <dgm:txLinClrLst/>
-    <dgm:txFillClrLst meth="repeat">
-      <a:schemeClr val="dk1"/>
-    </dgm:txFillClrLst>
-    <dgm:txEffectClrLst/>
-  </dgm:styleLbl>
-  <dgm:styleLbl name="node4">
-    <dgm:fillClrLst meth="repeat">
-      <a:schemeClr val="lt1"/>
-    </dgm:fillClrLst>
-    <dgm:linClrLst meth="repeat">
-      <a:schemeClr val="dk1">
-        <a:shade val="80000"/>
-      </a:schemeClr>
-    </dgm:linClrLst>
-    <dgm:effectClrLst/>
-    <dgm:txLinClrLst/>
-    <dgm:txFillClrLst meth="repeat">
-      <a:schemeClr val="dk1"/>
-    </dgm:txFillClrLst>
-    <dgm:txEffectClrLst/>
-  </dgm:styleLbl>
-  <dgm:styleLbl name="fgImgPlace1">
-    <dgm:fillClrLst meth="repeat">
-      <a:schemeClr val="dk1">
-        <a:tint val="40000"/>
-      </a:schemeClr>
-    </dgm:fillClrLst>
-    <dgm:linClrLst meth="repeat">
-      <a:schemeClr val="dk1">
-        <a:shade val="80000"/>
-      </a:schemeClr>
-    </dgm:linClrLst>
-    <dgm:effectClrLst/>
-    <dgm:txLinClrLst/>
-    <dgm:txFillClrLst meth="repeat">
-      <a:schemeClr val="lt1"/>
-    </dgm:txFillClrLst>
-    <dgm:txEffectClrLst/>
-  </dgm:styleLbl>
-  <dgm:styleLbl name="alignImgPlace1">
-    <dgm:fillClrLst meth="repeat">
-      <a:schemeClr val="dk1">
-        <a:tint val="40000"/>
-      </a:schemeClr>
-    </dgm:fillClrLst>
-    <dgm:linClrLst meth="repeat">
-      <a:schemeClr val="dk1">
-        <a:shade val="80000"/>
-      </a:schemeClr>
-    </dgm:linClrLst>
-    <dgm:effectClrLst/>
-    <dgm:txLinClrLst/>
-    <dgm:txFillClrLst meth="repeat">
-      <a:schemeClr val="lt1"/>
-    </dgm:txFillClrLst>
-    <dgm:txEffectClrLst/>
-  </dgm:styleLbl>
-  <dgm:styleLbl name="bgImgPlace1">
-    <dgm:fillClrLst meth="repeat">
-      <a:schemeClr val="dk1">
-        <a:tint val="40000"/>
-      </a:schemeClr>
-    </dgm:fillClrLst>
-    <dgm:linClrLst meth="repeat">
-      <a:schemeClr val="dk1">
-        <a:shade val="80000"/>
-      </a:schemeClr>
-    </dgm:linClrLst>
-    <dgm:effectClrLst/>
-    <dgm:txLinClrLst/>
-    <dgm:txFillClrLst meth="repeat">
-      <a:schemeClr val="lt1"/>
-    </dgm:txFillClrLst>
-    <dgm:txEffectClrLst/>
-  </dgm:styleLbl>
-  <dgm:styleLbl name="sibTrans2D1">
-    <dgm:fillClrLst meth="repeat">
-      <a:schemeClr val="dk1">
-        <a:tint val="60000"/>
-      </a:schemeClr>
-    </dgm:fillClrLst>
-    <dgm:linClrLst meth="repeat">
-      <a:schemeClr val="dk1">
-        <a:tint val="60000"/>
-      </a:schemeClr>
-    </dgm:linClrLst>
-    <dgm:effectClrLst/>
-    <dgm:txLinClrLst/>
-    <dgm:txFillClrLst meth="repeat">
-      <a:schemeClr val="dk1"/>
-    </dgm:txFillClrLst>
-    <dgm:txEffectClrLst/>
-  </dgm:styleLbl>
-  <dgm:styleLbl name="fgSibTrans2D1">
-    <dgm:fillClrLst meth="repeat">
-      <a:schemeClr val="dk1">
-        <a:tint val="60000"/>
-      </a:schemeClr>
-    </dgm:fillClrLst>
-    <dgm:linClrLst meth="repeat">
-      <a:schemeClr val="dk1">
-        <a:tint val="60000"/>
-      </a:schemeClr>
-    </dgm:linClrLst>
-    <dgm:effectClrLst/>
-    <dgm:txLinClrLst/>
-    <dgm:txFillClrLst meth="repeat">
-      <a:schemeClr val="dk1"/>
-    </dgm:txFillClrLst>
-    <dgm:txEffectClrLst/>
-  </dgm:styleLbl>
-  <dgm:styleLbl name="bgSibTrans2D1">
-    <dgm:fillClrLst meth="repeat">
-      <a:schemeClr val="dk1">
-        <a:tint val="60000"/>
-      </a:schemeClr>
-    </dgm:fillClrLst>
-    <dgm:linClrLst meth="repeat">
-      <a:schemeClr val="dk1">
-        <a:tint val="60000"/>
-      </a:schemeClr>
-    </dgm:linClrLst>
-    <dgm:effectClrLst/>
-    <dgm:txLinClrLst/>
-    <dgm:txFillClrLst meth="repeat">
-      <a:schemeClr val="dk1"/>
-    </dgm:txFillClrLst>
-    <dgm:txEffectClrLst/>
-  </dgm:styleLbl>
-  <dgm:styleLbl name="sibTrans1D1">
-    <dgm:fillClrLst meth="repeat">
-      <a:schemeClr val="dk1"/>
-    </dgm:fillClrLst>
-    <dgm:linClrLst meth="repeat">
-      <a:schemeClr val="dk1"/>
-    </dgm:linClrLst>
-    <dgm:effectClrLst/>
-    <dgm:txLinClrLst/>
-    <dgm:txFillClrLst meth="repeat">
-      <a:schemeClr val="tx1"/>
-    </dgm:txFillClrLst>
-    <dgm:txEffectClrLst/>
-  </dgm:styleLbl>
-  <dgm:styleLbl name="callout">
-    <dgm:fillClrLst meth="repeat">
-      <a:schemeClr val="dk1"/>
-    </dgm:fillClrLst>
-    <dgm:linClrLst meth="repeat">
-      <a:schemeClr val="dk1"/>
-    </dgm:linClrLst>
-    <dgm:effectClrLst/>
-    <dgm:txLinClrLst/>
-    <dgm:txFillClrLst meth="repeat">
-      <a:schemeClr val="tx1"/>
-    </dgm:txFillClrLst>
-    <dgm:txEffectClrLst/>
-  </dgm:styleLbl>
-  <dgm:styleLbl name="asst0">
-    <dgm:fillClrLst meth="repeat">
-      <a:schemeClr val="lt1"/>
-    </dgm:fillClrLst>
-    <dgm:linClrLst meth="repeat">
-      <a:schemeClr val="dk1">
-        <a:shade val="80000"/>
-      </a:schemeClr>
-    </dgm:linClrLst>
-    <dgm:effectClrLst/>
-    <dgm:txLinClrLst/>
-    <dgm:txFillClrLst meth="repeat">
-      <a:schemeClr val="dk1"/>
-    </dgm:txFillClrLst>
-    <dgm:txEffectClrLst/>
-  </dgm:styleLbl>
-  <dgm:styleLbl name="asst1">
-    <dgm:fillClrLst meth="repeat">
-      <a:schemeClr val="lt1"/>
-    </dgm:fillClrLst>
-    <dgm:linClrLst meth="repeat">
-      <a:schemeClr val="dk1">
-        <a:shade val="80000"/>
-      </a:schemeClr>
-    </dgm:linClrLst>
-    <dgm:effectClrLst/>
-    <dgm:txLinClrLst/>
-    <dgm:txFillClrLst meth="repeat">
-      <a:schemeClr val="dk1"/>
-    </dgm:txFillClrLst>
-    <dgm:txEffectClrLst/>
-  </dgm:styleLbl>
-  <dgm:styleLbl name="asst2">
-    <dgm:fillClrLst meth="repeat">
-      <a:schemeClr val="lt1"/>
-    </dgm:fillClrLst>
-    <dgm:linClrLst meth="repeat">
-      <a:schemeClr val="dk1">
-        <a:shade val="80000"/>
-      </a:schemeClr>
-    </dgm:linClrLst>
-    <dgm:effectClrLst/>
-    <dgm:txLinClrLst/>
-    <dgm:txFillClrLst meth="repeat">
-      <a:schemeClr val="dk1"/>
-    </dgm:txFillClrLst>
-    <dgm:txEffectClrLst/>
-  </dgm:styleLbl>
-  <dgm:styleLbl name="asst3">
-    <dgm:fillClrLst meth="repeat">
-      <a:schemeClr val="lt1"/>
-    </dgm:fillClrLst>
-    <dgm:linClrLst meth="repeat">
-      <a:schemeClr val="dk1">
-        <a:shade val="80000"/>
-      </a:schemeClr>
-    </dgm:linClrLst>
-    <dgm:effectClrLst/>
-    <dgm:txLinClrLst/>
-    <dgm:txFillClrLst meth="repeat">
-      <a:schemeClr val="dk1"/>
-    </dgm:txFillClrLst>
-    <dgm:txEffectClrLst/>
-  </dgm:styleLbl>
-  <dgm:styleLbl name="asst4">
-    <dgm:fillClrLst meth="repeat">
-      <a:schemeClr val="lt1"/>
-    </dgm:fillClrLst>
-    <dgm:linClrLst meth="repeat">
-      <a:schemeClr val="dk1">
-        <a:shade val="80000"/>
-      </a:schemeClr>
-    </dgm:linClrLst>
-    <dgm:effectClrLst/>
-    <dgm:txLinClrLst/>
-    <dgm:txFillClrLst meth="repeat">
-      <a:schemeClr val="dk1"/>
-    </dgm:txFillClrLst>
-    <dgm:txEffectClrLst/>
-  </dgm:styleLbl>
-  <dgm:styleLbl name="parChTrans2D1">
-    <dgm:fillClrLst meth="repeat">
-      <a:schemeClr val="dk1">
-        <a:tint val="60000"/>
-      </a:schemeClr>
-    </dgm:fillClrLst>
-    <dgm:linClrLst meth="repeat">
-      <a:schemeClr val="dk1">
-        <a:tint val="60000"/>
-      </a:schemeClr>
-    </dgm:linClrLst>
-    <dgm:effectClrLst/>
-    <dgm:txLinClrLst/>
-    <dgm:txFillClrLst/>
-    <dgm:txEffectClrLst/>
-  </dgm:styleLbl>
-  <dgm:styleLbl name="parChTrans2D2">
-    <dgm:fillClrLst meth="repeat">
-      <a:schemeClr val="dk1"/>
-    </dgm:fillClrLst>
-    <dgm:linClrLst meth="repeat">
-      <a:schemeClr val="dk1"/>
-    </dgm:linClrLst>
-    <dgm:effectClrLst/>
-    <dgm:txLinClrLst/>
-    <dgm:txFillClrLst/>
-    <dgm:txEffectClrLst/>
-  </dgm:styleLbl>
-  <dgm:styleLbl name="parChTrans2D3">
-    <dgm:fillClrLst meth="repeat">
-      <a:schemeClr val="dk1"/>
-    </dgm:fillClrLst>
-    <dgm:linClrLst meth="repeat">
-      <a:schemeClr val="dk1"/>
-    </dgm:linClrLst>
-    <dgm:effectClrLst/>
-    <dgm:txLinClrLst/>
-    <dgm:txFillClrLst/>
-    <dgm:txEffectClrLst/>
-  </dgm:styleLbl>
-  <dgm:styleLbl name="parChTrans2D4">
-    <dgm:fillClrLst meth="repeat">
-      <a:schemeClr val="dk1"/>
-    </dgm:fillClrLst>
-    <dgm:linClrLst meth="repeat">
-      <a:schemeClr val="dk1"/>
-    </dgm:linClrLst>
-    <dgm:effectClrLst/>
-    <dgm:txLinClrLst/>
-    <dgm:txFillClrLst meth="repeat">
-      <a:schemeClr val="lt1"/>
-    </dgm:txFillClrLst>
-    <dgm:txEffectClrLst/>
-  </dgm:styleLbl>
-  <dgm:styleLbl name="parChTrans1D1">
-    <dgm:fillClrLst meth="repeat">
-      <a:schemeClr val="dk1"/>
-    </dgm:fillClrLst>
-    <dgm:linClrLst meth="repeat">
-      <a:schemeClr val="dk1">
-        <a:shade val="60000"/>
-      </a:schemeClr>
-    </dgm:linClrLst>
-    <dgm:effectClrLst/>
-    <dgm:txLinClrLst/>
-    <dgm:txFillClrLst meth="repeat">
-      <a:schemeClr val="tx1"/>
-    </dgm:txFillClrLst>
-    <dgm:txEffectClrLst/>
-  </dgm:styleLbl>
-  <dgm:styleLbl name="parChTrans1D2">
-    <dgm:fillClrLst meth="repeat">
-      <a:schemeClr val="dk1"/>
-    </dgm:fillClrLst>
-    <dgm:linClrLst meth="repeat">
-      <a:schemeClr val="dk1">
-        <a:shade val="60000"/>
-      </a:schemeClr>
-    </dgm:linClrLst>
-    <dgm:effectClrLst/>
-    <dgm:txLinClrLst/>
-    <dgm:txFillClrLst meth="repeat">
-      <a:schemeClr val="tx1"/>
-    </dgm:txFillClrLst>
-    <dgm:txEffectClrLst/>
-  </dgm:styleLbl>
-  <dgm:styleLbl name="parChTrans1D3">
-    <dgm:fillClrLst meth="repeat">
-      <a:schemeClr val="dk1"/>
-    </dgm:fillClrLst>
-    <dgm:linClrLst meth="repeat">
-      <a:schemeClr val="dk1">
-        <a:shade val="80000"/>
-      </a:schemeClr>
-    </dgm:linClrLst>
-    <dgm:effectClrLst/>
-    <dgm:txLinClrLst/>
-    <dgm:txFillClrLst meth="repeat">
-      <a:schemeClr val="tx1"/>
-    </dgm:txFillClrLst>
-    <dgm:txEffectClrLst/>
-  </dgm:styleLbl>
-  <dgm:styleLbl name="parChTrans1D4">
-    <dgm:fillClrLst meth="repeat">
-      <a:schemeClr val="dk1"/>
-    </dgm:fillClrLst>
-    <dgm:linClrLst meth="repeat">
-      <a:schemeClr val="dk1">
-        <a:shade val="80000"/>
-      </a:schemeClr>
-    </dgm:linClrLst>
-    <dgm:effectClrLst/>
-    <dgm:txLinClrLst/>
-    <dgm:txFillClrLst meth="repeat">
-      <a:schemeClr val="tx1"/>
-    </dgm:txFillClrLst>
-    <dgm:txEffectClrLst/>
-  </dgm:styleLbl>
-  <dgm:styleLbl name="fgAcc1">
-    <dgm:fillClrLst meth="repeat">
-      <a:schemeClr val="dk1">
-        <a:alpha val="90000"/>
-        <a:tint val="40000"/>
-      </a:schemeClr>
-    </dgm:fillClrLst>
-    <dgm:linClrLst meth="repeat">
-      <a:schemeClr val="dk1"/>
-    </dgm:linClrLst>
-    <dgm:effectClrLst/>
-    <dgm:txLinClrLst/>
-    <dgm:txFillClrLst meth="repeat">
-      <a:schemeClr val="dk1"/>
-    </dgm:txFillClrLst>
-    <dgm:txEffectClrLst/>
-  </dgm:styleLbl>
-  <dgm:styleLbl name="conFgAcc1">
-    <dgm:fillClrLst meth="repeat">
-      <a:schemeClr val="dk1">
-        <a:alpha val="90000"/>
-        <a:tint val="40000"/>
-      </a:schemeClr>
-    </dgm:fillClrLst>
-    <dgm:linClrLst meth="repeat">
-      <a:schemeClr val="dk1"/>
-    </dgm:linClrLst>
-    <dgm:effectClrLst/>
-    <dgm:txLinClrLst/>
-    <dgm:txFillClrLst meth="repeat">
-      <a:schemeClr val="dk1"/>
-    </dgm:txFillClrLst>
-    <dgm:txEffectClrLst/>
-  </dgm:styleLbl>
-  <dgm:styleLbl name="alignAcc1">
-    <dgm:fillClrLst meth="repeat">
-      <a:schemeClr val="dk1">
-        <a:alpha val="90000"/>
-        <a:tint val="40000"/>
-      </a:schemeClr>
-    </dgm:fillClrLst>
-    <dgm:linClrLst meth="repeat">
-      <a:schemeClr val="dk1"/>
-    </dgm:linClrLst>
-    <dgm:effectClrLst/>
-    <dgm:txLinClrLst/>
-    <dgm:txFillClrLst meth="repeat">
-      <a:schemeClr val="dk1"/>
-    </dgm:txFillClrLst>
-    <dgm:txEffectClrLst/>
-  </dgm:styleLbl>
-  <dgm:styleLbl name="trAlignAcc1">
-    <dgm:fillClrLst meth="repeat">
-      <a:schemeClr val="dk1">
-        <a:alpha val="40000"/>
-        <a:tint val="40000"/>
-      </a:schemeClr>
-    </dgm:fillClrLst>
-    <dgm:linClrLst meth="repeat">
-      <a:schemeClr val="dk1"/>
-    </dgm:linClrLst>
-    <dgm:effectClrLst/>
-    <dgm:txLinClrLst/>
-    <dgm:txFillClrLst meth="repeat">
-      <a:schemeClr val="dk1"/>
-    </dgm:txFillClrLst>
-    <dgm:txEffectClrLst/>
-  </dgm:styleLbl>
-  <dgm:styleLbl name="bgAcc1">
-    <dgm:fillClrLst meth="repeat">
-      <a:schemeClr val="dk1">
-        <a:alpha val="90000"/>
-        <a:tint val="40000"/>
-      </a:schemeClr>
-    </dgm:fillClrLst>
-    <dgm:linClrLst meth="repeat">
-      <a:schemeClr val="dk1"/>
-    </dgm:linClrLst>
-    <dgm:effectClrLst/>
-    <dgm:txLinClrLst/>
-    <dgm:txFillClrLst meth="repeat">
-      <a:schemeClr val="dk1"/>
-    </dgm:txFillClrLst>
-    <dgm:txEffectClrLst/>
-  </dgm:styleLbl>
-  <dgm:styleLbl name="solidFgAcc1">
-    <dgm:fillClrLst meth="repeat">
-      <a:schemeClr val="lt1"/>
-    </dgm:fillClrLst>
-    <dgm:linClrLst meth="repeat">
-      <a:schemeClr val="dk1"/>
-    </dgm:linClrLst>
-    <dgm:effectClrLst/>
-    <dgm:txLinClrLst/>
-    <dgm:txFillClrLst meth="repeat">
-      <a:schemeClr val="dk1"/>
-    </dgm:txFillClrLst>
-    <dgm:txEffectClrLst/>
-  </dgm:styleLbl>
-  <dgm:styleLbl name="solidAlignAcc1">
-    <dgm:fillClrLst meth="repeat">
-      <a:schemeClr val="lt1"/>
-    </dgm:fillClrLst>
-    <dgm:linClrLst meth="repeat">
-      <a:schemeClr val="dk1"/>
-    </dgm:linClrLst>
-    <dgm:effectClrLst/>
-    <dgm:txLinClrLst/>
-    <dgm:txFillClrLst meth="repeat">
-      <a:schemeClr val="dk1"/>
-    </dgm:txFillClrLst>
-    <dgm:txEffectClrLst/>
-  </dgm:styleLbl>
-  <dgm:styleLbl name="solidBgAcc1">
-    <dgm:fillClrLst meth="repeat">
-      <a:schemeClr val="lt1"/>
-    </dgm:fillClrLst>
-    <dgm:linClrLst meth="repeat">
-      <a:schemeClr val="dk1"/>
-    </dgm:linClrLst>
-    <dgm:effectClrLst/>
-    <dgm:txLinClrLst/>
-    <dgm:txFillClrLst meth="repeat">
-      <a:schemeClr val="dk1"/>
-    </dgm:txFillClrLst>
-    <dgm:txEffectClrLst/>
-  </dgm:styleLbl>
-  <dgm:styleLbl name="fgAccFollowNode1">
-    <dgm:fillClrLst meth="repeat">
-      <a:schemeClr val="lt1">
-        <a:alpha val="90000"/>
-        <a:tint val="40000"/>
-      </a:schemeClr>
-    </dgm:fillClrLst>
-    <dgm:linClrLst meth="repeat">
-      <a:schemeClr val="dk1">
-        <a:alpha val="90000"/>
-      </a:schemeClr>
-    </dgm:linClrLst>
-    <dgm:effectClrLst/>
-    <dgm:txLinClrLst/>
-    <dgm:txFillClrLst meth="repeat">
-      <a:schemeClr val="dk1"/>
-    </dgm:txFillClrLst>
-    <dgm:txEffectClrLst/>
-  </dgm:styleLbl>
-  <dgm:styleLbl name="alignAccFollowNode1">
-    <dgm:fillClrLst meth="repeat">
-      <a:schemeClr val="lt1">
-        <a:alpha val="90000"/>
-        <a:tint val="40000"/>
-      </a:schemeClr>
-    </dgm:fillClrLst>
-    <dgm:linClrLst meth="repeat">
-      <a:schemeClr val="dk1">
-        <a:alpha val="90000"/>
-      </a:schemeClr>
-    </dgm:linClrLst>
-    <dgm:effectClrLst/>
-    <dgm:txLinClrLst/>
-    <dgm:txFillClrLst meth="repeat">
-      <a:schemeClr val="dk1"/>
-    </dgm:txFillClrLst>
-    <dgm:txEffectClrLst/>
-  </dgm:styleLbl>
-  <dgm:styleLbl name="bgAccFollowNode1">
-    <dgm:fillClrLst meth="repeat">
-      <a:schemeClr val="lt1">
-        <a:alpha val="90000"/>
-        <a:tint val="40000"/>
-      </a:schemeClr>
-    </dgm:fillClrLst>
-    <dgm:linClrLst meth="repeat">
-      <a:schemeClr val="dk1">
-        <a:alpha val="90000"/>
-      </a:schemeClr>
-    </dgm:linClrLst>
-    <dgm:effectClrLst/>
-    <dgm:txLinClrLst/>
-    <dgm:txFillClrLst meth="repeat">
-      <a:schemeClr val="dk1"/>
-    </dgm:txFillClrLst>
-    <dgm:txEffectClrLst/>
-  </dgm:styleLbl>
-  <dgm:styleLbl name="fgAcc0">
-    <dgm:fillClrLst meth="repeat">
-      <a:schemeClr val="dk1">
-        <a:alpha val="90000"/>
-        <a:tint val="40000"/>
-      </a:schemeClr>
-    </dgm:fillClrLst>
-    <dgm:linClrLst meth="repeat">
-      <a:schemeClr val="dk1"/>
-    </dgm:linClrLst>
-    <dgm:effectClrLst/>
-    <dgm:txLinClrLst/>
-    <dgm:txFillClrLst meth="repeat">
-      <a:schemeClr val="dk1"/>
-    </dgm:txFillClrLst>
-    <dgm:txEffectClrLst/>
-  </dgm:styleLbl>
-  <dgm:styleLbl name="fgAcc2">
-    <dgm:fillClrLst meth="repeat">
-      <a:schemeClr val="dk1">
-        <a:alpha val="90000"/>
-        <a:tint val="40000"/>
-      </a:schemeClr>
-    </dgm:fillClrLst>
-    <dgm:linClrLst meth="repeat">
-      <a:schemeClr val="dk1"/>
-    </dgm:linClrLst>
-    <dgm:effectClrLst/>
-    <dgm:txLinClrLst/>
-    <dgm:txFillClrLst meth="repeat">
-      <a:schemeClr val="dk1"/>
-    </dgm:txFillClrLst>
-    <dgm:txEffectClrLst/>
-  </dgm:styleLbl>
-  <dgm:styleLbl name="fgAcc3">
-    <dgm:fillClrLst meth="repeat">
-      <a:schemeClr val="dk1">
-        <a:alpha val="90000"/>
-        <a:tint val="40000"/>
-      </a:schemeClr>
-    </dgm:fillClrLst>
-    <dgm:linClrLst meth="repeat">
-      <a:schemeClr val="dk1"/>
-    </dgm:linClrLst>
-    <dgm:effectClrLst/>
-    <dgm:txLinClrLst/>
-    <dgm:txFillClrLst meth="repeat">
-      <a:schemeClr val="dk1"/>
-    </dgm:txFillClrLst>
-    <dgm:txEffectClrLst/>
-  </dgm:styleLbl>
-  <dgm:styleLbl name="fgAcc4">
-    <dgm:fillClrLst meth="repeat">
-      <a:schemeClr val="dk1">
-        <a:alpha val="90000"/>
-        <a:tint val="40000"/>
-      </a:schemeClr>
-    </dgm:fillClrLst>
-    <dgm:linClrLst meth="repeat">
-      <a:schemeClr val="dk1"/>
-    </dgm:linClrLst>
-    <dgm:effectClrLst/>
-    <dgm:txLinClrLst/>
-    <dgm:txFillClrLst meth="repeat">
-      <a:schemeClr val="dk1"/>
-    </dgm:txFillClrLst>
-    <dgm:txEffectClrLst/>
-  </dgm:styleLbl>
-  <dgm:styleLbl name="bgShp">
-    <dgm:fillClrLst meth="repeat">
-      <a:schemeClr val="dk1">
-        <a:tint val="40000"/>
-      </a:schemeClr>
-    </dgm:fillClrLst>
-    <dgm:linClrLst meth="repeat">
-      <a:schemeClr val="dk1"/>
-    </dgm:linClrLst>
-    <dgm:effectClrLst/>
-    <dgm:txLinClrLst/>
-    <dgm:txFillClrLst meth="repeat">
-      <a:schemeClr val="dk1"/>
-    </dgm:txFillClrLst>
-    <dgm:txEffectClrLst/>
-  </dgm:styleLbl>
-  <dgm:styleLbl name="dkBgShp">
-    <dgm:fillClrLst meth="repeat">
-      <a:schemeClr val="dk1">
-        <a:shade val="80000"/>
-      </a:schemeClr>
-    </dgm:fillClrLst>
-    <dgm:linClrLst meth="repeat">
-      <a:schemeClr val="dk1"/>
-    </dgm:linClrLst>
-    <dgm:effectClrLst/>
-    <dgm:txLinClrLst/>
-    <dgm:txFillClrLst meth="repeat">
-      <a:schemeClr val="lt1"/>
-    </dgm:txFillClrLst>
-    <dgm:txEffectClrLst/>
-  </dgm:styleLbl>
-  <dgm:styleLbl name="trBgShp">
-    <dgm:fillClrLst meth="repeat">
-      <a:schemeClr val="dk1">
-        <a:tint val="50000"/>
-        <a:alpha val="40000"/>
-      </a:schemeClr>
-    </dgm:fillClrLst>
-    <dgm:linClrLst meth="repeat">
-      <a:schemeClr val="dk1"/>
-    </dgm:linClrLst>
-    <dgm:effectClrLst/>
-    <dgm:txLinClrLst/>
-    <dgm:txFillClrLst meth="repeat">
-      <a:schemeClr val="lt1"/>
-    </dgm:txFillClrLst>
-    <dgm:txEffectClrLst/>
-  </dgm:styleLbl>
-  <dgm:styleLbl name="fgShp">
-    <dgm:fillClrLst meth="repeat">
-      <a:schemeClr val="dk1">
-        <a:tint val="60000"/>
-      </a:schemeClr>
-    </dgm:fillClrLst>
-    <dgm:linClrLst meth="repeat">
-      <a:schemeClr val="lt1"/>
-    </dgm:linClrLst>
-    <dgm:effectClrLst/>
-    <dgm:txLinClrLst/>
-    <dgm:txFillClrLst meth="repeat">
-      <a:schemeClr val="dk1"/>
-    </dgm:txFillClrLst>
-    <dgm:txEffectClrLst/>
-  </dgm:styleLbl>
-  <dgm:styleLbl name="revTx">
-    <dgm:fillClrLst meth="repeat">
-      <a:schemeClr val="lt1">
-        <a:alpha val="0"/>
-      </a:schemeClr>
-    </dgm:fillClrLst>
-    <dgm:linClrLst meth="repeat">
-      <a:schemeClr val="dk1">
-        <a:alpha val="0"/>
-      </a:schemeClr>
-    </dgm:linClrLst>
-    <dgm:effectClrLst/>
-    <dgm:txLinClrLst/>
-    <dgm:txFillClrLst meth="repeat">
-      <a:schemeClr val="tx1"/>
-    </dgm:txFillClrLst>
-    <dgm:txEffectClrLst/>
-  </dgm:styleLbl>
-</dgm:colorsDef>
-</file>
-
-<file path=ppt/diagrams/data1.xml><?xml version="1.0" encoding="utf-8"?>
-<dgm:dataModel xmlns:dgm="http://schemas.openxmlformats.org/drawingml/2006/diagram" xmlns:a="http://schemas.openxmlformats.org/drawingml/2006/main">
-  <dgm:ptLst>
-    <dgm:pt modelId="{DCB03D36-A9DE-402D-A158-12296C15D298}" type="doc">
-      <dgm:prSet loTypeId="urn:microsoft.com/office/officeart/2005/8/layout/vList2" loCatId="list" qsTypeId="urn:microsoft.com/office/officeart/2005/8/quickstyle/simple1" qsCatId="simple" csTypeId="urn:microsoft.com/office/officeart/2005/8/colors/accent0_1" csCatId="mainScheme"/>
-      <dgm:spPr/>
-      <dgm:t>
-        <a:bodyPr/>
-        <a:lstStyle/>
-        <a:p>
-          <a:endParaRPr lang="en-IE"/>
-        </a:p>
-      </dgm:t>
-    </dgm:pt>
-    <dgm:pt modelId="{4E9DE855-69A9-44C4-B05B-664D94B06C17}">
-      <dgm:prSet/>
-      <dgm:spPr/>
-      <dgm:t>
-        <a:bodyPr/>
-        <a:lstStyle/>
-        <a:p>
-          <a:r>
-            <a:rPr lang="en-GB" dirty="0"/>
-            <a:t>Career Mode</a:t>
-          </a:r>
-          <a:endParaRPr lang="en-IE" dirty="0"/>
-        </a:p>
-      </dgm:t>
-    </dgm:pt>
-    <dgm:pt modelId="{AED5B4D2-B8F0-4258-BDAB-EB5608E6C785}" type="parTrans" cxnId="{BCEF71A5-82D4-4D47-BE00-9043DA91DDD5}">
-      <dgm:prSet/>
-      <dgm:spPr/>
-      <dgm:t>
-        <a:bodyPr/>
-        <a:lstStyle/>
-        <a:p>
-          <a:endParaRPr lang="en-IE"/>
-        </a:p>
-      </dgm:t>
-    </dgm:pt>
-    <dgm:pt modelId="{551A5BB0-6E2D-4EB9-8D29-404A15420F57}" type="sibTrans" cxnId="{BCEF71A5-82D4-4D47-BE00-9043DA91DDD5}">
-      <dgm:prSet/>
-      <dgm:spPr/>
-      <dgm:t>
-        <a:bodyPr/>
-        <a:lstStyle/>
-        <a:p>
-          <a:endParaRPr lang="en-IE"/>
-        </a:p>
-      </dgm:t>
-    </dgm:pt>
-    <dgm:pt modelId="{3F9B130B-C547-4C80-A6CC-9B1C9AEE2380}">
-      <dgm:prSet/>
-      <dgm:spPr/>
-      <dgm:t>
-        <a:bodyPr/>
-        <a:lstStyle/>
-        <a:p>
-          <a:r>
-            <a:rPr lang="en-GB"/>
-            <a:t>Team management</a:t>
-          </a:r>
-          <a:endParaRPr lang="en-IE"/>
-        </a:p>
-      </dgm:t>
-    </dgm:pt>
-    <dgm:pt modelId="{CD7B7D6F-1AD1-4007-8F61-E440E987F496}" type="parTrans" cxnId="{31AF1A63-385D-4567-ACF1-E5F5EEC9EAA3}">
-      <dgm:prSet/>
-      <dgm:spPr/>
-      <dgm:t>
-        <a:bodyPr/>
-        <a:lstStyle/>
-        <a:p>
-          <a:endParaRPr lang="en-IE"/>
-        </a:p>
-      </dgm:t>
-    </dgm:pt>
-    <dgm:pt modelId="{8C8FF4B9-2A3F-4524-BDE6-5139F30A4004}" type="sibTrans" cxnId="{31AF1A63-385D-4567-ACF1-E5F5EEC9EAA3}">
-      <dgm:prSet/>
-      <dgm:spPr/>
-      <dgm:t>
-        <a:bodyPr/>
-        <a:lstStyle/>
-        <a:p>
-          <a:endParaRPr lang="en-IE"/>
-        </a:p>
-      </dgm:t>
-    </dgm:pt>
-    <dgm:pt modelId="{6A67DE45-C894-4FD6-BEE0-684E3C37CE2D}">
-      <dgm:prSet/>
-      <dgm:spPr/>
-      <dgm:t>
-        <a:bodyPr/>
-        <a:lstStyle/>
-        <a:p>
-          <a:r>
-            <a:rPr lang="en-GB"/>
-            <a:t>Development</a:t>
-          </a:r>
-          <a:endParaRPr lang="en-IE"/>
-        </a:p>
-      </dgm:t>
-    </dgm:pt>
-    <dgm:pt modelId="{E7891F3B-D42A-4895-96B2-0CBDA3D259C3}" type="parTrans" cxnId="{C3A515F4-BB0C-4B13-83A9-C387319EC584}">
-      <dgm:prSet/>
-      <dgm:spPr/>
-      <dgm:t>
-        <a:bodyPr/>
-        <a:lstStyle/>
-        <a:p>
-          <a:endParaRPr lang="en-IE"/>
-        </a:p>
-      </dgm:t>
-    </dgm:pt>
-    <dgm:pt modelId="{A0DEC8C7-4AD1-4BFA-86C5-4656C2EB24FD}" type="sibTrans" cxnId="{C3A515F4-BB0C-4B13-83A9-C387319EC584}">
-      <dgm:prSet/>
-      <dgm:spPr/>
-      <dgm:t>
-        <a:bodyPr/>
-        <a:lstStyle/>
-        <a:p>
-          <a:endParaRPr lang="en-IE"/>
-        </a:p>
-      </dgm:t>
-    </dgm:pt>
-    <dgm:pt modelId="{FAF0DE5D-BC31-4575-A70B-04A8D537A1D6}">
-      <dgm:prSet/>
-      <dgm:spPr/>
-      <dgm:t>
-        <a:bodyPr/>
-        <a:lstStyle/>
-        <a:p>
-          <a:r>
-            <a:rPr lang="en-GB"/>
-            <a:t>Multi-Discipline</a:t>
-          </a:r>
-          <a:endParaRPr lang="en-IE"/>
-        </a:p>
-      </dgm:t>
-    </dgm:pt>
-    <dgm:pt modelId="{5779F311-292A-45E4-BEA3-A85567393F7D}" type="parTrans" cxnId="{8B065440-FAAB-4F7B-B61E-24D5079F2210}">
-      <dgm:prSet/>
-      <dgm:spPr/>
-      <dgm:t>
-        <a:bodyPr/>
-        <a:lstStyle/>
-        <a:p>
-          <a:endParaRPr lang="en-IE"/>
-        </a:p>
-      </dgm:t>
-    </dgm:pt>
-    <dgm:pt modelId="{0C87DFCC-45C1-4924-8239-02619D1F0D2D}" type="sibTrans" cxnId="{8B065440-FAAB-4F7B-B61E-24D5079F2210}">
-      <dgm:prSet/>
-      <dgm:spPr/>
-      <dgm:t>
-        <a:bodyPr/>
-        <a:lstStyle/>
-        <a:p>
-          <a:endParaRPr lang="en-IE"/>
-        </a:p>
-      </dgm:t>
-    </dgm:pt>
-    <dgm:pt modelId="{09D55EE9-FE13-48FC-A074-BA8FC76637BE}" type="pres">
-      <dgm:prSet presAssocID="{DCB03D36-A9DE-402D-A158-12296C15D298}" presName="linear" presStyleCnt="0">
-        <dgm:presLayoutVars>
-          <dgm:animLvl val="lvl"/>
-          <dgm:resizeHandles val="exact"/>
-        </dgm:presLayoutVars>
-      </dgm:prSet>
-      <dgm:spPr/>
-    </dgm:pt>
-    <dgm:pt modelId="{BDF4E8B2-70A5-4908-B17C-75050E665B7C}" type="pres">
-      <dgm:prSet presAssocID="{4E9DE855-69A9-44C4-B05B-664D94B06C17}" presName="parentText" presStyleLbl="node1" presStyleIdx="0" presStyleCnt="4">
-        <dgm:presLayoutVars>
-          <dgm:chMax val="0"/>
-          <dgm:bulletEnabled val="1"/>
-        </dgm:presLayoutVars>
-      </dgm:prSet>
-      <dgm:spPr/>
-    </dgm:pt>
-    <dgm:pt modelId="{298C1D82-DF4F-4672-9565-6A022D2EE6BE}" type="pres">
-      <dgm:prSet presAssocID="{551A5BB0-6E2D-4EB9-8D29-404A15420F57}" presName="spacer" presStyleCnt="0"/>
-      <dgm:spPr/>
-    </dgm:pt>
-    <dgm:pt modelId="{AD323179-25AE-45BB-B5EA-9E5F83CE27C5}" type="pres">
-      <dgm:prSet presAssocID="{3F9B130B-C547-4C80-A6CC-9B1C9AEE2380}" presName="parentText" presStyleLbl="node1" presStyleIdx="1" presStyleCnt="4">
-        <dgm:presLayoutVars>
-          <dgm:chMax val="0"/>
-          <dgm:bulletEnabled val="1"/>
-        </dgm:presLayoutVars>
-      </dgm:prSet>
-      <dgm:spPr/>
-    </dgm:pt>
-    <dgm:pt modelId="{ACC02CCC-A383-467A-8703-E010B0E0548E}" type="pres">
-      <dgm:prSet presAssocID="{8C8FF4B9-2A3F-4524-BDE6-5139F30A4004}" presName="spacer" presStyleCnt="0"/>
-      <dgm:spPr/>
-    </dgm:pt>
-    <dgm:pt modelId="{6748A944-93DB-4775-B9C0-E2F4874AE86A}" type="pres">
-      <dgm:prSet presAssocID="{6A67DE45-C894-4FD6-BEE0-684E3C37CE2D}" presName="parentText" presStyleLbl="node1" presStyleIdx="2" presStyleCnt="4">
-        <dgm:presLayoutVars>
-          <dgm:chMax val="0"/>
-          <dgm:bulletEnabled val="1"/>
-        </dgm:presLayoutVars>
-      </dgm:prSet>
-      <dgm:spPr/>
-    </dgm:pt>
-    <dgm:pt modelId="{C384C281-38AA-4545-997A-BAC2D97B131B}" type="pres">
-      <dgm:prSet presAssocID="{A0DEC8C7-4AD1-4BFA-86C5-4656C2EB24FD}" presName="spacer" presStyleCnt="0"/>
-      <dgm:spPr/>
-    </dgm:pt>
-    <dgm:pt modelId="{D689B279-CEAD-40DC-B82A-1C580BE1AA9D}" type="pres">
-      <dgm:prSet presAssocID="{FAF0DE5D-BC31-4575-A70B-04A8D537A1D6}" presName="parentText" presStyleLbl="node1" presStyleIdx="3" presStyleCnt="4">
-        <dgm:presLayoutVars>
-          <dgm:chMax val="0"/>
-          <dgm:bulletEnabled val="1"/>
-        </dgm:presLayoutVars>
-      </dgm:prSet>
-      <dgm:spPr/>
-    </dgm:pt>
-  </dgm:ptLst>
-  <dgm:cxnLst>
-    <dgm:cxn modelId="{4561DE02-17B3-4893-B3A4-1B7A881E2A62}" type="presOf" srcId="{6A67DE45-C894-4FD6-BEE0-684E3C37CE2D}" destId="{6748A944-93DB-4775-B9C0-E2F4874AE86A}" srcOrd="0" destOrd="0" presId="urn:microsoft.com/office/officeart/2005/8/layout/vList2"/>
-    <dgm:cxn modelId="{23346218-0365-499F-BAE7-FF646C39A56D}" type="presOf" srcId="{3F9B130B-C547-4C80-A6CC-9B1C9AEE2380}" destId="{AD323179-25AE-45BB-B5EA-9E5F83CE27C5}" srcOrd="0" destOrd="0" presId="urn:microsoft.com/office/officeart/2005/8/layout/vList2"/>
-    <dgm:cxn modelId="{8B065440-FAAB-4F7B-B61E-24D5079F2210}" srcId="{DCB03D36-A9DE-402D-A158-12296C15D298}" destId="{FAF0DE5D-BC31-4575-A70B-04A8D537A1D6}" srcOrd="3" destOrd="0" parTransId="{5779F311-292A-45E4-BEA3-A85567393F7D}" sibTransId="{0C87DFCC-45C1-4924-8239-02619D1F0D2D}"/>
-    <dgm:cxn modelId="{31AF1A63-385D-4567-ACF1-E5F5EEC9EAA3}" srcId="{DCB03D36-A9DE-402D-A158-12296C15D298}" destId="{3F9B130B-C547-4C80-A6CC-9B1C9AEE2380}" srcOrd="1" destOrd="0" parTransId="{CD7B7D6F-1AD1-4007-8F61-E440E987F496}" sibTransId="{8C8FF4B9-2A3F-4524-BDE6-5139F30A4004}"/>
-    <dgm:cxn modelId="{DC1F6159-3E9D-4D9D-AEC3-A876FC401649}" type="presOf" srcId="{DCB03D36-A9DE-402D-A158-12296C15D298}" destId="{09D55EE9-FE13-48FC-A074-BA8FC76637BE}" srcOrd="0" destOrd="0" presId="urn:microsoft.com/office/officeart/2005/8/layout/vList2"/>
-    <dgm:cxn modelId="{B8857A7D-F2F5-4595-BCD7-6170A4EC620F}" type="presOf" srcId="{4E9DE855-69A9-44C4-B05B-664D94B06C17}" destId="{BDF4E8B2-70A5-4908-B17C-75050E665B7C}" srcOrd="0" destOrd="0" presId="urn:microsoft.com/office/officeart/2005/8/layout/vList2"/>
-    <dgm:cxn modelId="{BCEF71A5-82D4-4D47-BE00-9043DA91DDD5}" srcId="{DCB03D36-A9DE-402D-A158-12296C15D298}" destId="{4E9DE855-69A9-44C4-B05B-664D94B06C17}" srcOrd="0" destOrd="0" parTransId="{AED5B4D2-B8F0-4258-BDAB-EB5608E6C785}" sibTransId="{551A5BB0-6E2D-4EB9-8D29-404A15420F57}"/>
-    <dgm:cxn modelId="{DD2E58BC-352D-4D8B-8A2F-BE90C3749E73}" type="presOf" srcId="{FAF0DE5D-BC31-4575-A70B-04A8D537A1D6}" destId="{D689B279-CEAD-40DC-B82A-1C580BE1AA9D}" srcOrd="0" destOrd="0" presId="urn:microsoft.com/office/officeart/2005/8/layout/vList2"/>
-    <dgm:cxn modelId="{C3A515F4-BB0C-4B13-83A9-C387319EC584}" srcId="{DCB03D36-A9DE-402D-A158-12296C15D298}" destId="{6A67DE45-C894-4FD6-BEE0-684E3C37CE2D}" srcOrd="2" destOrd="0" parTransId="{E7891F3B-D42A-4895-96B2-0CBDA3D259C3}" sibTransId="{A0DEC8C7-4AD1-4BFA-86C5-4656C2EB24FD}"/>
-    <dgm:cxn modelId="{9CA103B3-EA89-4363-B4EB-5CCBFAD1707E}" type="presParOf" srcId="{09D55EE9-FE13-48FC-A074-BA8FC76637BE}" destId="{BDF4E8B2-70A5-4908-B17C-75050E665B7C}" srcOrd="0" destOrd="0" presId="urn:microsoft.com/office/officeart/2005/8/layout/vList2"/>
-    <dgm:cxn modelId="{FDDA15CC-7CD8-4CD4-BE42-45E448A3397F}" type="presParOf" srcId="{09D55EE9-FE13-48FC-A074-BA8FC76637BE}" destId="{298C1D82-DF4F-4672-9565-6A022D2EE6BE}" srcOrd="1" destOrd="0" presId="urn:microsoft.com/office/officeart/2005/8/layout/vList2"/>
-    <dgm:cxn modelId="{FE65FFFF-1E24-4293-B37B-20E97CFC367F}" type="presParOf" srcId="{09D55EE9-FE13-48FC-A074-BA8FC76637BE}" destId="{AD323179-25AE-45BB-B5EA-9E5F83CE27C5}" srcOrd="2" destOrd="0" presId="urn:microsoft.com/office/officeart/2005/8/layout/vList2"/>
-    <dgm:cxn modelId="{DB11FE31-7D7B-41CB-889E-A3BB9CB76A50}" type="presParOf" srcId="{09D55EE9-FE13-48FC-A074-BA8FC76637BE}" destId="{ACC02CCC-A383-467A-8703-E010B0E0548E}" srcOrd="3" destOrd="0" presId="urn:microsoft.com/office/officeart/2005/8/layout/vList2"/>
-    <dgm:cxn modelId="{64013FB9-EA3E-4964-94DB-26E6B1D5E1CA}" type="presParOf" srcId="{09D55EE9-FE13-48FC-A074-BA8FC76637BE}" destId="{6748A944-93DB-4775-B9C0-E2F4874AE86A}" srcOrd="4" destOrd="0" presId="urn:microsoft.com/office/officeart/2005/8/layout/vList2"/>
-    <dgm:cxn modelId="{3CD11E1E-D947-4DFF-99D8-4D7F66B685A6}" type="presParOf" srcId="{09D55EE9-FE13-48FC-A074-BA8FC76637BE}" destId="{C384C281-38AA-4545-997A-BAC2D97B131B}" srcOrd="5" destOrd="0" presId="urn:microsoft.com/office/officeart/2005/8/layout/vList2"/>
-    <dgm:cxn modelId="{38B98D44-B498-4189-A498-10DFA677EBCF}" type="presParOf" srcId="{09D55EE9-FE13-48FC-A074-BA8FC76637BE}" destId="{D689B279-CEAD-40DC-B82A-1C580BE1AA9D}" srcOrd="6" destOrd="0" presId="urn:microsoft.com/office/officeart/2005/8/layout/vList2"/>
-  </dgm:cxnLst>
-  <dgm:bg/>
-  <dgm:whole/>
-  <dgm:extLst>
-    <a:ext uri="http://schemas.microsoft.com/office/drawing/2008/diagram">
-      <dsp:dataModelExt xmlns:dsp="http://schemas.microsoft.com/office/drawing/2008/diagram" relId="rId8" minVer="http://schemas.openxmlformats.org/drawingml/2006/diagram"/>
-    </a:ext>
-  </dgm:extLst>
-</dgm:dataModel>
-</file>
-
-<file path=ppt/diagrams/drawing1.xml><?xml version="1.0" encoding="utf-8"?>
-<dsp:drawing xmlns:dgm="http://schemas.openxmlformats.org/drawingml/2006/diagram" xmlns:dsp="http://schemas.microsoft.com/office/drawing/2008/diagram" xmlns:a="http://schemas.openxmlformats.org/drawingml/2006/main">
-  <dsp:spTree>
-    <dsp:nvGrpSpPr>
-      <dsp:cNvPr id="0" name=""/>
-      <dsp:cNvGrpSpPr/>
-    </dsp:nvGrpSpPr>
-    <dsp:grpSpPr/>
-    <dsp:sp modelId="{BDF4E8B2-70A5-4908-B17C-75050E665B7C}">
-      <dsp:nvSpPr>
-        <dsp:cNvPr id="0" name=""/>
-        <dsp:cNvSpPr/>
-      </dsp:nvSpPr>
-      <dsp:spPr>
-        <a:xfrm>
-          <a:off x="0" y="88154"/>
-          <a:ext cx="3932237" cy="835380"/>
-        </a:xfrm>
-        <a:prstGeom prst="roundRect">
-          <a:avLst/>
-        </a:prstGeom>
-        <a:solidFill>
-          <a:schemeClr val="lt1">
-            <a:hueOff val="0"/>
-            <a:satOff val="0"/>
-            <a:lumOff val="0"/>
-            <a:alphaOff val="0"/>
-          </a:schemeClr>
-        </a:solidFill>
-        <a:ln w="19050" cap="flat" cmpd="sng" algn="ctr">
-          <a:solidFill>
-            <a:schemeClr val="dk1">
-              <a:shade val="80000"/>
-              <a:hueOff val="0"/>
-              <a:satOff val="0"/>
-              <a:lumOff val="0"/>
-              <a:alphaOff val="0"/>
-            </a:schemeClr>
-          </a:solidFill>
-          <a:prstDash val="solid"/>
-          <a:miter lim="800000"/>
-        </a:ln>
-        <a:effectLst/>
-      </dsp:spPr>
-      <dsp:style>
-        <a:lnRef idx="2">
-          <a:scrgbClr r="0" g="0" b="0"/>
-        </a:lnRef>
-        <a:fillRef idx="1">
-          <a:scrgbClr r="0" g="0" b="0"/>
-        </a:fillRef>
-        <a:effectRef idx="0">
-          <a:scrgbClr r="0" g="0" b="0"/>
-        </a:effectRef>
-        <a:fontRef idx="minor">
-          <a:schemeClr val="lt1"/>
-        </a:fontRef>
-      </dsp:style>
-      <dsp:txBody>
-        <a:bodyPr spcFirstLastPara="0" vert="horz" wrap="square" lIns="129540" tIns="129540" rIns="129540" bIns="129540" numCol="1" spcCol="1270" anchor="ctr" anchorCtr="0">
-          <a:noAutofit/>
-        </a:bodyPr>
-        <a:lstStyle/>
-        <a:p>
-          <a:pPr marL="0" lvl="0" indent="0" algn="l" defTabSz="1511300">
-            <a:lnSpc>
-              <a:spcPct val="90000"/>
-            </a:lnSpc>
-            <a:spcBef>
-              <a:spcPct val="0"/>
-            </a:spcBef>
-            <a:spcAft>
-              <a:spcPct val="35000"/>
-            </a:spcAft>
-            <a:buNone/>
-          </a:pPr>
-          <a:r>
-            <a:rPr lang="en-GB" sz="3400" kern="1200" dirty="0"/>
-            <a:t>Career Mode</a:t>
-          </a:r>
-          <a:endParaRPr lang="en-IE" sz="3400" kern="1200" dirty="0"/>
-        </a:p>
-      </dsp:txBody>
-      <dsp:txXfrm>
-        <a:off x="40780" y="128934"/>
-        <a:ext cx="3850677" cy="753820"/>
-      </dsp:txXfrm>
-    </dsp:sp>
-    <dsp:sp modelId="{AD323179-25AE-45BB-B5EA-9E5F83CE27C5}">
-      <dsp:nvSpPr>
-        <dsp:cNvPr id="0" name=""/>
-        <dsp:cNvSpPr/>
-      </dsp:nvSpPr>
-      <dsp:spPr>
-        <a:xfrm>
-          <a:off x="0" y="1021454"/>
-          <a:ext cx="3932237" cy="835380"/>
-        </a:xfrm>
-        <a:prstGeom prst="roundRect">
-          <a:avLst/>
-        </a:prstGeom>
-        <a:solidFill>
-          <a:schemeClr val="lt1">
-            <a:hueOff val="0"/>
-            <a:satOff val="0"/>
-            <a:lumOff val="0"/>
-            <a:alphaOff val="0"/>
-          </a:schemeClr>
-        </a:solidFill>
-        <a:ln w="19050" cap="flat" cmpd="sng" algn="ctr">
-          <a:solidFill>
-            <a:schemeClr val="dk1">
-              <a:shade val="80000"/>
-              <a:hueOff val="0"/>
-              <a:satOff val="0"/>
-              <a:lumOff val="0"/>
-              <a:alphaOff val="0"/>
-            </a:schemeClr>
-          </a:solidFill>
-          <a:prstDash val="solid"/>
-          <a:miter lim="800000"/>
-        </a:ln>
-        <a:effectLst/>
-      </dsp:spPr>
-      <dsp:style>
-        <a:lnRef idx="2">
-          <a:scrgbClr r="0" g="0" b="0"/>
-        </a:lnRef>
-        <a:fillRef idx="1">
-          <a:scrgbClr r="0" g="0" b="0"/>
-        </a:fillRef>
-        <a:effectRef idx="0">
-          <a:scrgbClr r="0" g="0" b="0"/>
-        </a:effectRef>
-        <a:fontRef idx="minor">
-          <a:schemeClr val="lt1"/>
-        </a:fontRef>
-      </dsp:style>
-      <dsp:txBody>
-        <a:bodyPr spcFirstLastPara="0" vert="horz" wrap="square" lIns="129540" tIns="129540" rIns="129540" bIns="129540" numCol="1" spcCol="1270" anchor="ctr" anchorCtr="0">
-          <a:noAutofit/>
-        </a:bodyPr>
-        <a:lstStyle/>
-        <a:p>
-          <a:pPr marL="0" lvl="0" indent="0" algn="l" defTabSz="1511300">
-            <a:lnSpc>
-              <a:spcPct val="90000"/>
-            </a:lnSpc>
-            <a:spcBef>
-              <a:spcPct val="0"/>
-            </a:spcBef>
-            <a:spcAft>
-              <a:spcPct val="35000"/>
-            </a:spcAft>
-            <a:buNone/>
-          </a:pPr>
-          <a:r>
-            <a:rPr lang="en-GB" sz="3400" kern="1200"/>
-            <a:t>Team management</a:t>
-          </a:r>
-          <a:endParaRPr lang="en-IE" sz="3400" kern="1200"/>
-        </a:p>
-      </dsp:txBody>
-      <dsp:txXfrm>
-        <a:off x="40780" y="1062234"/>
-        <a:ext cx="3850677" cy="753820"/>
-      </dsp:txXfrm>
-    </dsp:sp>
-    <dsp:sp modelId="{6748A944-93DB-4775-B9C0-E2F4874AE86A}">
-      <dsp:nvSpPr>
-        <dsp:cNvPr id="0" name=""/>
-        <dsp:cNvSpPr/>
-      </dsp:nvSpPr>
-      <dsp:spPr>
-        <a:xfrm>
-          <a:off x="0" y="1954754"/>
-          <a:ext cx="3932237" cy="835380"/>
-        </a:xfrm>
-        <a:prstGeom prst="roundRect">
-          <a:avLst/>
-        </a:prstGeom>
-        <a:solidFill>
-          <a:schemeClr val="lt1">
-            <a:hueOff val="0"/>
-            <a:satOff val="0"/>
-            <a:lumOff val="0"/>
-            <a:alphaOff val="0"/>
-          </a:schemeClr>
-        </a:solidFill>
-        <a:ln w="19050" cap="flat" cmpd="sng" algn="ctr">
-          <a:solidFill>
-            <a:schemeClr val="dk1">
-              <a:shade val="80000"/>
-              <a:hueOff val="0"/>
-              <a:satOff val="0"/>
-              <a:lumOff val="0"/>
-              <a:alphaOff val="0"/>
-            </a:schemeClr>
-          </a:solidFill>
-          <a:prstDash val="solid"/>
-          <a:miter lim="800000"/>
-        </a:ln>
-        <a:effectLst/>
-      </dsp:spPr>
-      <dsp:style>
-        <a:lnRef idx="2">
-          <a:scrgbClr r="0" g="0" b="0"/>
-        </a:lnRef>
-        <a:fillRef idx="1">
-          <a:scrgbClr r="0" g="0" b="0"/>
-        </a:fillRef>
-        <a:effectRef idx="0">
-          <a:scrgbClr r="0" g="0" b="0"/>
-        </a:effectRef>
-        <a:fontRef idx="minor">
-          <a:schemeClr val="lt1"/>
-        </a:fontRef>
-      </dsp:style>
-      <dsp:txBody>
-        <a:bodyPr spcFirstLastPara="0" vert="horz" wrap="square" lIns="129540" tIns="129540" rIns="129540" bIns="129540" numCol="1" spcCol="1270" anchor="ctr" anchorCtr="0">
-          <a:noAutofit/>
-        </a:bodyPr>
-        <a:lstStyle/>
-        <a:p>
-          <a:pPr marL="0" lvl="0" indent="0" algn="l" defTabSz="1511300">
-            <a:lnSpc>
-              <a:spcPct val="90000"/>
-            </a:lnSpc>
-            <a:spcBef>
-              <a:spcPct val="0"/>
-            </a:spcBef>
-            <a:spcAft>
-              <a:spcPct val="35000"/>
-            </a:spcAft>
-            <a:buNone/>
-          </a:pPr>
-          <a:r>
-            <a:rPr lang="en-GB" sz="3400" kern="1200"/>
-            <a:t>Development</a:t>
-          </a:r>
-          <a:endParaRPr lang="en-IE" sz="3400" kern="1200"/>
-        </a:p>
-      </dsp:txBody>
-      <dsp:txXfrm>
-        <a:off x="40780" y="1995534"/>
-        <a:ext cx="3850677" cy="753820"/>
-      </dsp:txXfrm>
-    </dsp:sp>
-    <dsp:sp modelId="{D689B279-CEAD-40DC-B82A-1C580BE1AA9D}">
-      <dsp:nvSpPr>
-        <dsp:cNvPr id="0" name=""/>
-        <dsp:cNvSpPr/>
-      </dsp:nvSpPr>
-      <dsp:spPr>
-        <a:xfrm>
-          <a:off x="0" y="2888054"/>
-          <a:ext cx="3932237" cy="835380"/>
-        </a:xfrm>
-        <a:prstGeom prst="roundRect">
-          <a:avLst/>
-        </a:prstGeom>
-        <a:solidFill>
-          <a:schemeClr val="lt1">
-            <a:hueOff val="0"/>
-            <a:satOff val="0"/>
-            <a:lumOff val="0"/>
-            <a:alphaOff val="0"/>
-          </a:schemeClr>
-        </a:solidFill>
-        <a:ln w="19050" cap="flat" cmpd="sng" algn="ctr">
-          <a:solidFill>
-            <a:schemeClr val="dk1">
-              <a:shade val="80000"/>
-              <a:hueOff val="0"/>
-              <a:satOff val="0"/>
-              <a:lumOff val="0"/>
-              <a:alphaOff val="0"/>
-            </a:schemeClr>
-          </a:solidFill>
-          <a:prstDash val="solid"/>
-          <a:miter lim="800000"/>
-        </a:ln>
-        <a:effectLst/>
-      </dsp:spPr>
-      <dsp:style>
-        <a:lnRef idx="2">
-          <a:scrgbClr r="0" g="0" b="0"/>
-        </a:lnRef>
-        <a:fillRef idx="1">
-          <a:scrgbClr r="0" g="0" b="0"/>
-        </a:fillRef>
-        <a:effectRef idx="0">
-          <a:scrgbClr r="0" g="0" b="0"/>
-        </a:effectRef>
-        <a:fontRef idx="minor">
-          <a:schemeClr val="lt1"/>
-        </a:fontRef>
-      </dsp:style>
-      <dsp:txBody>
-        <a:bodyPr spcFirstLastPara="0" vert="horz" wrap="square" lIns="129540" tIns="129540" rIns="129540" bIns="129540" numCol="1" spcCol="1270" anchor="ctr" anchorCtr="0">
-          <a:noAutofit/>
-        </a:bodyPr>
-        <a:lstStyle/>
-        <a:p>
-          <a:pPr marL="0" lvl="0" indent="0" algn="l" defTabSz="1511300">
-            <a:lnSpc>
-              <a:spcPct val="90000"/>
-            </a:lnSpc>
-            <a:spcBef>
-              <a:spcPct val="0"/>
-            </a:spcBef>
-            <a:spcAft>
-              <a:spcPct val="35000"/>
-            </a:spcAft>
-            <a:buNone/>
-          </a:pPr>
-          <a:r>
-            <a:rPr lang="en-GB" sz="3400" kern="1200"/>
-            <a:t>Multi-Discipline</a:t>
-          </a:r>
-          <a:endParaRPr lang="en-IE" sz="3400" kern="1200"/>
-        </a:p>
-      </dsp:txBody>
-      <dsp:txXfrm>
-        <a:off x="40780" y="2928834"/>
-        <a:ext cx="3850677" cy="753820"/>
-      </dsp:txXfrm>
-    </dsp:sp>
-  </dsp:spTree>
-</dsp:drawing>
-</file>
-
-<file path=ppt/diagrams/layout1.xml><?xml version="1.0" encoding="utf-8"?>
-<dgm:layoutDef xmlns:dgm="http://schemas.openxmlformats.org/drawingml/2006/diagram" xmlns:a="http://schemas.openxmlformats.org/drawingml/2006/main" uniqueId="urn:microsoft.com/office/officeart/2005/8/layout/vList2">
-  <dgm:title val=""/>
-  <dgm:desc val=""/>
-  <dgm:catLst>
-    <dgm:cat type="list" pri="3000"/>
-    <dgm:cat type="convert" pri="1000"/>
-  </dgm:catLst>
-  <dgm:sampData>
-    <dgm:dataModel>
-      <dgm:ptLst>
-        <dgm:pt modelId="0" type="doc"/>
-        <dgm:pt modelId="1">
-          <dgm:prSet phldr="1"/>
-        </dgm:pt>
-        <dgm:pt modelId="11">
-          <dgm:prSet phldr="1"/>
-        </dgm:pt>
-        <dgm:pt modelId="2">
-          <dgm:prSet phldr="1"/>
-        </dgm:pt>
-        <dgm:pt modelId="21">
-          <dgm:prSet phldr="1"/>
-        </dgm:pt>
-      </dgm:ptLst>
-      <dgm:cxnLst>
-        <dgm:cxn modelId="4" srcId="0" destId="1" srcOrd="0" destOrd="0"/>
-        <dgm:cxn modelId="5" srcId="0" destId="2" srcOrd="1" destOrd="0"/>
-        <dgm:cxn modelId="12" srcId="1" destId="11" srcOrd="0" destOrd="0"/>
-        <dgm:cxn modelId="23" srcId="2" destId="21" srcOrd="0" destOrd="0"/>
-      </dgm:cxnLst>
-      <dgm:bg/>
-      <dgm:whole/>
-    </dgm:dataModel>
-  </dgm:sampData>
-  <dgm:styleData>
-    <dgm:dataModel>
-      <dgm:ptLst>
-        <dgm:pt modelId="0" type="doc"/>
-        <dgm:pt modelId="1"/>
-        <dgm:pt modelId="2"/>
-      </dgm:ptLst>
-      <dgm:cxnLst>
-        <dgm:cxn modelId="3" srcId="0" destId="1" srcOrd="0" destOrd="0"/>
-        <dgm:cxn modelId="4" srcId="0" destId="2" srcOrd="1" destOrd="0"/>
-      </dgm:cxnLst>
-      <dgm:bg/>
-      <dgm:whole/>
-    </dgm:dataModel>
-  </dgm:styleData>
-  <dgm:clrData>
-    <dgm:dataModel>
-      <dgm:ptLst>
-        <dgm:pt modelId="0" type="doc"/>
-        <dgm:pt modelId="1"/>
-        <dgm:pt modelId="2"/>
-        <dgm:pt modelId="3"/>
-        <dgm:pt modelId="4"/>
-      </dgm:ptLst>
-      <dgm:cxnLst>
-        <dgm:cxn modelId="5" srcId="0" destId="1" srcOrd="0" destOrd="0"/>
-        <dgm:cxn modelId="6" srcId="0" destId="2" srcOrd="1" destOrd="0"/>
-        <dgm:cxn modelId="7" srcId="0" destId="3" srcOrd="2" destOrd="0"/>
-        <dgm:cxn modelId="8" srcId="0" destId="4" srcOrd="3" destOrd="0"/>
-      </dgm:cxnLst>
-      <dgm:bg/>
-      <dgm:whole/>
-    </dgm:dataModel>
-  </dgm:clrData>
-  <dgm:layoutNode name="linear">
-    <dgm:varLst>
-      <dgm:animLvl val="lvl"/>
-      <dgm:resizeHandles val="exact"/>
-    </dgm:varLst>
-    <dgm:alg type="lin">
-      <dgm:param type="linDir" val="fromT"/>
-      <dgm:param type="vertAlign" val="mid"/>
-    </dgm:alg>
-    <dgm:shape xmlns:r="http://schemas.openxmlformats.org/officeDocument/2006/relationships" r:blip="">
-      <dgm:adjLst/>
-    </dgm:shape>
-    <dgm:presOf/>
-    <dgm:constrLst>
-      <dgm:constr type="w" for="ch" forName="parentText" refType="w"/>
-      <dgm:constr type="h" for="ch" forName="parentText" refType="primFontSz" refFor="ch" refForName="parentText" fact="0.52"/>
-      <dgm:constr type="w" for="ch" forName="childText" refType="w"/>
-      <dgm:constr type="h" for="ch" forName="childText" refType="primFontSz" refFor="ch" refForName="parentText" fact="0.46"/>
-      <dgm:constr type="h" for="ch" forName="parentText" op="equ"/>
-      <dgm:constr type="primFontSz" for="ch" forName="parentText" op="equ" val="65"/>
-      <dgm:constr type="primFontSz" for="ch" forName="childText" refType="primFontSz" refFor="ch" refForName="parentText" op="equ"/>
-      <dgm:constr type="h" for="ch" forName="spacer" refType="primFontSz" refFor="ch" refForName="parentText" fact="0.08"/>
-    </dgm:constrLst>
-    <dgm:ruleLst>
-      <dgm:rule type="primFontSz" for="ch" forName="parentText" val="5" fact="NaN" max="NaN"/>
-    </dgm:ruleLst>
-    <dgm:forEach name="Name0" axis="ch" ptType="node">
-      <dgm:layoutNode name="parentText" styleLbl="node1">
-        <dgm:varLst>
-          <dgm:chMax val="0"/>
-          <dgm:bulletEnabled val="1"/>
-        </dgm:varLst>
-        <dgm:alg type="tx">
-          <dgm:param type="parTxLTRAlign" val="l"/>
-          <dgm:param type="parTxRTLAlign" val="r"/>
-        </dgm:alg>
-        <dgm:shape xmlns:r="http://schemas.openxmlformats.org/officeDocument/2006/relationships" type="roundRect" r:blip="">
-          <dgm:adjLst/>
-        </dgm:shape>
-        <dgm:presOf axis="self"/>
-        <dgm:constrLst>
-          <dgm:constr type="tMarg" refType="primFontSz" fact="0.3"/>
-          <dgm:constr type="bMarg" refType="primFontSz" fact="0.3"/>
-          <dgm:constr type="lMarg" refType="primFontSz" fact="0.3"/>
-          <dgm:constr type="rMarg" refType="primFontSz" fact="0.3"/>
-        </dgm:constrLst>
-        <dgm:ruleLst>
-          <dgm:rule type="h" val="INF" fact="NaN" max="NaN"/>
-        </dgm:ruleLst>
-      </dgm:layoutNode>
-      <dgm:choose name="Name1">
-        <dgm:if name="Name2" axis="ch" ptType="node" func="cnt" op="gte" val="1">
-          <dgm:layoutNode name="childText" styleLbl="revTx">
-            <dgm:varLst>
-              <dgm:bulletEnabled val="1"/>
-            </dgm:varLst>
-            <dgm:alg type="tx">
-              <dgm:param type="stBulletLvl" val="1"/>
-              <dgm:param type="lnSpAfChP" val="20"/>
-            </dgm:alg>
-            <dgm:shape xmlns:r="http://schemas.openxmlformats.org/officeDocument/2006/relationships" type="rect" r:blip="">
-              <dgm:adjLst/>
-            </dgm:shape>
-            <dgm:presOf axis="des" ptType="node"/>
-            <dgm:constrLst>
-              <dgm:constr type="tMarg" refType="primFontSz" fact="0.1"/>
-              <dgm:constr type="bMarg" refType="primFontSz" fact="0.1"/>
-              <dgm:constr type="lMarg" refType="w" fact="0.09"/>
-            </dgm:constrLst>
-            <dgm:ruleLst>
-              <dgm:rule type="h" val="INF" fact="NaN" max="NaN"/>
-            </dgm:ruleLst>
-          </dgm:layoutNode>
-        </dgm:if>
-        <dgm:else name="Name3">
-          <dgm:choose name="Name4">
-            <dgm:if name="Name5" axis="par ch" ptType="doc node" func="cnt" op="gte" val="2">
-              <dgm:forEach name="Name6" axis="followSib" ptType="sibTrans" cnt="1">
-                <dgm:layoutNode name="spacer">
-                  <dgm:alg type="sp"/>
-                  <dgm:shape xmlns:r="http://schemas.openxmlformats.org/officeDocument/2006/relationships" r:blip="">
-                    <dgm:adjLst/>
-                  </dgm:shape>
-                  <dgm:presOf/>
-                  <dgm:constrLst/>
-                  <dgm:ruleLst/>
-                </dgm:layoutNode>
-              </dgm:forEach>
-            </dgm:if>
-            <dgm:else name="Name7"/>
-          </dgm:choose>
-        </dgm:else>
-      </dgm:choose>
-    </dgm:forEach>
-  </dgm:layoutNode>
-</dgm:layoutDef>
-</file>
-
-<file path=ppt/diagrams/quickStyle1.xml><?xml version="1.0" encoding="utf-8"?>
-<dgm:styleDef xmlns:dgm="http://schemas.openxmlformats.org/drawingml/2006/diagram" xmlns:a="http://schemas.openxmlformats.org/drawingml/2006/main" uniqueId="urn:microsoft.com/office/officeart/2005/8/quickstyle/simple1">
-  <dgm:title val=""/>
-  <dgm:desc val=""/>
-  <dgm:catLst>
-    <dgm:cat type="simple" pri="10100"/>
-  </dgm:catLst>
-  <dgm:scene3d>
-    <a:camera prst="orthographicFront"/>
-    <a:lightRig rig="threePt" dir="t"/>
-  </dgm:scene3d>
-  <dgm:styleLbl name="node0">
-    <dgm:scene3d>
-      <a:camera prst="orthographicFront"/>
-      <a:lightRig rig="threePt" dir="t"/>
-    </dgm:scene3d>
-    <dgm:sp3d/>
-    <dgm:txPr/>
-    <dgm:style>
-      <a:lnRef idx="2">
-        <a:scrgbClr r="0" g="0" b="0"/>
-      </a:lnRef>
-      <a:fillRef idx="1">
-        <a:scrgbClr r="0" g="0" b="0"/>
-      </a:fillRef>
-      <a:effectRef idx="0">
-        <a:scrgbClr r="0" g="0" b="0"/>
-      </a:effectRef>
-      <a:fontRef idx="minor">
-        <a:schemeClr val="lt1"/>
-      </a:fontRef>
-    </dgm:style>
-  </dgm:styleLbl>
-  <dgm:styleLbl name="lnNode1">
-    <dgm:scene3d>
-      <a:camera prst="orthographicFront"/>
-      <a:lightRig rig="threePt" dir="t"/>
-    </dgm:scene3d>
-    <dgm:sp3d/>
-    <dgm:txPr/>
-    <dgm:style>
-      <a:lnRef idx="2">
-        <a:scrgbClr r="0" g="0" b="0"/>
-      </a:lnRef>
-      <a:fillRef idx="1">
-        <a:scrgbClr r="0" g="0" b="0"/>
-      </a:fillRef>
-      <a:effectRef idx="0">
-        <a:scrgbClr r="0" g="0" b="0"/>
-      </a:effectRef>
-      <a:fontRef idx="minor">
-        <a:schemeClr val="lt1"/>
-      </a:fontRef>
-    </dgm:style>
-  </dgm:styleLbl>
-  <dgm:styleLbl name="vennNode1">
-    <dgm:scene3d>
-      <a:camera prst="orthographicFront"/>
-      <a:lightRig rig="threePt" dir="t"/>
-    </dgm:scene3d>
-    <dgm:sp3d/>
-    <dgm:txPr/>
-    <dgm:style>
-      <a:lnRef idx="2">
-        <a:scrgbClr r="0" g="0" b="0"/>
-      </a:lnRef>
-      <a:fillRef idx="1">
-        <a:scrgbClr r="0" g="0" b="0"/>
-      </a:fillRef>
-      <a:effectRef idx="0">
-        <a:scrgbClr r="0" g="0" b="0"/>
-      </a:effectRef>
-      <a:fontRef idx="minor">
-        <a:schemeClr val="tx1"/>
-      </a:fontRef>
-    </dgm:style>
-  </dgm:styleLbl>
-  <dgm:styleLbl name="alignNode1">
-    <dgm:scene3d>
-      <a:camera prst="orthographicFront"/>
-      <a:lightRig rig="threePt" dir="t"/>
-    </dgm:scene3d>
-    <dgm:sp3d/>
-    <dgm:txPr/>
-    <dgm:style>
-      <a:lnRef idx="2">
-        <a:scrgbClr r="0" g="0" b="0"/>
-      </a:lnRef>
-      <a:fillRef idx="1">
-        <a:scrgbClr r="0" g="0" b="0"/>
-      </a:fillRef>
-      <a:effectRef idx="0">
-        <a:scrgbClr r="0" g="0" b="0"/>
-      </a:effectRef>
-      <a:fontRef idx="minor">
-        <a:schemeClr val="lt1"/>
-      </a:fontRef>
-    </dgm:style>
-  </dgm:styleLbl>
-  <dgm:styleLbl name="node1">
-    <dgm:scene3d>
-      <a:camera prst="orthographicFront"/>
-      <a:lightRig rig="threePt" dir="t"/>
-    </dgm:scene3d>
-    <dgm:sp3d/>
-    <dgm:txPr/>
-    <dgm:style>
-      <a:lnRef idx="2">
-        <a:scrgbClr r="0" g="0" b="0"/>
-      </a:lnRef>
-      <a:fillRef idx="1">
-        <a:scrgbClr r="0" g="0" b="0"/>
-      </a:fillRef>
-      <a:effectRef idx="0">
-        <a:scrgbClr r="0" g="0" b="0"/>
-      </a:effectRef>
-      <a:fontRef idx="minor">
-        <a:schemeClr val="lt1"/>
-      </a:fontRef>
-    </dgm:style>
-  </dgm:styleLbl>
-  <dgm:styleLbl name="node2">
-    <dgm:scene3d>
-      <a:camera prst="orthographicFront"/>
-      <a:lightRig rig="threePt" dir="t"/>
-    </dgm:scene3d>
-    <dgm:sp3d/>
-    <dgm:txPr/>
-    <dgm:style>
-      <a:lnRef idx="2">
-        <a:scrgbClr r="0" g="0" b="0"/>
-      </a:lnRef>
-      <a:fillRef idx="1">
-        <a:scrgbClr r="0" g="0" b="0"/>
-      </a:fillRef>
-      <a:effectRef idx="0">
-        <a:scrgbClr r="0" g="0" b="0"/>
-      </a:effectRef>
-      <a:fontRef idx="minor">
-        <a:schemeClr val="lt1"/>
-      </a:fontRef>
-    </dgm:style>
-  </dgm:styleLbl>
-  <dgm:styleLbl name="node3">
-    <dgm:scene3d>
-      <a:camera prst="orthographicFront"/>
-      <a:lightRig rig="threePt" dir="t"/>
-    </dgm:scene3d>
-    <dgm:sp3d/>
-    <dgm:txPr/>
-    <dgm:style>
-      <a:lnRef idx="2">
-        <a:scrgbClr r="0" g="0" b="0"/>
-      </a:lnRef>
-      <a:fillRef idx="1">
-        <a:scrgbClr r="0" g="0" b="0"/>
-      </a:fillRef>
-      <a:effectRef idx="0">
-        <a:scrgbClr r="0" g="0" b="0"/>
-      </a:effectRef>
-      <a:fontRef idx="minor">
-        <a:schemeClr val="lt1"/>
-      </a:fontRef>
-    </dgm:style>
-  </dgm:styleLbl>
-  <dgm:styleLbl name="node4">
-    <dgm:scene3d>
-      <a:camera prst="orthographicFront"/>
-      <a:lightRig rig="threePt" dir="t"/>
-    </dgm:scene3d>
-    <dgm:sp3d/>
-    <dgm:txPr/>
-    <dgm:style>
-      <a:lnRef idx="2">
-        <a:scrgbClr r="0" g="0" b="0"/>
-      </a:lnRef>
-      <a:fillRef idx="1">
-        <a:scrgbClr r="0" g="0" b="0"/>
-      </a:fillRef>
-      <a:effectRef idx="0">
-        <a:scrgbClr r="0" g="0" b="0"/>
-      </a:effectRef>
-      <a:fontRef idx="minor">
-        <a:schemeClr val="lt1"/>
-      </a:fontRef>
-    </dgm:style>
-  </dgm:styleLbl>
-  <dgm:styleLbl name="fgImgPlace1">
-    <dgm:scene3d>
-      <a:camera prst="orthographicFront"/>
-      <a:lightRig rig="threePt" dir="t"/>
-    </dgm:scene3d>
-    <dgm:sp3d/>
-    <dgm:txPr/>
-    <dgm:style>
-      <a:lnRef idx="2">
-        <a:scrgbClr r="0" g="0" b="0"/>
-      </a:lnRef>
-      <a:fillRef idx="1">
-        <a:scrgbClr r="0" g="0" b="0"/>
-      </a:fillRef>
-      <a:effectRef idx="0">
-        <a:scrgbClr r="0" g="0" b="0"/>
-      </a:effectRef>
-      <a:fontRef idx="minor"/>
-    </dgm:style>
-  </dgm:styleLbl>
-  <dgm:styleLbl name="alignImgPlace1">
-    <dgm:scene3d>
-      <a:camera prst="orthographicFront"/>
-      <a:lightRig rig="threePt" dir="t"/>
-    </dgm:scene3d>
-    <dgm:sp3d/>
-    <dgm:txPr/>
-    <dgm:style>
-      <a:lnRef idx="2">
-        <a:scrgbClr r="0" g="0" b="0"/>
-      </a:lnRef>
-      <a:fillRef idx="1">
-        <a:scrgbClr r="0" g="0" b="0"/>
-      </a:fillRef>
-      <a:effectRef idx="0">
-        <a:scrgbClr r="0" g="0" b="0"/>
-      </a:effectRef>
-      <a:fontRef idx="minor"/>
-    </dgm:style>
-  </dgm:styleLbl>
-  <dgm:styleLbl name="bgImgPlace1">
-    <dgm:scene3d>
-      <a:camera prst="orthographicFront"/>
-      <a:lightRig rig="threePt" dir="t"/>
-    </dgm:scene3d>
-    <dgm:sp3d/>
-    <dgm:txPr/>
-    <dgm:style>
-      <a:lnRef idx="2">
-        <a:scrgbClr r="0" g="0" b="0"/>
-      </a:lnRef>
-      <a:fillRef idx="1">
-        <a:scrgbClr r="0" g="0" b="0"/>
-      </a:fillRef>
-      <a:effectRef idx="0">
-        <a:scrgbClr r="0" g="0" b="0"/>
-      </a:effectRef>
-      <a:fontRef idx="minor"/>
-    </dgm:style>
-  </dgm:styleLbl>
-  <dgm:styleLbl name="sibTrans2D1">
-    <dgm:scene3d>
-      <a:camera prst="orthographicFront"/>
-      <a:lightRig rig="threePt" dir="t"/>
-    </dgm:scene3d>
-    <dgm:sp3d/>
-    <dgm:txPr/>
-    <dgm:style>
-      <a:lnRef idx="0">
-        <a:scrgbClr r="0" g="0" b="0"/>
-      </a:lnRef>
-      <a:fillRef idx="1">
-        <a:scrgbClr r="0" g="0" b="0"/>
-      </a:fillRef>
-      <a:effectRef idx="0">
-        <a:scrgbClr r="0" g="0" b="0"/>
-      </a:effectRef>
-      <a:fontRef idx="minor">
-        <a:schemeClr val="lt1"/>
-      </a:fontRef>
-    </dgm:style>
-  </dgm:styleLbl>
-  <dgm:styleLbl name="fgSibTrans2D1">
-    <dgm:scene3d>
-      <a:camera prst="orthographicFront"/>
-      <a:lightRig rig="threePt" dir="t"/>
-    </dgm:scene3d>
-    <dgm:sp3d/>
-    <dgm:txPr/>
-    <dgm:style>
-      <a:lnRef idx="0">
-        <a:scrgbClr r="0" g="0" b="0"/>
-      </a:lnRef>
-      <a:fillRef idx="1">
-        <a:scrgbClr r="0" g="0" b="0"/>
-      </a:fillRef>
-      <a:effectRef idx="0">
-        <a:scrgbClr r="0" g="0" b="0"/>
-      </a:effectRef>
-      <a:fontRef idx="minor">
-        <a:schemeClr val="lt1"/>
-      </a:fontRef>
-    </dgm:style>
-  </dgm:styleLbl>
-  <dgm:styleLbl name="bgSibTrans2D1">
-    <dgm:scene3d>
-      <a:camera prst="orthographicFront"/>
-      <a:lightRig rig="threePt" dir="t"/>
-    </dgm:scene3d>
-    <dgm:sp3d/>
-    <dgm:txPr/>
-    <dgm:style>
-      <a:lnRef idx="0">
-        <a:scrgbClr r="0" g="0" b="0"/>
-      </a:lnRef>
-      <a:fillRef idx="1">
-        <a:scrgbClr r="0" g="0" b="0"/>
-      </a:fillRef>
-      <a:effectRef idx="0">
-        <a:scrgbClr r="0" g="0" b="0"/>
-      </a:effectRef>
-      <a:fontRef idx="minor">
-        <a:schemeClr val="lt1"/>
-      </a:fontRef>
-    </dgm:style>
-  </dgm:styleLbl>
-  <dgm:styleLbl name="sibTrans1D1">
-    <dgm:scene3d>
-      <a:camera prst="orthographicFront"/>
-      <a:lightRig rig="threePt" dir="t"/>
-    </dgm:scene3d>
-    <dgm:sp3d/>
-    <dgm:txPr/>
-    <dgm:style>
-      <a:lnRef idx="1">
-        <a:scrgbClr r="0" g="0" b="0"/>
-      </a:lnRef>
-      <a:fillRef idx="0">
-        <a:scrgbClr r="0" g="0" b="0"/>
-      </a:fillRef>
-      <a:effectRef idx="0">
-        <a:scrgbClr r="0" g="0" b="0"/>
-      </a:effectRef>
-      <a:fontRef idx="minor"/>
-    </dgm:style>
-  </dgm:styleLbl>
-  <dgm:styleLbl name="callout">
-    <dgm:scene3d>
-      <a:camera prst="orthographicFront"/>
-      <a:lightRig rig="threePt" dir="t"/>
-    </dgm:scene3d>
-    <dgm:sp3d/>
-    <dgm:txPr/>
-    <dgm:style>
-      <a:lnRef idx="2">
-        <a:scrgbClr r="0" g="0" b="0"/>
-      </a:lnRef>
-      <a:fillRef idx="1">
-        <a:scrgbClr r="0" g="0" b="0"/>
-      </a:fillRef>
-      <a:effectRef idx="0">
-        <a:scrgbClr r="0" g="0" b="0"/>
-      </a:effectRef>
-      <a:fontRef idx="minor"/>
-    </dgm:style>
-  </dgm:styleLbl>
-  <dgm:styleLbl name="asst0">
-    <dgm:scene3d>
-      <a:camera prst="orthographicFront"/>
-      <a:lightRig rig="threePt" dir="t"/>
-    </dgm:scene3d>
-    <dgm:sp3d/>
-    <dgm:txPr/>
-    <dgm:style>
-      <a:lnRef idx="2">
-        <a:scrgbClr r="0" g="0" b="0"/>
-      </a:lnRef>
-      <a:fillRef idx="1">
-        <a:scrgbClr r="0" g="0" b="0"/>
-      </a:fillRef>
-      <a:effectRef idx="0">
-        <a:scrgbClr r="0" g="0" b="0"/>
-      </a:effectRef>
-      <a:fontRef idx="minor">
-        <a:schemeClr val="lt1"/>
-      </a:fontRef>
-    </dgm:style>
-  </dgm:styleLbl>
-  <dgm:styleLbl name="asst1">
-    <dgm:scene3d>
-      <a:camera prst="orthographicFront"/>
-      <a:lightRig rig="threePt" dir="t"/>
-    </dgm:scene3d>
-    <dgm:sp3d/>
-    <dgm:txPr/>
-    <dgm:style>
-      <a:lnRef idx="2">
-        <a:scrgbClr r="0" g="0" b="0"/>
-      </a:lnRef>
-      <a:fillRef idx="1">
-        <a:scrgbClr r="0" g="0" b="0"/>
-      </a:fillRef>
-      <a:effectRef idx="0">
-        <a:scrgbClr r="0" g="0" b="0"/>
-      </a:effectRef>
-      <a:fontRef idx="minor">
-        <a:schemeClr val="lt1"/>
-      </a:fontRef>
-    </dgm:style>
-  </dgm:styleLbl>
-  <dgm:styleLbl name="asst2">
-    <dgm:scene3d>
-      <a:camera prst="orthographicFront"/>
-      <a:lightRig rig="threePt" dir="t"/>
-    </dgm:scene3d>
-    <dgm:sp3d/>
-    <dgm:txPr/>
-    <dgm:style>
-      <a:lnRef idx="2">
-        <a:scrgbClr r="0" g="0" b="0"/>
-      </a:lnRef>
-      <a:fillRef idx="1">
-        <a:scrgbClr r="0" g="0" b="0"/>
-      </a:fillRef>
-      <a:effectRef idx="0">
-        <a:scrgbClr r="0" g="0" b="0"/>
-      </a:effectRef>
-      <a:fontRef idx="minor">
-        <a:schemeClr val="lt1"/>
-      </a:fontRef>
-    </dgm:style>
-  </dgm:styleLbl>
-  <dgm:styleLbl name="asst3">
-    <dgm:scene3d>
-      <a:camera prst="orthographicFront"/>
-      <a:lightRig rig="threePt" dir="t"/>
-    </dgm:scene3d>
-    <dgm:sp3d/>
-    <dgm:txPr/>
-    <dgm:style>
-      <a:lnRef idx="2">
-        <a:scrgbClr r="0" g="0" b="0"/>
-      </a:lnRef>
-      <a:fillRef idx="1">
-        <a:scrgbClr r="0" g="0" b="0"/>
-      </a:fillRef>
-      <a:effectRef idx="0">
-        <a:scrgbClr r="0" g="0" b="0"/>
-      </a:effectRef>
-      <a:fontRef idx="minor">
-        <a:schemeClr val="lt1"/>
-      </a:fontRef>
-    </dgm:style>
-  </dgm:styleLbl>
-  <dgm:styleLbl name="asst4">
-    <dgm:scene3d>
-      <a:camera prst="orthographicFront"/>
-      <a:lightRig rig="threePt" dir="t"/>
-    </dgm:scene3d>
-    <dgm:sp3d/>
-    <dgm:txPr/>
-    <dgm:style>
-      <a:lnRef idx="2">
-        <a:scrgbClr r="0" g="0" b="0"/>
-      </a:lnRef>
-      <a:fillRef idx="1">
-        <a:scrgbClr r="0" g="0" b="0"/>
-      </a:fillRef>
-      <a:effectRef idx="0">
-        <a:scrgbClr r="0" g="0" b="0"/>
-      </a:effectRef>
-      <a:fontRef idx="minor">
-        <a:schemeClr val="lt1"/>
-      </a:fontRef>
-    </dgm:style>
-  </dgm:styleLbl>
-  <dgm:styleLbl name="parChTrans2D1">
-    <dgm:scene3d>
-      <a:camera prst="orthographicFront"/>
-      <a:lightRig rig="threePt" dir="t"/>
-    </dgm:scene3d>
-    <dgm:sp3d/>
-    <dgm:txPr/>
-    <dgm:style>
-      <a:lnRef idx="2">
-        <a:scrgbClr r="0" g="0" b="0"/>
-      </a:lnRef>
-      <a:fillRef idx="1">
-        <a:scrgbClr r="0" g="0" b="0"/>
-      </a:fillRef>
-      <a:effectRef idx="0">
-        <a:scrgbClr r="0" g="0" b="0"/>
-      </a:effectRef>
-      <a:fontRef idx="minor">
-        <a:schemeClr val="lt1"/>
-      </a:fontRef>
-    </dgm:style>
-  </dgm:styleLbl>
-  <dgm:styleLbl name="parChTrans2D2">
-    <dgm:scene3d>
-      <a:camera prst="orthographicFront"/>
-      <a:lightRig rig="threePt" dir="t"/>
-    </dgm:scene3d>
-    <dgm:sp3d/>
-    <dgm:txPr/>
-    <dgm:style>
-      <a:lnRef idx="2">
-        <a:scrgbClr r="0" g="0" b="0"/>
-      </a:lnRef>
-      <a:fillRef idx="1">
-        <a:scrgbClr r="0" g="0" b="0"/>
-      </a:fillRef>
-      <a:effectRef idx="0">
-        <a:scrgbClr r="0" g="0" b="0"/>
-      </a:effectRef>
-      <a:fontRef idx="minor">
-        <a:schemeClr val="lt1"/>
-      </a:fontRef>
-    </dgm:style>
-  </dgm:styleLbl>
-  <dgm:styleLbl name="parChTrans2D3">
-    <dgm:scene3d>
-      <a:camera prst="orthographicFront"/>
-      <a:lightRig rig="threePt" dir="t"/>
-    </dgm:scene3d>
-    <dgm:sp3d/>
-    <dgm:txPr/>
-    <dgm:style>
-      <a:lnRef idx="2">
-        <a:scrgbClr r="0" g="0" b="0"/>
-      </a:lnRef>
-      <a:fillRef idx="1">
-        <a:scrgbClr r="0" g="0" b="0"/>
-      </a:fillRef>
-      <a:effectRef idx="0">
-        <a:scrgbClr r="0" g="0" b="0"/>
-      </a:effectRef>
-      <a:fontRef idx="minor">
-        <a:schemeClr val="lt1"/>
-      </a:fontRef>
-    </dgm:style>
-  </dgm:styleLbl>
-  <dgm:styleLbl name="parChTrans2D4">
-    <dgm:scene3d>
-      <a:camera prst="orthographicFront"/>
-      <a:lightRig rig="threePt" dir="t"/>
-    </dgm:scene3d>
-    <dgm:sp3d/>
-    <dgm:txPr/>
-    <dgm:style>
-      <a:lnRef idx="2">
-        <a:scrgbClr r="0" g="0" b="0"/>
-      </a:lnRef>
-      <a:fillRef idx="1">
-        <a:scrgbClr r="0" g="0" b="0"/>
-      </a:fillRef>
-      <a:effectRef idx="0">
-        <a:scrgbClr r="0" g="0" b="0"/>
-      </a:effectRef>
-      <a:fontRef idx="minor">
-        <a:schemeClr val="lt1"/>
-      </a:fontRef>
-    </dgm:style>
-  </dgm:styleLbl>
-  <dgm:styleLbl name="parChTrans1D1">
-    <dgm:scene3d>
-      <a:camera prst="orthographicFront"/>
-      <a:lightRig rig="threePt" dir="t"/>
-    </dgm:scene3d>
-    <dgm:sp3d/>
-    <dgm:txPr/>
-    <dgm:style>
-      <a:lnRef idx="2">
-        <a:scrgbClr r="0" g="0" b="0"/>
-      </a:lnRef>
-      <a:fillRef idx="0">
-        <a:scrgbClr r="0" g="0" b="0"/>
-      </a:fillRef>
-      <a:effectRef idx="0">
-        <a:scrgbClr r="0" g="0" b="0"/>
-      </a:effectRef>
-      <a:fontRef idx="minor"/>
-    </dgm:style>
-  </dgm:styleLbl>
-  <dgm:styleLbl name="parChTrans1D2">
-    <dgm:scene3d>
-      <a:camera prst="orthographicFront"/>
-      <a:lightRig rig="threePt" dir="t"/>
-    </dgm:scene3d>
-    <dgm:sp3d/>
-    <dgm:txPr/>
-    <dgm:style>
-      <a:lnRef idx="2">
-        <a:scrgbClr r="0" g="0" b="0"/>
-      </a:lnRef>
-      <a:fillRef idx="0">
-        <a:scrgbClr r="0" g="0" b="0"/>
-      </a:fillRef>
-      <a:effectRef idx="0">
-        <a:scrgbClr r="0" g="0" b="0"/>
-      </a:effectRef>
-      <a:fontRef idx="minor"/>
-    </dgm:style>
-  </dgm:styleLbl>
-  <dgm:styleLbl name="parChTrans1D3">
-    <dgm:scene3d>
-      <a:camera prst="orthographicFront"/>
-      <a:lightRig rig="threePt" dir="t"/>
-    </dgm:scene3d>
-    <dgm:sp3d/>
-    <dgm:txPr/>
-    <dgm:style>
-      <a:lnRef idx="2">
-        <a:scrgbClr r="0" g="0" b="0"/>
-      </a:lnRef>
-      <a:fillRef idx="0">
-        <a:scrgbClr r="0" g="0" b="0"/>
-      </a:fillRef>
-      <a:effectRef idx="0">
-        <a:scrgbClr r="0" g="0" b="0"/>
-      </a:effectRef>
-      <a:fontRef idx="minor"/>
-    </dgm:style>
-  </dgm:styleLbl>
-  <dgm:styleLbl name="parChTrans1D4">
-    <dgm:scene3d>
-      <a:camera prst="orthographicFront"/>
-      <a:lightRig rig="threePt" dir="t"/>
-    </dgm:scene3d>
-    <dgm:sp3d/>
-    <dgm:txPr/>
-    <dgm:style>
-      <a:lnRef idx="2">
-        <a:scrgbClr r="0" g="0" b="0"/>
-      </a:lnRef>
-      <a:fillRef idx="0">
-        <a:scrgbClr r="0" g="0" b="0"/>
-      </a:fillRef>
-      <a:effectRef idx="0">
-        <a:scrgbClr r="0" g="0" b="0"/>
-      </a:effectRef>
-      <a:fontRef idx="minor"/>
-    </dgm:style>
-  </dgm:styleLbl>
-  <dgm:styleLbl name="fgAcc1">
-    <dgm:scene3d>
-      <a:camera prst="orthographicFront"/>
-      <a:lightRig rig="threePt" dir="t"/>
-    </dgm:scene3d>
-    <dgm:sp3d/>
-    <dgm:txPr/>
-    <dgm:style>
-      <a:lnRef idx="2">
-        <a:scrgbClr r="0" g="0" b="0"/>
-      </a:lnRef>
-      <a:fillRef idx="1">
-        <a:scrgbClr r="0" g="0" b="0"/>
-      </a:fillRef>
-      <a:effectRef idx="0">
-        <a:scrgbClr r="0" g="0" b="0"/>
-      </a:effectRef>
-      <a:fontRef idx="minor"/>
-    </dgm:style>
-  </dgm:styleLbl>
-  <dgm:styleLbl name="conFgAcc1">
-    <dgm:scene3d>
-      <a:camera prst="orthographicFront"/>
-      <a:lightRig rig="threePt" dir="t"/>
-    </dgm:scene3d>
-    <dgm:sp3d/>
-    <dgm:txPr/>
-    <dgm:style>
-      <a:lnRef idx="2">
-        <a:scrgbClr r="0" g="0" b="0"/>
-      </a:lnRef>
-      <a:fillRef idx="1">
-        <a:scrgbClr r="0" g="0" b="0"/>
-      </a:fillRef>
-      <a:effectRef idx="0">
-        <a:scrgbClr r="0" g="0" b="0"/>
-      </a:effectRef>
-      <a:fontRef idx="minor"/>
-    </dgm:style>
-  </dgm:styleLbl>
-  <dgm:styleLbl name="alignAcc1">
-    <dgm:scene3d>
-      <a:camera prst="orthographicFront"/>
-      <a:lightRig rig="threePt" dir="t"/>
-    </dgm:scene3d>
-    <dgm:sp3d/>
-    <dgm:txPr/>
-    <dgm:style>
-      <a:lnRef idx="2">
-        <a:scrgbClr r="0" g="0" b="0"/>
-      </a:lnRef>
-      <a:fillRef idx="1">
-        <a:scrgbClr r="0" g="0" b="0"/>
-      </a:fillRef>
-      <a:effectRef idx="0">
-        <a:scrgbClr r="0" g="0" b="0"/>
-      </a:effectRef>
-      <a:fontRef idx="minor"/>
-    </dgm:style>
-  </dgm:styleLbl>
-  <dgm:styleLbl name="trAlignAcc1">
-    <dgm:scene3d>
-      <a:camera prst="orthographicFront"/>
-      <a:lightRig rig="threePt" dir="t"/>
-    </dgm:scene3d>
-    <dgm:sp3d/>
-    <dgm:txPr/>
-    <dgm:style>
-      <a:lnRef idx="1">
-        <a:scrgbClr r="0" g="0" b="0"/>
-      </a:lnRef>
-      <a:fillRef idx="1">
-        <a:scrgbClr r="0" g="0" b="0"/>
-      </a:fillRef>
-      <a:effectRef idx="0">
-        <a:scrgbClr r="0" g="0" b="0"/>
-      </a:effectRef>
-      <a:fontRef idx="minor"/>
-    </dgm:style>
-  </dgm:styleLbl>
-  <dgm:styleLbl name="bgAcc1">
-    <dgm:scene3d>
-      <a:camera prst="orthographicFront"/>
-      <a:lightRig rig="threePt" dir="t"/>
-    </dgm:scene3d>
-    <dgm:sp3d/>
-    <dgm:txPr/>
-    <dgm:style>
-      <a:lnRef idx="2">
-        <a:scrgbClr r="0" g="0" b="0"/>
-      </a:lnRef>
-      <a:fillRef idx="1">
-        <a:scrgbClr r="0" g="0" b="0"/>
-      </a:fillRef>
-      <a:effectRef idx="0">
-        <a:scrgbClr r="0" g="0" b="0"/>
-      </a:effectRef>
-      <a:fontRef idx="minor"/>
-    </dgm:style>
-  </dgm:styleLbl>
-  <dgm:styleLbl name="solidFgAcc1">
-    <dgm:scene3d>
-      <a:camera prst="orthographicFront"/>
-      <a:lightRig rig="threePt" dir="t"/>
-    </dgm:scene3d>
-    <dgm:sp3d/>
-    <dgm:txPr/>
-    <dgm:style>
-      <a:lnRef idx="2">
-        <a:scrgbClr r="0" g="0" b="0"/>
-      </a:lnRef>
-      <a:fillRef idx="1">
-        <a:scrgbClr r="0" g="0" b="0"/>
-      </a:fillRef>
-      <a:effectRef idx="0">
-        <a:scrgbClr r="0" g="0" b="0"/>
-      </a:effectRef>
-      <a:fontRef idx="minor"/>
-    </dgm:style>
-  </dgm:styleLbl>
-  <dgm:styleLbl name="solidAlignAcc1">
-    <dgm:scene3d>
-      <a:camera prst="orthographicFront"/>
-      <a:lightRig rig="threePt" dir="t"/>
-    </dgm:scene3d>
-    <dgm:sp3d/>
-    <dgm:txPr/>
-    <dgm:style>
-      <a:lnRef idx="2">
-        <a:scrgbClr r="0" g="0" b="0"/>
-      </a:lnRef>
-      <a:fillRef idx="1">
-        <a:scrgbClr r="0" g="0" b="0"/>
-      </a:fillRef>
-      <a:effectRef idx="0">
-        <a:scrgbClr r="0" g="0" b="0"/>
-      </a:effectRef>
-      <a:fontRef idx="minor"/>
-    </dgm:style>
-  </dgm:styleLbl>
-  <dgm:styleLbl name="solidBgAcc1">
-    <dgm:scene3d>
-      <a:camera prst="orthographicFront"/>
-      <a:lightRig rig="threePt" dir="t"/>
-    </dgm:scene3d>
-    <dgm:sp3d/>
-    <dgm:txPr/>
-    <dgm:style>
-      <a:lnRef idx="2">
-        <a:scrgbClr r="0" g="0" b="0"/>
-      </a:lnRef>
-      <a:fillRef idx="1">
-        <a:scrgbClr r="0" g="0" b="0"/>
-      </a:fillRef>
-      <a:effectRef idx="0">
-        <a:scrgbClr r="0" g="0" b="0"/>
-      </a:effectRef>
-      <a:fontRef idx="minor"/>
-    </dgm:style>
-  </dgm:styleLbl>
-  <dgm:styleLbl name="fgAccFollowNode1">
-    <dgm:scene3d>
-      <a:camera prst="orthographicFront"/>
-      <a:lightRig rig="threePt" dir="t"/>
-    </dgm:scene3d>
-    <dgm:sp3d/>
-    <dgm:txPr/>
-    <dgm:style>
-      <a:lnRef idx="2">
-        <a:scrgbClr r="0" g="0" b="0"/>
-      </a:lnRef>
-      <a:fillRef idx="1">
-        <a:scrgbClr r="0" g="0" b="0"/>
-      </a:fillRef>
-      <a:effectRef idx="0">
-        <a:scrgbClr r="0" g="0" b="0"/>
-      </a:effectRef>
-      <a:fontRef idx="minor"/>
-    </dgm:style>
-  </dgm:styleLbl>
-  <dgm:styleLbl name="alignAccFollowNode1">
-    <dgm:scene3d>
-      <a:camera prst="orthographicFront"/>
-      <a:lightRig rig="threePt" dir="t"/>
-    </dgm:scene3d>
-    <dgm:sp3d/>
-    <dgm:txPr/>
-    <dgm:style>
-      <a:lnRef idx="2">
-        <a:scrgbClr r="0" g="0" b="0"/>
-      </a:lnRef>
-      <a:fillRef idx="1">
-        <a:scrgbClr r="0" g="0" b="0"/>
-      </a:fillRef>
-      <a:effectRef idx="0">
-        <a:scrgbClr r="0" g="0" b="0"/>
-      </a:effectRef>
-      <a:fontRef idx="minor"/>
-    </dgm:style>
-  </dgm:styleLbl>
-  <dgm:styleLbl name="bgAccFollowNode1">
-    <dgm:scene3d>
-      <a:camera prst="orthographicFront"/>
-      <a:lightRig rig="threePt" dir="t"/>
-    </dgm:scene3d>
-    <dgm:sp3d/>
-    <dgm:txPr/>
-    <dgm:style>
-      <a:lnRef idx="2">
-        <a:scrgbClr r="0" g="0" b="0"/>
-      </a:lnRef>
-      <a:fillRef idx="1">
-        <a:scrgbClr r="0" g="0" b="0"/>
-      </a:fillRef>
-      <a:effectRef idx="0">
-        <a:scrgbClr r="0" g="0" b="0"/>
-      </a:effectRef>
-      <a:fontRef idx="minor"/>
-    </dgm:style>
-  </dgm:styleLbl>
-  <dgm:styleLbl name="fgAcc0">
-    <dgm:scene3d>
-      <a:camera prst="orthographicFront"/>
-      <a:lightRig rig="threePt" dir="t"/>
-    </dgm:scene3d>
-    <dgm:sp3d/>
-    <dgm:txPr/>
-    <dgm:style>
-      <a:lnRef idx="2">
-        <a:scrgbClr r="0" g="0" b="0"/>
-      </a:lnRef>
-      <a:fillRef idx="1">
-        <a:scrgbClr r="0" g="0" b="0"/>
-      </a:fillRef>
-      <a:effectRef idx="0">
-        <a:scrgbClr r="0" g="0" b="0"/>
-      </a:effectRef>
-      <a:fontRef idx="minor"/>
-    </dgm:style>
-  </dgm:styleLbl>
-  <dgm:styleLbl name="fgAcc2">
-    <dgm:scene3d>
-      <a:camera prst="orthographicFront"/>
-      <a:lightRig rig="threePt" dir="t"/>
-    </dgm:scene3d>
-    <dgm:sp3d/>
-    <dgm:txPr/>
-    <dgm:style>
-      <a:lnRef idx="2">
-        <a:scrgbClr r="0" g="0" b="0"/>
-      </a:lnRef>
-      <a:fillRef idx="1">
-        <a:scrgbClr r="0" g="0" b="0"/>
-      </a:fillRef>
-      <a:effectRef idx="0">
-        <a:scrgbClr r="0" g="0" b="0"/>
-      </a:effectRef>
-      <a:fontRef idx="minor"/>
-    </dgm:style>
-  </dgm:styleLbl>
-  <dgm:styleLbl name="fgAcc3">
-    <dgm:scene3d>
-      <a:camera prst="orthographicFront"/>
-      <a:lightRig rig="threePt" dir="t"/>
-    </dgm:scene3d>
-    <dgm:sp3d/>
-    <dgm:txPr/>
-    <dgm:style>
-      <a:lnRef idx="2">
-        <a:scrgbClr r="0" g="0" b="0"/>
-      </a:lnRef>
-      <a:fillRef idx="1">
-        <a:scrgbClr r="0" g="0" b="0"/>
-      </a:fillRef>
-      <a:effectRef idx="0">
-        <a:scrgbClr r="0" g="0" b="0"/>
-      </a:effectRef>
-      <a:fontRef idx="minor"/>
-    </dgm:style>
-  </dgm:styleLbl>
-  <dgm:styleLbl name="fgAcc4">
-    <dgm:scene3d>
-      <a:camera prst="orthographicFront"/>
-      <a:lightRig rig="threePt" dir="t"/>
-    </dgm:scene3d>
-    <dgm:sp3d/>
-    <dgm:txPr/>
-    <dgm:style>
-      <a:lnRef idx="2">
-        <a:scrgbClr r="0" g="0" b="0"/>
-      </a:lnRef>
-      <a:fillRef idx="1">
-        <a:scrgbClr r="0" g="0" b="0"/>
-      </a:fillRef>
-      <a:effectRef idx="0">
-        <a:scrgbClr r="0" g="0" b="0"/>
-      </a:effectRef>
-      <a:fontRef idx="minor"/>
-    </dgm:style>
-  </dgm:styleLbl>
-  <dgm:styleLbl name="bgShp">
-    <dgm:scene3d>
-      <a:camera prst="orthographicFront"/>
-      <a:lightRig rig="threePt" dir="t"/>
-    </dgm:scene3d>
-    <dgm:sp3d/>
-    <dgm:txPr/>
-    <dgm:style>
-      <a:lnRef idx="0">
-        <a:scrgbClr r="0" g="0" b="0"/>
-      </a:lnRef>
-      <a:fillRef idx="1">
-        <a:scrgbClr r="0" g="0" b="0"/>
-      </a:fillRef>
-      <a:effectRef idx="0">
-        <a:scrgbClr r="0" g="0" b="0"/>
-      </a:effectRef>
-      <a:fontRef idx="minor"/>
-    </dgm:style>
-  </dgm:styleLbl>
-  <dgm:styleLbl name="dkBgShp">
-    <dgm:scene3d>
-      <a:camera prst="orthographicFront"/>
-      <a:lightRig rig="threePt" dir="t"/>
-    </dgm:scene3d>
-    <dgm:sp3d/>
-    <dgm:txPr/>
-    <dgm:style>
-      <a:lnRef idx="0">
-        <a:scrgbClr r="0" g="0" b="0"/>
-      </a:lnRef>
-      <a:fillRef idx="1">
-        <a:scrgbClr r="0" g="0" b="0"/>
-      </a:fillRef>
-      <a:effectRef idx="0">
-        <a:scrgbClr r="0" g="0" b="0"/>
-      </a:effectRef>
-      <a:fontRef idx="minor"/>
-    </dgm:style>
-  </dgm:styleLbl>
-  <dgm:styleLbl name="trBgShp">
-    <dgm:scene3d>
-      <a:camera prst="orthographicFront"/>
-      <a:lightRig rig="threePt" dir="t"/>
-    </dgm:scene3d>
-    <dgm:sp3d/>
-    <dgm:txPr/>
-    <dgm:style>
-      <a:lnRef idx="0">
-        <a:scrgbClr r="0" g="0" b="0"/>
-      </a:lnRef>
-      <a:fillRef idx="1">
-        <a:scrgbClr r="0" g="0" b="0"/>
-      </a:fillRef>
-      <a:effectRef idx="0">
-        <a:scrgbClr r="0" g="0" b="0"/>
-      </a:effectRef>
-      <a:fontRef idx="minor"/>
-    </dgm:style>
-  </dgm:styleLbl>
-  <dgm:styleLbl name="fgShp">
-    <dgm:scene3d>
-      <a:camera prst="orthographicFront"/>
-      <a:lightRig rig="threePt" dir="t"/>
-    </dgm:scene3d>
-    <dgm:sp3d/>
-    <dgm:txPr/>
-    <dgm:style>
-      <a:lnRef idx="2">
-        <a:scrgbClr r="0" g="0" b="0"/>
-      </a:lnRef>
-      <a:fillRef idx="1">
-        <a:scrgbClr r="0" g="0" b="0"/>
-      </a:fillRef>
-      <a:effectRef idx="0">
-        <a:scrgbClr r="0" g="0" b="0"/>
-      </a:effectRef>
-      <a:fontRef idx="minor"/>
-    </dgm:style>
-  </dgm:styleLbl>
-  <dgm:styleLbl name="revTx">
-    <dgm:scene3d>
-      <a:camera prst="orthographicFront"/>
-      <a:lightRig rig="threePt" dir="t"/>
-    </dgm:scene3d>
-    <dgm:sp3d/>
-    <dgm:txPr/>
-    <dgm:style>
-      <a:lnRef idx="0">
-        <a:scrgbClr r="0" g="0" b="0"/>
-      </a:lnRef>
-      <a:fillRef idx="0">
-        <a:scrgbClr r="0" g="0" b="0"/>
-      </a:fillRef>
-      <a:effectRef idx="0">
-        <a:scrgbClr r="0" g="0" b="0"/>
-      </a:effectRef>
-      <a:fontRef idx="minor"/>
-    </dgm:style>
-  </dgm:styleLbl>
-</dgm:styleDef>
 </file>
 
 <file path=ppt/notesMasters/notesMaster1.xml><?xml version="1.0" encoding="utf-8"?>
@@ -3118,23 +526,10 @@
                 <a:ea typeface="+mn-ea"/>
                 <a:cs typeface="+mn-cs"/>
               </a:rPr>
-              <a:t>Hello, I’m Eoin Fitzsimons, a lifelong motorsport and sports‑simulation fan. This is Momentum, it is a multi‑discipline motorsport management simulator that aims to deliver deep management systems across multiple racing formats while also providing a real time racing system.</a:t>
-            </a:r>
-          </a:p>
-          <a:p>
-            <a:endParaRPr lang="en-IE" sz="1200" b="0" i="0" kern="1200" dirty="0">
-              <a:solidFill>
-                <a:schemeClr val="tx1"/>
-              </a:solidFill>
-              <a:effectLst/>
-              <a:latin typeface="+mn-lt"/>
-              <a:ea typeface="+mn-ea"/>
-              <a:cs typeface="+mn-cs"/>
-            </a:endParaRPr>
-          </a:p>
-          <a:p>
-            <a:r>
-              <a:rPr lang="en-IE" sz="1200" b="0" i="0" kern="1200" dirty="0">
+              <a:t>Hello, I’m Eoin Fitzsimons, a lifelong motorsport and sports‑simulation fan. This is Momentum, a programme used to </a:t>
+            </a:r>
+            <a:r>
+              <a:rPr lang="en-IE" sz="1200" b="0" i="0" kern="1200">
                 <a:solidFill>
                   <a:schemeClr val="tx1"/>
                 </a:solidFill>
@@ -3143,7 +538,7 @@
                 <a:ea typeface="+mn-ea"/>
                 <a:cs typeface="+mn-cs"/>
               </a:rPr>
-              <a:t>Who is it for?</a:t>
+              <a:t>simulate motorsports.</a:t>
             </a:r>
             <a:endParaRPr lang="en-IE" dirty="0"/>
           </a:p>
@@ -3176,362 +571,6 @@
     <p:extLst>
       <p:ext uri="{BB962C8B-B14F-4D97-AF65-F5344CB8AC3E}">
         <p14:creationId xmlns:p14="http://schemas.microsoft.com/office/powerpoint/2010/main" val="2943444161"/>
-      </p:ext>
-    </p:extLst>
-  </p:cSld>
-  <p:clrMapOvr>
-    <a:masterClrMapping/>
-  </p:clrMapOvr>
-</p:notes>
-</file>
-
-<file path=ppt/notesSlides/notesSlide2.xml><?xml version="1.0" encoding="utf-8"?>
-<p:notes xmlns:a="http://schemas.openxmlformats.org/drawingml/2006/main" xmlns:r="http://schemas.openxmlformats.org/officeDocument/2006/relationships" xmlns:p="http://schemas.openxmlformats.org/presentationml/2006/main">
-  <p:cSld>
-    <p:spTree>
-      <p:nvGrpSpPr>
-        <p:cNvPr id="1" name=""/>
-        <p:cNvGrpSpPr/>
-        <p:nvPr/>
-      </p:nvGrpSpPr>
-      <p:grpSpPr>
-        <a:xfrm>
-          <a:off x="0" y="0"/>
-          <a:ext cx="0" cy="0"/>
-          <a:chOff x="0" y="0"/>
-          <a:chExt cx="0" cy="0"/>
-        </a:xfrm>
-      </p:grpSpPr>
-      <p:sp>
-        <p:nvSpPr>
-          <p:cNvPr id="2" name="Slide Image Placeholder 1"/>
-          <p:cNvSpPr>
-            <a:spLocks noGrp="1" noRot="1" noChangeAspect="1"/>
-          </p:cNvSpPr>
-          <p:nvPr>
-            <p:ph type="sldImg"/>
-          </p:nvPr>
-        </p:nvSpPr>
-        <p:spPr/>
-        <p:txBody>
-          <a:bodyPr/>
-          <a:lstStyle/>
-          <a:p>
-            <a:endParaRPr lang="en-IE"/>
-          </a:p>
-        </p:txBody>
-      </p:sp>
-      <p:sp>
-        <p:nvSpPr>
-          <p:cNvPr id="3" name="Notes Placeholder 2"/>
-          <p:cNvSpPr>
-            <a:spLocks noGrp="1"/>
-          </p:cNvSpPr>
-          <p:nvPr>
-            <p:ph type="body" idx="1"/>
-          </p:nvPr>
-        </p:nvSpPr>
-        <p:spPr/>
-        <p:txBody>
-          <a:bodyPr/>
-          <a:lstStyle/>
-          <a:p>
-            <a:r>
-              <a:rPr lang="en-GB" dirty="0"/>
-              <a:t>Motorsport management games are niche and often single‑discipline or shallow in simulation. Inspired by modding work on car‑centric titles and by low‑fi, vehicle‑focused play, the project aims are broader coverage across disciplines, depth in management systems (contracts, staff, budgets, vehicle setup), and practical deliverability in a single repository with lightweight dependencies.</a:t>
-            </a:r>
-          </a:p>
-          <a:p>
-            <a:endParaRPr lang="en-GB" dirty="0"/>
-          </a:p>
-          <a:p>
-            <a:r>
-              <a:rPr lang="en-GB" dirty="0"/>
-              <a:t>I found that these other games were much too simple when it came to what their driver attributes were, but it was a struggle to produce my own without redundancy, I had over 50 related to driving alone while both MM and F1 had 12. This made the diagrams hard to read</a:t>
-            </a:r>
-            <a:r>
-              <a:rPr lang="en-IE" dirty="0"/>
-              <a:t>.</a:t>
-            </a:r>
-            <a:endParaRPr lang="en-GB" dirty="0"/>
-          </a:p>
-        </p:txBody>
-      </p:sp>
-      <p:sp>
-        <p:nvSpPr>
-          <p:cNvPr id="4" name="Slide Number Placeholder 3"/>
-          <p:cNvSpPr>
-            <a:spLocks noGrp="1"/>
-          </p:cNvSpPr>
-          <p:nvPr>
-            <p:ph type="sldNum" sz="quarter" idx="5"/>
-          </p:nvPr>
-        </p:nvSpPr>
-        <p:spPr/>
-        <p:txBody>
-          <a:bodyPr/>
-          <a:lstStyle/>
-          <a:p>
-            <a:fld id="{C439C384-FEF2-4015-9B8A-9427217FDE2D}" type="slidenum">
-              <a:rPr lang="en-IE" smtClean="0"/>
-              <a:t>2</a:t>
-            </a:fld>
-            <a:endParaRPr lang="en-IE"/>
-          </a:p>
-        </p:txBody>
-      </p:sp>
-    </p:spTree>
-    <p:extLst>
-      <p:ext uri="{BB962C8B-B14F-4D97-AF65-F5344CB8AC3E}">
-        <p14:creationId xmlns:p14="http://schemas.microsoft.com/office/powerpoint/2010/main" val="1214771843"/>
-      </p:ext>
-    </p:extLst>
-  </p:cSld>
-  <p:clrMapOvr>
-    <a:masterClrMapping/>
-  </p:clrMapOvr>
-</p:notes>
-</file>
-
-<file path=ppt/notesSlides/notesSlide3.xml><?xml version="1.0" encoding="utf-8"?>
-<p:notes xmlns:a="http://schemas.openxmlformats.org/drawingml/2006/main" xmlns:r="http://schemas.openxmlformats.org/officeDocument/2006/relationships" xmlns:p="http://schemas.openxmlformats.org/presentationml/2006/main">
-  <p:cSld>
-    <p:spTree>
-      <p:nvGrpSpPr>
-        <p:cNvPr id="1" name=""/>
-        <p:cNvGrpSpPr/>
-        <p:nvPr/>
-      </p:nvGrpSpPr>
-      <p:grpSpPr>
-        <a:xfrm>
-          <a:off x="0" y="0"/>
-          <a:ext cx="0" cy="0"/>
-          <a:chOff x="0" y="0"/>
-          <a:chExt cx="0" cy="0"/>
-        </a:xfrm>
-      </p:grpSpPr>
-      <p:sp>
-        <p:nvSpPr>
-          <p:cNvPr id="2" name="Slide Image Placeholder 1"/>
-          <p:cNvSpPr>
-            <a:spLocks noGrp="1" noRot="1" noChangeAspect="1"/>
-          </p:cNvSpPr>
-          <p:nvPr>
-            <p:ph type="sldImg"/>
-          </p:nvPr>
-        </p:nvSpPr>
-        <p:spPr/>
-        <p:txBody>
-          <a:bodyPr/>
-          <a:lstStyle/>
-          <a:p>
-            <a:endParaRPr lang="en-IE"/>
-          </a:p>
-        </p:txBody>
-      </p:sp>
-      <p:sp>
-        <p:nvSpPr>
-          <p:cNvPr id="3" name="Notes Placeholder 2"/>
-          <p:cNvSpPr>
-            <a:spLocks noGrp="1"/>
-          </p:cNvSpPr>
-          <p:nvPr>
-            <p:ph type="body" idx="1"/>
-          </p:nvPr>
-        </p:nvSpPr>
-        <p:spPr/>
-        <p:txBody>
-          <a:bodyPr/>
-          <a:lstStyle/>
-          <a:p>
-            <a:r>
-              <a:rPr lang="en-GB" sz="1200" b="0" i="0" kern="1200" dirty="0">
-                <a:solidFill>
-                  <a:schemeClr val="tx1"/>
-                </a:solidFill>
-                <a:effectLst/>
-                <a:latin typeface="+mn-lt"/>
-                <a:ea typeface="+mn-ea"/>
-                <a:cs typeface="+mn-cs"/>
-              </a:rPr>
-              <a:t>The MVP concentrates on a demonstrable quick‑race, telemetry capture for tuning, a compact driver model, and output debugging that collect metrics such as DNFs and lap‑time volatility. Monte Carlo simulation was used earlier as an approach as it allowed for many lightning quick simulations that could then feed the best results out, but I felt there was not enough in race control.</a:t>
-            </a:r>
-          </a:p>
-          <a:p>
-            <a:endParaRPr lang="en-GB" sz="1200" b="0" i="0" kern="1200" dirty="0">
-              <a:solidFill>
-                <a:schemeClr val="tx1"/>
-              </a:solidFill>
-              <a:effectLst/>
-              <a:latin typeface="+mn-lt"/>
-              <a:ea typeface="+mn-ea"/>
-              <a:cs typeface="+mn-cs"/>
-            </a:endParaRPr>
-          </a:p>
-          <a:p>
-            <a:r>
-              <a:rPr lang="en-GB" sz="1200" b="0" i="0" kern="1200" dirty="0">
-                <a:solidFill>
-                  <a:schemeClr val="tx1"/>
-                </a:solidFill>
-                <a:effectLst/>
-                <a:latin typeface="+mn-lt"/>
-                <a:ea typeface="+mn-ea"/>
-                <a:cs typeface="+mn-cs"/>
-              </a:rPr>
-              <a:t>The stack is Python 3.13 with FastAPI, SQLite, NumPy/pandas/SciPy and a PyQt6 GUI to balance rapid development and local distribution. Key challenges identified were data integrity, demo fragility, and performance trade‑offs, I documented conceptual diagrams and alternative solutions and used them to prioritise automated import/verification, seeded tests, and targeted optimisation.</a:t>
-            </a:r>
-          </a:p>
-          <a:p>
-            <a:endParaRPr lang="en-GB" sz="1200" b="0" i="0" kern="1200" dirty="0">
-              <a:solidFill>
-                <a:schemeClr val="tx1"/>
-              </a:solidFill>
-              <a:effectLst/>
-              <a:latin typeface="+mn-lt"/>
-              <a:ea typeface="+mn-ea"/>
-              <a:cs typeface="+mn-cs"/>
-            </a:endParaRPr>
-          </a:p>
-          <a:p>
-            <a:endParaRPr lang="en-GB" dirty="0"/>
-          </a:p>
-          <a:p>
-            <a:endParaRPr lang="en-IE" dirty="0"/>
-          </a:p>
-        </p:txBody>
-      </p:sp>
-      <p:sp>
-        <p:nvSpPr>
-          <p:cNvPr id="4" name="Slide Number Placeholder 3"/>
-          <p:cNvSpPr>
-            <a:spLocks noGrp="1"/>
-          </p:cNvSpPr>
-          <p:nvPr>
-            <p:ph type="sldNum" sz="quarter" idx="5"/>
-          </p:nvPr>
-        </p:nvSpPr>
-        <p:spPr/>
-        <p:txBody>
-          <a:bodyPr/>
-          <a:lstStyle/>
-          <a:p>
-            <a:fld id="{C439C384-FEF2-4015-9B8A-9427217FDE2D}" type="slidenum">
-              <a:rPr lang="en-IE" smtClean="0"/>
-              <a:t>3</a:t>
-            </a:fld>
-            <a:endParaRPr lang="en-IE"/>
-          </a:p>
-        </p:txBody>
-      </p:sp>
-    </p:spTree>
-    <p:extLst>
-      <p:ext uri="{BB962C8B-B14F-4D97-AF65-F5344CB8AC3E}">
-        <p14:creationId xmlns:p14="http://schemas.microsoft.com/office/powerpoint/2010/main" val="3150110954"/>
-      </p:ext>
-    </p:extLst>
-  </p:cSld>
-  <p:clrMapOvr>
-    <a:masterClrMapping/>
-  </p:clrMapOvr>
-</p:notes>
-</file>
-
-<file path=ppt/notesSlides/notesSlide4.xml><?xml version="1.0" encoding="utf-8"?>
-<p:notes xmlns:a="http://schemas.openxmlformats.org/drawingml/2006/main" xmlns:r="http://schemas.openxmlformats.org/officeDocument/2006/relationships" xmlns:p="http://schemas.openxmlformats.org/presentationml/2006/main">
-  <p:cSld>
-    <p:spTree>
-      <p:nvGrpSpPr>
-        <p:cNvPr id="1" name=""/>
-        <p:cNvGrpSpPr/>
-        <p:nvPr/>
-      </p:nvGrpSpPr>
-      <p:grpSpPr>
-        <a:xfrm>
-          <a:off x="0" y="0"/>
-          <a:ext cx="0" cy="0"/>
-          <a:chOff x="0" y="0"/>
-          <a:chExt cx="0" cy="0"/>
-        </a:xfrm>
-      </p:grpSpPr>
-      <p:sp>
-        <p:nvSpPr>
-          <p:cNvPr id="2" name="Slide Image Placeholder 1"/>
-          <p:cNvSpPr>
-            <a:spLocks noGrp="1" noRot="1" noChangeAspect="1"/>
-          </p:cNvSpPr>
-          <p:nvPr>
-            <p:ph type="sldImg"/>
-          </p:nvPr>
-        </p:nvSpPr>
-        <p:spPr/>
-        <p:txBody>
-          <a:bodyPr/>
-          <a:lstStyle/>
-          <a:p>
-            <a:endParaRPr lang="en-IE"/>
-          </a:p>
-        </p:txBody>
-      </p:sp>
-      <p:sp>
-        <p:nvSpPr>
-          <p:cNvPr id="3" name="Notes Placeholder 2"/>
-          <p:cNvSpPr>
-            <a:spLocks noGrp="1"/>
-          </p:cNvSpPr>
-          <p:nvPr>
-            <p:ph type="body" idx="1"/>
-          </p:nvPr>
-        </p:nvSpPr>
-        <p:spPr/>
-        <p:txBody>
-          <a:bodyPr/>
-          <a:lstStyle/>
-          <a:p>
-            <a:r>
-              <a:rPr lang="en-GB" dirty="0"/>
-              <a:t>I will focus on building a larger game world, a persistent one that progresses and develops whether you oversee it or not. This will allow a player to move in the same game world and see how teams you were previously involved in either kick on or ruin your legacy. Drivers will be available for multiple disciplines, think the real-world triple crown or Kiki Räikkönen and Robert Kubica going into rally.</a:t>
-            </a:r>
-          </a:p>
-          <a:p>
-            <a:endParaRPr lang="en-GB" dirty="0"/>
-          </a:p>
-          <a:p>
-            <a:r>
-              <a:rPr lang="en-GB" dirty="0"/>
-              <a:t>I envisage this being a large task, but I have laid a lot of groundwork with my game engines that I then will iterate on top of, each system will not have to be made from scratch.</a:t>
-            </a:r>
-            <a:endParaRPr lang="en-IE" dirty="0"/>
-          </a:p>
-        </p:txBody>
-      </p:sp>
-      <p:sp>
-        <p:nvSpPr>
-          <p:cNvPr id="4" name="Slide Number Placeholder 3"/>
-          <p:cNvSpPr>
-            <a:spLocks noGrp="1"/>
-          </p:cNvSpPr>
-          <p:nvPr>
-            <p:ph type="sldNum" sz="quarter" idx="5"/>
-          </p:nvPr>
-        </p:nvSpPr>
-        <p:spPr/>
-        <p:txBody>
-          <a:bodyPr/>
-          <a:lstStyle/>
-          <a:p>
-            <a:fld id="{C439C384-FEF2-4015-9B8A-9427217FDE2D}" type="slidenum">
-              <a:rPr lang="en-IE" smtClean="0"/>
-              <a:t>4</a:t>
-            </a:fld>
-            <a:endParaRPr lang="en-IE"/>
-          </a:p>
-        </p:txBody>
-      </p:sp>
-    </p:spTree>
-    <p:extLst>
-      <p:ext uri="{BB962C8B-B14F-4D97-AF65-F5344CB8AC3E}">
-        <p14:creationId xmlns:p14="http://schemas.microsoft.com/office/powerpoint/2010/main" val="1135146227"/>
       </p:ext>
     </p:extLst>
   </p:cSld>
@@ -7144,7 +4183,7 @@
           <a:p>
             <a:r>
               <a:rPr lang="en-GB" dirty="0"/>
-              <a:t>MULTI-DISCIPLINE MOTORSPORT MANAGER</a:t>
+              <a:t>MOTORSPORT SIMULATION</a:t>
             </a:r>
             <a:endParaRPr lang="en-IE" dirty="0"/>
           </a:p>
@@ -7154,818 +4193,6 @@
     <p:extLst>
       <p:ext uri="{BB962C8B-B14F-4D97-AF65-F5344CB8AC3E}">
         <p14:creationId xmlns:p14="http://schemas.microsoft.com/office/powerpoint/2010/main" val="26541964"/>
-      </p:ext>
-    </p:extLst>
-  </p:cSld>
-  <p:clrMapOvr>
-    <a:masterClrMapping/>
-  </p:clrMapOvr>
-</p:sld>
-</file>
-
-<file path=ppt/slides/slide2.xml><?xml version="1.0" encoding="utf-8"?>
-<p:sld xmlns:a="http://schemas.openxmlformats.org/drawingml/2006/main" xmlns:r="http://schemas.openxmlformats.org/officeDocument/2006/relationships" xmlns:p="http://schemas.openxmlformats.org/presentationml/2006/main">
-  <p:cSld>
-    <p:spTree>
-      <p:nvGrpSpPr>
-        <p:cNvPr id="1" name=""/>
-        <p:cNvGrpSpPr/>
-        <p:nvPr/>
-      </p:nvGrpSpPr>
-      <p:grpSpPr>
-        <a:xfrm>
-          <a:off x="0" y="0"/>
-          <a:ext cx="0" cy="0"/>
-          <a:chOff x="0" y="0"/>
-          <a:chExt cx="0" cy="0"/>
-        </a:xfrm>
-      </p:grpSpPr>
-      <p:sp>
-        <p:nvSpPr>
-          <p:cNvPr id="2" name="Title 1">
-            <a:extLst>
-              <a:ext uri="{FF2B5EF4-FFF2-40B4-BE49-F238E27FC236}">
-                <a16:creationId xmlns:a16="http://schemas.microsoft.com/office/drawing/2014/main" id="{179CBBB9-FD06-2558-F18D-8B5A939F6F1A}"/>
-              </a:ext>
-            </a:extLst>
-          </p:cNvPr>
-          <p:cNvSpPr>
-            <a:spLocks noGrp="1"/>
-          </p:cNvSpPr>
-          <p:nvPr>
-            <p:ph type="title"/>
-          </p:nvPr>
-        </p:nvSpPr>
-        <p:spPr/>
-        <p:txBody>
-          <a:bodyPr/>
-          <a:lstStyle/>
-          <a:p>
-            <a:pPr algn="ctr"/>
-            <a:r>
-              <a:rPr lang="en-GB" dirty="0"/>
-              <a:t>The Past – What Compares?</a:t>
-            </a:r>
-            <a:endParaRPr lang="en-IE" dirty="0"/>
-          </a:p>
-        </p:txBody>
-      </p:sp>
-      <p:pic>
-        <p:nvPicPr>
-          <p:cNvPr id="1026" name="Picture 2" descr="Motorsport Manager on Steam">
-            <a:extLst>
-              <a:ext uri="{FF2B5EF4-FFF2-40B4-BE49-F238E27FC236}">
-                <a16:creationId xmlns:a16="http://schemas.microsoft.com/office/drawing/2014/main" id="{98E076EA-F95D-C170-6762-1F28DB7E4100}"/>
-              </a:ext>
-            </a:extLst>
-          </p:cNvPr>
-          <p:cNvPicPr>
-            <a:picLocks noGrp="1" noChangeAspect="1" noChangeArrowheads="1"/>
-          </p:cNvPicPr>
-          <p:nvPr>
-            <p:ph sz="half" idx="1"/>
-          </p:nvPr>
-        </p:nvPicPr>
-        <p:blipFill>
-          <a:blip r:embed="rId3">
-            <a:extLst>
-              <a:ext uri="{28A0092B-C50C-407E-A947-70E740481C1C}">
-                <a14:useLocalDpi xmlns:a14="http://schemas.microsoft.com/office/drawing/2010/main" val="0"/>
-              </a:ext>
-            </a:extLst>
-          </a:blip>
-          <a:stretch>
-            <a:fillRect/>
-          </a:stretch>
-        </p:blipFill>
-        <p:spPr bwMode="auto">
-          <a:xfrm>
-            <a:off x="355600" y="2060020"/>
-            <a:ext cx="5664200" cy="3186111"/>
-          </a:xfrm>
-          <a:prstGeom prst="rect">
-            <a:avLst/>
-          </a:prstGeom>
-          <a:noFill/>
-          <a:extLst>
-            <a:ext uri="{909E8E84-426E-40DD-AFC4-6F175D3DCCD1}">
-              <a14:hiddenFill xmlns:a14="http://schemas.microsoft.com/office/drawing/2010/main">
-                <a:solidFill>
-                  <a:srgbClr val="FFFFFF"/>
-                </a:solidFill>
-              </a14:hiddenFill>
-            </a:ext>
-          </a:extLst>
-        </p:spPr>
-      </p:pic>
-      <p:pic>
-        <p:nvPicPr>
-          <p:cNvPr id="5" name="Picture 6" descr="Three games in, is F1 Manager succeeding? - The Race">
-            <a:extLst>
-              <a:ext uri="{FF2B5EF4-FFF2-40B4-BE49-F238E27FC236}">
-                <a16:creationId xmlns:a16="http://schemas.microsoft.com/office/drawing/2014/main" id="{B8D25B6F-DF10-59AE-EEC0-9478D2A7B6E4}"/>
-              </a:ext>
-            </a:extLst>
-          </p:cNvPr>
-          <p:cNvPicPr>
-            <a:picLocks noGrp="1" noChangeAspect="1" noChangeArrowheads="1"/>
-          </p:cNvPicPr>
-          <p:nvPr>
-            <p:ph sz="half" idx="2"/>
-          </p:nvPr>
-        </p:nvPicPr>
-        <p:blipFill>
-          <a:blip r:embed="rId4">
-            <a:extLst>
-              <a:ext uri="{28A0092B-C50C-407E-A947-70E740481C1C}">
-                <a14:useLocalDpi xmlns:a14="http://schemas.microsoft.com/office/drawing/2010/main" val="0"/>
-              </a:ext>
-            </a:extLst>
-          </a:blip>
-          <a:srcRect/>
-          <a:stretch>
-            <a:fillRect/>
-          </a:stretch>
-        </p:blipFill>
-        <p:spPr bwMode="auto">
-          <a:xfrm>
-            <a:off x="6172202" y="2060020"/>
-            <a:ext cx="5664200" cy="3186113"/>
-          </a:xfrm>
-          <a:prstGeom prst="rect">
-            <a:avLst/>
-          </a:prstGeom>
-          <a:noFill/>
-          <a:extLst>
-            <a:ext uri="{909E8E84-426E-40DD-AFC4-6F175D3DCCD1}">
-              <a14:hiddenFill xmlns:a14="http://schemas.microsoft.com/office/drawing/2010/main">
-                <a:solidFill>
-                  <a:srgbClr val="FFFFFF"/>
-                </a:solidFill>
-              </a14:hiddenFill>
-            </a:ext>
-          </a:extLst>
-        </p:spPr>
-      </p:pic>
-      <p:sp>
-        <p:nvSpPr>
-          <p:cNvPr id="6" name="TextBox 5">
-            <a:extLst>
-              <a:ext uri="{FF2B5EF4-FFF2-40B4-BE49-F238E27FC236}">
-                <a16:creationId xmlns:a16="http://schemas.microsoft.com/office/drawing/2014/main" id="{4EB669A6-7859-7D1B-A144-BF4168F9D7E7}"/>
-              </a:ext>
-            </a:extLst>
-          </p:cNvPr>
-          <p:cNvSpPr txBox="1"/>
-          <p:nvPr/>
-        </p:nvSpPr>
-        <p:spPr>
-          <a:xfrm>
-            <a:off x="2086404" y="1690688"/>
-            <a:ext cx="2202591" cy="369332"/>
-          </a:xfrm>
-          <a:prstGeom prst="rect">
-            <a:avLst/>
-          </a:prstGeom>
-          <a:noFill/>
-        </p:spPr>
-        <p:txBody>
-          <a:bodyPr wrap="none" rtlCol="0">
-            <a:spAutoFit/>
-          </a:bodyPr>
-          <a:lstStyle/>
-          <a:p>
-            <a:pPr algn="ctr"/>
-            <a:r>
-              <a:rPr lang="en-GB" dirty="0">
-                <a:solidFill>
-                  <a:schemeClr val="accent2"/>
-                </a:solidFill>
-              </a:rPr>
-              <a:t>Motorsport Manager</a:t>
-            </a:r>
-            <a:endParaRPr lang="en-IE" dirty="0">
-              <a:solidFill>
-                <a:schemeClr val="accent2"/>
-              </a:solidFill>
-            </a:endParaRPr>
-          </a:p>
-        </p:txBody>
-      </p:sp>
-      <p:sp>
-        <p:nvSpPr>
-          <p:cNvPr id="7" name="TextBox 6">
-            <a:extLst>
-              <a:ext uri="{FF2B5EF4-FFF2-40B4-BE49-F238E27FC236}">
-                <a16:creationId xmlns:a16="http://schemas.microsoft.com/office/drawing/2014/main" id="{CB536009-FF63-F366-476D-0CB3CD97E727}"/>
-              </a:ext>
-            </a:extLst>
-          </p:cNvPr>
-          <p:cNvSpPr txBox="1"/>
-          <p:nvPr/>
-        </p:nvSpPr>
-        <p:spPr>
-          <a:xfrm>
-            <a:off x="8333316" y="1702079"/>
-            <a:ext cx="1341970" cy="369332"/>
-          </a:xfrm>
-          <a:prstGeom prst="rect">
-            <a:avLst/>
-          </a:prstGeom>
-          <a:noFill/>
-        </p:spPr>
-        <p:txBody>
-          <a:bodyPr wrap="none" rtlCol="0">
-            <a:spAutoFit/>
-          </a:bodyPr>
-          <a:lstStyle/>
-          <a:p>
-            <a:pPr algn="ctr"/>
-            <a:r>
-              <a:rPr lang="en-GB" dirty="0">
-                <a:solidFill>
-                  <a:schemeClr val="accent2"/>
-                </a:solidFill>
-              </a:rPr>
-              <a:t>F1 Manager</a:t>
-            </a:r>
-            <a:endParaRPr lang="en-IE" dirty="0">
-              <a:solidFill>
-                <a:schemeClr val="accent2"/>
-              </a:solidFill>
-            </a:endParaRPr>
-          </a:p>
-        </p:txBody>
-      </p:sp>
-    </p:spTree>
-    <p:extLst>
-      <p:ext uri="{BB962C8B-B14F-4D97-AF65-F5344CB8AC3E}">
-        <p14:creationId xmlns:p14="http://schemas.microsoft.com/office/powerpoint/2010/main" val="955301833"/>
-      </p:ext>
-    </p:extLst>
-  </p:cSld>
-  <p:clrMapOvr>
-    <a:masterClrMapping/>
-  </p:clrMapOvr>
-</p:sld>
-</file>
-
-<file path=ppt/slides/slide3.xml><?xml version="1.0" encoding="utf-8"?>
-<p:sld xmlns:a="http://schemas.openxmlformats.org/drawingml/2006/main" xmlns:r="http://schemas.openxmlformats.org/officeDocument/2006/relationships" xmlns:p="http://schemas.openxmlformats.org/presentationml/2006/main">
-  <p:cSld>
-    <p:spTree>
-      <p:nvGrpSpPr>
-        <p:cNvPr id="1" name=""/>
-        <p:cNvGrpSpPr/>
-        <p:nvPr/>
-      </p:nvGrpSpPr>
-      <p:grpSpPr>
-        <a:xfrm>
-          <a:off x="0" y="0"/>
-          <a:ext cx="0" cy="0"/>
-          <a:chOff x="0" y="0"/>
-          <a:chExt cx="0" cy="0"/>
-        </a:xfrm>
-      </p:grpSpPr>
-      <p:sp>
-        <p:nvSpPr>
-          <p:cNvPr id="2" name="Title 1">
-            <a:extLst>
-              <a:ext uri="{FF2B5EF4-FFF2-40B4-BE49-F238E27FC236}">
-                <a16:creationId xmlns:a16="http://schemas.microsoft.com/office/drawing/2014/main" id="{E99044C3-4FBA-D7F4-2BDE-B0D192853013}"/>
-              </a:ext>
-            </a:extLst>
-          </p:cNvPr>
-          <p:cNvSpPr>
-            <a:spLocks noGrp="1"/>
-          </p:cNvSpPr>
-          <p:nvPr>
-            <p:ph type="title"/>
-          </p:nvPr>
-        </p:nvSpPr>
-        <p:spPr/>
-        <p:txBody>
-          <a:bodyPr anchor="ctr">
-            <a:normAutofit/>
-          </a:bodyPr>
-          <a:lstStyle/>
-          <a:p>
-            <a:pPr algn="ctr"/>
-            <a:r>
-              <a:rPr lang="en-GB" dirty="0"/>
-              <a:t>The Present – The MVP</a:t>
-            </a:r>
-            <a:endParaRPr lang="en-IE" dirty="0"/>
-          </a:p>
-        </p:txBody>
-      </p:sp>
-      <p:pic>
-        <p:nvPicPr>
-          <p:cNvPr id="16" name="Content Placeholder 15" descr="A screenshot of a computer&#10;&#10;AI-generated content may be incorrect.">
-            <a:extLst>
-              <a:ext uri="{FF2B5EF4-FFF2-40B4-BE49-F238E27FC236}">
-                <a16:creationId xmlns:a16="http://schemas.microsoft.com/office/drawing/2014/main" id="{F827F380-AF29-368A-F44C-2DA1835CB19A}"/>
-              </a:ext>
-            </a:extLst>
-          </p:cNvPr>
-          <p:cNvPicPr>
-            <a:picLocks noGrp="1" noChangeAspect="1"/>
-          </p:cNvPicPr>
-          <p:nvPr>
-            <p:ph sz="half" idx="1"/>
-          </p:nvPr>
-        </p:nvPicPr>
-        <p:blipFill>
-          <a:blip r:embed="rId3"/>
-          <a:stretch>
-            <a:fillRect/>
-          </a:stretch>
-        </p:blipFill>
-        <p:spPr>
-          <a:xfrm>
-            <a:off x="259800" y="1615923"/>
-            <a:ext cx="5760000" cy="3132000"/>
-          </a:xfrm>
-          <a:prstGeom prst="rect">
-            <a:avLst/>
-          </a:prstGeom>
-        </p:spPr>
-      </p:pic>
-      <p:pic>
-        <p:nvPicPr>
-          <p:cNvPr id="18" name="Content Placeholder 17" descr="A video game screen with a race track&#10;&#10;AI-generated content may be incorrect.">
-            <a:extLst>
-              <a:ext uri="{FF2B5EF4-FFF2-40B4-BE49-F238E27FC236}">
-                <a16:creationId xmlns:a16="http://schemas.microsoft.com/office/drawing/2014/main" id="{457416EF-90BD-D1CF-D88A-32F4A9BCD16D}"/>
-              </a:ext>
-            </a:extLst>
-          </p:cNvPr>
-          <p:cNvPicPr>
-            <a:picLocks noGrp="1" noChangeAspect="1"/>
-          </p:cNvPicPr>
-          <p:nvPr>
-            <p:ph sz="half" idx="2"/>
-          </p:nvPr>
-        </p:nvPicPr>
-        <p:blipFill>
-          <a:blip r:embed="rId4"/>
-          <a:stretch>
-            <a:fillRect/>
-          </a:stretch>
-        </p:blipFill>
-        <p:spPr>
-          <a:xfrm>
-            <a:off x="6263644" y="3299115"/>
-            <a:ext cx="5760000" cy="3132000"/>
-          </a:xfrm>
-          <a:prstGeom prst="rect">
-            <a:avLst/>
-          </a:prstGeom>
-        </p:spPr>
-      </p:pic>
-      <p:pic>
-        <p:nvPicPr>
-          <p:cNvPr id="20" name="Picture 19">
-            <a:extLst>
-              <a:ext uri="{FF2B5EF4-FFF2-40B4-BE49-F238E27FC236}">
-                <a16:creationId xmlns:a16="http://schemas.microsoft.com/office/drawing/2014/main" id="{DD38AA2C-062E-CAE0-AFFB-58FD445BCB30}"/>
-              </a:ext>
-            </a:extLst>
-          </p:cNvPr>
-          <p:cNvPicPr>
-            <a:picLocks noChangeAspect="1"/>
-          </p:cNvPicPr>
-          <p:nvPr/>
-        </p:nvPicPr>
-        <p:blipFill>
-          <a:blip r:embed="rId5">
-            <a:extLst>
-              <a:ext uri="{28A0092B-C50C-407E-A947-70E740481C1C}">
-                <a14:useLocalDpi xmlns:a14="http://schemas.microsoft.com/office/drawing/2010/main" val="0"/>
-              </a:ext>
-            </a:extLst>
-          </a:blip>
-          <a:stretch>
-            <a:fillRect/>
-          </a:stretch>
-        </p:blipFill>
-        <p:spPr>
-          <a:xfrm>
-            <a:off x="8401085" y="2022302"/>
-            <a:ext cx="571429" cy="295238"/>
-          </a:xfrm>
-          <a:prstGeom prst="rect">
-            <a:avLst/>
-          </a:prstGeom>
-        </p:spPr>
-      </p:pic>
-      <p:sp>
-        <p:nvSpPr>
-          <p:cNvPr id="21" name="TextBox 20">
-            <a:extLst>
-              <a:ext uri="{FF2B5EF4-FFF2-40B4-BE49-F238E27FC236}">
-                <a16:creationId xmlns:a16="http://schemas.microsoft.com/office/drawing/2014/main" id="{B85C7338-D306-DD02-1C46-3EE4E620158D}"/>
-              </a:ext>
-            </a:extLst>
-          </p:cNvPr>
-          <p:cNvSpPr txBox="1"/>
-          <p:nvPr/>
-        </p:nvSpPr>
-        <p:spPr>
-          <a:xfrm>
-            <a:off x="8029184" y="1615923"/>
-            <a:ext cx="1315232" cy="369332"/>
-          </a:xfrm>
-          <a:prstGeom prst="rect">
-            <a:avLst/>
-          </a:prstGeom>
-          <a:noFill/>
-        </p:spPr>
-        <p:txBody>
-          <a:bodyPr wrap="none" rtlCol="0">
-            <a:spAutoFit/>
-          </a:bodyPr>
-          <a:lstStyle/>
-          <a:p>
-            <a:pPr algn="ctr"/>
-            <a:r>
-              <a:rPr lang="en-GB" dirty="0">
-                <a:solidFill>
-                  <a:schemeClr val="accent2"/>
-                </a:solidFill>
-              </a:rPr>
-              <a:t>Base Sprite</a:t>
-            </a:r>
-            <a:endParaRPr lang="en-IE" dirty="0">
-              <a:solidFill>
-                <a:schemeClr val="accent2"/>
-              </a:solidFill>
-            </a:endParaRPr>
-          </a:p>
-        </p:txBody>
-      </p:sp>
-      <p:sp>
-        <p:nvSpPr>
-          <p:cNvPr id="22" name="TextBox 21">
-            <a:extLst>
-              <a:ext uri="{FF2B5EF4-FFF2-40B4-BE49-F238E27FC236}">
-                <a16:creationId xmlns:a16="http://schemas.microsoft.com/office/drawing/2014/main" id="{C99930C0-6CC5-FB2F-1FE9-6ADAF01A0A2D}"/>
-              </a:ext>
-            </a:extLst>
-          </p:cNvPr>
-          <p:cNvSpPr txBox="1"/>
-          <p:nvPr/>
-        </p:nvSpPr>
-        <p:spPr>
-          <a:xfrm>
-            <a:off x="2500843" y="1355435"/>
-            <a:ext cx="1277914" cy="369332"/>
-          </a:xfrm>
-          <a:prstGeom prst="rect">
-            <a:avLst/>
-          </a:prstGeom>
-          <a:noFill/>
-        </p:spPr>
-        <p:txBody>
-          <a:bodyPr wrap="none" rtlCol="0">
-            <a:spAutoFit/>
-          </a:bodyPr>
-          <a:lstStyle/>
-          <a:p>
-            <a:pPr algn="ctr"/>
-            <a:r>
-              <a:rPr lang="en-GB" dirty="0">
-                <a:solidFill>
-                  <a:schemeClr val="accent2"/>
-                </a:solidFill>
-              </a:rPr>
-              <a:t>Main Menu</a:t>
-            </a:r>
-            <a:endParaRPr lang="en-IE" dirty="0">
-              <a:solidFill>
-                <a:schemeClr val="accent2"/>
-              </a:solidFill>
-            </a:endParaRPr>
-          </a:p>
-        </p:txBody>
-      </p:sp>
-      <p:pic>
-        <p:nvPicPr>
-          <p:cNvPr id="24" name="Picture 23" descr="A video game screen with a race car&#10;&#10;AI-generated content may be incorrect.">
-            <a:extLst>
-              <a:ext uri="{FF2B5EF4-FFF2-40B4-BE49-F238E27FC236}">
-                <a16:creationId xmlns:a16="http://schemas.microsoft.com/office/drawing/2014/main" id="{9DF81096-B96F-C6DA-A334-4F3A3E47A358}"/>
-              </a:ext>
-            </a:extLst>
-          </p:cNvPr>
-          <p:cNvPicPr>
-            <a:picLocks noChangeAspect="1"/>
-          </p:cNvPicPr>
-          <p:nvPr/>
-        </p:nvPicPr>
-        <p:blipFill>
-          <a:blip r:embed="rId6"/>
-          <a:stretch>
-            <a:fillRect/>
-          </a:stretch>
-        </p:blipFill>
-        <p:spPr>
-          <a:xfrm>
-            <a:off x="259802" y="4838500"/>
-            <a:ext cx="3467650" cy="1552589"/>
-          </a:xfrm>
-          <a:prstGeom prst="rect">
-            <a:avLst/>
-          </a:prstGeom>
-        </p:spPr>
-      </p:pic>
-      <p:sp>
-        <p:nvSpPr>
-          <p:cNvPr id="25" name="TextBox 24">
-            <a:extLst>
-              <a:ext uri="{FF2B5EF4-FFF2-40B4-BE49-F238E27FC236}">
-                <a16:creationId xmlns:a16="http://schemas.microsoft.com/office/drawing/2014/main" id="{592D3A4D-8B49-3A18-9A7E-2E9618945D6A}"/>
-              </a:ext>
-            </a:extLst>
-          </p:cNvPr>
-          <p:cNvSpPr txBox="1"/>
-          <p:nvPr/>
-        </p:nvSpPr>
-        <p:spPr>
-          <a:xfrm>
-            <a:off x="3727452" y="6112335"/>
-            <a:ext cx="1529329" cy="369332"/>
-          </a:xfrm>
-          <a:prstGeom prst="rect">
-            <a:avLst/>
-          </a:prstGeom>
-          <a:noFill/>
-        </p:spPr>
-        <p:txBody>
-          <a:bodyPr wrap="none" rtlCol="0">
-            <a:spAutoFit/>
-          </a:bodyPr>
-          <a:lstStyle/>
-          <a:p>
-            <a:pPr algn="ctr"/>
-            <a:r>
-              <a:rPr lang="en-GB" dirty="0">
-                <a:solidFill>
-                  <a:schemeClr val="accent2"/>
-                </a:solidFill>
-              </a:rPr>
-              <a:t>Cars on Track</a:t>
-            </a:r>
-            <a:endParaRPr lang="en-IE" dirty="0">
-              <a:solidFill>
-                <a:schemeClr val="accent2"/>
-              </a:solidFill>
-            </a:endParaRPr>
-          </a:p>
-        </p:txBody>
-      </p:sp>
-      <p:sp>
-        <p:nvSpPr>
-          <p:cNvPr id="26" name="TextBox 25">
-            <a:extLst>
-              <a:ext uri="{FF2B5EF4-FFF2-40B4-BE49-F238E27FC236}">
-                <a16:creationId xmlns:a16="http://schemas.microsoft.com/office/drawing/2014/main" id="{183A71B5-65C6-1C17-DC48-A15BED883807}"/>
-              </a:ext>
-            </a:extLst>
-          </p:cNvPr>
-          <p:cNvSpPr txBox="1"/>
-          <p:nvPr/>
-        </p:nvSpPr>
-        <p:spPr>
-          <a:xfrm>
-            <a:off x="8179373" y="2929783"/>
-            <a:ext cx="1928541" cy="369332"/>
-          </a:xfrm>
-          <a:prstGeom prst="rect">
-            <a:avLst/>
-          </a:prstGeom>
-          <a:noFill/>
-        </p:spPr>
-        <p:txBody>
-          <a:bodyPr wrap="none" rtlCol="0">
-            <a:spAutoFit/>
-          </a:bodyPr>
-          <a:lstStyle/>
-          <a:p>
-            <a:pPr algn="ctr"/>
-            <a:r>
-              <a:rPr lang="en-GB" dirty="0">
-                <a:solidFill>
-                  <a:schemeClr val="accent2"/>
-                </a:solidFill>
-              </a:rPr>
-              <a:t>Track &amp; Telemetry</a:t>
-            </a:r>
-            <a:endParaRPr lang="en-IE" dirty="0">
-              <a:solidFill>
-                <a:schemeClr val="accent2"/>
-              </a:solidFill>
-            </a:endParaRPr>
-          </a:p>
-        </p:txBody>
-      </p:sp>
-    </p:spTree>
-    <p:extLst>
-      <p:ext uri="{BB962C8B-B14F-4D97-AF65-F5344CB8AC3E}">
-        <p14:creationId xmlns:p14="http://schemas.microsoft.com/office/powerpoint/2010/main" val="3990719499"/>
-      </p:ext>
-    </p:extLst>
-  </p:cSld>
-  <p:clrMapOvr>
-    <a:masterClrMapping/>
-  </p:clrMapOvr>
-</p:sld>
-</file>
-
-<file path=ppt/slides/slide4.xml><?xml version="1.0" encoding="utf-8"?>
-<p:sld xmlns:a="http://schemas.openxmlformats.org/drawingml/2006/main" xmlns:r="http://schemas.openxmlformats.org/officeDocument/2006/relationships" xmlns:p="http://schemas.openxmlformats.org/presentationml/2006/main">
-  <p:cSld>
-    <p:spTree>
-      <p:nvGrpSpPr>
-        <p:cNvPr id="1" name=""/>
-        <p:cNvGrpSpPr/>
-        <p:nvPr/>
-      </p:nvGrpSpPr>
-      <p:grpSpPr>
-        <a:xfrm>
-          <a:off x="0" y="0"/>
-          <a:ext cx="0" cy="0"/>
-          <a:chOff x="0" y="0"/>
-          <a:chExt cx="0" cy="0"/>
-        </a:xfrm>
-      </p:grpSpPr>
-      <p:sp>
-        <p:nvSpPr>
-          <p:cNvPr id="2" name="Title 1">
-            <a:extLst>
-              <a:ext uri="{FF2B5EF4-FFF2-40B4-BE49-F238E27FC236}">
-                <a16:creationId xmlns:a16="http://schemas.microsoft.com/office/drawing/2014/main" id="{B1831D92-F9C3-958F-BCA4-D981F6C17845}"/>
-              </a:ext>
-            </a:extLst>
-          </p:cNvPr>
-          <p:cNvSpPr>
-            <a:spLocks noGrp="1"/>
-          </p:cNvSpPr>
-          <p:nvPr>
-            <p:ph type="title"/>
-          </p:nvPr>
-        </p:nvSpPr>
-        <p:spPr>
-          <a:xfrm>
-            <a:off x="839788" y="457200"/>
-            <a:ext cx="10512424" cy="1600200"/>
-          </a:xfrm>
-        </p:spPr>
-        <p:txBody>
-          <a:bodyPr anchor="ctr"/>
-          <a:lstStyle/>
-          <a:p>
-            <a:r>
-              <a:rPr lang="en-GB" dirty="0"/>
-              <a:t>The Future – What Will Come?</a:t>
-            </a:r>
-            <a:endParaRPr lang="en-IE" dirty="0"/>
-          </a:p>
-        </p:txBody>
-      </p:sp>
-      <p:pic>
-        <p:nvPicPr>
-          <p:cNvPr id="7" name="Content Placeholder 6" descr="A screenshot of a computer&#10;&#10;AI-generated content may be incorrect.">
-            <a:extLst>
-              <a:ext uri="{FF2B5EF4-FFF2-40B4-BE49-F238E27FC236}">
-                <a16:creationId xmlns:a16="http://schemas.microsoft.com/office/drawing/2014/main" id="{5E219A61-0BE0-71A5-FACB-DB825692BDC2}"/>
-              </a:ext>
-            </a:extLst>
-          </p:cNvPr>
-          <p:cNvPicPr>
-            <a:picLocks noGrp="1" noChangeAspect="1"/>
-          </p:cNvPicPr>
-          <p:nvPr>
-            <p:ph idx="1"/>
-          </p:nvPr>
-        </p:nvPicPr>
-        <p:blipFill>
-          <a:blip r:embed="rId3">
-            <a:extLst>
-              <a:ext uri="{28A0092B-C50C-407E-A947-70E740481C1C}">
-                <a14:useLocalDpi xmlns:a14="http://schemas.microsoft.com/office/drawing/2010/main" val="0"/>
-              </a:ext>
-            </a:extLst>
-          </a:blip>
-          <a:stretch>
-            <a:fillRect/>
-          </a:stretch>
-        </p:blipFill>
-        <p:spPr>
-          <a:xfrm>
-            <a:off x="5180012" y="2002351"/>
-            <a:ext cx="6172200" cy="3921686"/>
-          </a:xfrm>
-        </p:spPr>
-      </p:pic>
-      <p:graphicFrame>
-        <p:nvGraphicFramePr>
-          <p:cNvPr id="12" name="Diagram 11">
-            <a:extLst>
-              <a:ext uri="{FF2B5EF4-FFF2-40B4-BE49-F238E27FC236}">
-                <a16:creationId xmlns:a16="http://schemas.microsoft.com/office/drawing/2014/main" id="{86349885-F96F-4DC6-D480-4B6F2BCA51F1}"/>
-              </a:ext>
-            </a:extLst>
-          </p:cNvPr>
-          <p:cNvGraphicFramePr/>
-          <p:nvPr>
-            <p:extLst>
-              <p:ext uri="{D42A27DB-BD31-4B8C-83A1-F6EECF244321}">
-                <p14:modId xmlns:p14="http://schemas.microsoft.com/office/powerpoint/2010/main" val="3309744533"/>
-              </p:ext>
-            </p:extLst>
-          </p:nvPr>
-        </p:nvGraphicFramePr>
-        <p:xfrm>
-          <a:off x="839788" y="2057400"/>
-          <a:ext cx="3932237" cy="3811588"/>
-        </p:xfrm>
-        <a:graphic>
-          <a:graphicData uri="http://schemas.openxmlformats.org/drawingml/2006/diagram">
-            <dgm:relIds xmlns:dgm="http://schemas.openxmlformats.org/drawingml/2006/diagram" xmlns:r="http://schemas.openxmlformats.org/officeDocument/2006/relationships" r:dm="rId4" r:lo="rId5" r:qs="rId6" r:cs="rId7"/>
-          </a:graphicData>
-        </a:graphic>
-      </p:graphicFrame>
-    </p:spTree>
-    <p:extLst>
-      <p:ext uri="{BB962C8B-B14F-4D97-AF65-F5344CB8AC3E}">
-        <p14:creationId xmlns:p14="http://schemas.microsoft.com/office/powerpoint/2010/main" val="142314760"/>
-      </p:ext>
-    </p:extLst>
-  </p:cSld>
-  <p:clrMapOvr>
-    <a:masterClrMapping/>
-  </p:clrMapOvr>
-</p:sld>
-</file>
-
-<file path=ppt/slides/slide5.xml><?xml version="1.0" encoding="utf-8"?>
-<p:sld xmlns:a="http://schemas.openxmlformats.org/drawingml/2006/main" xmlns:r="http://schemas.openxmlformats.org/officeDocument/2006/relationships" xmlns:p="http://schemas.openxmlformats.org/presentationml/2006/main">
-  <p:cSld>
-    <p:spTree>
-      <p:nvGrpSpPr>
-        <p:cNvPr id="1" name=""/>
-        <p:cNvGrpSpPr/>
-        <p:nvPr/>
-      </p:nvGrpSpPr>
-      <p:grpSpPr>
-        <a:xfrm>
-          <a:off x="0" y="0"/>
-          <a:ext cx="0" cy="0"/>
-          <a:chOff x="0" y="0"/>
-          <a:chExt cx="0" cy="0"/>
-        </a:xfrm>
-      </p:grpSpPr>
-      <p:sp>
-        <p:nvSpPr>
-          <p:cNvPr id="5" name="Title 4">
-            <a:extLst>
-              <a:ext uri="{FF2B5EF4-FFF2-40B4-BE49-F238E27FC236}">
-                <a16:creationId xmlns:a16="http://schemas.microsoft.com/office/drawing/2014/main" id="{C5171B95-8642-A756-BE86-6ADC35A847DA}"/>
-              </a:ext>
-            </a:extLst>
-          </p:cNvPr>
-          <p:cNvSpPr>
-            <a:spLocks noGrp="1"/>
-          </p:cNvSpPr>
-          <p:nvPr>
-            <p:ph type="title"/>
-          </p:nvPr>
-        </p:nvSpPr>
-        <p:spPr>
-          <a:xfrm>
-            <a:off x="838200" y="2766218"/>
-            <a:ext cx="10515600" cy="1325563"/>
-          </a:xfrm>
-        </p:spPr>
-        <p:txBody>
-          <a:bodyPr>
-            <a:noAutofit/>
-          </a:bodyPr>
-          <a:lstStyle/>
-          <a:p>
-            <a:r>
-              <a:rPr lang="en-GB" sz="9600" dirty="0"/>
-              <a:t>Questions?</a:t>
-            </a:r>
-            <a:endParaRPr lang="en-IE" sz="9600" dirty="0"/>
-          </a:p>
-        </p:txBody>
-      </p:sp>
-    </p:spTree>
-    <p:extLst>
-      <p:ext uri="{BB962C8B-B14F-4D97-AF65-F5344CB8AC3E}">
-        <p14:creationId xmlns:p14="http://schemas.microsoft.com/office/powerpoint/2010/main" val="2380583073"/>
       </p:ext>
     </p:extLst>
   </p:cSld>

--- a/docs/Final Submission/Final Presentation.pptx
+++ b/docs/Final Submission/Final Presentation.pptx
@@ -5,10 +5,14 @@
     <p:sldMasterId id="2147483972" r:id="rId1"/>
   </p:sldMasterIdLst>
   <p:notesMasterIdLst>
-    <p:notesMasterId r:id="rId3"/>
+    <p:notesMasterId r:id="rId7"/>
   </p:notesMasterIdLst>
   <p:sldIdLst>
     <p:sldId id="256" r:id="rId2"/>
+    <p:sldId id="257" r:id="rId3"/>
+    <p:sldId id="259" r:id="rId4"/>
+    <p:sldId id="260" r:id="rId5"/>
+    <p:sldId id="261" r:id="rId6"/>
   </p:sldIdLst>
   <p:sldSz cx="12192000" cy="6858000"/>
   <p:notesSz cx="6858000" cy="9144000"/>
@@ -197,7 +201,7 @@
           <a:p>
             <a:fld id="{A83EA0DD-752A-4738-B3DB-B4E0E0FEBB26}" type="datetimeFigureOut">
               <a:rPr lang="en-IE" smtClean="0"/>
-              <a:t>01/08/2026</a:t>
+              <a:t>02/08/2026</a:t>
             </a:fld>
             <a:endParaRPr lang="en-IE"/>
           </a:p>
@@ -580,6 +584,111 @@
 </p:notes>
 </file>
 
+<file path=ppt/notesSlides/notesSlide2.xml><?xml version="1.0" encoding="utf-8"?>
+<p:notes xmlns:a="http://schemas.openxmlformats.org/drawingml/2006/main" xmlns:r="http://schemas.openxmlformats.org/officeDocument/2006/relationships" xmlns:p="http://schemas.openxmlformats.org/presentationml/2006/main">
+  <p:cSld>
+    <p:spTree>
+      <p:nvGrpSpPr>
+        <p:cNvPr id="1" name=""/>
+        <p:cNvGrpSpPr/>
+        <p:nvPr/>
+      </p:nvGrpSpPr>
+      <p:grpSpPr>
+        <a:xfrm>
+          <a:off x="0" y="0"/>
+          <a:ext cx="0" cy="0"/>
+          <a:chOff x="0" y="0"/>
+          <a:chExt cx="0" cy="0"/>
+        </a:xfrm>
+      </p:grpSpPr>
+      <p:sp>
+        <p:nvSpPr>
+          <p:cNvPr id="2" name="Slide Image Placeholder 1"/>
+          <p:cNvSpPr>
+            <a:spLocks noGrp="1" noRot="1" noChangeAspect="1"/>
+          </p:cNvSpPr>
+          <p:nvPr>
+            <p:ph type="sldImg"/>
+          </p:nvPr>
+        </p:nvSpPr>
+        <p:spPr/>
+      </p:sp>
+      <p:sp>
+        <p:nvSpPr>
+          <p:cNvPr id="3" name="Notes Placeholder 2"/>
+          <p:cNvSpPr>
+            <a:spLocks noGrp="1"/>
+          </p:cNvSpPr>
+          <p:nvPr>
+            <p:ph type="body" idx="1"/>
+          </p:nvPr>
+        </p:nvSpPr>
+        <p:spPr/>
+        <p:txBody>
+          <a:bodyPr/>
+          <a:lstStyle/>
+          <a:p>
+            <a:r>
+              <a:rPr lang="en-IE" dirty="0"/>
+              <a:t>Momentum is a motorsport simulation application where the user observes a race rather than directly controlling a vehicle.</a:t>
+            </a:r>
+          </a:p>
+          <a:p>
+            <a:r>
+              <a:rPr lang="en-IE" dirty="0"/>
+              <a:t>The system models drivers as autonomous agents with different characteristics and simulates race progression through a discrete update system.</a:t>
+            </a:r>
+          </a:p>
+          <a:p>
+            <a:r>
+              <a:rPr lang="en-IE" dirty="0"/>
+              <a:t>Existing racing games generally focus on player interaction and physics-based driving. Momentum instead focuses on the underlying race simulation, including driver behaviour, race progression and result generation.</a:t>
+            </a:r>
+          </a:p>
+          <a:p>
+            <a:r>
+              <a:rPr lang="en-IE" dirty="0"/>
+              <a:t>The system also uses a data-driven approach, where track information is stored externally and converted into a visual circuit at runtime.</a:t>
+            </a:r>
+          </a:p>
+        </p:txBody>
+      </p:sp>
+      <p:sp>
+        <p:nvSpPr>
+          <p:cNvPr id="4" name="Slide Number Placeholder 3"/>
+          <p:cNvSpPr>
+            <a:spLocks noGrp="1"/>
+          </p:cNvSpPr>
+          <p:nvPr>
+            <p:ph type="sldNum" sz="quarter" idx="5"/>
+          </p:nvPr>
+        </p:nvSpPr>
+        <p:spPr/>
+        <p:txBody>
+          <a:bodyPr/>
+          <a:lstStyle/>
+          <a:p>
+            <a:fld id="{C439C384-FEF2-4015-9B8A-9427217FDE2D}" type="slidenum">
+              <a:rPr lang="en-IE" smtClean="0"/>
+              <a:t>2</a:t>
+            </a:fld>
+            <a:endParaRPr lang="en-IE"/>
+          </a:p>
+        </p:txBody>
+      </p:sp>
+    </p:spTree>
+    <p:extLst>
+      <p:ext uri="{BB962C8B-B14F-4D97-AF65-F5344CB8AC3E}">
+        <p14:creationId xmlns:p14="http://schemas.microsoft.com/office/powerpoint/2010/main" val="3834676577"/>
+      </p:ext>
+    </p:extLst>
+  </p:cSld>
+  <p:clrMapOvr>
+    <a:masterClrMapping/>
+  </p:clrMapOvr>
+</p:notes>
+</file>
+
 <file path=ppt/slideLayouts/slideLayout1.xml><?xml version="1.0" encoding="utf-8"?>
 <p:sldLayout xmlns:a="http://schemas.openxmlformats.org/drawingml/2006/main" xmlns:r="http://schemas.openxmlformats.org/officeDocument/2006/relationships" xmlns:p="http://schemas.openxmlformats.org/presentationml/2006/main" type="title" preserve="1">
   <p:cSld name="Title Slide">
@@ -733,7 +842,7 @@
           <a:p>
             <a:fld id="{DCFCBE93-8E4F-43D5-94BB-3D9BCCE02D4C}" type="datetime1">
               <a:rPr lang="en-US" smtClean="0"/>
-              <a:t>8/1/2026</a:t>
+              <a:t>8/2/2026</a:t>
             </a:fld>
             <a:endParaRPr lang="en-US"/>
           </a:p>
@@ -941,7 +1050,7 @@
           <a:p>
             <a:fld id="{A6D2D44A-2BD4-4D89-BA19-78E185FF2901}" type="datetime1">
               <a:rPr lang="en-US" smtClean="0"/>
-              <a:t>8/1/2026</a:t>
+              <a:t>8/2/2026</a:t>
             </a:fld>
             <a:endParaRPr lang="en-US"/>
           </a:p>
@@ -1159,7 +1268,7 @@
           <a:p>
             <a:fld id="{48F5A2EC-C415-40FD-B4CA-288F246EAD97}" type="datetime1">
               <a:rPr lang="en-US" smtClean="0"/>
-              <a:t>8/1/2026</a:t>
+              <a:t>8/2/2026</a:t>
             </a:fld>
             <a:endParaRPr lang="en-US"/>
           </a:p>
@@ -1367,7 +1476,7 @@
           <a:p>
             <a:fld id="{C889F087-D06C-4D03-9B30-1FD995930E7C}" type="datetime1">
               <a:rPr lang="en-US" smtClean="0"/>
-              <a:t>8/1/2026</a:t>
+              <a:t>8/2/2026</a:t>
             </a:fld>
             <a:endParaRPr lang="en-US"/>
           </a:p>
@@ -1651,7 +1760,7 @@
           <a:p>
             <a:fld id="{716390DD-C8B9-4FA1-B19A-AD5E6313EA9F}" type="datetime1">
               <a:rPr lang="en-US" smtClean="0"/>
-              <a:t>8/1/2026</a:t>
+              <a:t>8/2/2026</a:t>
             </a:fld>
             <a:endParaRPr lang="en-US"/>
           </a:p>
@@ -1927,7 +2036,7 @@
           <a:p>
             <a:fld id="{D3528E2F-7DCC-40BC-8C3D-60ADC4949A7D}" type="datetime1">
               <a:rPr lang="en-US" smtClean="0"/>
-              <a:t>8/1/2026</a:t>
+              <a:t>8/2/2026</a:t>
             </a:fld>
             <a:endParaRPr lang="en-US"/>
           </a:p>
@@ -2350,7 +2459,7 @@
           <a:p>
             <a:fld id="{0E42FD16-0B33-49D4-994E-5D59F14BB469}" type="datetime1">
               <a:rPr lang="en-US" smtClean="0"/>
-              <a:t>8/1/2026</a:t>
+              <a:t>8/2/2026</a:t>
             </a:fld>
             <a:endParaRPr lang="en-US"/>
           </a:p>
@@ -2500,7 +2609,7 @@
           <a:p>
             <a:fld id="{04048AD4-3D5D-45D6-84E6-5EEEE3F193D3}" type="datetime1">
               <a:rPr lang="en-US" smtClean="0"/>
-              <a:t>8/1/2026</a:t>
+              <a:t>8/2/2026</a:t>
             </a:fld>
             <a:endParaRPr lang="en-US"/>
           </a:p>
@@ -2621,7 +2730,7 @@
           <a:p>
             <a:fld id="{7B1D4F7A-50EF-4184-95D2-C94723F359F9}" type="datetime1">
               <a:rPr lang="en-US" smtClean="0"/>
-              <a:t>8/1/2026</a:t>
+              <a:t>8/2/2026</a:t>
             </a:fld>
             <a:endParaRPr lang="en-US"/>
           </a:p>
@@ -2942,7 +3051,7 @@
           <a:p>
             <a:fld id="{53A911ED-9804-43CB-9F75-C96652EB10E9}" type="datetime1">
               <a:rPr lang="en-US" smtClean="0"/>
-              <a:t>8/1/2026</a:t>
+              <a:t>8/2/2026</a:t>
             </a:fld>
             <a:endParaRPr lang="en-US"/>
           </a:p>
@@ -3239,7 +3348,7 @@
           <a:p>
             <a:fld id="{68BDE276-C07D-4BC6-BADA-0096F65127DD}" type="datetime1">
               <a:rPr lang="en-US" smtClean="0"/>
-              <a:t>8/1/2026</a:t>
+              <a:t>8/2/2026</a:t>
             </a:fld>
             <a:endParaRPr lang="en-US"/>
           </a:p>
@@ -3539,7 +3648,7 @@
           <a:p>
             <a:fld id="{35506811-9558-4283-B7CE-ABA783DD6862}" type="datetime1">
               <a:rPr lang="en-US" smtClean="0"/>
-              <a:t>8/1/2026</a:t>
+              <a:t>8/2/2026</a:t>
             </a:fld>
             <a:endParaRPr lang="en-US"/>
           </a:p>
@@ -3881,7 +3990,7 @@
         <a:buChar char="•"/>
         <a:defRPr sz="2400" kern="1200">
           <a:solidFill>
-            <a:schemeClr val="accent2"/>
+            <a:schemeClr val="bg2"/>
           </a:solidFill>
           <a:latin typeface="Segoe UI Light" panose="020B0502040204020203" pitchFamily="34" charset="0"/>
           <a:ea typeface="+mn-ea"/>
@@ -3899,7 +4008,7 @@
         <a:buChar char="•"/>
         <a:defRPr sz="2000" kern="1200">
           <a:solidFill>
-            <a:schemeClr val="accent2"/>
+            <a:schemeClr val="bg2"/>
           </a:solidFill>
           <a:latin typeface="Segoe UI Light" panose="020B0502040204020203" pitchFamily="34" charset="0"/>
           <a:ea typeface="+mn-ea"/>
@@ -3917,7 +4026,7 @@
         <a:buChar char="•"/>
         <a:defRPr sz="1800" kern="1200">
           <a:solidFill>
-            <a:schemeClr val="accent2"/>
+            <a:schemeClr val="bg2"/>
           </a:solidFill>
           <a:latin typeface="Segoe UI Light" panose="020B0502040204020203" pitchFamily="34" charset="0"/>
           <a:ea typeface="+mn-ea"/>
@@ -3935,7 +4044,7 @@
         <a:buChar char="•"/>
         <a:defRPr sz="1800" kern="1200">
           <a:solidFill>
-            <a:schemeClr val="accent2"/>
+            <a:schemeClr val="bg2"/>
           </a:solidFill>
           <a:latin typeface="Segoe UI Light" panose="020B0502040204020203" pitchFamily="34" charset="0"/>
           <a:ea typeface="+mn-ea"/>
@@ -4189,10 +4298,485 @@
           </a:p>
         </p:txBody>
       </p:sp>
+      <p:sp>
+        <p:nvSpPr>
+          <p:cNvPr id="4" name="TextBox 3">
+            <a:extLst>
+              <a:ext uri="{FF2B5EF4-FFF2-40B4-BE49-F238E27FC236}">
+                <a16:creationId xmlns:a16="http://schemas.microsoft.com/office/drawing/2014/main" id="{5883C7EE-84B8-F629-1F7C-D067283E429D}"/>
+              </a:ext>
+            </a:extLst>
+          </p:cNvPr>
+          <p:cNvSpPr txBox="1"/>
+          <p:nvPr/>
+        </p:nvSpPr>
+        <p:spPr>
+          <a:xfrm>
+            <a:off x="2330321" y="6180992"/>
+            <a:ext cx="7531357" cy="369332"/>
+          </a:xfrm>
+          <a:prstGeom prst="rect">
+            <a:avLst/>
+          </a:prstGeom>
+          <a:noFill/>
+        </p:spPr>
+        <p:txBody>
+          <a:bodyPr wrap="none" rtlCol="0">
+            <a:spAutoFit/>
+          </a:bodyPr>
+          <a:lstStyle/>
+          <a:p>
+            <a:pPr algn="ctr"/>
+            <a:r>
+              <a:rPr lang="en-GB" dirty="0">
+                <a:solidFill>
+                  <a:srgbClr val="A93044"/>
+                </a:solidFill>
+              </a:rPr>
+              <a:t>Eoin Fitzsimons X23151374 BSc (Hons) Computing Software Development</a:t>
+            </a:r>
+            <a:endParaRPr lang="en-IE" dirty="0">
+              <a:solidFill>
+                <a:srgbClr val="A93044"/>
+              </a:solidFill>
+            </a:endParaRPr>
+          </a:p>
+        </p:txBody>
+      </p:sp>
     </p:spTree>
     <p:extLst>
       <p:ext uri="{BB962C8B-B14F-4D97-AF65-F5344CB8AC3E}">
         <p14:creationId xmlns:p14="http://schemas.microsoft.com/office/powerpoint/2010/main" val="26541964"/>
+      </p:ext>
+    </p:extLst>
+  </p:cSld>
+  <p:clrMapOvr>
+    <a:masterClrMapping/>
+  </p:clrMapOvr>
+</p:sld>
+</file>
+
+<file path=ppt/slides/slide2.xml><?xml version="1.0" encoding="utf-8"?>
+<p:sld xmlns:a="http://schemas.openxmlformats.org/drawingml/2006/main" xmlns:r="http://schemas.openxmlformats.org/officeDocument/2006/relationships" xmlns:p="http://schemas.openxmlformats.org/presentationml/2006/main">
+  <p:cSld>
+    <p:spTree>
+      <p:nvGrpSpPr>
+        <p:cNvPr id="1" name=""/>
+        <p:cNvGrpSpPr/>
+        <p:nvPr/>
+      </p:nvGrpSpPr>
+      <p:grpSpPr>
+        <a:xfrm>
+          <a:off x="0" y="0"/>
+          <a:ext cx="0" cy="0"/>
+          <a:chOff x="0" y="0"/>
+          <a:chExt cx="0" cy="0"/>
+        </a:xfrm>
+      </p:grpSpPr>
+      <p:sp>
+        <p:nvSpPr>
+          <p:cNvPr id="2" name="Title 1">
+            <a:extLst>
+              <a:ext uri="{FF2B5EF4-FFF2-40B4-BE49-F238E27FC236}">
+                <a16:creationId xmlns:a16="http://schemas.microsoft.com/office/drawing/2014/main" id="{A4B38CFF-8DFF-7F67-4F22-64860B69D10B}"/>
+              </a:ext>
+            </a:extLst>
+          </p:cNvPr>
+          <p:cNvSpPr>
+            <a:spLocks noGrp="1"/>
+          </p:cNvSpPr>
+          <p:nvPr>
+            <p:ph type="title"/>
+          </p:nvPr>
+        </p:nvSpPr>
+        <p:spPr/>
+        <p:txBody>
+          <a:bodyPr/>
+          <a:lstStyle/>
+          <a:p>
+            <a:r>
+              <a:rPr lang="en-GB" dirty="0"/>
+              <a:t>Project Overview</a:t>
+            </a:r>
+            <a:endParaRPr lang="en-IE" dirty="0"/>
+          </a:p>
+        </p:txBody>
+      </p:sp>
+      <p:sp>
+        <p:nvSpPr>
+          <p:cNvPr id="3" name="Content Placeholder 2">
+            <a:extLst>
+              <a:ext uri="{FF2B5EF4-FFF2-40B4-BE49-F238E27FC236}">
+                <a16:creationId xmlns:a16="http://schemas.microsoft.com/office/drawing/2014/main" id="{F94CF115-B3AB-F5DF-CD96-0D864B207DB4}"/>
+              </a:ext>
+            </a:extLst>
+          </p:cNvPr>
+          <p:cNvSpPr>
+            <a:spLocks noGrp="1"/>
+          </p:cNvSpPr>
+          <p:nvPr>
+            <p:ph idx="1"/>
+          </p:nvPr>
+        </p:nvSpPr>
+        <p:spPr/>
+        <p:txBody>
+          <a:bodyPr>
+            <a:normAutofit fontScale="85000" lnSpcReduction="20000"/>
+          </a:bodyPr>
+          <a:lstStyle/>
+          <a:p>
+            <a:r>
+              <a:rPr lang="en-IE" b="1" dirty="0"/>
+              <a:t>What is Momentum?</a:t>
+            </a:r>
+            <a:endParaRPr lang="en-IE" dirty="0"/>
+          </a:p>
+          <a:p>
+            <a:pPr lvl="1"/>
+            <a:r>
+              <a:rPr lang="en-IE" dirty="0"/>
+              <a:t>A 2D motorsport race simulation application </a:t>
+            </a:r>
+          </a:p>
+          <a:p>
+            <a:pPr lvl="1"/>
+            <a:r>
+              <a:rPr lang="en-IE" dirty="0"/>
+              <a:t>Models races using autonomous driver agents </a:t>
+            </a:r>
+          </a:p>
+          <a:p>
+            <a:pPr lvl="1"/>
+            <a:r>
+              <a:rPr lang="en-IE" dirty="0"/>
+              <a:t>Users observe race progression and results </a:t>
+            </a:r>
+          </a:p>
+          <a:p>
+            <a:r>
+              <a:rPr lang="en-IE" b="1" dirty="0"/>
+              <a:t>Target Users</a:t>
+            </a:r>
+            <a:endParaRPr lang="en-IE" dirty="0"/>
+          </a:p>
+          <a:p>
+            <a:pPr lvl="1"/>
+            <a:r>
+              <a:rPr lang="en-IE" dirty="0"/>
+              <a:t>Motorsport enthusiasts </a:t>
+            </a:r>
+          </a:p>
+          <a:p>
+            <a:pPr lvl="1"/>
+            <a:r>
+              <a:rPr lang="en-IE" dirty="0"/>
+              <a:t>Users interested in simulation systems </a:t>
+            </a:r>
+          </a:p>
+          <a:p>
+            <a:r>
+              <a:rPr lang="en-IE" b="1" dirty="0"/>
+              <a:t>Problem Addressed</a:t>
+            </a:r>
+            <a:endParaRPr lang="en-IE" dirty="0"/>
+          </a:p>
+          <a:p>
+            <a:pPr lvl="1"/>
+            <a:r>
+              <a:rPr lang="en-IE" dirty="0"/>
+              <a:t>Explores how motorsport races can be modelled through software simulation </a:t>
+            </a:r>
+          </a:p>
+          <a:p>
+            <a:pPr lvl="1"/>
+            <a:r>
+              <a:rPr lang="en-IE" dirty="0"/>
+              <a:t>Provides an alternative to player-controlled racing applications </a:t>
+            </a:r>
+          </a:p>
+          <a:p>
+            <a:r>
+              <a:rPr lang="en-IE" b="1" dirty="0"/>
+              <a:t>Difference from Existing Applications</a:t>
+            </a:r>
+            <a:endParaRPr lang="en-IE" dirty="0"/>
+          </a:p>
+          <a:p>
+            <a:pPr lvl="1"/>
+            <a:r>
+              <a:rPr lang="en-IE" dirty="0"/>
+              <a:t>Focuses on race simulation rather than vehicle control </a:t>
+            </a:r>
+          </a:p>
+          <a:p>
+            <a:pPr lvl="1"/>
+            <a:r>
+              <a:rPr lang="en-IE" dirty="0"/>
+              <a:t>Uses a lightweight agent-based approach </a:t>
+            </a:r>
+          </a:p>
+          <a:p>
+            <a:pPr lvl="1"/>
+            <a:r>
+              <a:rPr lang="en-IE" dirty="0"/>
+              <a:t>Generates track layouts through data-driven configuration</a:t>
+            </a:r>
+          </a:p>
+        </p:txBody>
+      </p:sp>
+    </p:spTree>
+    <p:extLst>
+      <p:ext uri="{BB962C8B-B14F-4D97-AF65-F5344CB8AC3E}">
+        <p14:creationId xmlns:p14="http://schemas.microsoft.com/office/powerpoint/2010/main" val="1982207296"/>
+      </p:ext>
+    </p:extLst>
+  </p:cSld>
+  <p:clrMapOvr>
+    <a:masterClrMapping/>
+  </p:clrMapOvr>
+</p:sld>
+</file>
+
+<file path=ppt/slides/slide3.xml><?xml version="1.0" encoding="utf-8"?>
+<p:sld xmlns:a="http://schemas.openxmlformats.org/drawingml/2006/main" xmlns:r="http://schemas.openxmlformats.org/officeDocument/2006/relationships" xmlns:p="http://schemas.openxmlformats.org/presentationml/2006/main">
+  <p:cSld>
+    <p:spTree>
+      <p:nvGrpSpPr>
+        <p:cNvPr id="1" name=""/>
+        <p:cNvGrpSpPr/>
+        <p:nvPr/>
+      </p:nvGrpSpPr>
+      <p:grpSpPr>
+        <a:xfrm>
+          <a:off x="0" y="0"/>
+          <a:ext cx="0" cy="0"/>
+          <a:chOff x="0" y="0"/>
+          <a:chExt cx="0" cy="0"/>
+        </a:xfrm>
+      </p:grpSpPr>
+      <p:sp>
+        <p:nvSpPr>
+          <p:cNvPr id="2" name="Title 1">
+            <a:extLst>
+              <a:ext uri="{FF2B5EF4-FFF2-40B4-BE49-F238E27FC236}">
+                <a16:creationId xmlns:a16="http://schemas.microsoft.com/office/drawing/2014/main" id="{C1752299-4003-886D-E2B6-0209FD1C0C18}"/>
+              </a:ext>
+            </a:extLst>
+          </p:cNvPr>
+          <p:cNvSpPr>
+            <a:spLocks noGrp="1"/>
+          </p:cNvSpPr>
+          <p:nvPr>
+            <p:ph type="title"/>
+          </p:nvPr>
+        </p:nvSpPr>
+        <p:spPr/>
+        <p:txBody>
+          <a:bodyPr/>
+          <a:lstStyle/>
+          <a:p>
+            <a:r>
+              <a:rPr lang="en-IE" dirty="0"/>
+              <a:t>Technologies &amp; Architecture</a:t>
+            </a:r>
+          </a:p>
+        </p:txBody>
+      </p:sp>
+      <p:sp>
+        <p:nvSpPr>
+          <p:cNvPr id="3" name="Content Placeholder 2">
+            <a:extLst>
+              <a:ext uri="{FF2B5EF4-FFF2-40B4-BE49-F238E27FC236}">
+                <a16:creationId xmlns:a16="http://schemas.microsoft.com/office/drawing/2014/main" id="{3CE9665F-9842-C896-A051-ED4D14A3CFC7}"/>
+              </a:ext>
+            </a:extLst>
+          </p:cNvPr>
+          <p:cNvSpPr>
+            <a:spLocks noGrp="1"/>
+          </p:cNvSpPr>
+          <p:nvPr>
+            <p:ph idx="1"/>
+          </p:nvPr>
+        </p:nvSpPr>
+        <p:spPr/>
+        <p:txBody>
+          <a:bodyPr/>
+          <a:lstStyle/>
+          <a:p>
+            <a:endParaRPr lang="en-IE"/>
+          </a:p>
+        </p:txBody>
+      </p:sp>
+    </p:spTree>
+    <p:extLst>
+      <p:ext uri="{BB962C8B-B14F-4D97-AF65-F5344CB8AC3E}">
+        <p14:creationId xmlns:p14="http://schemas.microsoft.com/office/powerpoint/2010/main" val="224328958"/>
+      </p:ext>
+    </p:extLst>
+  </p:cSld>
+  <p:clrMapOvr>
+    <a:masterClrMapping/>
+  </p:clrMapOvr>
+</p:sld>
+</file>
+
+<file path=ppt/slides/slide4.xml><?xml version="1.0" encoding="utf-8"?>
+<p:sld xmlns:a="http://schemas.openxmlformats.org/drawingml/2006/main" xmlns:r="http://schemas.openxmlformats.org/officeDocument/2006/relationships" xmlns:p="http://schemas.openxmlformats.org/presentationml/2006/main">
+  <p:cSld>
+    <p:spTree>
+      <p:nvGrpSpPr>
+        <p:cNvPr id="1" name=""/>
+        <p:cNvGrpSpPr/>
+        <p:nvPr/>
+      </p:nvGrpSpPr>
+      <p:grpSpPr>
+        <a:xfrm>
+          <a:off x="0" y="0"/>
+          <a:ext cx="0" cy="0"/>
+          <a:chOff x="0" y="0"/>
+          <a:chExt cx="0" cy="0"/>
+        </a:xfrm>
+      </p:grpSpPr>
+      <p:sp>
+        <p:nvSpPr>
+          <p:cNvPr id="2" name="Title 1">
+            <a:extLst>
+              <a:ext uri="{FF2B5EF4-FFF2-40B4-BE49-F238E27FC236}">
+                <a16:creationId xmlns:a16="http://schemas.microsoft.com/office/drawing/2014/main" id="{1F702758-3F71-DD41-9B98-B4AAEE811947}"/>
+              </a:ext>
+            </a:extLst>
+          </p:cNvPr>
+          <p:cNvSpPr>
+            <a:spLocks noGrp="1"/>
+          </p:cNvSpPr>
+          <p:nvPr>
+            <p:ph type="title"/>
+          </p:nvPr>
+        </p:nvSpPr>
+        <p:spPr/>
+        <p:txBody>
+          <a:bodyPr/>
+          <a:lstStyle/>
+          <a:p>
+            <a:r>
+              <a:rPr lang="en-IE" dirty="0"/>
+              <a:t>Algorithms</a:t>
+            </a:r>
+          </a:p>
+        </p:txBody>
+      </p:sp>
+      <p:sp>
+        <p:nvSpPr>
+          <p:cNvPr id="3" name="Content Placeholder 2">
+            <a:extLst>
+              <a:ext uri="{FF2B5EF4-FFF2-40B4-BE49-F238E27FC236}">
+                <a16:creationId xmlns:a16="http://schemas.microsoft.com/office/drawing/2014/main" id="{2FB42E34-9B36-3EBF-7912-56426A687633}"/>
+              </a:ext>
+            </a:extLst>
+          </p:cNvPr>
+          <p:cNvSpPr>
+            <a:spLocks noGrp="1"/>
+          </p:cNvSpPr>
+          <p:nvPr>
+            <p:ph idx="1"/>
+          </p:nvPr>
+        </p:nvSpPr>
+        <p:spPr/>
+        <p:txBody>
+          <a:bodyPr/>
+          <a:lstStyle/>
+          <a:p>
+            <a:endParaRPr lang="en-IE"/>
+          </a:p>
+        </p:txBody>
+      </p:sp>
+    </p:spTree>
+    <p:extLst>
+      <p:ext uri="{BB962C8B-B14F-4D97-AF65-F5344CB8AC3E}">
+        <p14:creationId xmlns:p14="http://schemas.microsoft.com/office/powerpoint/2010/main" val="896789106"/>
+      </p:ext>
+    </p:extLst>
+  </p:cSld>
+  <p:clrMapOvr>
+    <a:masterClrMapping/>
+  </p:clrMapOvr>
+</p:sld>
+</file>
+
+<file path=ppt/slides/slide5.xml><?xml version="1.0" encoding="utf-8"?>
+<p:sld xmlns:a="http://schemas.openxmlformats.org/drawingml/2006/main" xmlns:r="http://schemas.openxmlformats.org/officeDocument/2006/relationships" xmlns:p="http://schemas.openxmlformats.org/presentationml/2006/main">
+  <p:cSld>
+    <p:spTree>
+      <p:nvGrpSpPr>
+        <p:cNvPr id="1" name=""/>
+        <p:cNvGrpSpPr/>
+        <p:nvPr/>
+      </p:nvGrpSpPr>
+      <p:grpSpPr>
+        <a:xfrm>
+          <a:off x="0" y="0"/>
+          <a:ext cx="0" cy="0"/>
+          <a:chOff x="0" y="0"/>
+          <a:chExt cx="0" cy="0"/>
+        </a:xfrm>
+      </p:grpSpPr>
+      <p:sp>
+        <p:nvSpPr>
+          <p:cNvPr id="2" name="Title 1">
+            <a:extLst>
+              <a:ext uri="{FF2B5EF4-FFF2-40B4-BE49-F238E27FC236}">
+                <a16:creationId xmlns:a16="http://schemas.microsoft.com/office/drawing/2014/main" id="{9732F1FB-CBA9-F09A-7F0F-A636A3D309A4}"/>
+              </a:ext>
+            </a:extLst>
+          </p:cNvPr>
+          <p:cNvSpPr>
+            <a:spLocks noGrp="1"/>
+          </p:cNvSpPr>
+          <p:nvPr>
+            <p:ph type="title"/>
+          </p:nvPr>
+        </p:nvSpPr>
+        <p:spPr/>
+        <p:txBody>
+          <a:bodyPr/>
+          <a:lstStyle/>
+          <a:p>
+            <a:r>
+              <a:rPr lang="en-IE" dirty="0"/>
+              <a:t>Testing</a:t>
+            </a:r>
+          </a:p>
+        </p:txBody>
+      </p:sp>
+      <p:sp>
+        <p:nvSpPr>
+          <p:cNvPr id="3" name="Content Placeholder 2">
+            <a:extLst>
+              <a:ext uri="{FF2B5EF4-FFF2-40B4-BE49-F238E27FC236}">
+                <a16:creationId xmlns:a16="http://schemas.microsoft.com/office/drawing/2014/main" id="{EACC85F6-9639-453A-20AA-647B05582C85}"/>
+              </a:ext>
+            </a:extLst>
+          </p:cNvPr>
+          <p:cNvSpPr>
+            <a:spLocks noGrp="1"/>
+          </p:cNvSpPr>
+          <p:nvPr>
+            <p:ph idx="1"/>
+          </p:nvPr>
+        </p:nvSpPr>
+        <p:spPr/>
+        <p:txBody>
+          <a:bodyPr/>
+          <a:lstStyle/>
+          <a:p>
+            <a:endParaRPr lang="en-IE"/>
+          </a:p>
+        </p:txBody>
+      </p:sp>
+    </p:spTree>
+    <p:extLst>
+      <p:ext uri="{BB962C8B-B14F-4D97-AF65-F5344CB8AC3E}">
+        <p14:creationId xmlns:p14="http://schemas.microsoft.com/office/powerpoint/2010/main" val="1509408172"/>
       </p:ext>
     </p:extLst>
   </p:cSld>

--- a/docs/Final Submission/Final Presentation.pptx
+++ b/docs/Final Submission/Final Presentation.pptx
@@ -5,7 +5,7 @@
     <p:sldMasterId id="2147483972" r:id="rId1"/>
   </p:sldMasterIdLst>
   <p:notesMasterIdLst>
-    <p:notesMasterId r:id="rId7"/>
+    <p:notesMasterId r:id="rId8"/>
   </p:notesMasterIdLst>
   <p:sldIdLst>
     <p:sldId id="256" r:id="rId2"/>
@@ -13,6 +13,7 @@
     <p:sldId id="259" r:id="rId4"/>
     <p:sldId id="260" r:id="rId5"/>
     <p:sldId id="261" r:id="rId6"/>
+    <p:sldId id="262" r:id="rId7"/>
   </p:sldIdLst>
   <p:sldSz cx="12192000" cy="6858000"/>
   <p:notesSz cx="6858000" cy="9144000"/>
@@ -117,6 +118,7331 @@
     </p:ext>
   </p:extLst>
 </p:presentation>
+</file>
+
+<file path=ppt/diagrams/colors1.xml><?xml version="1.0" encoding="utf-8"?>
+<dgm:colorsDef xmlns:dgm="http://schemas.openxmlformats.org/drawingml/2006/diagram" xmlns:a="http://schemas.openxmlformats.org/drawingml/2006/main" uniqueId="urn:microsoft.com/office/officeart/2005/8/colors/accent0_1">
+  <dgm:title val=""/>
+  <dgm:desc val=""/>
+  <dgm:catLst>
+    <dgm:cat type="mainScheme" pri="10100"/>
+  </dgm:catLst>
+  <dgm:styleLbl name="node0">
+    <dgm:fillClrLst meth="repeat">
+      <a:schemeClr val="lt1"/>
+    </dgm:fillClrLst>
+    <dgm:linClrLst meth="repeat">
+      <a:schemeClr val="dk1">
+        <a:shade val="80000"/>
+      </a:schemeClr>
+    </dgm:linClrLst>
+    <dgm:effectClrLst/>
+    <dgm:txLinClrLst/>
+    <dgm:txFillClrLst meth="repeat">
+      <a:schemeClr val="dk1"/>
+    </dgm:txFillClrLst>
+    <dgm:txEffectClrLst/>
+  </dgm:styleLbl>
+  <dgm:styleLbl name="node1">
+    <dgm:fillClrLst meth="repeat">
+      <a:schemeClr val="lt1"/>
+    </dgm:fillClrLst>
+    <dgm:linClrLst meth="repeat">
+      <a:schemeClr val="dk1">
+        <a:shade val="80000"/>
+      </a:schemeClr>
+    </dgm:linClrLst>
+    <dgm:effectClrLst/>
+    <dgm:txLinClrLst/>
+    <dgm:txFillClrLst meth="repeat">
+      <a:schemeClr val="dk1"/>
+    </dgm:txFillClrLst>
+    <dgm:txEffectClrLst/>
+  </dgm:styleLbl>
+  <dgm:styleLbl name="alignNode1">
+    <dgm:fillClrLst meth="repeat">
+      <a:schemeClr val="lt1"/>
+    </dgm:fillClrLst>
+    <dgm:linClrLst meth="repeat">
+      <a:schemeClr val="dk1">
+        <a:shade val="80000"/>
+      </a:schemeClr>
+    </dgm:linClrLst>
+    <dgm:effectClrLst/>
+    <dgm:txLinClrLst/>
+    <dgm:txFillClrLst meth="repeat">
+      <a:schemeClr val="dk1"/>
+    </dgm:txFillClrLst>
+    <dgm:txEffectClrLst/>
+  </dgm:styleLbl>
+  <dgm:styleLbl name="lnNode1">
+    <dgm:fillClrLst meth="repeat">
+      <a:schemeClr val="lt1"/>
+    </dgm:fillClrLst>
+    <dgm:linClrLst meth="repeat">
+      <a:schemeClr val="dk1">
+        <a:shade val="80000"/>
+      </a:schemeClr>
+    </dgm:linClrLst>
+    <dgm:effectClrLst/>
+    <dgm:txLinClrLst/>
+    <dgm:txFillClrLst meth="repeat">
+      <a:schemeClr val="dk1"/>
+    </dgm:txFillClrLst>
+    <dgm:txEffectClrLst/>
+  </dgm:styleLbl>
+  <dgm:styleLbl name="vennNode1">
+    <dgm:fillClrLst meth="repeat">
+      <a:schemeClr val="lt1">
+        <a:alpha val="50000"/>
+      </a:schemeClr>
+    </dgm:fillClrLst>
+    <dgm:linClrLst meth="repeat">
+      <a:schemeClr val="dk1">
+        <a:shade val="80000"/>
+      </a:schemeClr>
+    </dgm:linClrLst>
+    <dgm:effectClrLst/>
+    <dgm:txLinClrLst/>
+    <dgm:txFillClrLst/>
+    <dgm:txEffectClrLst/>
+  </dgm:styleLbl>
+  <dgm:styleLbl name="node2">
+    <dgm:fillClrLst meth="repeat">
+      <a:schemeClr val="lt1"/>
+    </dgm:fillClrLst>
+    <dgm:linClrLst meth="repeat">
+      <a:schemeClr val="dk1">
+        <a:shade val="80000"/>
+      </a:schemeClr>
+    </dgm:linClrLst>
+    <dgm:effectClrLst/>
+    <dgm:txLinClrLst/>
+    <dgm:txFillClrLst meth="repeat">
+      <a:schemeClr val="dk1"/>
+    </dgm:txFillClrLst>
+    <dgm:txEffectClrLst/>
+  </dgm:styleLbl>
+  <dgm:styleLbl name="node3">
+    <dgm:fillClrLst meth="repeat">
+      <a:schemeClr val="lt1"/>
+    </dgm:fillClrLst>
+    <dgm:linClrLst meth="repeat">
+      <a:schemeClr val="dk1">
+        <a:shade val="80000"/>
+      </a:schemeClr>
+    </dgm:linClrLst>
+    <dgm:effectClrLst/>
+    <dgm:txLinClrLst/>
+    <dgm:txFillClrLst meth="repeat">
+      <a:schemeClr val="dk1"/>
+    </dgm:txFillClrLst>
+    <dgm:txEffectClrLst/>
+  </dgm:styleLbl>
+  <dgm:styleLbl name="node4">
+    <dgm:fillClrLst meth="repeat">
+      <a:schemeClr val="lt1"/>
+    </dgm:fillClrLst>
+    <dgm:linClrLst meth="repeat">
+      <a:schemeClr val="dk1">
+        <a:shade val="80000"/>
+      </a:schemeClr>
+    </dgm:linClrLst>
+    <dgm:effectClrLst/>
+    <dgm:txLinClrLst/>
+    <dgm:txFillClrLst meth="repeat">
+      <a:schemeClr val="dk1"/>
+    </dgm:txFillClrLst>
+    <dgm:txEffectClrLst/>
+  </dgm:styleLbl>
+  <dgm:styleLbl name="fgImgPlace1">
+    <dgm:fillClrLst meth="repeat">
+      <a:schemeClr val="dk1">
+        <a:tint val="40000"/>
+      </a:schemeClr>
+    </dgm:fillClrLst>
+    <dgm:linClrLst meth="repeat">
+      <a:schemeClr val="dk1">
+        <a:shade val="80000"/>
+      </a:schemeClr>
+    </dgm:linClrLst>
+    <dgm:effectClrLst/>
+    <dgm:txLinClrLst/>
+    <dgm:txFillClrLst meth="repeat">
+      <a:schemeClr val="lt1"/>
+    </dgm:txFillClrLst>
+    <dgm:txEffectClrLst/>
+  </dgm:styleLbl>
+  <dgm:styleLbl name="alignImgPlace1">
+    <dgm:fillClrLst meth="repeat">
+      <a:schemeClr val="dk1">
+        <a:tint val="40000"/>
+      </a:schemeClr>
+    </dgm:fillClrLst>
+    <dgm:linClrLst meth="repeat">
+      <a:schemeClr val="dk1">
+        <a:shade val="80000"/>
+      </a:schemeClr>
+    </dgm:linClrLst>
+    <dgm:effectClrLst/>
+    <dgm:txLinClrLst/>
+    <dgm:txFillClrLst meth="repeat">
+      <a:schemeClr val="lt1"/>
+    </dgm:txFillClrLst>
+    <dgm:txEffectClrLst/>
+  </dgm:styleLbl>
+  <dgm:styleLbl name="bgImgPlace1">
+    <dgm:fillClrLst meth="repeat">
+      <a:schemeClr val="dk1">
+        <a:tint val="40000"/>
+      </a:schemeClr>
+    </dgm:fillClrLst>
+    <dgm:linClrLst meth="repeat">
+      <a:schemeClr val="dk1">
+        <a:shade val="80000"/>
+      </a:schemeClr>
+    </dgm:linClrLst>
+    <dgm:effectClrLst/>
+    <dgm:txLinClrLst/>
+    <dgm:txFillClrLst meth="repeat">
+      <a:schemeClr val="lt1"/>
+    </dgm:txFillClrLst>
+    <dgm:txEffectClrLst/>
+  </dgm:styleLbl>
+  <dgm:styleLbl name="sibTrans2D1">
+    <dgm:fillClrLst meth="repeat">
+      <a:schemeClr val="dk1">
+        <a:tint val="60000"/>
+      </a:schemeClr>
+    </dgm:fillClrLst>
+    <dgm:linClrLst meth="repeat">
+      <a:schemeClr val="dk1">
+        <a:tint val="60000"/>
+      </a:schemeClr>
+    </dgm:linClrLst>
+    <dgm:effectClrLst/>
+    <dgm:txLinClrLst/>
+    <dgm:txFillClrLst meth="repeat">
+      <a:schemeClr val="dk1"/>
+    </dgm:txFillClrLst>
+    <dgm:txEffectClrLst/>
+  </dgm:styleLbl>
+  <dgm:styleLbl name="fgSibTrans2D1">
+    <dgm:fillClrLst meth="repeat">
+      <a:schemeClr val="dk1">
+        <a:tint val="60000"/>
+      </a:schemeClr>
+    </dgm:fillClrLst>
+    <dgm:linClrLst meth="repeat">
+      <a:schemeClr val="dk1">
+        <a:tint val="60000"/>
+      </a:schemeClr>
+    </dgm:linClrLst>
+    <dgm:effectClrLst/>
+    <dgm:txLinClrLst/>
+    <dgm:txFillClrLst meth="repeat">
+      <a:schemeClr val="dk1"/>
+    </dgm:txFillClrLst>
+    <dgm:txEffectClrLst/>
+  </dgm:styleLbl>
+  <dgm:styleLbl name="bgSibTrans2D1">
+    <dgm:fillClrLst meth="repeat">
+      <a:schemeClr val="dk1">
+        <a:tint val="60000"/>
+      </a:schemeClr>
+    </dgm:fillClrLst>
+    <dgm:linClrLst meth="repeat">
+      <a:schemeClr val="dk1">
+        <a:tint val="60000"/>
+      </a:schemeClr>
+    </dgm:linClrLst>
+    <dgm:effectClrLst/>
+    <dgm:txLinClrLst/>
+    <dgm:txFillClrLst meth="repeat">
+      <a:schemeClr val="dk1"/>
+    </dgm:txFillClrLst>
+    <dgm:txEffectClrLst/>
+  </dgm:styleLbl>
+  <dgm:styleLbl name="sibTrans1D1">
+    <dgm:fillClrLst meth="repeat">
+      <a:schemeClr val="dk1"/>
+    </dgm:fillClrLst>
+    <dgm:linClrLst meth="repeat">
+      <a:schemeClr val="dk1"/>
+    </dgm:linClrLst>
+    <dgm:effectClrLst/>
+    <dgm:txLinClrLst/>
+    <dgm:txFillClrLst meth="repeat">
+      <a:schemeClr val="tx1"/>
+    </dgm:txFillClrLst>
+    <dgm:txEffectClrLst/>
+  </dgm:styleLbl>
+  <dgm:styleLbl name="callout">
+    <dgm:fillClrLst meth="repeat">
+      <a:schemeClr val="dk1"/>
+    </dgm:fillClrLst>
+    <dgm:linClrLst meth="repeat">
+      <a:schemeClr val="dk1"/>
+    </dgm:linClrLst>
+    <dgm:effectClrLst/>
+    <dgm:txLinClrLst/>
+    <dgm:txFillClrLst meth="repeat">
+      <a:schemeClr val="tx1"/>
+    </dgm:txFillClrLst>
+    <dgm:txEffectClrLst/>
+  </dgm:styleLbl>
+  <dgm:styleLbl name="asst0">
+    <dgm:fillClrLst meth="repeat">
+      <a:schemeClr val="lt1"/>
+    </dgm:fillClrLst>
+    <dgm:linClrLst meth="repeat">
+      <a:schemeClr val="dk1">
+        <a:shade val="80000"/>
+      </a:schemeClr>
+    </dgm:linClrLst>
+    <dgm:effectClrLst/>
+    <dgm:txLinClrLst/>
+    <dgm:txFillClrLst meth="repeat">
+      <a:schemeClr val="dk1"/>
+    </dgm:txFillClrLst>
+    <dgm:txEffectClrLst/>
+  </dgm:styleLbl>
+  <dgm:styleLbl name="asst1">
+    <dgm:fillClrLst meth="repeat">
+      <a:schemeClr val="lt1"/>
+    </dgm:fillClrLst>
+    <dgm:linClrLst meth="repeat">
+      <a:schemeClr val="dk1">
+        <a:shade val="80000"/>
+      </a:schemeClr>
+    </dgm:linClrLst>
+    <dgm:effectClrLst/>
+    <dgm:txLinClrLst/>
+    <dgm:txFillClrLst meth="repeat">
+      <a:schemeClr val="dk1"/>
+    </dgm:txFillClrLst>
+    <dgm:txEffectClrLst/>
+  </dgm:styleLbl>
+  <dgm:styleLbl name="asst2">
+    <dgm:fillClrLst meth="repeat">
+      <a:schemeClr val="lt1"/>
+    </dgm:fillClrLst>
+    <dgm:linClrLst meth="repeat">
+      <a:schemeClr val="dk1">
+        <a:shade val="80000"/>
+      </a:schemeClr>
+    </dgm:linClrLst>
+    <dgm:effectClrLst/>
+    <dgm:txLinClrLst/>
+    <dgm:txFillClrLst meth="repeat">
+      <a:schemeClr val="dk1"/>
+    </dgm:txFillClrLst>
+    <dgm:txEffectClrLst/>
+  </dgm:styleLbl>
+  <dgm:styleLbl name="asst3">
+    <dgm:fillClrLst meth="repeat">
+      <a:schemeClr val="lt1"/>
+    </dgm:fillClrLst>
+    <dgm:linClrLst meth="repeat">
+      <a:schemeClr val="dk1">
+        <a:shade val="80000"/>
+      </a:schemeClr>
+    </dgm:linClrLst>
+    <dgm:effectClrLst/>
+    <dgm:txLinClrLst/>
+    <dgm:txFillClrLst meth="repeat">
+      <a:schemeClr val="dk1"/>
+    </dgm:txFillClrLst>
+    <dgm:txEffectClrLst/>
+  </dgm:styleLbl>
+  <dgm:styleLbl name="asst4">
+    <dgm:fillClrLst meth="repeat">
+      <a:schemeClr val="lt1"/>
+    </dgm:fillClrLst>
+    <dgm:linClrLst meth="repeat">
+      <a:schemeClr val="dk1">
+        <a:shade val="80000"/>
+      </a:schemeClr>
+    </dgm:linClrLst>
+    <dgm:effectClrLst/>
+    <dgm:txLinClrLst/>
+    <dgm:txFillClrLst meth="repeat">
+      <a:schemeClr val="dk1"/>
+    </dgm:txFillClrLst>
+    <dgm:txEffectClrLst/>
+  </dgm:styleLbl>
+  <dgm:styleLbl name="parChTrans2D1">
+    <dgm:fillClrLst meth="repeat">
+      <a:schemeClr val="dk1">
+        <a:tint val="60000"/>
+      </a:schemeClr>
+    </dgm:fillClrLst>
+    <dgm:linClrLst meth="repeat">
+      <a:schemeClr val="dk1">
+        <a:tint val="60000"/>
+      </a:schemeClr>
+    </dgm:linClrLst>
+    <dgm:effectClrLst/>
+    <dgm:txLinClrLst/>
+    <dgm:txFillClrLst/>
+    <dgm:txEffectClrLst/>
+  </dgm:styleLbl>
+  <dgm:styleLbl name="parChTrans2D2">
+    <dgm:fillClrLst meth="repeat">
+      <a:schemeClr val="dk1"/>
+    </dgm:fillClrLst>
+    <dgm:linClrLst meth="repeat">
+      <a:schemeClr val="dk1"/>
+    </dgm:linClrLst>
+    <dgm:effectClrLst/>
+    <dgm:txLinClrLst/>
+    <dgm:txFillClrLst/>
+    <dgm:txEffectClrLst/>
+  </dgm:styleLbl>
+  <dgm:styleLbl name="parChTrans2D3">
+    <dgm:fillClrLst meth="repeat">
+      <a:schemeClr val="dk1"/>
+    </dgm:fillClrLst>
+    <dgm:linClrLst meth="repeat">
+      <a:schemeClr val="dk1"/>
+    </dgm:linClrLst>
+    <dgm:effectClrLst/>
+    <dgm:txLinClrLst/>
+    <dgm:txFillClrLst/>
+    <dgm:txEffectClrLst/>
+  </dgm:styleLbl>
+  <dgm:styleLbl name="parChTrans2D4">
+    <dgm:fillClrLst meth="repeat">
+      <a:schemeClr val="dk1"/>
+    </dgm:fillClrLst>
+    <dgm:linClrLst meth="repeat">
+      <a:schemeClr val="dk1"/>
+    </dgm:linClrLst>
+    <dgm:effectClrLst/>
+    <dgm:txLinClrLst/>
+    <dgm:txFillClrLst meth="repeat">
+      <a:schemeClr val="lt1"/>
+    </dgm:txFillClrLst>
+    <dgm:txEffectClrLst/>
+  </dgm:styleLbl>
+  <dgm:styleLbl name="parChTrans1D1">
+    <dgm:fillClrLst meth="repeat">
+      <a:schemeClr val="dk1"/>
+    </dgm:fillClrLst>
+    <dgm:linClrLst meth="repeat">
+      <a:schemeClr val="dk1">
+        <a:shade val="60000"/>
+      </a:schemeClr>
+    </dgm:linClrLst>
+    <dgm:effectClrLst/>
+    <dgm:txLinClrLst/>
+    <dgm:txFillClrLst meth="repeat">
+      <a:schemeClr val="tx1"/>
+    </dgm:txFillClrLst>
+    <dgm:txEffectClrLst/>
+  </dgm:styleLbl>
+  <dgm:styleLbl name="parChTrans1D2">
+    <dgm:fillClrLst meth="repeat">
+      <a:schemeClr val="dk1"/>
+    </dgm:fillClrLst>
+    <dgm:linClrLst meth="repeat">
+      <a:schemeClr val="dk1">
+        <a:shade val="60000"/>
+      </a:schemeClr>
+    </dgm:linClrLst>
+    <dgm:effectClrLst/>
+    <dgm:txLinClrLst/>
+    <dgm:txFillClrLst meth="repeat">
+      <a:schemeClr val="tx1"/>
+    </dgm:txFillClrLst>
+    <dgm:txEffectClrLst/>
+  </dgm:styleLbl>
+  <dgm:styleLbl name="parChTrans1D3">
+    <dgm:fillClrLst meth="repeat">
+      <a:schemeClr val="dk1"/>
+    </dgm:fillClrLst>
+    <dgm:linClrLst meth="repeat">
+      <a:schemeClr val="dk1">
+        <a:shade val="80000"/>
+      </a:schemeClr>
+    </dgm:linClrLst>
+    <dgm:effectClrLst/>
+    <dgm:txLinClrLst/>
+    <dgm:txFillClrLst meth="repeat">
+      <a:schemeClr val="tx1"/>
+    </dgm:txFillClrLst>
+    <dgm:txEffectClrLst/>
+  </dgm:styleLbl>
+  <dgm:styleLbl name="parChTrans1D4">
+    <dgm:fillClrLst meth="repeat">
+      <a:schemeClr val="dk1"/>
+    </dgm:fillClrLst>
+    <dgm:linClrLst meth="repeat">
+      <a:schemeClr val="dk1">
+        <a:shade val="80000"/>
+      </a:schemeClr>
+    </dgm:linClrLst>
+    <dgm:effectClrLst/>
+    <dgm:txLinClrLst/>
+    <dgm:txFillClrLst meth="repeat">
+      <a:schemeClr val="tx1"/>
+    </dgm:txFillClrLst>
+    <dgm:txEffectClrLst/>
+  </dgm:styleLbl>
+  <dgm:styleLbl name="fgAcc1">
+    <dgm:fillClrLst meth="repeat">
+      <a:schemeClr val="dk1">
+        <a:alpha val="90000"/>
+        <a:tint val="40000"/>
+      </a:schemeClr>
+    </dgm:fillClrLst>
+    <dgm:linClrLst meth="repeat">
+      <a:schemeClr val="dk1"/>
+    </dgm:linClrLst>
+    <dgm:effectClrLst/>
+    <dgm:txLinClrLst/>
+    <dgm:txFillClrLst meth="repeat">
+      <a:schemeClr val="dk1"/>
+    </dgm:txFillClrLst>
+    <dgm:txEffectClrLst/>
+  </dgm:styleLbl>
+  <dgm:styleLbl name="conFgAcc1">
+    <dgm:fillClrLst meth="repeat">
+      <a:schemeClr val="dk1">
+        <a:alpha val="90000"/>
+        <a:tint val="40000"/>
+      </a:schemeClr>
+    </dgm:fillClrLst>
+    <dgm:linClrLst meth="repeat">
+      <a:schemeClr val="dk1"/>
+    </dgm:linClrLst>
+    <dgm:effectClrLst/>
+    <dgm:txLinClrLst/>
+    <dgm:txFillClrLst meth="repeat">
+      <a:schemeClr val="dk1"/>
+    </dgm:txFillClrLst>
+    <dgm:txEffectClrLst/>
+  </dgm:styleLbl>
+  <dgm:styleLbl name="alignAcc1">
+    <dgm:fillClrLst meth="repeat">
+      <a:schemeClr val="dk1">
+        <a:alpha val="90000"/>
+        <a:tint val="40000"/>
+      </a:schemeClr>
+    </dgm:fillClrLst>
+    <dgm:linClrLst meth="repeat">
+      <a:schemeClr val="dk1"/>
+    </dgm:linClrLst>
+    <dgm:effectClrLst/>
+    <dgm:txLinClrLst/>
+    <dgm:txFillClrLst meth="repeat">
+      <a:schemeClr val="dk1"/>
+    </dgm:txFillClrLst>
+    <dgm:txEffectClrLst/>
+  </dgm:styleLbl>
+  <dgm:styleLbl name="trAlignAcc1">
+    <dgm:fillClrLst meth="repeat">
+      <a:schemeClr val="dk1">
+        <a:alpha val="40000"/>
+        <a:tint val="40000"/>
+      </a:schemeClr>
+    </dgm:fillClrLst>
+    <dgm:linClrLst meth="repeat">
+      <a:schemeClr val="dk1"/>
+    </dgm:linClrLst>
+    <dgm:effectClrLst/>
+    <dgm:txLinClrLst/>
+    <dgm:txFillClrLst meth="repeat">
+      <a:schemeClr val="dk1"/>
+    </dgm:txFillClrLst>
+    <dgm:txEffectClrLst/>
+  </dgm:styleLbl>
+  <dgm:styleLbl name="bgAcc1">
+    <dgm:fillClrLst meth="repeat">
+      <a:schemeClr val="dk1">
+        <a:alpha val="90000"/>
+        <a:tint val="40000"/>
+      </a:schemeClr>
+    </dgm:fillClrLst>
+    <dgm:linClrLst meth="repeat">
+      <a:schemeClr val="dk1"/>
+    </dgm:linClrLst>
+    <dgm:effectClrLst/>
+    <dgm:txLinClrLst/>
+    <dgm:txFillClrLst meth="repeat">
+      <a:schemeClr val="dk1"/>
+    </dgm:txFillClrLst>
+    <dgm:txEffectClrLst/>
+  </dgm:styleLbl>
+  <dgm:styleLbl name="solidFgAcc1">
+    <dgm:fillClrLst meth="repeat">
+      <a:schemeClr val="lt1"/>
+    </dgm:fillClrLst>
+    <dgm:linClrLst meth="repeat">
+      <a:schemeClr val="dk1"/>
+    </dgm:linClrLst>
+    <dgm:effectClrLst/>
+    <dgm:txLinClrLst/>
+    <dgm:txFillClrLst meth="repeat">
+      <a:schemeClr val="dk1"/>
+    </dgm:txFillClrLst>
+    <dgm:txEffectClrLst/>
+  </dgm:styleLbl>
+  <dgm:styleLbl name="solidAlignAcc1">
+    <dgm:fillClrLst meth="repeat">
+      <a:schemeClr val="lt1"/>
+    </dgm:fillClrLst>
+    <dgm:linClrLst meth="repeat">
+      <a:schemeClr val="dk1"/>
+    </dgm:linClrLst>
+    <dgm:effectClrLst/>
+    <dgm:txLinClrLst/>
+    <dgm:txFillClrLst meth="repeat">
+      <a:schemeClr val="dk1"/>
+    </dgm:txFillClrLst>
+    <dgm:txEffectClrLst/>
+  </dgm:styleLbl>
+  <dgm:styleLbl name="solidBgAcc1">
+    <dgm:fillClrLst meth="repeat">
+      <a:schemeClr val="lt1"/>
+    </dgm:fillClrLst>
+    <dgm:linClrLst meth="repeat">
+      <a:schemeClr val="dk1"/>
+    </dgm:linClrLst>
+    <dgm:effectClrLst/>
+    <dgm:txLinClrLst/>
+    <dgm:txFillClrLst meth="repeat">
+      <a:schemeClr val="dk1"/>
+    </dgm:txFillClrLst>
+    <dgm:txEffectClrLst/>
+  </dgm:styleLbl>
+  <dgm:styleLbl name="fgAccFollowNode1">
+    <dgm:fillClrLst meth="repeat">
+      <a:schemeClr val="lt1">
+        <a:alpha val="90000"/>
+        <a:tint val="40000"/>
+      </a:schemeClr>
+    </dgm:fillClrLst>
+    <dgm:linClrLst meth="repeat">
+      <a:schemeClr val="dk1">
+        <a:alpha val="90000"/>
+      </a:schemeClr>
+    </dgm:linClrLst>
+    <dgm:effectClrLst/>
+    <dgm:txLinClrLst/>
+    <dgm:txFillClrLst meth="repeat">
+      <a:schemeClr val="dk1"/>
+    </dgm:txFillClrLst>
+    <dgm:txEffectClrLst/>
+  </dgm:styleLbl>
+  <dgm:styleLbl name="alignAccFollowNode1">
+    <dgm:fillClrLst meth="repeat">
+      <a:schemeClr val="lt1">
+        <a:alpha val="90000"/>
+        <a:tint val="40000"/>
+      </a:schemeClr>
+    </dgm:fillClrLst>
+    <dgm:linClrLst meth="repeat">
+      <a:schemeClr val="dk1">
+        <a:alpha val="90000"/>
+      </a:schemeClr>
+    </dgm:linClrLst>
+    <dgm:effectClrLst/>
+    <dgm:txLinClrLst/>
+    <dgm:txFillClrLst meth="repeat">
+      <a:schemeClr val="dk1"/>
+    </dgm:txFillClrLst>
+    <dgm:txEffectClrLst/>
+  </dgm:styleLbl>
+  <dgm:styleLbl name="bgAccFollowNode1">
+    <dgm:fillClrLst meth="repeat">
+      <a:schemeClr val="lt1">
+        <a:alpha val="90000"/>
+        <a:tint val="40000"/>
+      </a:schemeClr>
+    </dgm:fillClrLst>
+    <dgm:linClrLst meth="repeat">
+      <a:schemeClr val="dk1">
+        <a:alpha val="90000"/>
+      </a:schemeClr>
+    </dgm:linClrLst>
+    <dgm:effectClrLst/>
+    <dgm:txLinClrLst/>
+    <dgm:txFillClrLst meth="repeat">
+      <a:schemeClr val="dk1"/>
+    </dgm:txFillClrLst>
+    <dgm:txEffectClrLst/>
+  </dgm:styleLbl>
+  <dgm:styleLbl name="fgAcc0">
+    <dgm:fillClrLst meth="repeat">
+      <a:schemeClr val="dk1">
+        <a:alpha val="90000"/>
+        <a:tint val="40000"/>
+      </a:schemeClr>
+    </dgm:fillClrLst>
+    <dgm:linClrLst meth="repeat">
+      <a:schemeClr val="dk1"/>
+    </dgm:linClrLst>
+    <dgm:effectClrLst/>
+    <dgm:txLinClrLst/>
+    <dgm:txFillClrLst meth="repeat">
+      <a:schemeClr val="dk1"/>
+    </dgm:txFillClrLst>
+    <dgm:txEffectClrLst/>
+  </dgm:styleLbl>
+  <dgm:styleLbl name="fgAcc2">
+    <dgm:fillClrLst meth="repeat">
+      <a:schemeClr val="dk1">
+        <a:alpha val="90000"/>
+        <a:tint val="40000"/>
+      </a:schemeClr>
+    </dgm:fillClrLst>
+    <dgm:linClrLst meth="repeat">
+      <a:schemeClr val="dk1"/>
+    </dgm:linClrLst>
+    <dgm:effectClrLst/>
+    <dgm:txLinClrLst/>
+    <dgm:txFillClrLst meth="repeat">
+      <a:schemeClr val="dk1"/>
+    </dgm:txFillClrLst>
+    <dgm:txEffectClrLst/>
+  </dgm:styleLbl>
+  <dgm:styleLbl name="fgAcc3">
+    <dgm:fillClrLst meth="repeat">
+      <a:schemeClr val="dk1">
+        <a:alpha val="90000"/>
+        <a:tint val="40000"/>
+      </a:schemeClr>
+    </dgm:fillClrLst>
+    <dgm:linClrLst meth="repeat">
+      <a:schemeClr val="dk1"/>
+    </dgm:linClrLst>
+    <dgm:effectClrLst/>
+    <dgm:txLinClrLst/>
+    <dgm:txFillClrLst meth="repeat">
+      <a:schemeClr val="dk1"/>
+    </dgm:txFillClrLst>
+    <dgm:txEffectClrLst/>
+  </dgm:styleLbl>
+  <dgm:styleLbl name="fgAcc4">
+    <dgm:fillClrLst meth="repeat">
+      <a:schemeClr val="dk1">
+        <a:alpha val="90000"/>
+        <a:tint val="40000"/>
+      </a:schemeClr>
+    </dgm:fillClrLst>
+    <dgm:linClrLst meth="repeat">
+      <a:schemeClr val="dk1"/>
+    </dgm:linClrLst>
+    <dgm:effectClrLst/>
+    <dgm:txLinClrLst/>
+    <dgm:txFillClrLst meth="repeat">
+      <a:schemeClr val="dk1"/>
+    </dgm:txFillClrLst>
+    <dgm:txEffectClrLst/>
+  </dgm:styleLbl>
+  <dgm:styleLbl name="bgShp">
+    <dgm:fillClrLst meth="repeat">
+      <a:schemeClr val="dk1">
+        <a:tint val="40000"/>
+      </a:schemeClr>
+    </dgm:fillClrLst>
+    <dgm:linClrLst meth="repeat">
+      <a:schemeClr val="dk1"/>
+    </dgm:linClrLst>
+    <dgm:effectClrLst/>
+    <dgm:txLinClrLst/>
+    <dgm:txFillClrLst meth="repeat">
+      <a:schemeClr val="dk1"/>
+    </dgm:txFillClrLst>
+    <dgm:txEffectClrLst/>
+  </dgm:styleLbl>
+  <dgm:styleLbl name="dkBgShp">
+    <dgm:fillClrLst meth="repeat">
+      <a:schemeClr val="dk1">
+        <a:shade val="80000"/>
+      </a:schemeClr>
+    </dgm:fillClrLst>
+    <dgm:linClrLst meth="repeat">
+      <a:schemeClr val="dk1"/>
+    </dgm:linClrLst>
+    <dgm:effectClrLst/>
+    <dgm:txLinClrLst/>
+    <dgm:txFillClrLst meth="repeat">
+      <a:schemeClr val="lt1"/>
+    </dgm:txFillClrLst>
+    <dgm:txEffectClrLst/>
+  </dgm:styleLbl>
+  <dgm:styleLbl name="trBgShp">
+    <dgm:fillClrLst meth="repeat">
+      <a:schemeClr val="dk1">
+        <a:tint val="50000"/>
+        <a:alpha val="40000"/>
+      </a:schemeClr>
+    </dgm:fillClrLst>
+    <dgm:linClrLst meth="repeat">
+      <a:schemeClr val="dk1"/>
+    </dgm:linClrLst>
+    <dgm:effectClrLst/>
+    <dgm:txLinClrLst/>
+    <dgm:txFillClrLst meth="repeat">
+      <a:schemeClr val="lt1"/>
+    </dgm:txFillClrLst>
+    <dgm:txEffectClrLst/>
+  </dgm:styleLbl>
+  <dgm:styleLbl name="fgShp">
+    <dgm:fillClrLst meth="repeat">
+      <a:schemeClr val="dk1">
+        <a:tint val="60000"/>
+      </a:schemeClr>
+    </dgm:fillClrLst>
+    <dgm:linClrLst meth="repeat">
+      <a:schemeClr val="lt1"/>
+    </dgm:linClrLst>
+    <dgm:effectClrLst/>
+    <dgm:txLinClrLst/>
+    <dgm:txFillClrLst meth="repeat">
+      <a:schemeClr val="dk1"/>
+    </dgm:txFillClrLst>
+    <dgm:txEffectClrLst/>
+  </dgm:styleLbl>
+  <dgm:styleLbl name="revTx">
+    <dgm:fillClrLst meth="repeat">
+      <a:schemeClr val="lt1">
+        <a:alpha val="0"/>
+      </a:schemeClr>
+    </dgm:fillClrLst>
+    <dgm:linClrLst meth="repeat">
+      <a:schemeClr val="dk1">
+        <a:alpha val="0"/>
+      </a:schemeClr>
+    </dgm:linClrLst>
+    <dgm:effectClrLst/>
+    <dgm:txLinClrLst/>
+    <dgm:txFillClrLst meth="repeat">
+      <a:schemeClr val="tx1"/>
+    </dgm:txFillClrLst>
+    <dgm:txEffectClrLst/>
+  </dgm:styleLbl>
+</dgm:colorsDef>
+</file>
+
+<file path=ppt/diagrams/colors2.xml><?xml version="1.0" encoding="utf-8"?>
+<dgm:colorsDef xmlns:dgm="http://schemas.openxmlformats.org/drawingml/2006/diagram" xmlns:a="http://schemas.openxmlformats.org/drawingml/2006/main" uniqueId="urn:microsoft.com/office/officeart/2005/8/colors/accent1_1">
+  <dgm:title val=""/>
+  <dgm:desc val=""/>
+  <dgm:catLst>
+    <dgm:cat type="accent1" pri="11100"/>
+  </dgm:catLst>
+  <dgm:styleLbl name="node0">
+    <dgm:fillClrLst meth="repeat">
+      <a:schemeClr val="lt1"/>
+    </dgm:fillClrLst>
+    <dgm:linClrLst meth="repeat">
+      <a:schemeClr val="accent1">
+        <a:shade val="80000"/>
+      </a:schemeClr>
+    </dgm:linClrLst>
+    <dgm:effectClrLst/>
+    <dgm:txLinClrLst/>
+    <dgm:txFillClrLst meth="repeat">
+      <a:schemeClr val="dk1"/>
+    </dgm:txFillClrLst>
+    <dgm:txEffectClrLst/>
+  </dgm:styleLbl>
+  <dgm:styleLbl name="alignNode1">
+    <dgm:fillClrLst meth="repeat">
+      <a:schemeClr val="lt1"/>
+    </dgm:fillClrLst>
+    <dgm:linClrLst meth="repeat">
+      <a:schemeClr val="accent1">
+        <a:shade val="80000"/>
+      </a:schemeClr>
+    </dgm:linClrLst>
+    <dgm:effectClrLst/>
+    <dgm:txLinClrLst/>
+    <dgm:txFillClrLst meth="repeat">
+      <a:schemeClr val="dk1"/>
+    </dgm:txFillClrLst>
+    <dgm:txEffectClrLst/>
+  </dgm:styleLbl>
+  <dgm:styleLbl name="node1">
+    <dgm:fillClrLst meth="repeat">
+      <a:schemeClr val="lt1"/>
+    </dgm:fillClrLst>
+    <dgm:linClrLst meth="repeat">
+      <a:schemeClr val="accent1">
+        <a:shade val="80000"/>
+      </a:schemeClr>
+    </dgm:linClrLst>
+    <dgm:effectClrLst/>
+    <dgm:txLinClrLst/>
+    <dgm:txFillClrLst meth="repeat">
+      <a:schemeClr val="dk1"/>
+    </dgm:txFillClrLst>
+    <dgm:txEffectClrLst/>
+  </dgm:styleLbl>
+  <dgm:styleLbl name="lnNode1">
+    <dgm:fillClrLst meth="repeat">
+      <a:schemeClr val="lt1"/>
+    </dgm:fillClrLst>
+    <dgm:linClrLst meth="repeat">
+      <a:schemeClr val="accent1">
+        <a:shade val="80000"/>
+      </a:schemeClr>
+    </dgm:linClrLst>
+    <dgm:effectClrLst/>
+    <dgm:txLinClrLst/>
+    <dgm:txFillClrLst meth="repeat">
+      <a:schemeClr val="dk1"/>
+    </dgm:txFillClrLst>
+    <dgm:txEffectClrLst/>
+  </dgm:styleLbl>
+  <dgm:styleLbl name="vennNode1">
+    <dgm:fillClrLst meth="repeat">
+      <a:schemeClr val="lt1">
+        <a:alpha val="50000"/>
+      </a:schemeClr>
+    </dgm:fillClrLst>
+    <dgm:linClrLst meth="repeat">
+      <a:schemeClr val="accent1">
+        <a:shade val="80000"/>
+      </a:schemeClr>
+    </dgm:linClrLst>
+    <dgm:effectClrLst/>
+    <dgm:txLinClrLst/>
+    <dgm:txFillClrLst/>
+    <dgm:txEffectClrLst/>
+  </dgm:styleLbl>
+  <dgm:styleLbl name="node2">
+    <dgm:fillClrLst meth="repeat">
+      <a:schemeClr val="lt1"/>
+    </dgm:fillClrLst>
+    <dgm:linClrLst meth="repeat">
+      <a:schemeClr val="accent1">
+        <a:shade val="80000"/>
+      </a:schemeClr>
+    </dgm:linClrLst>
+    <dgm:effectClrLst/>
+    <dgm:txLinClrLst/>
+    <dgm:txFillClrLst meth="repeat">
+      <a:schemeClr val="dk1"/>
+    </dgm:txFillClrLst>
+    <dgm:txEffectClrLst/>
+  </dgm:styleLbl>
+  <dgm:styleLbl name="node3">
+    <dgm:fillClrLst meth="repeat">
+      <a:schemeClr val="lt1"/>
+    </dgm:fillClrLst>
+    <dgm:linClrLst meth="repeat">
+      <a:schemeClr val="accent1">
+        <a:shade val="80000"/>
+      </a:schemeClr>
+    </dgm:linClrLst>
+    <dgm:effectClrLst/>
+    <dgm:txLinClrLst/>
+    <dgm:txFillClrLst meth="repeat">
+      <a:schemeClr val="dk1"/>
+    </dgm:txFillClrLst>
+    <dgm:txEffectClrLst/>
+  </dgm:styleLbl>
+  <dgm:styleLbl name="node4">
+    <dgm:fillClrLst meth="repeat">
+      <a:schemeClr val="lt1"/>
+    </dgm:fillClrLst>
+    <dgm:linClrLst meth="repeat">
+      <a:schemeClr val="accent1">
+        <a:shade val="80000"/>
+      </a:schemeClr>
+    </dgm:linClrLst>
+    <dgm:effectClrLst/>
+    <dgm:txLinClrLst/>
+    <dgm:txFillClrLst meth="repeat">
+      <a:schemeClr val="dk1"/>
+    </dgm:txFillClrLst>
+    <dgm:txEffectClrLst/>
+  </dgm:styleLbl>
+  <dgm:styleLbl name="fgImgPlace1">
+    <dgm:fillClrLst meth="repeat">
+      <a:schemeClr val="accent1">
+        <a:tint val="40000"/>
+      </a:schemeClr>
+    </dgm:fillClrLst>
+    <dgm:linClrLst meth="repeat">
+      <a:schemeClr val="accent1">
+        <a:shade val="80000"/>
+      </a:schemeClr>
+    </dgm:linClrLst>
+    <dgm:effectClrLst/>
+    <dgm:txLinClrLst/>
+    <dgm:txFillClrLst meth="repeat">
+      <a:schemeClr val="lt1"/>
+    </dgm:txFillClrLst>
+    <dgm:txEffectClrLst/>
+  </dgm:styleLbl>
+  <dgm:styleLbl name="alignImgPlace1">
+    <dgm:fillClrLst meth="repeat">
+      <a:schemeClr val="accent1">
+        <a:tint val="40000"/>
+      </a:schemeClr>
+    </dgm:fillClrLst>
+    <dgm:linClrLst meth="repeat">
+      <a:schemeClr val="accent1">
+        <a:shade val="80000"/>
+      </a:schemeClr>
+    </dgm:linClrLst>
+    <dgm:effectClrLst/>
+    <dgm:txLinClrLst/>
+    <dgm:txFillClrLst meth="repeat">
+      <a:schemeClr val="lt1"/>
+    </dgm:txFillClrLst>
+    <dgm:txEffectClrLst/>
+  </dgm:styleLbl>
+  <dgm:styleLbl name="bgImgPlace1">
+    <dgm:fillClrLst meth="repeat">
+      <a:schemeClr val="accent1">
+        <a:tint val="40000"/>
+      </a:schemeClr>
+    </dgm:fillClrLst>
+    <dgm:linClrLst meth="repeat">
+      <a:schemeClr val="accent1">
+        <a:shade val="80000"/>
+      </a:schemeClr>
+    </dgm:linClrLst>
+    <dgm:effectClrLst/>
+    <dgm:txLinClrLst/>
+    <dgm:txFillClrLst meth="repeat">
+      <a:schemeClr val="lt1"/>
+    </dgm:txFillClrLst>
+    <dgm:txEffectClrLst/>
+  </dgm:styleLbl>
+  <dgm:styleLbl name="sibTrans2D1">
+    <dgm:fillClrLst meth="repeat">
+      <a:schemeClr val="accent1">
+        <a:tint val="60000"/>
+      </a:schemeClr>
+    </dgm:fillClrLst>
+    <dgm:linClrLst meth="repeat">
+      <a:schemeClr val="accent1">
+        <a:tint val="60000"/>
+      </a:schemeClr>
+    </dgm:linClrLst>
+    <dgm:effectClrLst/>
+    <dgm:txLinClrLst/>
+    <dgm:txFillClrLst meth="repeat">
+      <a:schemeClr val="dk1"/>
+    </dgm:txFillClrLst>
+    <dgm:txEffectClrLst/>
+  </dgm:styleLbl>
+  <dgm:styleLbl name="fgSibTrans2D1">
+    <dgm:fillClrLst meth="repeat">
+      <a:schemeClr val="accent1">
+        <a:tint val="60000"/>
+      </a:schemeClr>
+    </dgm:fillClrLst>
+    <dgm:linClrLst meth="repeat">
+      <a:schemeClr val="accent1">
+        <a:tint val="60000"/>
+      </a:schemeClr>
+    </dgm:linClrLst>
+    <dgm:effectClrLst/>
+    <dgm:txLinClrLst/>
+    <dgm:txFillClrLst meth="repeat">
+      <a:schemeClr val="dk1"/>
+    </dgm:txFillClrLst>
+    <dgm:txEffectClrLst/>
+  </dgm:styleLbl>
+  <dgm:styleLbl name="bgSibTrans2D1">
+    <dgm:fillClrLst meth="repeat">
+      <a:schemeClr val="accent1">
+        <a:tint val="60000"/>
+      </a:schemeClr>
+    </dgm:fillClrLst>
+    <dgm:linClrLst meth="repeat">
+      <a:schemeClr val="accent1">
+        <a:tint val="60000"/>
+      </a:schemeClr>
+    </dgm:linClrLst>
+    <dgm:effectClrLst/>
+    <dgm:txLinClrLst/>
+    <dgm:txFillClrLst meth="repeat">
+      <a:schemeClr val="dk1"/>
+    </dgm:txFillClrLst>
+    <dgm:txEffectClrLst/>
+  </dgm:styleLbl>
+  <dgm:styleLbl name="sibTrans1D1">
+    <dgm:fillClrLst meth="repeat">
+      <a:schemeClr val="accent1"/>
+    </dgm:fillClrLst>
+    <dgm:linClrLst meth="repeat">
+      <a:schemeClr val="accent1"/>
+    </dgm:linClrLst>
+    <dgm:effectClrLst/>
+    <dgm:txLinClrLst/>
+    <dgm:txFillClrLst meth="repeat">
+      <a:schemeClr val="tx1"/>
+    </dgm:txFillClrLst>
+    <dgm:txEffectClrLst/>
+  </dgm:styleLbl>
+  <dgm:styleLbl name="callout">
+    <dgm:fillClrLst meth="repeat">
+      <a:schemeClr val="accent1"/>
+    </dgm:fillClrLst>
+    <dgm:linClrLst meth="repeat">
+      <a:schemeClr val="accent1"/>
+    </dgm:linClrLst>
+    <dgm:effectClrLst/>
+    <dgm:txLinClrLst/>
+    <dgm:txFillClrLst meth="repeat">
+      <a:schemeClr val="tx1"/>
+    </dgm:txFillClrLst>
+    <dgm:txEffectClrLst/>
+  </dgm:styleLbl>
+  <dgm:styleLbl name="asst0">
+    <dgm:fillClrLst meth="repeat">
+      <a:schemeClr val="lt1"/>
+    </dgm:fillClrLst>
+    <dgm:linClrLst meth="repeat">
+      <a:schemeClr val="accent1">
+        <a:shade val="80000"/>
+      </a:schemeClr>
+    </dgm:linClrLst>
+    <dgm:effectClrLst/>
+    <dgm:txLinClrLst/>
+    <dgm:txFillClrLst meth="repeat">
+      <a:schemeClr val="dk1"/>
+    </dgm:txFillClrLst>
+    <dgm:txEffectClrLst/>
+  </dgm:styleLbl>
+  <dgm:styleLbl name="asst1">
+    <dgm:fillClrLst meth="repeat">
+      <a:schemeClr val="lt1"/>
+    </dgm:fillClrLst>
+    <dgm:linClrLst meth="repeat">
+      <a:schemeClr val="accent1">
+        <a:shade val="80000"/>
+      </a:schemeClr>
+    </dgm:linClrLst>
+    <dgm:effectClrLst/>
+    <dgm:txLinClrLst/>
+    <dgm:txFillClrLst meth="repeat">
+      <a:schemeClr val="dk1"/>
+    </dgm:txFillClrLst>
+    <dgm:txEffectClrLst/>
+  </dgm:styleLbl>
+  <dgm:styleLbl name="asst2">
+    <dgm:fillClrLst meth="repeat">
+      <a:schemeClr val="lt1"/>
+    </dgm:fillClrLst>
+    <dgm:linClrLst meth="repeat">
+      <a:schemeClr val="accent1">
+        <a:shade val="80000"/>
+      </a:schemeClr>
+    </dgm:linClrLst>
+    <dgm:effectClrLst/>
+    <dgm:txLinClrLst/>
+    <dgm:txFillClrLst meth="repeat">
+      <a:schemeClr val="dk1"/>
+    </dgm:txFillClrLst>
+    <dgm:txEffectClrLst/>
+  </dgm:styleLbl>
+  <dgm:styleLbl name="asst3">
+    <dgm:fillClrLst meth="repeat">
+      <a:schemeClr val="lt1"/>
+    </dgm:fillClrLst>
+    <dgm:linClrLst meth="repeat">
+      <a:schemeClr val="accent1">
+        <a:shade val="80000"/>
+      </a:schemeClr>
+    </dgm:linClrLst>
+    <dgm:effectClrLst/>
+    <dgm:txLinClrLst/>
+    <dgm:txFillClrLst meth="repeat">
+      <a:schemeClr val="dk1"/>
+    </dgm:txFillClrLst>
+    <dgm:txEffectClrLst/>
+  </dgm:styleLbl>
+  <dgm:styleLbl name="asst4">
+    <dgm:fillClrLst meth="repeat">
+      <a:schemeClr val="lt1"/>
+    </dgm:fillClrLst>
+    <dgm:linClrLst meth="repeat">
+      <a:schemeClr val="accent1">
+        <a:shade val="80000"/>
+      </a:schemeClr>
+    </dgm:linClrLst>
+    <dgm:effectClrLst/>
+    <dgm:txLinClrLst/>
+    <dgm:txFillClrLst meth="repeat">
+      <a:schemeClr val="dk1"/>
+    </dgm:txFillClrLst>
+    <dgm:txEffectClrLst/>
+  </dgm:styleLbl>
+  <dgm:styleLbl name="parChTrans2D1">
+    <dgm:fillClrLst meth="repeat">
+      <a:schemeClr val="accent1">
+        <a:tint val="60000"/>
+      </a:schemeClr>
+    </dgm:fillClrLst>
+    <dgm:linClrLst meth="repeat">
+      <a:schemeClr val="accent1">
+        <a:tint val="60000"/>
+      </a:schemeClr>
+    </dgm:linClrLst>
+    <dgm:effectClrLst/>
+    <dgm:txLinClrLst/>
+    <dgm:txFillClrLst/>
+    <dgm:txEffectClrLst/>
+  </dgm:styleLbl>
+  <dgm:styleLbl name="parChTrans2D2">
+    <dgm:fillClrLst meth="repeat">
+      <a:schemeClr val="accent1"/>
+    </dgm:fillClrLst>
+    <dgm:linClrLst meth="repeat">
+      <a:schemeClr val="accent1"/>
+    </dgm:linClrLst>
+    <dgm:effectClrLst/>
+    <dgm:txLinClrLst/>
+    <dgm:txFillClrLst/>
+    <dgm:txEffectClrLst/>
+  </dgm:styleLbl>
+  <dgm:styleLbl name="parChTrans2D3">
+    <dgm:fillClrLst meth="repeat">
+      <a:schemeClr val="accent1"/>
+    </dgm:fillClrLst>
+    <dgm:linClrLst meth="repeat">
+      <a:schemeClr val="accent1"/>
+    </dgm:linClrLst>
+    <dgm:effectClrLst/>
+    <dgm:txLinClrLst/>
+    <dgm:txFillClrLst/>
+    <dgm:txEffectClrLst/>
+  </dgm:styleLbl>
+  <dgm:styleLbl name="parChTrans2D4">
+    <dgm:fillClrLst meth="repeat">
+      <a:schemeClr val="accent1"/>
+    </dgm:fillClrLst>
+    <dgm:linClrLst meth="repeat">
+      <a:schemeClr val="accent1"/>
+    </dgm:linClrLst>
+    <dgm:effectClrLst/>
+    <dgm:txLinClrLst/>
+    <dgm:txFillClrLst meth="repeat">
+      <a:schemeClr val="lt1"/>
+    </dgm:txFillClrLst>
+    <dgm:txEffectClrLst/>
+  </dgm:styleLbl>
+  <dgm:styleLbl name="parChTrans1D1">
+    <dgm:fillClrLst meth="repeat">
+      <a:schemeClr val="accent1"/>
+    </dgm:fillClrLst>
+    <dgm:linClrLst meth="repeat">
+      <a:schemeClr val="accent1">
+        <a:shade val="60000"/>
+      </a:schemeClr>
+    </dgm:linClrLst>
+    <dgm:effectClrLst/>
+    <dgm:txLinClrLst/>
+    <dgm:txFillClrLst meth="repeat">
+      <a:schemeClr val="tx1"/>
+    </dgm:txFillClrLst>
+    <dgm:txEffectClrLst/>
+  </dgm:styleLbl>
+  <dgm:styleLbl name="parChTrans1D2">
+    <dgm:fillClrLst meth="repeat">
+      <a:schemeClr val="accent1"/>
+    </dgm:fillClrLst>
+    <dgm:linClrLst meth="repeat">
+      <a:schemeClr val="accent1">
+        <a:shade val="60000"/>
+      </a:schemeClr>
+    </dgm:linClrLst>
+    <dgm:effectClrLst/>
+    <dgm:txLinClrLst/>
+    <dgm:txFillClrLst meth="repeat">
+      <a:schemeClr val="tx1"/>
+    </dgm:txFillClrLst>
+    <dgm:txEffectClrLst/>
+  </dgm:styleLbl>
+  <dgm:styleLbl name="parChTrans1D3">
+    <dgm:fillClrLst meth="repeat">
+      <a:schemeClr val="accent1"/>
+    </dgm:fillClrLst>
+    <dgm:linClrLst meth="repeat">
+      <a:schemeClr val="accent1">
+        <a:shade val="80000"/>
+      </a:schemeClr>
+    </dgm:linClrLst>
+    <dgm:effectClrLst/>
+    <dgm:txLinClrLst/>
+    <dgm:txFillClrLst meth="repeat">
+      <a:schemeClr val="tx1"/>
+    </dgm:txFillClrLst>
+    <dgm:txEffectClrLst/>
+  </dgm:styleLbl>
+  <dgm:styleLbl name="parChTrans1D4">
+    <dgm:fillClrLst meth="repeat">
+      <a:schemeClr val="accent1"/>
+    </dgm:fillClrLst>
+    <dgm:linClrLst meth="repeat">
+      <a:schemeClr val="accent1">
+        <a:shade val="80000"/>
+      </a:schemeClr>
+    </dgm:linClrLst>
+    <dgm:effectClrLst/>
+    <dgm:txLinClrLst/>
+    <dgm:txFillClrLst meth="repeat">
+      <a:schemeClr val="tx1"/>
+    </dgm:txFillClrLst>
+    <dgm:txEffectClrLst/>
+  </dgm:styleLbl>
+  <dgm:styleLbl name="fgAcc1">
+    <dgm:fillClrLst meth="repeat">
+      <a:schemeClr val="accent1">
+        <a:alpha val="90000"/>
+        <a:tint val="40000"/>
+      </a:schemeClr>
+    </dgm:fillClrLst>
+    <dgm:linClrLst meth="repeat">
+      <a:schemeClr val="accent1"/>
+    </dgm:linClrLst>
+    <dgm:effectClrLst/>
+    <dgm:txLinClrLst/>
+    <dgm:txFillClrLst meth="repeat">
+      <a:schemeClr val="dk1"/>
+    </dgm:txFillClrLst>
+    <dgm:txEffectClrLst/>
+  </dgm:styleLbl>
+  <dgm:styleLbl name="conFgAcc1">
+    <dgm:fillClrLst meth="repeat">
+      <a:schemeClr val="accent1">
+        <a:alpha val="90000"/>
+        <a:tint val="40000"/>
+      </a:schemeClr>
+    </dgm:fillClrLst>
+    <dgm:linClrLst meth="repeat">
+      <a:schemeClr val="accent1"/>
+    </dgm:linClrLst>
+    <dgm:effectClrLst/>
+    <dgm:txLinClrLst/>
+    <dgm:txFillClrLst meth="repeat">
+      <a:schemeClr val="dk1"/>
+    </dgm:txFillClrLst>
+    <dgm:txEffectClrLst/>
+  </dgm:styleLbl>
+  <dgm:styleLbl name="alignAcc1">
+    <dgm:fillClrLst meth="repeat">
+      <a:schemeClr val="accent1">
+        <a:alpha val="90000"/>
+        <a:tint val="40000"/>
+      </a:schemeClr>
+    </dgm:fillClrLst>
+    <dgm:linClrLst meth="repeat">
+      <a:schemeClr val="accent1"/>
+    </dgm:linClrLst>
+    <dgm:effectClrLst/>
+    <dgm:txLinClrLst/>
+    <dgm:txFillClrLst meth="repeat">
+      <a:schemeClr val="dk1"/>
+    </dgm:txFillClrLst>
+    <dgm:txEffectClrLst/>
+  </dgm:styleLbl>
+  <dgm:styleLbl name="trAlignAcc1">
+    <dgm:fillClrLst meth="repeat">
+      <a:schemeClr val="accent1">
+        <a:alpha val="40000"/>
+        <a:tint val="40000"/>
+      </a:schemeClr>
+    </dgm:fillClrLst>
+    <dgm:linClrLst meth="repeat">
+      <a:schemeClr val="accent1"/>
+    </dgm:linClrLst>
+    <dgm:effectClrLst/>
+    <dgm:txLinClrLst/>
+    <dgm:txFillClrLst meth="repeat">
+      <a:schemeClr val="dk1"/>
+    </dgm:txFillClrLst>
+    <dgm:txEffectClrLst/>
+  </dgm:styleLbl>
+  <dgm:styleLbl name="bgAcc1">
+    <dgm:fillClrLst meth="repeat">
+      <a:schemeClr val="accent1">
+        <a:alpha val="90000"/>
+        <a:tint val="40000"/>
+      </a:schemeClr>
+    </dgm:fillClrLst>
+    <dgm:linClrLst meth="repeat">
+      <a:schemeClr val="accent1"/>
+    </dgm:linClrLst>
+    <dgm:effectClrLst/>
+    <dgm:txLinClrLst/>
+    <dgm:txFillClrLst meth="repeat">
+      <a:schemeClr val="dk1"/>
+    </dgm:txFillClrLst>
+    <dgm:txEffectClrLst/>
+  </dgm:styleLbl>
+  <dgm:styleLbl name="solidFgAcc1">
+    <dgm:fillClrLst meth="repeat">
+      <a:schemeClr val="lt1"/>
+    </dgm:fillClrLst>
+    <dgm:linClrLst meth="repeat">
+      <a:schemeClr val="accent1"/>
+    </dgm:linClrLst>
+    <dgm:effectClrLst/>
+    <dgm:txLinClrLst/>
+    <dgm:txFillClrLst meth="repeat">
+      <a:schemeClr val="dk1"/>
+    </dgm:txFillClrLst>
+    <dgm:txEffectClrLst/>
+  </dgm:styleLbl>
+  <dgm:styleLbl name="solidAlignAcc1">
+    <dgm:fillClrLst meth="repeat">
+      <a:schemeClr val="lt1"/>
+    </dgm:fillClrLst>
+    <dgm:linClrLst meth="repeat">
+      <a:schemeClr val="accent1"/>
+    </dgm:linClrLst>
+    <dgm:effectClrLst/>
+    <dgm:txLinClrLst/>
+    <dgm:txFillClrLst meth="repeat">
+      <a:schemeClr val="dk1"/>
+    </dgm:txFillClrLst>
+    <dgm:txEffectClrLst/>
+  </dgm:styleLbl>
+  <dgm:styleLbl name="solidBgAcc1">
+    <dgm:fillClrLst meth="repeat">
+      <a:schemeClr val="lt1"/>
+    </dgm:fillClrLst>
+    <dgm:linClrLst meth="repeat">
+      <a:schemeClr val="accent1"/>
+    </dgm:linClrLst>
+    <dgm:effectClrLst/>
+    <dgm:txLinClrLst/>
+    <dgm:txFillClrLst meth="repeat">
+      <a:schemeClr val="dk1"/>
+    </dgm:txFillClrLst>
+    <dgm:txEffectClrLst/>
+  </dgm:styleLbl>
+  <dgm:styleLbl name="fgAccFollowNode1">
+    <dgm:fillClrLst meth="repeat">
+      <a:schemeClr val="lt1">
+        <a:alpha val="90000"/>
+        <a:tint val="40000"/>
+      </a:schemeClr>
+    </dgm:fillClrLst>
+    <dgm:linClrLst meth="repeat">
+      <a:schemeClr val="accent1">
+        <a:alpha val="90000"/>
+      </a:schemeClr>
+    </dgm:linClrLst>
+    <dgm:effectClrLst/>
+    <dgm:txLinClrLst/>
+    <dgm:txFillClrLst meth="repeat">
+      <a:schemeClr val="dk1"/>
+    </dgm:txFillClrLst>
+    <dgm:txEffectClrLst/>
+  </dgm:styleLbl>
+  <dgm:styleLbl name="alignAccFollowNode1">
+    <dgm:fillClrLst meth="repeat">
+      <a:schemeClr val="lt1">
+        <a:alpha val="90000"/>
+        <a:tint val="40000"/>
+      </a:schemeClr>
+    </dgm:fillClrLst>
+    <dgm:linClrLst meth="repeat">
+      <a:schemeClr val="accent1">
+        <a:alpha val="90000"/>
+      </a:schemeClr>
+    </dgm:linClrLst>
+    <dgm:effectClrLst/>
+    <dgm:txLinClrLst/>
+    <dgm:txFillClrLst meth="repeat">
+      <a:schemeClr val="dk1"/>
+    </dgm:txFillClrLst>
+    <dgm:txEffectClrLst/>
+  </dgm:styleLbl>
+  <dgm:styleLbl name="bgAccFollowNode1">
+    <dgm:fillClrLst meth="repeat">
+      <a:schemeClr val="lt1">
+        <a:alpha val="90000"/>
+        <a:tint val="40000"/>
+      </a:schemeClr>
+    </dgm:fillClrLst>
+    <dgm:linClrLst meth="repeat">
+      <a:schemeClr val="accent1">
+        <a:alpha val="90000"/>
+      </a:schemeClr>
+    </dgm:linClrLst>
+    <dgm:effectClrLst/>
+    <dgm:txLinClrLst/>
+    <dgm:txFillClrLst meth="repeat">
+      <a:schemeClr val="dk1"/>
+    </dgm:txFillClrLst>
+    <dgm:txEffectClrLst/>
+  </dgm:styleLbl>
+  <dgm:styleLbl name="fgAcc0">
+    <dgm:fillClrLst meth="repeat">
+      <a:schemeClr val="accent1">
+        <a:alpha val="90000"/>
+        <a:tint val="40000"/>
+      </a:schemeClr>
+    </dgm:fillClrLst>
+    <dgm:linClrLst meth="repeat">
+      <a:schemeClr val="accent1"/>
+    </dgm:linClrLst>
+    <dgm:effectClrLst/>
+    <dgm:txLinClrLst/>
+    <dgm:txFillClrLst meth="repeat">
+      <a:schemeClr val="dk1"/>
+    </dgm:txFillClrLst>
+    <dgm:txEffectClrLst/>
+  </dgm:styleLbl>
+  <dgm:styleLbl name="fgAcc2">
+    <dgm:fillClrLst meth="repeat">
+      <a:schemeClr val="accent1">
+        <a:alpha val="90000"/>
+        <a:tint val="40000"/>
+      </a:schemeClr>
+    </dgm:fillClrLst>
+    <dgm:linClrLst meth="repeat">
+      <a:schemeClr val="accent1"/>
+    </dgm:linClrLst>
+    <dgm:effectClrLst/>
+    <dgm:txLinClrLst/>
+    <dgm:txFillClrLst meth="repeat">
+      <a:schemeClr val="dk1"/>
+    </dgm:txFillClrLst>
+    <dgm:txEffectClrLst/>
+  </dgm:styleLbl>
+  <dgm:styleLbl name="fgAcc3">
+    <dgm:fillClrLst meth="repeat">
+      <a:schemeClr val="accent1">
+        <a:alpha val="90000"/>
+        <a:tint val="40000"/>
+      </a:schemeClr>
+    </dgm:fillClrLst>
+    <dgm:linClrLst meth="repeat">
+      <a:schemeClr val="accent1"/>
+    </dgm:linClrLst>
+    <dgm:effectClrLst/>
+    <dgm:txLinClrLst/>
+    <dgm:txFillClrLst meth="repeat">
+      <a:schemeClr val="dk1"/>
+    </dgm:txFillClrLst>
+    <dgm:txEffectClrLst/>
+  </dgm:styleLbl>
+  <dgm:styleLbl name="fgAcc4">
+    <dgm:fillClrLst meth="repeat">
+      <a:schemeClr val="accent1">
+        <a:alpha val="90000"/>
+        <a:tint val="40000"/>
+      </a:schemeClr>
+    </dgm:fillClrLst>
+    <dgm:linClrLst meth="repeat">
+      <a:schemeClr val="accent1"/>
+    </dgm:linClrLst>
+    <dgm:effectClrLst/>
+    <dgm:txLinClrLst/>
+    <dgm:txFillClrLst meth="repeat">
+      <a:schemeClr val="dk1"/>
+    </dgm:txFillClrLst>
+    <dgm:txEffectClrLst/>
+  </dgm:styleLbl>
+  <dgm:styleLbl name="bgShp">
+    <dgm:fillClrLst meth="repeat">
+      <a:schemeClr val="accent1">
+        <a:tint val="40000"/>
+      </a:schemeClr>
+    </dgm:fillClrLst>
+    <dgm:linClrLst meth="repeat">
+      <a:schemeClr val="accent1"/>
+    </dgm:linClrLst>
+    <dgm:effectClrLst/>
+    <dgm:txLinClrLst/>
+    <dgm:txFillClrLst meth="repeat">
+      <a:schemeClr val="dk1"/>
+    </dgm:txFillClrLst>
+    <dgm:txEffectClrLst/>
+  </dgm:styleLbl>
+  <dgm:styleLbl name="dkBgShp">
+    <dgm:fillClrLst meth="repeat">
+      <a:schemeClr val="accent1">
+        <a:shade val="80000"/>
+      </a:schemeClr>
+    </dgm:fillClrLst>
+    <dgm:linClrLst meth="repeat">
+      <a:schemeClr val="accent1"/>
+    </dgm:linClrLst>
+    <dgm:effectClrLst/>
+    <dgm:txLinClrLst/>
+    <dgm:txFillClrLst meth="repeat">
+      <a:schemeClr val="lt1"/>
+    </dgm:txFillClrLst>
+    <dgm:txEffectClrLst/>
+  </dgm:styleLbl>
+  <dgm:styleLbl name="trBgShp">
+    <dgm:fillClrLst meth="repeat">
+      <a:schemeClr val="accent1">
+        <a:tint val="50000"/>
+        <a:alpha val="40000"/>
+      </a:schemeClr>
+    </dgm:fillClrLst>
+    <dgm:linClrLst meth="repeat">
+      <a:schemeClr val="accent1"/>
+    </dgm:linClrLst>
+    <dgm:effectClrLst/>
+    <dgm:txLinClrLst/>
+    <dgm:txFillClrLst meth="repeat">
+      <a:schemeClr val="lt1"/>
+    </dgm:txFillClrLst>
+    <dgm:txEffectClrLst/>
+  </dgm:styleLbl>
+  <dgm:styleLbl name="fgShp">
+    <dgm:fillClrLst meth="repeat">
+      <a:schemeClr val="accent1">
+        <a:tint val="60000"/>
+      </a:schemeClr>
+    </dgm:fillClrLst>
+    <dgm:linClrLst meth="repeat">
+      <a:schemeClr val="lt1"/>
+    </dgm:linClrLst>
+    <dgm:effectClrLst/>
+    <dgm:txLinClrLst/>
+    <dgm:txFillClrLst meth="repeat">
+      <a:schemeClr val="dk1"/>
+    </dgm:txFillClrLst>
+    <dgm:txEffectClrLst/>
+  </dgm:styleLbl>
+  <dgm:styleLbl name="revTx">
+    <dgm:fillClrLst meth="repeat">
+      <a:schemeClr val="lt1">
+        <a:alpha val="0"/>
+      </a:schemeClr>
+    </dgm:fillClrLst>
+    <dgm:linClrLst meth="repeat">
+      <a:schemeClr val="dk1">
+        <a:alpha val="0"/>
+      </a:schemeClr>
+    </dgm:linClrLst>
+    <dgm:effectClrLst/>
+    <dgm:txLinClrLst/>
+    <dgm:txFillClrLst meth="repeat">
+      <a:schemeClr val="tx1"/>
+    </dgm:txFillClrLst>
+    <dgm:txEffectClrLst/>
+  </dgm:styleLbl>
+</dgm:colorsDef>
+</file>
+
+<file path=ppt/diagrams/data1.xml><?xml version="1.0" encoding="utf-8"?>
+<dgm:dataModel xmlns:dgm="http://schemas.openxmlformats.org/drawingml/2006/diagram" xmlns:a="http://schemas.openxmlformats.org/drawingml/2006/main">
+  <dgm:ptLst>
+    <dgm:pt modelId="{F1F8B658-A221-4539-BBEF-84208F403DFF}" type="doc">
+      <dgm:prSet loTypeId="urn:microsoft.com/office/officeart/2005/8/layout/process1" loCatId="process" qsTypeId="urn:microsoft.com/office/officeart/2005/8/quickstyle/simple1" qsCatId="simple" csTypeId="urn:microsoft.com/office/officeart/2005/8/colors/accent0_1" csCatId="mainScheme" phldr="1"/>
+      <dgm:spPr/>
+    </dgm:pt>
+    <dgm:pt modelId="{46509B18-8069-4705-810F-294DA09C2BD5}">
+      <dgm:prSet phldrT="[Text]"/>
+      <dgm:spPr/>
+      <dgm:t>
+        <a:bodyPr/>
+        <a:lstStyle/>
+        <a:p>
+          <a:pPr>
+            <a:buNone/>
+          </a:pPr>
+          <a:r>
+            <a:rPr lang="en-IE" dirty="0"/>
+            <a:t>Race Initialisation</a:t>
+          </a:r>
+        </a:p>
+      </dgm:t>
+    </dgm:pt>
+    <dgm:pt modelId="{6916A3D2-96A3-45B4-817E-4E3F7ACFFFF7}" type="parTrans" cxnId="{3D77940C-BF16-4A41-A966-974FBFE1C777}">
+      <dgm:prSet/>
+      <dgm:spPr/>
+      <dgm:t>
+        <a:bodyPr/>
+        <a:lstStyle/>
+        <a:p>
+          <a:endParaRPr lang="en-IE"/>
+        </a:p>
+      </dgm:t>
+    </dgm:pt>
+    <dgm:pt modelId="{FB669013-FD33-4426-B5C6-964C7EF775E4}" type="sibTrans" cxnId="{3D77940C-BF16-4A41-A966-974FBFE1C777}">
+      <dgm:prSet/>
+      <dgm:spPr>
+        <a:solidFill>
+          <a:schemeClr val="accent2"/>
+        </a:solidFill>
+      </dgm:spPr>
+      <dgm:t>
+        <a:bodyPr/>
+        <a:lstStyle/>
+        <a:p>
+          <a:endParaRPr lang="en-IE"/>
+        </a:p>
+      </dgm:t>
+    </dgm:pt>
+    <dgm:pt modelId="{0DD7685A-6C0C-42E2-AB4F-E7C3495F9859}">
+      <dgm:prSet phldrT="[Text]"/>
+      <dgm:spPr/>
+      <dgm:t>
+        <a:bodyPr/>
+        <a:lstStyle/>
+        <a:p>
+          <a:pPr>
+            <a:buNone/>
+          </a:pPr>
+          <a:r>
+            <a:rPr lang="en-IE" dirty="0"/>
+            <a:t>Driver Behaviour Update</a:t>
+          </a:r>
+        </a:p>
+      </dgm:t>
+    </dgm:pt>
+    <dgm:pt modelId="{80AE067D-78E9-4A59-8639-50CFD0950265}" type="parTrans" cxnId="{7BCC904F-0289-4E59-ADAA-13249E78A1B4}">
+      <dgm:prSet/>
+      <dgm:spPr/>
+      <dgm:t>
+        <a:bodyPr/>
+        <a:lstStyle/>
+        <a:p>
+          <a:endParaRPr lang="en-IE"/>
+        </a:p>
+      </dgm:t>
+    </dgm:pt>
+    <dgm:pt modelId="{FD9AA3F4-7ED3-4F51-915F-CA8C2C38140D}" type="sibTrans" cxnId="{7BCC904F-0289-4E59-ADAA-13249E78A1B4}">
+      <dgm:prSet/>
+      <dgm:spPr>
+        <a:solidFill>
+          <a:srgbClr val="A93044"/>
+        </a:solidFill>
+      </dgm:spPr>
+      <dgm:t>
+        <a:bodyPr/>
+        <a:lstStyle/>
+        <a:p>
+          <a:endParaRPr lang="en-IE"/>
+        </a:p>
+      </dgm:t>
+    </dgm:pt>
+    <dgm:pt modelId="{5FF5B6C2-B3F7-42E8-B4B5-093037CB6F10}">
+      <dgm:prSet phldrT="[Text]"/>
+      <dgm:spPr/>
+      <dgm:t>
+        <a:bodyPr/>
+        <a:lstStyle/>
+        <a:p>
+          <a:pPr>
+            <a:buNone/>
+          </a:pPr>
+          <a:r>
+            <a:rPr lang="en-IE" dirty="0"/>
+            <a:t>Race Simulation Loop</a:t>
+          </a:r>
+        </a:p>
+      </dgm:t>
+    </dgm:pt>
+    <dgm:pt modelId="{DBFB854D-F5EE-4774-BD1A-AF8D1AA7649F}" type="parTrans" cxnId="{263AEEC2-4455-464C-A125-51B992427F07}">
+      <dgm:prSet/>
+      <dgm:spPr/>
+      <dgm:t>
+        <a:bodyPr/>
+        <a:lstStyle/>
+        <a:p>
+          <a:endParaRPr lang="en-IE"/>
+        </a:p>
+      </dgm:t>
+    </dgm:pt>
+    <dgm:pt modelId="{ED1E0211-67EE-45C9-A773-7B8C03E63880}" type="sibTrans" cxnId="{263AEEC2-4455-464C-A125-51B992427F07}">
+      <dgm:prSet/>
+      <dgm:spPr>
+        <a:solidFill>
+          <a:srgbClr val="A93044"/>
+        </a:solidFill>
+      </dgm:spPr>
+      <dgm:t>
+        <a:bodyPr/>
+        <a:lstStyle/>
+        <a:p>
+          <a:endParaRPr lang="en-IE"/>
+        </a:p>
+      </dgm:t>
+    </dgm:pt>
+    <dgm:pt modelId="{56FD32F2-27B3-42D3-B05C-78E4C3EEF271}">
+      <dgm:prSet phldrT="[Text]"/>
+      <dgm:spPr/>
+      <dgm:t>
+        <a:bodyPr/>
+        <a:lstStyle/>
+        <a:p>
+          <a:pPr>
+            <a:buNone/>
+          </a:pPr>
+          <a:r>
+            <a:rPr lang="en-IE" dirty="0"/>
+            <a:t>Checkpoint &amp; Position Update</a:t>
+          </a:r>
+        </a:p>
+      </dgm:t>
+    </dgm:pt>
+    <dgm:pt modelId="{49D61686-8945-4E07-A5EF-294581385A96}" type="parTrans" cxnId="{A8A41619-AD62-4EDC-A4AF-B3513A80CB9B}">
+      <dgm:prSet/>
+      <dgm:spPr/>
+      <dgm:t>
+        <a:bodyPr/>
+        <a:lstStyle/>
+        <a:p>
+          <a:endParaRPr lang="en-IE"/>
+        </a:p>
+      </dgm:t>
+    </dgm:pt>
+    <dgm:pt modelId="{36144163-E3F3-43F5-88EF-29A5FB3D925E}" type="sibTrans" cxnId="{A8A41619-AD62-4EDC-A4AF-B3513A80CB9B}">
+      <dgm:prSet/>
+      <dgm:spPr>
+        <a:solidFill>
+          <a:srgbClr val="A93044"/>
+        </a:solidFill>
+      </dgm:spPr>
+      <dgm:t>
+        <a:bodyPr/>
+        <a:lstStyle/>
+        <a:p>
+          <a:endParaRPr lang="en-IE"/>
+        </a:p>
+      </dgm:t>
+    </dgm:pt>
+    <dgm:pt modelId="{49CE846F-54D6-44DB-A4EC-5A63E9F4EE48}">
+      <dgm:prSet phldrT="[Text]"/>
+      <dgm:spPr/>
+      <dgm:t>
+        <a:bodyPr/>
+        <a:lstStyle/>
+        <a:p>
+          <a:pPr>
+            <a:buNone/>
+          </a:pPr>
+          <a:r>
+            <a:rPr lang="en-IE" dirty="0"/>
+            <a:t>Telemetry Generation</a:t>
+          </a:r>
+        </a:p>
+      </dgm:t>
+    </dgm:pt>
+    <dgm:pt modelId="{ECD844E2-940B-49D7-98F4-CAD0AF579DA0}" type="parTrans" cxnId="{33FDC06C-176F-40F6-971D-B75D6A5AFC54}">
+      <dgm:prSet/>
+      <dgm:spPr/>
+      <dgm:t>
+        <a:bodyPr/>
+        <a:lstStyle/>
+        <a:p>
+          <a:endParaRPr lang="en-IE"/>
+        </a:p>
+      </dgm:t>
+    </dgm:pt>
+    <dgm:pt modelId="{8D493311-6832-4918-A830-3DCD54CC8FDF}" type="sibTrans" cxnId="{33FDC06C-176F-40F6-971D-B75D6A5AFC54}">
+      <dgm:prSet/>
+      <dgm:spPr/>
+      <dgm:t>
+        <a:bodyPr/>
+        <a:lstStyle/>
+        <a:p>
+          <a:endParaRPr lang="en-IE"/>
+        </a:p>
+      </dgm:t>
+    </dgm:pt>
+    <dgm:pt modelId="{18D5B566-CBB3-4A2B-AB29-E5E158A409FD}" type="pres">
+      <dgm:prSet presAssocID="{F1F8B658-A221-4539-BBEF-84208F403DFF}" presName="Name0" presStyleCnt="0">
+        <dgm:presLayoutVars>
+          <dgm:dir/>
+          <dgm:resizeHandles val="exact"/>
+        </dgm:presLayoutVars>
+      </dgm:prSet>
+      <dgm:spPr/>
+    </dgm:pt>
+    <dgm:pt modelId="{483B3306-9E08-493E-B4D1-8F0414F0F3F5}" type="pres">
+      <dgm:prSet presAssocID="{46509B18-8069-4705-810F-294DA09C2BD5}" presName="node" presStyleLbl="node1" presStyleIdx="0" presStyleCnt="5" custLinFactNeighborX="0">
+        <dgm:presLayoutVars>
+          <dgm:bulletEnabled val="1"/>
+        </dgm:presLayoutVars>
+      </dgm:prSet>
+      <dgm:spPr/>
+    </dgm:pt>
+    <dgm:pt modelId="{AC35074A-6676-451D-B690-4D7F43554B5E}" type="pres">
+      <dgm:prSet presAssocID="{FB669013-FD33-4426-B5C6-964C7EF775E4}" presName="sibTrans" presStyleLbl="sibTrans2D1" presStyleIdx="0" presStyleCnt="4"/>
+      <dgm:spPr/>
+    </dgm:pt>
+    <dgm:pt modelId="{60E2820F-296A-4B0A-9D7C-A098F67BA26B}" type="pres">
+      <dgm:prSet presAssocID="{FB669013-FD33-4426-B5C6-964C7EF775E4}" presName="connectorText" presStyleLbl="sibTrans2D1" presStyleIdx="0" presStyleCnt="4"/>
+      <dgm:spPr/>
+    </dgm:pt>
+    <dgm:pt modelId="{C1DA1859-ADFE-446E-8AF2-B62D312D6EF6}" type="pres">
+      <dgm:prSet presAssocID="{0DD7685A-6C0C-42E2-AB4F-E7C3495F9859}" presName="node" presStyleLbl="node1" presStyleIdx="1" presStyleCnt="5" custLinFactNeighborX="0">
+        <dgm:presLayoutVars>
+          <dgm:bulletEnabled val="1"/>
+        </dgm:presLayoutVars>
+      </dgm:prSet>
+      <dgm:spPr/>
+    </dgm:pt>
+    <dgm:pt modelId="{0E0C0A7D-3DD8-4B75-85A5-205A5F9A5CAD}" type="pres">
+      <dgm:prSet presAssocID="{FD9AA3F4-7ED3-4F51-915F-CA8C2C38140D}" presName="sibTrans" presStyleLbl="sibTrans2D1" presStyleIdx="1" presStyleCnt="4"/>
+      <dgm:spPr/>
+    </dgm:pt>
+    <dgm:pt modelId="{40F56964-BF61-453A-998B-ADC551DFB192}" type="pres">
+      <dgm:prSet presAssocID="{FD9AA3F4-7ED3-4F51-915F-CA8C2C38140D}" presName="connectorText" presStyleLbl="sibTrans2D1" presStyleIdx="1" presStyleCnt="4"/>
+      <dgm:spPr/>
+    </dgm:pt>
+    <dgm:pt modelId="{FB3320C9-CCE2-4A09-9D4B-F0C97D609CA6}" type="pres">
+      <dgm:prSet presAssocID="{5FF5B6C2-B3F7-42E8-B4B5-093037CB6F10}" presName="node" presStyleLbl="node1" presStyleIdx="2" presStyleCnt="5">
+        <dgm:presLayoutVars>
+          <dgm:bulletEnabled val="1"/>
+        </dgm:presLayoutVars>
+      </dgm:prSet>
+      <dgm:spPr/>
+    </dgm:pt>
+    <dgm:pt modelId="{1B1207CD-762C-4032-9B85-93FBD354AF22}" type="pres">
+      <dgm:prSet presAssocID="{ED1E0211-67EE-45C9-A773-7B8C03E63880}" presName="sibTrans" presStyleLbl="sibTrans2D1" presStyleIdx="2" presStyleCnt="4"/>
+      <dgm:spPr/>
+    </dgm:pt>
+    <dgm:pt modelId="{3DD7F041-164D-47FA-9CA1-6F0B200FEDE2}" type="pres">
+      <dgm:prSet presAssocID="{ED1E0211-67EE-45C9-A773-7B8C03E63880}" presName="connectorText" presStyleLbl="sibTrans2D1" presStyleIdx="2" presStyleCnt="4"/>
+      <dgm:spPr/>
+    </dgm:pt>
+    <dgm:pt modelId="{BA0053AC-5E35-47CA-8098-43C45F42DE77}" type="pres">
+      <dgm:prSet presAssocID="{56FD32F2-27B3-42D3-B05C-78E4C3EEF271}" presName="node" presStyleLbl="node1" presStyleIdx="3" presStyleCnt="5">
+        <dgm:presLayoutVars>
+          <dgm:bulletEnabled val="1"/>
+        </dgm:presLayoutVars>
+      </dgm:prSet>
+      <dgm:spPr/>
+    </dgm:pt>
+    <dgm:pt modelId="{6D83BE8D-26D3-4FC5-A60B-6AE7DD08ECAE}" type="pres">
+      <dgm:prSet presAssocID="{36144163-E3F3-43F5-88EF-29A5FB3D925E}" presName="sibTrans" presStyleLbl="sibTrans2D1" presStyleIdx="3" presStyleCnt="4"/>
+      <dgm:spPr/>
+    </dgm:pt>
+    <dgm:pt modelId="{22D1CD4B-27DC-4DE0-A07B-06FD635D1353}" type="pres">
+      <dgm:prSet presAssocID="{36144163-E3F3-43F5-88EF-29A5FB3D925E}" presName="connectorText" presStyleLbl="sibTrans2D1" presStyleIdx="3" presStyleCnt="4"/>
+      <dgm:spPr/>
+    </dgm:pt>
+    <dgm:pt modelId="{632D27BE-4310-42B5-B451-A9DDF8B20469}" type="pres">
+      <dgm:prSet presAssocID="{49CE846F-54D6-44DB-A4EC-5A63E9F4EE48}" presName="node" presStyleLbl="node1" presStyleIdx="4" presStyleCnt="5">
+        <dgm:presLayoutVars>
+          <dgm:bulletEnabled val="1"/>
+        </dgm:presLayoutVars>
+      </dgm:prSet>
+      <dgm:spPr/>
+    </dgm:pt>
+  </dgm:ptLst>
+  <dgm:cxnLst>
+    <dgm:cxn modelId="{A8EE3106-F391-4F4E-A73B-B3C843BFC60F}" type="presOf" srcId="{FB669013-FD33-4426-B5C6-964C7EF775E4}" destId="{60E2820F-296A-4B0A-9D7C-A098F67BA26B}" srcOrd="1" destOrd="0" presId="urn:microsoft.com/office/officeart/2005/8/layout/process1"/>
+    <dgm:cxn modelId="{3D77940C-BF16-4A41-A966-974FBFE1C777}" srcId="{F1F8B658-A221-4539-BBEF-84208F403DFF}" destId="{46509B18-8069-4705-810F-294DA09C2BD5}" srcOrd="0" destOrd="0" parTransId="{6916A3D2-96A3-45B4-817E-4E3F7ACFFFF7}" sibTransId="{FB669013-FD33-4426-B5C6-964C7EF775E4}"/>
+    <dgm:cxn modelId="{A8A41619-AD62-4EDC-A4AF-B3513A80CB9B}" srcId="{F1F8B658-A221-4539-BBEF-84208F403DFF}" destId="{56FD32F2-27B3-42D3-B05C-78E4C3EEF271}" srcOrd="3" destOrd="0" parTransId="{49D61686-8945-4E07-A5EF-294581385A96}" sibTransId="{36144163-E3F3-43F5-88EF-29A5FB3D925E}"/>
+    <dgm:cxn modelId="{D652D72A-8BD1-4A6D-B56A-31B655818BB3}" type="presOf" srcId="{46509B18-8069-4705-810F-294DA09C2BD5}" destId="{483B3306-9E08-493E-B4D1-8F0414F0F3F5}" srcOrd="0" destOrd="0" presId="urn:microsoft.com/office/officeart/2005/8/layout/process1"/>
+    <dgm:cxn modelId="{29B4AF63-84B9-4823-97ED-91AE4F5DA03F}" type="presOf" srcId="{FB669013-FD33-4426-B5C6-964C7EF775E4}" destId="{AC35074A-6676-451D-B690-4D7F43554B5E}" srcOrd="0" destOrd="0" presId="urn:microsoft.com/office/officeart/2005/8/layout/process1"/>
+    <dgm:cxn modelId="{20128D46-472A-4633-93E3-D903DA2DA236}" type="presOf" srcId="{49CE846F-54D6-44DB-A4EC-5A63E9F4EE48}" destId="{632D27BE-4310-42B5-B451-A9DDF8B20469}" srcOrd="0" destOrd="0" presId="urn:microsoft.com/office/officeart/2005/8/layout/process1"/>
+    <dgm:cxn modelId="{33FDC06C-176F-40F6-971D-B75D6A5AFC54}" srcId="{F1F8B658-A221-4539-BBEF-84208F403DFF}" destId="{49CE846F-54D6-44DB-A4EC-5A63E9F4EE48}" srcOrd="4" destOrd="0" parTransId="{ECD844E2-940B-49D7-98F4-CAD0AF579DA0}" sibTransId="{8D493311-6832-4918-A830-3DCD54CC8FDF}"/>
+    <dgm:cxn modelId="{06ED894D-21AC-4891-BEBB-76EAED9C0290}" type="presOf" srcId="{0DD7685A-6C0C-42E2-AB4F-E7C3495F9859}" destId="{C1DA1859-ADFE-446E-8AF2-B62D312D6EF6}" srcOrd="0" destOrd="0" presId="urn:microsoft.com/office/officeart/2005/8/layout/process1"/>
+    <dgm:cxn modelId="{38D1116E-95C1-46FD-957D-B2261DB31D12}" type="presOf" srcId="{F1F8B658-A221-4539-BBEF-84208F403DFF}" destId="{18D5B566-CBB3-4A2B-AB29-E5E158A409FD}" srcOrd="0" destOrd="0" presId="urn:microsoft.com/office/officeart/2005/8/layout/process1"/>
+    <dgm:cxn modelId="{7BCC904F-0289-4E59-ADAA-13249E78A1B4}" srcId="{F1F8B658-A221-4539-BBEF-84208F403DFF}" destId="{0DD7685A-6C0C-42E2-AB4F-E7C3495F9859}" srcOrd="1" destOrd="0" parTransId="{80AE067D-78E9-4A59-8639-50CFD0950265}" sibTransId="{FD9AA3F4-7ED3-4F51-915F-CA8C2C38140D}"/>
+    <dgm:cxn modelId="{75E0417B-976E-4F7F-BB5B-C2CF4DF91076}" type="presOf" srcId="{56FD32F2-27B3-42D3-B05C-78E4C3EEF271}" destId="{BA0053AC-5E35-47CA-8098-43C45F42DE77}" srcOrd="0" destOrd="0" presId="urn:microsoft.com/office/officeart/2005/8/layout/process1"/>
+    <dgm:cxn modelId="{A6B51E80-7334-491A-982C-A09F7828151A}" type="presOf" srcId="{36144163-E3F3-43F5-88EF-29A5FB3D925E}" destId="{6D83BE8D-26D3-4FC5-A60B-6AE7DD08ECAE}" srcOrd="0" destOrd="0" presId="urn:microsoft.com/office/officeart/2005/8/layout/process1"/>
+    <dgm:cxn modelId="{C130788C-229F-4E0C-92D5-C2446F062868}" type="presOf" srcId="{36144163-E3F3-43F5-88EF-29A5FB3D925E}" destId="{22D1CD4B-27DC-4DE0-A07B-06FD635D1353}" srcOrd="1" destOrd="0" presId="urn:microsoft.com/office/officeart/2005/8/layout/process1"/>
+    <dgm:cxn modelId="{17F911A1-E288-45AF-B020-06B6E0BE923B}" type="presOf" srcId="{FD9AA3F4-7ED3-4F51-915F-CA8C2C38140D}" destId="{40F56964-BF61-453A-998B-ADC551DFB192}" srcOrd="1" destOrd="0" presId="urn:microsoft.com/office/officeart/2005/8/layout/process1"/>
+    <dgm:cxn modelId="{E5DAE2BE-92FD-4C76-9EAD-0954EEE8E028}" type="presOf" srcId="{FD9AA3F4-7ED3-4F51-915F-CA8C2C38140D}" destId="{0E0C0A7D-3DD8-4B75-85A5-205A5F9A5CAD}" srcOrd="0" destOrd="0" presId="urn:microsoft.com/office/officeart/2005/8/layout/process1"/>
+    <dgm:cxn modelId="{263AEEC2-4455-464C-A125-51B992427F07}" srcId="{F1F8B658-A221-4539-BBEF-84208F403DFF}" destId="{5FF5B6C2-B3F7-42E8-B4B5-093037CB6F10}" srcOrd="2" destOrd="0" parTransId="{DBFB854D-F5EE-4774-BD1A-AF8D1AA7649F}" sibTransId="{ED1E0211-67EE-45C9-A773-7B8C03E63880}"/>
+    <dgm:cxn modelId="{9ADA2ECB-96A0-4776-81D4-093B7D380E51}" type="presOf" srcId="{ED1E0211-67EE-45C9-A773-7B8C03E63880}" destId="{3DD7F041-164D-47FA-9CA1-6F0B200FEDE2}" srcOrd="1" destOrd="0" presId="urn:microsoft.com/office/officeart/2005/8/layout/process1"/>
+    <dgm:cxn modelId="{7F7D3AE5-CD0D-4B37-939C-02734BA70A4C}" type="presOf" srcId="{5FF5B6C2-B3F7-42E8-B4B5-093037CB6F10}" destId="{FB3320C9-CCE2-4A09-9D4B-F0C97D609CA6}" srcOrd="0" destOrd="0" presId="urn:microsoft.com/office/officeart/2005/8/layout/process1"/>
+    <dgm:cxn modelId="{C6E3A4E8-4FDE-421D-9FBF-7EEED9DFC3C8}" type="presOf" srcId="{ED1E0211-67EE-45C9-A773-7B8C03E63880}" destId="{1B1207CD-762C-4032-9B85-93FBD354AF22}" srcOrd="0" destOrd="0" presId="urn:microsoft.com/office/officeart/2005/8/layout/process1"/>
+    <dgm:cxn modelId="{70E46D58-DDC5-4388-B8FF-EF226036389B}" type="presParOf" srcId="{18D5B566-CBB3-4A2B-AB29-E5E158A409FD}" destId="{483B3306-9E08-493E-B4D1-8F0414F0F3F5}" srcOrd="0" destOrd="0" presId="urn:microsoft.com/office/officeart/2005/8/layout/process1"/>
+    <dgm:cxn modelId="{AFD72C5D-2204-49A9-AD12-1425BF7FF9F3}" type="presParOf" srcId="{18D5B566-CBB3-4A2B-AB29-E5E158A409FD}" destId="{AC35074A-6676-451D-B690-4D7F43554B5E}" srcOrd="1" destOrd="0" presId="urn:microsoft.com/office/officeart/2005/8/layout/process1"/>
+    <dgm:cxn modelId="{5435D7C2-31FE-4661-9DB5-34C732200869}" type="presParOf" srcId="{AC35074A-6676-451D-B690-4D7F43554B5E}" destId="{60E2820F-296A-4B0A-9D7C-A098F67BA26B}" srcOrd="0" destOrd="0" presId="urn:microsoft.com/office/officeart/2005/8/layout/process1"/>
+    <dgm:cxn modelId="{0857FA56-E1E8-4A84-B42F-ACD1F184D7C3}" type="presParOf" srcId="{18D5B566-CBB3-4A2B-AB29-E5E158A409FD}" destId="{C1DA1859-ADFE-446E-8AF2-B62D312D6EF6}" srcOrd="2" destOrd="0" presId="urn:microsoft.com/office/officeart/2005/8/layout/process1"/>
+    <dgm:cxn modelId="{B495B735-FC5C-4C6C-9136-90B713C8968E}" type="presParOf" srcId="{18D5B566-CBB3-4A2B-AB29-E5E158A409FD}" destId="{0E0C0A7D-3DD8-4B75-85A5-205A5F9A5CAD}" srcOrd="3" destOrd="0" presId="urn:microsoft.com/office/officeart/2005/8/layout/process1"/>
+    <dgm:cxn modelId="{6B60F160-7281-42ED-AADF-C04DD0953921}" type="presParOf" srcId="{0E0C0A7D-3DD8-4B75-85A5-205A5F9A5CAD}" destId="{40F56964-BF61-453A-998B-ADC551DFB192}" srcOrd="0" destOrd="0" presId="urn:microsoft.com/office/officeart/2005/8/layout/process1"/>
+    <dgm:cxn modelId="{F48D2FE5-C3C8-46FF-BED6-91A5CE604D29}" type="presParOf" srcId="{18D5B566-CBB3-4A2B-AB29-E5E158A409FD}" destId="{FB3320C9-CCE2-4A09-9D4B-F0C97D609CA6}" srcOrd="4" destOrd="0" presId="urn:microsoft.com/office/officeart/2005/8/layout/process1"/>
+    <dgm:cxn modelId="{7F228E4A-970B-4EAC-B56F-F20E4FBCF01F}" type="presParOf" srcId="{18D5B566-CBB3-4A2B-AB29-E5E158A409FD}" destId="{1B1207CD-762C-4032-9B85-93FBD354AF22}" srcOrd="5" destOrd="0" presId="urn:microsoft.com/office/officeart/2005/8/layout/process1"/>
+    <dgm:cxn modelId="{D4439571-A5FB-4291-AF55-3C0BAEF566D5}" type="presParOf" srcId="{1B1207CD-762C-4032-9B85-93FBD354AF22}" destId="{3DD7F041-164D-47FA-9CA1-6F0B200FEDE2}" srcOrd="0" destOrd="0" presId="urn:microsoft.com/office/officeart/2005/8/layout/process1"/>
+    <dgm:cxn modelId="{8462811C-DD86-49C6-BDCA-08044AAC9952}" type="presParOf" srcId="{18D5B566-CBB3-4A2B-AB29-E5E158A409FD}" destId="{BA0053AC-5E35-47CA-8098-43C45F42DE77}" srcOrd="6" destOrd="0" presId="urn:microsoft.com/office/officeart/2005/8/layout/process1"/>
+    <dgm:cxn modelId="{05D393A9-F554-4712-8059-D5A6D0D94016}" type="presParOf" srcId="{18D5B566-CBB3-4A2B-AB29-E5E158A409FD}" destId="{6D83BE8D-26D3-4FC5-A60B-6AE7DD08ECAE}" srcOrd="7" destOrd="0" presId="urn:microsoft.com/office/officeart/2005/8/layout/process1"/>
+    <dgm:cxn modelId="{2CCAD6F3-3260-4458-8A50-DE239FD74A62}" type="presParOf" srcId="{6D83BE8D-26D3-4FC5-A60B-6AE7DD08ECAE}" destId="{22D1CD4B-27DC-4DE0-A07B-06FD635D1353}" srcOrd="0" destOrd="0" presId="urn:microsoft.com/office/officeart/2005/8/layout/process1"/>
+    <dgm:cxn modelId="{F347EA62-D84F-419E-9CD3-17B6559D46CC}" type="presParOf" srcId="{18D5B566-CBB3-4A2B-AB29-E5E158A409FD}" destId="{632D27BE-4310-42B5-B451-A9DDF8B20469}" srcOrd="8" destOrd="0" presId="urn:microsoft.com/office/officeart/2005/8/layout/process1"/>
+  </dgm:cxnLst>
+  <dgm:bg/>
+  <dgm:whole/>
+  <dgm:extLst>
+    <a:ext uri="http://schemas.microsoft.com/office/drawing/2008/diagram">
+      <dsp:dataModelExt xmlns:dsp="http://schemas.microsoft.com/office/drawing/2008/diagram" relId="rId7" minVer="http://schemas.openxmlformats.org/drawingml/2006/diagram"/>
+    </a:ext>
+  </dgm:extLst>
+</dgm:dataModel>
+</file>
+
+<file path=ppt/diagrams/data2.xml><?xml version="1.0" encoding="utf-8"?>
+<dgm:dataModel xmlns:dgm="http://schemas.openxmlformats.org/drawingml/2006/diagram" xmlns:a="http://schemas.openxmlformats.org/drawingml/2006/main">
+  <dgm:ptLst>
+    <dgm:pt modelId="{174C7BC0-A6DA-4B38-9AF9-502B0B4362C7}" type="doc">
+      <dgm:prSet loTypeId="urn:microsoft.com/office/officeart/2005/8/layout/hList1" loCatId="list" qsTypeId="urn:microsoft.com/office/officeart/2005/8/quickstyle/simple4" qsCatId="simple" csTypeId="urn:microsoft.com/office/officeart/2005/8/colors/accent1_1" csCatId="accent1" phldr="1"/>
+      <dgm:spPr/>
+      <dgm:t>
+        <a:bodyPr/>
+        <a:lstStyle/>
+        <a:p>
+          <a:endParaRPr lang="en-US"/>
+        </a:p>
+      </dgm:t>
+    </dgm:pt>
+    <dgm:pt modelId="{D0848C07-6547-42B2-8707-F98FA531BB94}">
+      <dgm:prSet/>
+      <dgm:spPr/>
+      <dgm:t>
+        <a:bodyPr/>
+        <a:lstStyle/>
+        <a:p>
+          <a:r>
+            <a:rPr lang="en-IE" b="1"/>
+            <a:t>Unit Testing (pytest)</a:t>
+          </a:r>
+          <a:r>
+            <a:rPr lang="en-IE"/>
+            <a:t> </a:t>
+          </a:r>
+          <a:endParaRPr lang="en-US"/>
+        </a:p>
+      </dgm:t>
+    </dgm:pt>
+    <dgm:pt modelId="{EA6F3171-FC74-47F2-A9D0-D5CA150A8955}" type="parTrans" cxnId="{CC000E4A-582C-4015-8880-5F7D58B50F69}">
+      <dgm:prSet/>
+      <dgm:spPr/>
+      <dgm:t>
+        <a:bodyPr/>
+        <a:lstStyle/>
+        <a:p>
+          <a:endParaRPr lang="en-US"/>
+        </a:p>
+      </dgm:t>
+    </dgm:pt>
+    <dgm:pt modelId="{23AB8727-0F0D-4CD7-8A1B-0032ACCFE280}" type="sibTrans" cxnId="{CC000E4A-582C-4015-8880-5F7D58B50F69}">
+      <dgm:prSet/>
+      <dgm:spPr/>
+      <dgm:t>
+        <a:bodyPr/>
+        <a:lstStyle/>
+        <a:p>
+          <a:endParaRPr lang="en-US"/>
+        </a:p>
+      </dgm:t>
+    </dgm:pt>
+    <dgm:pt modelId="{14E6748A-A138-42A0-AF86-4CACC0F5E6A4}">
+      <dgm:prSet/>
+      <dgm:spPr/>
+      <dgm:t>
+        <a:bodyPr/>
+        <a:lstStyle/>
+        <a:p>
+          <a:r>
+            <a:rPr lang="en-IE"/>
+            <a:t>Verified driver generation logic </a:t>
+          </a:r>
+          <a:endParaRPr lang="en-US"/>
+        </a:p>
+      </dgm:t>
+    </dgm:pt>
+    <dgm:pt modelId="{EEE7052B-E769-4240-B766-5321C889E24D}" type="parTrans" cxnId="{93712A10-C99D-43FC-960E-0B11B03E8F36}">
+      <dgm:prSet/>
+      <dgm:spPr/>
+      <dgm:t>
+        <a:bodyPr/>
+        <a:lstStyle/>
+        <a:p>
+          <a:endParaRPr lang="en-US"/>
+        </a:p>
+      </dgm:t>
+    </dgm:pt>
+    <dgm:pt modelId="{83C6C374-6513-4E14-B43F-8EC8E532AFC8}" type="sibTrans" cxnId="{93712A10-C99D-43FC-960E-0B11B03E8F36}">
+      <dgm:prSet/>
+      <dgm:spPr/>
+      <dgm:t>
+        <a:bodyPr/>
+        <a:lstStyle/>
+        <a:p>
+          <a:endParaRPr lang="en-US"/>
+        </a:p>
+      </dgm:t>
+    </dgm:pt>
+    <dgm:pt modelId="{A11D6E1A-CF90-4758-807D-1927A3EA6F2E}">
+      <dgm:prSet/>
+      <dgm:spPr/>
+      <dgm:t>
+        <a:bodyPr/>
+        <a:lstStyle/>
+        <a:p>
+          <a:r>
+            <a:rPr lang="en-IE"/>
+            <a:t>11 automated tests </a:t>
+          </a:r>
+          <a:endParaRPr lang="en-US"/>
+        </a:p>
+      </dgm:t>
+    </dgm:pt>
+    <dgm:pt modelId="{A71A5171-D0E8-4D7B-AB7E-63E5FFE603E3}" type="parTrans" cxnId="{CB23E244-1B59-4B52-98D8-BFFBFE8D0806}">
+      <dgm:prSet/>
+      <dgm:spPr/>
+      <dgm:t>
+        <a:bodyPr/>
+        <a:lstStyle/>
+        <a:p>
+          <a:endParaRPr lang="en-US"/>
+        </a:p>
+      </dgm:t>
+    </dgm:pt>
+    <dgm:pt modelId="{A9C2F6D9-26B9-43EA-8352-92272B010673}" type="sibTrans" cxnId="{CB23E244-1B59-4B52-98D8-BFFBFE8D0806}">
+      <dgm:prSet/>
+      <dgm:spPr/>
+      <dgm:t>
+        <a:bodyPr/>
+        <a:lstStyle/>
+        <a:p>
+          <a:endParaRPr lang="en-US"/>
+        </a:p>
+      </dgm:t>
+    </dgm:pt>
+    <dgm:pt modelId="{EE1DD065-A1B5-41B2-895A-7EC28798ED85}">
+      <dgm:prSet/>
+      <dgm:spPr/>
+      <dgm:t>
+        <a:bodyPr/>
+        <a:lstStyle/>
+        <a:p>
+          <a:r>
+            <a:rPr lang="en-IE"/>
+            <a:t>Validated driver attributes, IDs, names and statistics </a:t>
+          </a:r>
+          <a:endParaRPr lang="en-US"/>
+        </a:p>
+      </dgm:t>
+    </dgm:pt>
+    <dgm:pt modelId="{A7CDCD8B-9E4A-409C-9B57-CF986323E82C}" type="parTrans" cxnId="{A83E6007-7BAA-4E19-8970-B16078C9F1E8}">
+      <dgm:prSet/>
+      <dgm:spPr/>
+      <dgm:t>
+        <a:bodyPr/>
+        <a:lstStyle/>
+        <a:p>
+          <a:endParaRPr lang="en-US"/>
+        </a:p>
+      </dgm:t>
+    </dgm:pt>
+    <dgm:pt modelId="{07F20EC2-5C28-4630-9A65-A1FA90B8F782}" type="sibTrans" cxnId="{A83E6007-7BAA-4E19-8970-B16078C9F1E8}">
+      <dgm:prSet/>
+      <dgm:spPr/>
+      <dgm:t>
+        <a:bodyPr/>
+        <a:lstStyle/>
+        <a:p>
+          <a:endParaRPr lang="en-US"/>
+        </a:p>
+      </dgm:t>
+    </dgm:pt>
+    <dgm:pt modelId="{EE59A2AA-300A-446D-A459-8A65650C7E23}">
+      <dgm:prSet/>
+      <dgm:spPr/>
+      <dgm:t>
+        <a:bodyPr/>
+        <a:lstStyle/>
+        <a:p>
+          <a:r>
+            <a:rPr lang="en-IE" b="1"/>
+            <a:t>Class Testing (pytest)</a:t>
+          </a:r>
+          <a:r>
+            <a:rPr lang="en-IE"/>
+            <a:t> </a:t>
+          </a:r>
+          <a:endParaRPr lang="en-US"/>
+        </a:p>
+      </dgm:t>
+    </dgm:pt>
+    <dgm:pt modelId="{597FF2CF-4E63-4997-BEFA-C5CED203137D}" type="parTrans" cxnId="{5B5A61BB-4AF6-4411-9440-EA5D8979A94C}">
+      <dgm:prSet/>
+      <dgm:spPr/>
+      <dgm:t>
+        <a:bodyPr/>
+        <a:lstStyle/>
+        <a:p>
+          <a:endParaRPr lang="en-US"/>
+        </a:p>
+      </dgm:t>
+    </dgm:pt>
+    <dgm:pt modelId="{9C23D6C2-0855-4426-B97E-E250446E3793}" type="sibTrans" cxnId="{5B5A61BB-4AF6-4411-9440-EA5D8979A94C}">
+      <dgm:prSet/>
+      <dgm:spPr/>
+      <dgm:t>
+        <a:bodyPr/>
+        <a:lstStyle/>
+        <a:p>
+          <a:endParaRPr lang="en-US"/>
+        </a:p>
+      </dgm:t>
+    </dgm:pt>
+    <dgm:pt modelId="{4069FA31-9492-48D5-9F05-528FB3FE1B7F}">
+      <dgm:prSet/>
+      <dgm:spPr/>
+      <dgm:t>
+        <a:bodyPr/>
+        <a:lstStyle/>
+        <a:p>
+          <a:r>
+            <a:rPr lang="en-IE"/>
+            <a:t>Tested the RaceController </a:t>
+          </a:r>
+          <a:endParaRPr lang="en-US"/>
+        </a:p>
+      </dgm:t>
+    </dgm:pt>
+    <dgm:pt modelId="{CCB9545B-2C73-48EB-A697-0E4BA10FA132}" type="parTrans" cxnId="{2393CCE3-D0A3-4740-96EA-E5D659023007}">
+      <dgm:prSet/>
+      <dgm:spPr/>
+      <dgm:t>
+        <a:bodyPr/>
+        <a:lstStyle/>
+        <a:p>
+          <a:endParaRPr lang="en-US"/>
+        </a:p>
+      </dgm:t>
+    </dgm:pt>
+    <dgm:pt modelId="{6BF89D76-80B5-41CE-A360-CB42AE3FC2FC}" type="sibTrans" cxnId="{2393CCE3-D0A3-4740-96EA-E5D659023007}">
+      <dgm:prSet/>
+      <dgm:spPr/>
+      <dgm:t>
+        <a:bodyPr/>
+        <a:lstStyle/>
+        <a:p>
+          <a:endParaRPr lang="en-US"/>
+        </a:p>
+      </dgm:t>
+    </dgm:pt>
+    <dgm:pt modelId="{E7C98585-0D7D-422A-B6E8-E759B870F31F}">
+      <dgm:prSet/>
+      <dgm:spPr/>
+      <dgm:t>
+        <a:bodyPr/>
+        <a:lstStyle/>
+        <a:p>
+          <a:r>
+            <a:rPr lang="en-IE"/>
+            <a:t>7 automated tests </a:t>
+          </a:r>
+          <a:endParaRPr lang="en-US"/>
+        </a:p>
+      </dgm:t>
+    </dgm:pt>
+    <dgm:pt modelId="{EA7D9091-A51E-419B-AE4F-AB2A2AAA9514}" type="parTrans" cxnId="{15D67A90-8159-4D30-98AF-D5023BFA6688}">
+      <dgm:prSet/>
+      <dgm:spPr/>
+      <dgm:t>
+        <a:bodyPr/>
+        <a:lstStyle/>
+        <a:p>
+          <a:endParaRPr lang="en-US"/>
+        </a:p>
+      </dgm:t>
+    </dgm:pt>
+    <dgm:pt modelId="{C1F6BEE5-A717-4F07-A8CC-BD626EB26D03}" type="sibTrans" cxnId="{15D67A90-8159-4D30-98AF-D5023BFA6688}">
+      <dgm:prSet/>
+      <dgm:spPr/>
+      <dgm:t>
+        <a:bodyPr/>
+        <a:lstStyle/>
+        <a:p>
+          <a:endParaRPr lang="en-US"/>
+        </a:p>
+      </dgm:t>
+    </dgm:pt>
+    <dgm:pt modelId="{42208BB4-28E3-4CAB-AC52-F2BB5A85A816}">
+      <dgm:prSet/>
+      <dgm:spPr/>
+      <dgm:t>
+        <a:bodyPr/>
+        <a:lstStyle/>
+        <a:p>
+          <a:r>
+            <a:rPr lang="en-IE"/>
+            <a:t>Verified race setup, simulation, telemetry and results generation </a:t>
+          </a:r>
+          <a:endParaRPr lang="en-US"/>
+        </a:p>
+      </dgm:t>
+    </dgm:pt>
+    <dgm:pt modelId="{377DB40D-92C5-4467-BD3D-D18B2CE821F3}" type="parTrans" cxnId="{25E1264F-7C78-4047-91A7-F1C90F71ADB9}">
+      <dgm:prSet/>
+      <dgm:spPr/>
+      <dgm:t>
+        <a:bodyPr/>
+        <a:lstStyle/>
+        <a:p>
+          <a:endParaRPr lang="en-US"/>
+        </a:p>
+      </dgm:t>
+    </dgm:pt>
+    <dgm:pt modelId="{65583036-077D-4CC5-8EEF-BC2FAF795503}" type="sibTrans" cxnId="{25E1264F-7C78-4047-91A7-F1C90F71ADB9}">
+      <dgm:prSet/>
+      <dgm:spPr/>
+      <dgm:t>
+        <a:bodyPr/>
+        <a:lstStyle/>
+        <a:p>
+          <a:endParaRPr lang="en-US"/>
+        </a:p>
+      </dgm:t>
+    </dgm:pt>
+    <dgm:pt modelId="{729F6C17-BE7C-4104-84DE-C3CBBBD3C8D9}">
+      <dgm:prSet/>
+      <dgm:spPr/>
+      <dgm:t>
+        <a:bodyPr/>
+        <a:lstStyle/>
+        <a:p>
+          <a:r>
+            <a:rPr lang="en-IE" b="1"/>
+            <a:t>Integration Testing (pytest-qt)</a:t>
+          </a:r>
+          <a:r>
+            <a:rPr lang="en-IE"/>
+            <a:t> </a:t>
+          </a:r>
+          <a:endParaRPr lang="en-US"/>
+        </a:p>
+      </dgm:t>
+    </dgm:pt>
+    <dgm:pt modelId="{63FB29C8-FC86-4C95-A9C6-102D76F28AEB}" type="parTrans" cxnId="{3525C3E8-950A-4C00-B715-38DFA958AA9A}">
+      <dgm:prSet/>
+      <dgm:spPr/>
+      <dgm:t>
+        <a:bodyPr/>
+        <a:lstStyle/>
+        <a:p>
+          <a:endParaRPr lang="en-US"/>
+        </a:p>
+      </dgm:t>
+    </dgm:pt>
+    <dgm:pt modelId="{06F975BF-2A7F-4095-AE17-B2F8446B2AE5}" type="sibTrans" cxnId="{3525C3E8-950A-4C00-B715-38DFA958AA9A}">
+      <dgm:prSet/>
+      <dgm:spPr/>
+      <dgm:t>
+        <a:bodyPr/>
+        <a:lstStyle/>
+        <a:p>
+          <a:endParaRPr lang="en-US"/>
+        </a:p>
+      </dgm:t>
+    </dgm:pt>
+    <dgm:pt modelId="{93A7B0A5-22EA-4D94-A053-92129763F6E1}">
+      <dgm:prSet/>
+      <dgm:spPr/>
+      <dgm:t>
+        <a:bodyPr/>
+        <a:lstStyle/>
+        <a:p>
+          <a:r>
+            <a:rPr lang="en-IE"/>
+            <a:t>Tested interaction between RaceController and PyQt6 interface </a:t>
+          </a:r>
+          <a:endParaRPr lang="en-US"/>
+        </a:p>
+      </dgm:t>
+    </dgm:pt>
+    <dgm:pt modelId="{92EFB4D9-B073-4B3E-A94D-64384660FF4F}" type="parTrans" cxnId="{CD0D3C81-6CDB-44E5-8C9C-B91006D544E9}">
+      <dgm:prSet/>
+      <dgm:spPr/>
+      <dgm:t>
+        <a:bodyPr/>
+        <a:lstStyle/>
+        <a:p>
+          <a:endParaRPr lang="en-US"/>
+        </a:p>
+      </dgm:t>
+    </dgm:pt>
+    <dgm:pt modelId="{F3028D52-4727-4CDD-8B2D-4F9C3FC1A717}" type="sibTrans" cxnId="{CD0D3C81-6CDB-44E5-8C9C-B91006D544E9}">
+      <dgm:prSet/>
+      <dgm:spPr/>
+      <dgm:t>
+        <a:bodyPr/>
+        <a:lstStyle/>
+        <a:p>
+          <a:endParaRPr lang="en-US"/>
+        </a:p>
+      </dgm:t>
+    </dgm:pt>
+    <dgm:pt modelId="{47182CCA-9109-4612-8500-93986140D2D0}">
+      <dgm:prSet/>
+      <dgm:spPr/>
+      <dgm:t>
+        <a:bodyPr/>
+        <a:lstStyle/>
+        <a:p>
+          <a:r>
+            <a:rPr lang="en-IE"/>
+            <a:t>Confirmed race data loads correctly and UI controls trigger the correct actions </a:t>
+          </a:r>
+          <a:endParaRPr lang="en-US"/>
+        </a:p>
+      </dgm:t>
+    </dgm:pt>
+    <dgm:pt modelId="{B98880AD-9D18-4C98-AF40-1F97FC935AC2}" type="parTrans" cxnId="{28CC05A8-49F9-4175-B203-436D4C5EFF6D}">
+      <dgm:prSet/>
+      <dgm:spPr/>
+      <dgm:t>
+        <a:bodyPr/>
+        <a:lstStyle/>
+        <a:p>
+          <a:endParaRPr lang="en-US"/>
+        </a:p>
+      </dgm:t>
+    </dgm:pt>
+    <dgm:pt modelId="{7A7B2350-44B8-4094-90F0-D8881475C772}" type="sibTrans" cxnId="{28CC05A8-49F9-4175-B203-436D4C5EFF6D}">
+      <dgm:prSet/>
+      <dgm:spPr/>
+      <dgm:t>
+        <a:bodyPr/>
+        <a:lstStyle/>
+        <a:p>
+          <a:endParaRPr lang="en-US"/>
+        </a:p>
+      </dgm:t>
+    </dgm:pt>
+    <dgm:pt modelId="{0BC197A5-D7C6-4903-8C1A-6AAFDB462E46}">
+      <dgm:prSet/>
+      <dgm:spPr/>
+      <dgm:t>
+        <a:bodyPr/>
+        <a:lstStyle/>
+        <a:p>
+          <a:r>
+            <a:rPr lang="en-IE" b="1"/>
+            <a:t>System Testing (Manual)</a:t>
+          </a:r>
+          <a:r>
+            <a:rPr lang="en-IE"/>
+            <a:t> </a:t>
+          </a:r>
+          <a:endParaRPr lang="en-US"/>
+        </a:p>
+      </dgm:t>
+    </dgm:pt>
+    <dgm:pt modelId="{D070C695-B63D-47FC-94C0-671DADA15262}" type="parTrans" cxnId="{BBC6F320-CFBB-461D-9537-BB2D51AE4855}">
+      <dgm:prSet/>
+      <dgm:spPr/>
+      <dgm:t>
+        <a:bodyPr/>
+        <a:lstStyle/>
+        <a:p>
+          <a:endParaRPr lang="en-US"/>
+        </a:p>
+      </dgm:t>
+    </dgm:pt>
+    <dgm:pt modelId="{68C7BE81-8282-456F-9C39-91E8EBFAEAC5}" type="sibTrans" cxnId="{BBC6F320-CFBB-461D-9537-BB2D51AE4855}">
+      <dgm:prSet/>
+      <dgm:spPr/>
+      <dgm:t>
+        <a:bodyPr/>
+        <a:lstStyle/>
+        <a:p>
+          <a:endParaRPr lang="en-US"/>
+        </a:p>
+      </dgm:t>
+    </dgm:pt>
+    <dgm:pt modelId="{1AD0E0BA-C1D6-49A4-82D1-E969BD8FCDF8}">
+      <dgm:prSet/>
+      <dgm:spPr/>
+      <dgm:t>
+        <a:bodyPr/>
+        <a:lstStyle/>
+        <a:p>
+          <a:r>
+            <a:rPr lang="en-IE"/>
+            <a:t>Validated all functional requirements </a:t>
+          </a:r>
+          <a:endParaRPr lang="en-US"/>
+        </a:p>
+      </dgm:t>
+    </dgm:pt>
+    <dgm:pt modelId="{9762902C-25B2-4AEA-A3CF-5DEAC075A0F4}" type="parTrans" cxnId="{663C8F8C-3029-4075-AF33-C3EE8CC28E01}">
+      <dgm:prSet/>
+      <dgm:spPr/>
+      <dgm:t>
+        <a:bodyPr/>
+        <a:lstStyle/>
+        <a:p>
+          <a:endParaRPr lang="en-US"/>
+        </a:p>
+      </dgm:t>
+    </dgm:pt>
+    <dgm:pt modelId="{461D3290-CF05-40E7-9B2C-3A0BF548079A}" type="sibTrans" cxnId="{663C8F8C-3029-4075-AF33-C3EE8CC28E01}">
+      <dgm:prSet/>
+      <dgm:spPr/>
+      <dgm:t>
+        <a:bodyPr/>
+        <a:lstStyle/>
+        <a:p>
+          <a:endParaRPr lang="en-US"/>
+        </a:p>
+      </dgm:t>
+    </dgm:pt>
+    <dgm:pt modelId="{FCF33AEB-5809-4100-991B-75C35559E896}">
+      <dgm:prSet/>
+      <dgm:spPr/>
+      <dgm:t>
+        <a:bodyPr/>
+        <a:lstStyle/>
+        <a:p>
+          <a:r>
+            <a:rPr lang="en-IE"/>
+            <a:t>Race simulation </a:t>
+          </a:r>
+          <a:endParaRPr lang="en-US"/>
+        </a:p>
+      </dgm:t>
+    </dgm:pt>
+    <dgm:pt modelId="{831922E6-2CF9-436F-B4E7-B15769FD074C}" type="parTrans" cxnId="{EE40D36B-A2A4-41A7-9C71-88D22F1E6658}">
+      <dgm:prSet/>
+      <dgm:spPr/>
+      <dgm:t>
+        <a:bodyPr/>
+        <a:lstStyle/>
+        <a:p>
+          <a:endParaRPr lang="en-US"/>
+        </a:p>
+      </dgm:t>
+    </dgm:pt>
+    <dgm:pt modelId="{8EBFAA6F-6A24-4ECD-ACD3-292FCFC3A546}" type="sibTrans" cxnId="{EE40D36B-A2A4-41A7-9C71-88D22F1E6658}">
+      <dgm:prSet/>
+      <dgm:spPr/>
+      <dgm:t>
+        <a:bodyPr/>
+        <a:lstStyle/>
+        <a:p>
+          <a:endParaRPr lang="en-US"/>
+        </a:p>
+      </dgm:t>
+    </dgm:pt>
+    <dgm:pt modelId="{665CEBF1-C393-476B-B04D-65A9AFB98891}">
+      <dgm:prSet/>
+      <dgm:spPr/>
+      <dgm:t>
+        <a:bodyPr/>
+        <a:lstStyle/>
+        <a:p>
+          <a:r>
+            <a:rPr lang="en-IE"/>
+            <a:t>Live race display </a:t>
+          </a:r>
+          <a:endParaRPr lang="en-US"/>
+        </a:p>
+      </dgm:t>
+    </dgm:pt>
+    <dgm:pt modelId="{A32EB242-BD8C-4BFA-841D-B48C6A1624EE}" type="parTrans" cxnId="{2CCE5AE8-FCFA-498F-B20F-7B75528EBE5D}">
+      <dgm:prSet/>
+      <dgm:spPr/>
+      <dgm:t>
+        <a:bodyPr/>
+        <a:lstStyle/>
+        <a:p>
+          <a:endParaRPr lang="en-US"/>
+        </a:p>
+      </dgm:t>
+    </dgm:pt>
+    <dgm:pt modelId="{F1B07617-4BF5-4D76-A7E2-5214F9B307D5}" type="sibTrans" cxnId="{2CCE5AE8-FCFA-498F-B20F-7B75528EBE5D}">
+      <dgm:prSet/>
+      <dgm:spPr/>
+      <dgm:t>
+        <a:bodyPr/>
+        <a:lstStyle/>
+        <a:p>
+          <a:endParaRPr lang="en-US"/>
+        </a:p>
+      </dgm:t>
+    </dgm:pt>
+    <dgm:pt modelId="{CB9446E3-22A8-4EB1-94D6-2E8E423D03A3}">
+      <dgm:prSet/>
+      <dgm:spPr/>
+      <dgm:t>
+        <a:bodyPr/>
+        <a:lstStyle/>
+        <a:p>
+          <a:r>
+            <a:rPr lang="en-IE"/>
+            <a:t>Driver information </a:t>
+          </a:r>
+          <a:endParaRPr lang="en-US"/>
+        </a:p>
+      </dgm:t>
+    </dgm:pt>
+    <dgm:pt modelId="{B536CA73-F9E9-464D-A053-B2FD66191EDC}" type="parTrans" cxnId="{22AE8E10-62D1-43A0-8928-12398BBE8DBD}">
+      <dgm:prSet/>
+      <dgm:spPr/>
+      <dgm:t>
+        <a:bodyPr/>
+        <a:lstStyle/>
+        <a:p>
+          <a:endParaRPr lang="en-US"/>
+        </a:p>
+      </dgm:t>
+    </dgm:pt>
+    <dgm:pt modelId="{AF268209-B21E-4A4E-935D-164E5B6E4FED}" type="sibTrans" cxnId="{22AE8E10-62D1-43A0-8928-12398BBE8DBD}">
+      <dgm:prSet/>
+      <dgm:spPr/>
+      <dgm:t>
+        <a:bodyPr/>
+        <a:lstStyle/>
+        <a:p>
+          <a:endParaRPr lang="en-US"/>
+        </a:p>
+      </dgm:t>
+    </dgm:pt>
+    <dgm:pt modelId="{BC35C7F6-0A88-422F-98B1-6B1C8540E726}">
+      <dgm:prSet/>
+      <dgm:spPr/>
+      <dgm:t>
+        <a:bodyPr/>
+        <a:lstStyle/>
+        <a:p>
+          <a:r>
+            <a:rPr lang="en-IE"/>
+            <a:t>Race results </a:t>
+          </a:r>
+          <a:endParaRPr lang="en-US"/>
+        </a:p>
+      </dgm:t>
+    </dgm:pt>
+    <dgm:pt modelId="{B8F81C08-4E24-4B59-BC31-E9DBD0DE56B7}" type="parTrans" cxnId="{82D65746-8AAF-4B2C-9081-622C3EDC0765}">
+      <dgm:prSet/>
+      <dgm:spPr/>
+      <dgm:t>
+        <a:bodyPr/>
+        <a:lstStyle/>
+        <a:p>
+          <a:endParaRPr lang="en-US"/>
+        </a:p>
+      </dgm:t>
+    </dgm:pt>
+    <dgm:pt modelId="{E03709B8-637B-44DE-95B2-E243DB036A82}" type="sibTrans" cxnId="{82D65746-8AAF-4B2C-9081-622C3EDC0765}">
+      <dgm:prSet/>
+      <dgm:spPr/>
+      <dgm:t>
+        <a:bodyPr/>
+        <a:lstStyle/>
+        <a:p>
+          <a:endParaRPr lang="en-US"/>
+        </a:p>
+      </dgm:t>
+    </dgm:pt>
+    <dgm:pt modelId="{3026595D-5730-4F3C-AA50-590F26E394C0}">
+      <dgm:prSet/>
+      <dgm:spPr/>
+      <dgm:t>
+        <a:bodyPr/>
+        <a:lstStyle/>
+        <a:p>
+          <a:r>
+            <a:rPr lang="en-IE"/>
+            <a:t>Accessibility settings </a:t>
+          </a:r>
+          <a:endParaRPr lang="en-US"/>
+        </a:p>
+      </dgm:t>
+    </dgm:pt>
+    <dgm:pt modelId="{E11387C1-A0EF-4FE6-B3CE-E78A5F3008BF}" type="parTrans" cxnId="{1F26FC36-AE96-42D3-92F1-8379979BB920}">
+      <dgm:prSet/>
+      <dgm:spPr/>
+      <dgm:t>
+        <a:bodyPr/>
+        <a:lstStyle/>
+        <a:p>
+          <a:endParaRPr lang="en-US"/>
+        </a:p>
+      </dgm:t>
+    </dgm:pt>
+    <dgm:pt modelId="{E7E4E60B-C67B-4ED1-B1B3-070656DECCD1}" type="sibTrans" cxnId="{1F26FC36-AE96-42D3-92F1-8379979BB920}">
+      <dgm:prSet/>
+      <dgm:spPr/>
+      <dgm:t>
+        <a:bodyPr/>
+        <a:lstStyle/>
+        <a:p>
+          <a:endParaRPr lang="en-US"/>
+        </a:p>
+      </dgm:t>
+    </dgm:pt>
+    <dgm:pt modelId="{1305126E-5E43-46AB-8AAB-1EC0CBCDDC91}">
+      <dgm:prSet/>
+      <dgm:spPr/>
+      <dgm:t>
+        <a:bodyPr/>
+        <a:lstStyle/>
+        <a:p>
+          <a:r>
+            <a:rPr lang="en-IE" b="1"/>
+            <a:t>Outcome</a:t>
+          </a:r>
+          <a:endParaRPr lang="en-US"/>
+        </a:p>
+      </dgm:t>
+    </dgm:pt>
+    <dgm:pt modelId="{1896CC2E-7443-4360-9AD6-E3389E09DDF9}" type="parTrans" cxnId="{E938D00A-C1FA-4FCF-B767-17046F37D9DF}">
+      <dgm:prSet/>
+      <dgm:spPr/>
+      <dgm:t>
+        <a:bodyPr/>
+        <a:lstStyle/>
+        <a:p>
+          <a:endParaRPr lang="en-US"/>
+        </a:p>
+      </dgm:t>
+    </dgm:pt>
+    <dgm:pt modelId="{C9660B4A-05B7-4D36-BF47-50AA47B34058}" type="sibTrans" cxnId="{E938D00A-C1FA-4FCF-B767-17046F37D9DF}">
+      <dgm:prSet/>
+      <dgm:spPr/>
+      <dgm:t>
+        <a:bodyPr/>
+        <a:lstStyle/>
+        <a:p>
+          <a:endParaRPr lang="en-US"/>
+        </a:p>
+      </dgm:t>
+    </dgm:pt>
+    <dgm:pt modelId="{F816084D-FA16-443B-9AC8-1329E2018AB9}">
+      <dgm:prSet/>
+      <dgm:spPr/>
+      <dgm:t>
+        <a:bodyPr/>
+        <a:lstStyle/>
+        <a:p>
+          <a:r>
+            <a:rPr lang="en-IE"/>
+            <a:t>24 automated tests passed </a:t>
+          </a:r>
+          <a:endParaRPr lang="en-US"/>
+        </a:p>
+      </dgm:t>
+    </dgm:pt>
+    <dgm:pt modelId="{11657795-82BB-4C3A-B4E3-10B1B19A6257}" type="parTrans" cxnId="{743CEFDE-C96E-4D14-A603-8601AE9196B3}">
+      <dgm:prSet/>
+      <dgm:spPr/>
+      <dgm:t>
+        <a:bodyPr/>
+        <a:lstStyle/>
+        <a:p>
+          <a:endParaRPr lang="en-US"/>
+        </a:p>
+      </dgm:t>
+    </dgm:pt>
+    <dgm:pt modelId="{24434CFE-BF90-4E49-B74C-511E98FFFBF5}" type="sibTrans" cxnId="{743CEFDE-C96E-4D14-A603-8601AE9196B3}">
+      <dgm:prSet/>
+      <dgm:spPr/>
+      <dgm:t>
+        <a:bodyPr/>
+        <a:lstStyle/>
+        <a:p>
+          <a:endParaRPr lang="en-US"/>
+        </a:p>
+      </dgm:t>
+    </dgm:pt>
+    <dgm:pt modelId="{7473CDE0-ADD3-4E79-B736-3D09328A2427}">
+      <dgm:prSet/>
+      <dgm:spPr/>
+      <dgm:t>
+        <a:bodyPr/>
+        <a:lstStyle/>
+        <a:p>
+          <a:r>
+            <a:rPr lang="en-IE"/>
+            <a:t>All planned system tests passed </a:t>
+          </a:r>
+          <a:endParaRPr lang="en-US"/>
+        </a:p>
+      </dgm:t>
+    </dgm:pt>
+    <dgm:pt modelId="{C033BD34-B6BD-4004-AD38-2709FCDAB6D7}" type="parTrans" cxnId="{8BDB7CE2-FC23-44AF-80D3-2351A47491C9}">
+      <dgm:prSet/>
+      <dgm:spPr/>
+      <dgm:t>
+        <a:bodyPr/>
+        <a:lstStyle/>
+        <a:p>
+          <a:endParaRPr lang="en-US"/>
+        </a:p>
+      </dgm:t>
+    </dgm:pt>
+    <dgm:pt modelId="{A76FBAC0-4E16-4D2B-935F-213339B05ACF}" type="sibTrans" cxnId="{8BDB7CE2-FC23-44AF-80D3-2351A47491C9}">
+      <dgm:prSet/>
+      <dgm:spPr/>
+      <dgm:t>
+        <a:bodyPr/>
+        <a:lstStyle/>
+        <a:p>
+          <a:endParaRPr lang="en-US"/>
+        </a:p>
+      </dgm:t>
+    </dgm:pt>
+    <dgm:pt modelId="{0ECEB27E-706C-4A33-8B0B-456FE3D00325}">
+      <dgm:prSet/>
+      <dgm:spPr/>
+      <dgm:t>
+        <a:bodyPr/>
+        <a:lstStyle/>
+        <a:p>
+          <a:r>
+            <a:rPr lang="en-IE"/>
+            <a:t>Application met all functional requirements</a:t>
+          </a:r>
+          <a:endParaRPr lang="en-US"/>
+        </a:p>
+      </dgm:t>
+    </dgm:pt>
+    <dgm:pt modelId="{0568C7E1-8BF4-4C2B-BAFC-2C4ADAFBE11F}" type="parTrans" cxnId="{175BF510-A94C-4209-9894-AA7FDE4CF367}">
+      <dgm:prSet/>
+      <dgm:spPr/>
+      <dgm:t>
+        <a:bodyPr/>
+        <a:lstStyle/>
+        <a:p>
+          <a:endParaRPr lang="en-US"/>
+        </a:p>
+      </dgm:t>
+    </dgm:pt>
+    <dgm:pt modelId="{106B2FC0-21FE-4F8F-A309-3B697F07AD2C}" type="sibTrans" cxnId="{175BF510-A94C-4209-9894-AA7FDE4CF367}">
+      <dgm:prSet/>
+      <dgm:spPr/>
+      <dgm:t>
+        <a:bodyPr/>
+        <a:lstStyle/>
+        <a:p>
+          <a:endParaRPr lang="en-US"/>
+        </a:p>
+      </dgm:t>
+    </dgm:pt>
+    <dgm:pt modelId="{4551940E-364B-462F-AD27-DDF507B1A067}" type="pres">
+      <dgm:prSet presAssocID="{174C7BC0-A6DA-4B38-9AF9-502B0B4362C7}" presName="Name0" presStyleCnt="0">
+        <dgm:presLayoutVars>
+          <dgm:dir/>
+          <dgm:animLvl val="lvl"/>
+          <dgm:resizeHandles val="exact"/>
+        </dgm:presLayoutVars>
+      </dgm:prSet>
+      <dgm:spPr/>
+    </dgm:pt>
+    <dgm:pt modelId="{4901D29B-D2A1-4887-BAB7-94F7C355BF9A}" type="pres">
+      <dgm:prSet presAssocID="{D0848C07-6547-42B2-8707-F98FA531BB94}" presName="composite" presStyleCnt="0"/>
+      <dgm:spPr/>
+    </dgm:pt>
+    <dgm:pt modelId="{962A9775-B660-4369-9ECA-76A5B1C77A25}" type="pres">
+      <dgm:prSet presAssocID="{D0848C07-6547-42B2-8707-F98FA531BB94}" presName="parTx" presStyleLbl="alignNode1" presStyleIdx="0" presStyleCnt="5">
+        <dgm:presLayoutVars>
+          <dgm:chMax val="0"/>
+          <dgm:chPref val="0"/>
+          <dgm:bulletEnabled val="1"/>
+        </dgm:presLayoutVars>
+      </dgm:prSet>
+      <dgm:spPr/>
+    </dgm:pt>
+    <dgm:pt modelId="{D7A13854-8AA3-4625-8C9F-1E35F0AA587A}" type="pres">
+      <dgm:prSet presAssocID="{D0848C07-6547-42B2-8707-F98FA531BB94}" presName="desTx" presStyleLbl="alignAccFollowNode1" presStyleIdx="0" presStyleCnt="5">
+        <dgm:presLayoutVars>
+          <dgm:bulletEnabled val="1"/>
+        </dgm:presLayoutVars>
+      </dgm:prSet>
+      <dgm:spPr/>
+    </dgm:pt>
+    <dgm:pt modelId="{4110AD48-65A3-4680-A481-D081EF7C1689}" type="pres">
+      <dgm:prSet presAssocID="{23AB8727-0F0D-4CD7-8A1B-0032ACCFE280}" presName="space" presStyleCnt="0"/>
+      <dgm:spPr/>
+    </dgm:pt>
+    <dgm:pt modelId="{E5EEEB73-B7D6-43C3-B8FD-626C1855420D}" type="pres">
+      <dgm:prSet presAssocID="{EE59A2AA-300A-446D-A459-8A65650C7E23}" presName="composite" presStyleCnt="0"/>
+      <dgm:spPr/>
+    </dgm:pt>
+    <dgm:pt modelId="{C0B00806-C28D-482C-ABA8-E404759875A2}" type="pres">
+      <dgm:prSet presAssocID="{EE59A2AA-300A-446D-A459-8A65650C7E23}" presName="parTx" presStyleLbl="alignNode1" presStyleIdx="1" presStyleCnt="5">
+        <dgm:presLayoutVars>
+          <dgm:chMax val="0"/>
+          <dgm:chPref val="0"/>
+          <dgm:bulletEnabled val="1"/>
+        </dgm:presLayoutVars>
+      </dgm:prSet>
+      <dgm:spPr/>
+    </dgm:pt>
+    <dgm:pt modelId="{68B54BB8-F7E5-4542-9A6D-61918DA60243}" type="pres">
+      <dgm:prSet presAssocID="{EE59A2AA-300A-446D-A459-8A65650C7E23}" presName="desTx" presStyleLbl="alignAccFollowNode1" presStyleIdx="1" presStyleCnt="5">
+        <dgm:presLayoutVars>
+          <dgm:bulletEnabled val="1"/>
+        </dgm:presLayoutVars>
+      </dgm:prSet>
+      <dgm:spPr/>
+    </dgm:pt>
+    <dgm:pt modelId="{9F03F72E-2355-4B70-877E-4307F65BEC1B}" type="pres">
+      <dgm:prSet presAssocID="{9C23D6C2-0855-4426-B97E-E250446E3793}" presName="space" presStyleCnt="0"/>
+      <dgm:spPr/>
+    </dgm:pt>
+    <dgm:pt modelId="{B1BF2AF2-6DEF-4E89-8822-7474F958E5B0}" type="pres">
+      <dgm:prSet presAssocID="{729F6C17-BE7C-4104-84DE-C3CBBBD3C8D9}" presName="composite" presStyleCnt="0"/>
+      <dgm:spPr/>
+    </dgm:pt>
+    <dgm:pt modelId="{8FA9666F-37A1-408F-A310-79AE9893137D}" type="pres">
+      <dgm:prSet presAssocID="{729F6C17-BE7C-4104-84DE-C3CBBBD3C8D9}" presName="parTx" presStyleLbl="alignNode1" presStyleIdx="2" presStyleCnt="5">
+        <dgm:presLayoutVars>
+          <dgm:chMax val="0"/>
+          <dgm:chPref val="0"/>
+          <dgm:bulletEnabled val="1"/>
+        </dgm:presLayoutVars>
+      </dgm:prSet>
+      <dgm:spPr/>
+    </dgm:pt>
+    <dgm:pt modelId="{8AEAEBFB-3310-43B8-A19E-37BE4596DAE3}" type="pres">
+      <dgm:prSet presAssocID="{729F6C17-BE7C-4104-84DE-C3CBBBD3C8D9}" presName="desTx" presStyleLbl="alignAccFollowNode1" presStyleIdx="2" presStyleCnt="5">
+        <dgm:presLayoutVars>
+          <dgm:bulletEnabled val="1"/>
+        </dgm:presLayoutVars>
+      </dgm:prSet>
+      <dgm:spPr/>
+    </dgm:pt>
+    <dgm:pt modelId="{B1C6255F-57A0-468D-A693-A9726C0C2D30}" type="pres">
+      <dgm:prSet presAssocID="{06F975BF-2A7F-4095-AE17-B2F8446B2AE5}" presName="space" presStyleCnt="0"/>
+      <dgm:spPr/>
+    </dgm:pt>
+    <dgm:pt modelId="{BFCB9DA3-5EC6-43CF-BE09-29F862017A6D}" type="pres">
+      <dgm:prSet presAssocID="{0BC197A5-D7C6-4903-8C1A-6AAFDB462E46}" presName="composite" presStyleCnt="0"/>
+      <dgm:spPr/>
+    </dgm:pt>
+    <dgm:pt modelId="{846B2601-2552-4B6A-B23F-184F206CCA93}" type="pres">
+      <dgm:prSet presAssocID="{0BC197A5-D7C6-4903-8C1A-6AAFDB462E46}" presName="parTx" presStyleLbl="alignNode1" presStyleIdx="3" presStyleCnt="5">
+        <dgm:presLayoutVars>
+          <dgm:chMax val="0"/>
+          <dgm:chPref val="0"/>
+          <dgm:bulletEnabled val="1"/>
+        </dgm:presLayoutVars>
+      </dgm:prSet>
+      <dgm:spPr/>
+    </dgm:pt>
+    <dgm:pt modelId="{0F7139EB-BD7E-4CF5-9B4E-6B17E66429B1}" type="pres">
+      <dgm:prSet presAssocID="{0BC197A5-D7C6-4903-8C1A-6AAFDB462E46}" presName="desTx" presStyleLbl="alignAccFollowNode1" presStyleIdx="3" presStyleCnt="5">
+        <dgm:presLayoutVars>
+          <dgm:bulletEnabled val="1"/>
+        </dgm:presLayoutVars>
+      </dgm:prSet>
+      <dgm:spPr/>
+    </dgm:pt>
+    <dgm:pt modelId="{3320C39C-CB22-451B-9B3A-97B9F9C6B28F}" type="pres">
+      <dgm:prSet presAssocID="{68C7BE81-8282-456F-9C39-91E8EBFAEAC5}" presName="space" presStyleCnt="0"/>
+      <dgm:spPr/>
+    </dgm:pt>
+    <dgm:pt modelId="{5DB322AD-2C08-4119-9A88-77756BB72DC5}" type="pres">
+      <dgm:prSet presAssocID="{1305126E-5E43-46AB-8AAB-1EC0CBCDDC91}" presName="composite" presStyleCnt="0"/>
+      <dgm:spPr/>
+    </dgm:pt>
+    <dgm:pt modelId="{1AD820B3-A82A-4276-B6CC-46731392EAEF}" type="pres">
+      <dgm:prSet presAssocID="{1305126E-5E43-46AB-8AAB-1EC0CBCDDC91}" presName="parTx" presStyleLbl="alignNode1" presStyleIdx="4" presStyleCnt="5">
+        <dgm:presLayoutVars>
+          <dgm:chMax val="0"/>
+          <dgm:chPref val="0"/>
+          <dgm:bulletEnabled val="1"/>
+        </dgm:presLayoutVars>
+      </dgm:prSet>
+      <dgm:spPr/>
+    </dgm:pt>
+    <dgm:pt modelId="{E522ABA4-EFC3-4019-8454-344F60FCBA95}" type="pres">
+      <dgm:prSet presAssocID="{1305126E-5E43-46AB-8AAB-1EC0CBCDDC91}" presName="desTx" presStyleLbl="alignAccFollowNode1" presStyleIdx="4" presStyleCnt="5">
+        <dgm:presLayoutVars>
+          <dgm:bulletEnabled val="1"/>
+        </dgm:presLayoutVars>
+      </dgm:prSet>
+      <dgm:spPr/>
+    </dgm:pt>
+  </dgm:ptLst>
+  <dgm:cxnLst>
+    <dgm:cxn modelId="{A83E6007-7BAA-4E19-8970-B16078C9F1E8}" srcId="{D0848C07-6547-42B2-8707-F98FA531BB94}" destId="{EE1DD065-A1B5-41B2-895A-7EC28798ED85}" srcOrd="2" destOrd="0" parTransId="{A7CDCD8B-9E4A-409C-9B57-CF986323E82C}" sibTransId="{07F20EC2-5C28-4630-9A65-A1FA90B8F782}"/>
+    <dgm:cxn modelId="{E938D00A-C1FA-4FCF-B767-17046F37D9DF}" srcId="{174C7BC0-A6DA-4B38-9AF9-502B0B4362C7}" destId="{1305126E-5E43-46AB-8AAB-1EC0CBCDDC91}" srcOrd="4" destOrd="0" parTransId="{1896CC2E-7443-4360-9AD6-E3389E09DDF9}" sibTransId="{C9660B4A-05B7-4D36-BF47-50AA47B34058}"/>
+    <dgm:cxn modelId="{B1FFE90E-D9B3-4CBE-B820-2016D6C87B0F}" type="presOf" srcId="{1AD0E0BA-C1D6-49A4-82D1-E969BD8FCDF8}" destId="{0F7139EB-BD7E-4CF5-9B4E-6B17E66429B1}" srcOrd="0" destOrd="0" presId="urn:microsoft.com/office/officeart/2005/8/layout/hList1"/>
+    <dgm:cxn modelId="{93712A10-C99D-43FC-960E-0B11B03E8F36}" srcId="{D0848C07-6547-42B2-8707-F98FA531BB94}" destId="{14E6748A-A138-42A0-AF86-4CACC0F5E6A4}" srcOrd="0" destOrd="0" parTransId="{EEE7052B-E769-4240-B766-5321C889E24D}" sibTransId="{83C6C374-6513-4E14-B43F-8EC8E532AFC8}"/>
+    <dgm:cxn modelId="{22AE8E10-62D1-43A0-8928-12398BBE8DBD}" srcId="{0BC197A5-D7C6-4903-8C1A-6AAFDB462E46}" destId="{CB9446E3-22A8-4EB1-94D6-2E8E423D03A3}" srcOrd="3" destOrd="0" parTransId="{B536CA73-F9E9-464D-A053-B2FD66191EDC}" sibTransId="{AF268209-B21E-4A4E-935D-164E5B6E4FED}"/>
+    <dgm:cxn modelId="{175BF510-A94C-4209-9894-AA7FDE4CF367}" srcId="{1305126E-5E43-46AB-8AAB-1EC0CBCDDC91}" destId="{0ECEB27E-706C-4A33-8B0B-456FE3D00325}" srcOrd="2" destOrd="0" parTransId="{0568C7E1-8BF4-4C2B-BAFC-2C4ADAFBE11F}" sibTransId="{106B2FC0-21FE-4F8F-A309-3B697F07AD2C}"/>
+    <dgm:cxn modelId="{BBC6F320-CFBB-461D-9537-BB2D51AE4855}" srcId="{174C7BC0-A6DA-4B38-9AF9-502B0B4362C7}" destId="{0BC197A5-D7C6-4903-8C1A-6AAFDB462E46}" srcOrd="3" destOrd="0" parTransId="{D070C695-B63D-47FC-94C0-671DADA15262}" sibTransId="{68C7BE81-8282-456F-9C39-91E8EBFAEAC5}"/>
+    <dgm:cxn modelId="{BAA9BE2C-6748-4AA6-AC18-4B691C424313}" type="presOf" srcId="{CB9446E3-22A8-4EB1-94D6-2E8E423D03A3}" destId="{0F7139EB-BD7E-4CF5-9B4E-6B17E66429B1}" srcOrd="0" destOrd="3" presId="urn:microsoft.com/office/officeart/2005/8/layout/hList1"/>
+    <dgm:cxn modelId="{1F26FC36-AE96-42D3-92F1-8379979BB920}" srcId="{0BC197A5-D7C6-4903-8C1A-6AAFDB462E46}" destId="{3026595D-5730-4F3C-AA50-590F26E394C0}" srcOrd="5" destOrd="0" parTransId="{E11387C1-A0EF-4FE6-B3CE-E78A5F3008BF}" sibTransId="{E7E4E60B-C67B-4ED1-B1B3-070656DECCD1}"/>
+    <dgm:cxn modelId="{4F987E3E-ED46-404A-B268-90D58E9BA0BE}" type="presOf" srcId="{A11D6E1A-CF90-4758-807D-1927A3EA6F2E}" destId="{D7A13854-8AA3-4625-8C9F-1E35F0AA587A}" srcOrd="0" destOrd="1" presId="urn:microsoft.com/office/officeart/2005/8/layout/hList1"/>
+    <dgm:cxn modelId="{1ADB355E-1DEE-4191-A9B2-32EDC05DDF9A}" type="presOf" srcId="{FCF33AEB-5809-4100-991B-75C35559E896}" destId="{0F7139EB-BD7E-4CF5-9B4E-6B17E66429B1}" srcOrd="0" destOrd="1" presId="urn:microsoft.com/office/officeart/2005/8/layout/hList1"/>
+    <dgm:cxn modelId="{CB23E244-1B59-4B52-98D8-BFFBFE8D0806}" srcId="{D0848C07-6547-42B2-8707-F98FA531BB94}" destId="{A11D6E1A-CF90-4758-807D-1927A3EA6F2E}" srcOrd="1" destOrd="0" parTransId="{A71A5171-D0E8-4D7B-AB7E-63E5FFE603E3}" sibTransId="{A9C2F6D9-26B9-43EA-8352-92272B010673}"/>
+    <dgm:cxn modelId="{82D65746-8AAF-4B2C-9081-622C3EDC0765}" srcId="{0BC197A5-D7C6-4903-8C1A-6AAFDB462E46}" destId="{BC35C7F6-0A88-422F-98B1-6B1C8540E726}" srcOrd="4" destOrd="0" parTransId="{B8F81C08-4E24-4B59-BC31-E9DBD0DE56B7}" sibTransId="{E03709B8-637B-44DE-95B2-E243DB036A82}"/>
+    <dgm:cxn modelId="{AFA33668-88F5-4A71-8D2B-24BEB3FEE262}" type="presOf" srcId="{14E6748A-A138-42A0-AF86-4CACC0F5E6A4}" destId="{D7A13854-8AA3-4625-8C9F-1E35F0AA587A}" srcOrd="0" destOrd="0" presId="urn:microsoft.com/office/officeart/2005/8/layout/hList1"/>
+    <dgm:cxn modelId="{CC000E4A-582C-4015-8880-5F7D58B50F69}" srcId="{174C7BC0-A6DA-4B38-9AF9-502B0B4362C7}" destId="{D0848C07-6547-42B2-8707-F98FA531BB94}" srcOrd="0" destOrd="0" parTransId="{EA6F3171-FC74-47F2-A9D0-D5CA150A8955}" sibTransId="{23AB8727-0F0D-4CD7-8A1B-0032ACCFE280}"/>
+    <dgm:cxn modelId="{EE40D36B-A2A4-41A7-9C71-88D22F1E6658}" srcId="{0BC197A5-D7C6-4903-8C1A-6AAFDB462E46}" destId="{FCF33AEB-5809-4100-991B-75C35559E896}" srcOrd="1" destOrd="0" parTransId="{831922E6-2CF9-436F-B4E7-B15769FD074C}" sibTransId="{8EBFAA6F-6A24-4ECD-ACD3-292FCFC3A546}"/>
+    <dgm:cxn modelId="{25E1264F-7C78-4047-91A7-F1C90F71ADB9}" srcId="{EE59A2AA-300A-446D-A459-8A65650C7E23}" destId="{42208BB4-28E3-4CAB-AC52-F2BB5A85A816}" srcOrd="2" destOrd="0" parTransId="{377DB40D-92C5-4467-BD3D-D18B2CE821F3}" sibTransId="{65583036-077D-4CC5-8EEF-BC2FAF795503}"/>
+    <dgm:cxn modelId="{36A33772-B7BE-4B33-8633-DFEF6B13A426}" type="presOf" srcId="{1305126E-5E43-46AB-8AAB-1EC0CBCDDC91}" destId="{1AD820B3-A82A-4276-B6CC-46731392EAEF}" srcOrd="0" destOrd="0" presId="urn:microsoft.com/office/officeart/2005/8/layout/hList1"/>
+    <dgm:cxn modelId="{917A0C59-214C-4BB0-932F-75F584D2EC39}" type="presOf" srcId="{BC35C7F6-0A88-422F-98B1-6B1C8540E726}" destId="{0F7139EB-BD7E-4CF5-9B4E-6B17E66429B1}" srcOrd="0" destOrd="4" presId="urn:microsoft.com/office/officeart/2005/8/layout/hList1"/>
+    <dgm:cxn modelId="{CD0D3C81-6CDB-44E5-8C9C-B91006D544E9}" srcId="{729F6C17-BE7C-4104-84DE-C3CBBBD3C8D9}" destId="{93A7B0A5-22EA-4D94-A053-92129763F6E1}" srcOrd="0" destOrd="0" parTransId="{92EFB4D9-B073-4B3E-A94D-64384660FF4F}" sibTransId="{F3028D52-4727-4CDD-8B2D-4F9C3FC1A717}"/>
+    <dgm:cxn modelId="{87CFA184-F822-48B2-94F0-A1CA1B3CCBE9}" type="presOf" srcId="{3026595D-5730-4F3C-AA50-590F26E394C0}" destId="{0F7139EB-BD7E-4CF5-9B4E-6B17E66429B1}" srcOrd="0" destOrd="5" presId="urn:microsoft.com/office/officeart/2005/8/layout/hList1"/>
+    <dgm:cxn modelId="{AE70CB8A-81D1-43BF-8169-3F0D3E685066}" type="presOf" srcId="{665CEBF1-C393-476B-B04D-65A9AFB98891}" destId="{0F7139EB-BD7E-4CF5-9B4E-6B17E66429B1}" srcOrd="0" destOrd="2" presId="urn:microsoft.com/office/officeart/2005/8/layout/hList1"/>
+    <dgm:cxn modelId="{8B0C198B-3168-4DEF-B0AB-21C0F5D62F73}" type="presOf" srcId="{7473CDE0-ADD3-4E79-B736-3D09328A2427}" destId="{E522ABA4-EFC3-4019-8454-344F60FCBA95}" srcOrd="0" destOrd="1" presId="urn:microsoft.com/office/officeart/2005/8/layout/hList1"/>
+    <dgm:cxn modelId="{05C8438B-FDC2-4E6D-A64A-F550FC1718CC}" type="presOf" srcId="{EE1DD065-A1B5-41B2-895A-7EC28798ED85}" destId="{D7A13854-8AA3-4625-8C9F-1E35F0AA587A}" srcOrd="0" destOrd="2" presId="urn:microsoft.com/office/officeart/2005/8/layout/hList1"/>
+    <dgm:cxn modelId="{663C8F8C-3029-4075-AF33-C3EE8CC28E01}" srcId="{0BC197A5-D7C6-4903-8C1A-6AAFDB462E46}" destId="{1AD0E0BA-C1D6-49A4-82D1-E969BD8FCDF8}" srcOrd="0" destOrd="0" parTransId="{9762902C-25B2-4AEA-A3CF-5DEAC075A0F4}" sibTransId="{461D3290-CF05-40E7-9B2C-3A0BF548079A}"/>
+    <dgm:cxn modelId="{F76E0A8D-9775-4498-A538-7AD19E603E85}" type="presOf" srcId="{EE59A2AA-300A-446D-A459-8A65650C7E23}" destId="{C0B00806-C28D-482C-ABA8-E404759875A2}" srcOrd="0" destOrd="0" presId="urn:microsoft.com/office/officeart/2005/8/layout/hList1"/>
+    <dgm:cxn modelId="{15D67A90-8159-4D30-98AF-D5023BFA6688}" srcId="{EE59A2AA-300A-446D-A459-8A65650C7E23}" destId="{E7C98585-0D7D-422A-B6E8-E759B870F31F}" srcOrd="1" destOrd="0" parTransId="{EA7D9091-A51E-419B-AE4F-AB2A2AAA9514}" sibTransId="{C1F6BEE5-A717-4F07-A8CC-BD626EB26D03}"/>
+    <dgm:cxn modelId="{A84EB494-9354-4AE5-B22B-2397B02C9245}" type="presOf" srcId="{93A7B0A5-22EA-4D94-A053-92129763F6E1}" destId="{8AEAEBFB-3310-43B8-A19E-37BE4596DAE3}" srcOrd="0" destOrd="0" presId="urn:microsoft.com/office/officeart/2005/8/layout/hList1"/>
+    <dgm:cxn modelId="{A945BAA0-7292-45B2-A854-F15A72B93878}" type="presOf" srcId="{4069FA31-9492-48D5-9F05-528FB3FE1B7F}" destId="{68B54BB8-F7E5-4542-9A6D-61918DA60243}" srcOrd="0" destOrd="0" presId="urn:microsoft.com/office/officeart/2005/8/layout/hList1"/>
+    <dgm:cxn modelId="{28CC05A8-49F9-4175-B203-436D4C5EFF6D}" srcId="{729F6C17-BE7C-4104-84DE-C3CBBBD3C8D9}" destId="{47182CCA-9109-4612-8500-93986140D2D0}" srcOrd="1" destOrd="0" parTransId="{B98880AD-9D18-4C98-AF40-1F97FC935AC2}" sibTransId="{7A7B2350-44B8-4094-90F0-D8881475C772}"/>
+    <dgm:cxn modelId="{0B1C1DB6-1A6A-4501-8CA7-124CBAA80E42}" type="presOf" srcId="{729F6C17-BE7C-4104-84DE-C3CBBBD3C8D9}" destId="{8FA9666F-37A1-408F-A310-79AE9893137D}" srcOrd="0" destOrd="0" presId="urn:microsoft.com/office/officeart/2005/8/layout/hList1"/>
+    <dgm:cxn modelId="{5B5A61BB-4AF6-4411-9440-EA5D8979A94C}" srcId="{174C7BC0-A6DA-4B38-9AF9-502B0B4362C7}" destId="{EE59A2AA-300A-446D-A459-8A65650C7E23}" srcOrd="1" destOrd="0" parTransId="{597FF2CF-4E63-4997-BEFA-C5CED203137D}" sibTransId="{9C23D6C2-0855-4426-B97E-E250446E3793}"/>
+    <dgm:cxn modelId="{2348AEBD-84D1-4EBB-89B1-B5D349245E62}" type="presOf" srcId="{174C7BC0-A6DA-4B38-9AF9-502B0B4362C7}" destId="{4551940E-364B-462F-AD27-DDF507B1A067}" srcOrd="0" destOrd="0" presId="urn:microsoft.com/office/officeart/2005/8/layout/hList1"/>
+    <dgm:cxn modelId="{E8BC81CA-ABBA-4F50-87CE-01DA78101A39}" type="presOf" srcId="{F816084D-FA16-443B-9AC8-1329E2018AB9}" destId="{E522ABA4-EFC3-4019-8454-344F60FCBA95}" srcOrd="0" destOrd="0" presId="urn:microsoft.com/office/officeart/2005/8/layout/hList1"/>
+    <dgm:cxn modelId="{D87B0AD9-E228-4FE6-9C3C-424445F1979A}" type="presOf" srcId="{0ECEB27E-706C-4A33-8B0B-456FE3D00325}" destId="{E522ABA4-EFC3-4019-8454-344F60FCBA95}" srcOrd="0" destOrd="2" presId="urn:microsoft.com/office/officeart/2005/8/layout/hList1"/>
+    <dgm:cxn modelId="{743CEFDE-C96E-4D14-A603-8601AE9196B3}" srcId="{1305126E-5E43-46AB-8AAB-1EC0CBCDDC91}" destId="{F816084D-FA16-443B-9AC8-1329E2018AB9}" srcOrd="0" destOrd="0" parTransId="{11657795-82BB-4C3A-B4E3-10B1B19A6257}" sibTransId="{24434CFE-BF90-4E49-B74C-511E98FFFBF5}"/>
+    <dgm:cxn modelId="{8BDB7CE2-FC23-44AF-80D3-2351A47491C9}" srcId="{1305126E-5E43-46AB-8AAB-1EC0CBCDDC91}" destId="{7473CDE0-ADD3-4E79-B736-3D09328A2427}" srcOrd="1" destOrd="0" parTransId="{C033BD34-B6BD-4004-AD38-2709FCDAB6D7}" sibTransId="{A76FBAC0-4E16-4D2B-935F-213339B05ACF}"/>
+    <dgm:cxn modelId="{C6E86BE3-4997-43C8-B67C-050EC8C12EBF}" type="presOf" srcId="{42208BB4-28E3-4CAB-AC52-F2BB5A85A816}" destId="{68B54BB8-F7E5-4542-9A6D-61918DA60243}" srcOrd="0" destOrd="2" presId="urn:microsoft.com/office/officeart/2005/8/layout/hList1"/>
+    <dgm:cxn modelId="{2393CCE3-D0A3-4740-96EA-E5D659023007}" srcId="{EE59A2AA-300A-446D-A459-8A65650C7E23}" destId="{4069FA31-9492-48D5-9F05-528FB3FE1B7F}" srcOrd="0" destOrd="0" parTransId="{CCB9545B-2C73-48EB-A697-0E4BA10FA132}" sibTransId="{6BF89D76-80B5-41CE-A360-CB42AE3FC2FC}"/>
+    <dgm:cxn modelId="{702E96E5-B426-455D-A7F4-D1F0923334B7}" type="presOf" srcId="{47182CCA-9109-4612-8500-93986140D2D0}" destId="{8AEAEBFB-3310-43B8-A19E-37BE4596DAE3}" srcOrd="0" destOrd="1" presId="urn:microsoft.com/office/officeart/2005/8/layout/hList1"/>
+    <dgm:cxn modelId="{2CCE5AE8-FCFA-498F-B20F-7B75528EBE5D}" srcId="{0BC197A5-D7C6-4903-8C1A-6AAFDB462E46}" destId="{665CEBF1-C393-476B-B04D-65A9AFB98891}" srcOrd="2" destOrd="0" parTransId="{A32EB242-BD8C-4BFA-841D-B48C6A1624EE}" sibTransId="{F1B07617-4BF5-4D76-A7E2-5214F9B307D5}"/>
+    <dgm:cxn modelId="{3525C3E8-950A-4C00-B715-38DFA958AA9A}" srcId="{174C7BC0-A6DA-4B38-9AF9-502B0B4362C7}" destId="{729F6C17-BE7C-4104-84DE-C3CBBBD3C8D9}" srcOrd="2" destOrd="0" parTransId="{63FB29C8-FC86-4C95-A9C6-102D76F28AEB}" sibTransId="{06F975BF-2A7F-4095-AE17-B2F8446B2AE5}"/>
+    <dgm:cxn modelId="{FFD516F0-CF68-42FE-9434-808F82C7D6CD}" type="presOf" srcId="{0BC197A5-D7C6-4903-8C1A-6AAFDB462E46}" destId="{846B2601-2552-4B6A-B23F-184F206CCA93}" srcOrd="0" destOrd="0" presId="urn:microsoft.com/office/officeart/2005/8/layout/hList1"/>
+    <dgm:cxn modelId="{1EB2F0FA-CE9D-4741-AAE8-6EE0251D9D3A}" type="presOf" srcId="{D0848C07-6547-42B2-8707-F98FA531BB94}" destId="{962A9775-B660-4369-9ECA-76A5B1C77A25}" srcOrd="0" destOrd="0" presId="urn:microsoft.com/office/officeart/2005/8/layout/hList1"/>
+    <dgm:cxn modelId="{6A666FFE-42A9-418F-8960-354AE11C6718}" type="presOf" srcId="{E7C98585-0D7D-422A-B6E8-E759B870F31F}" destId="{68B54BB8-F7E5-4542-9A6D-61918DA60243}" srcOrd="0" destOrd="1" presId="urn:microsoft.com/office/officeart/2005/8/layout/hList1"/>
+    <dgm:cxn modelId="{7326BCE7-801D-4964-931D-90769985959C}" type="presParOf" srcId="{4551940E-364B-462F-AD27-DDF507B1A067}" destId="{4901D29B-D2A1-4887-BAB7-94F7C355BF9A}" srcOrd="0" destOrd="0" presId="urn:microsoft.com/office/officeart/2005/8/layout/hList1"/>
+    <dgm:cxn modelId="{BE5402B5-CB4A-48EB-8302-85D4F117D9EE}" type="presParOf" srcId="{4901D29B-D2A1-4887-BAB7-94F7C355BF9A}" destId="{962A9775-B660-4369-9ECA-76A5B1C77A25}" srcOrd="0" destOrd="0" presId="urn:microsoft.com/office/officeart/2005/8/layout/hList1"/>
+    <dgm:cxn modelId="{7669F90E-EFE8-41DB-97DA-6E2DBF363FD8}" type="presParOf" srcId="{4901D29B-D2A1-4887-BAB7-94F7C355BF9A}" destId="{D7A13854-8AA3-4625-8C9F-1E35F0AA587A}" srcOrd="1" destOrd="0" presId="urn:microsoft.com/office/officeart/2005/8/layout/hList1"/>
+    <dgm:cxn modelId="{7D348457-9AD8-4E91-9653-9F42DFB65EBA}" type="presParOf" srcId="{4551940E-364B-462F-AD27-DDF507B1A067}" destId="{4110AD48-65A3-4680-A481-D081EF7C1689}" srcOrd="1" destOrd="0" presId="urn:microsoft.com/office/officeart/2005/8/layout/hList1"/>
+    <dgm:cxn modelId="{52FBB0AD-648E-4FA9-B233-2BC98F0A26C8}" type="presParOf" srcId="{4551940E-364B-462F-AD27-DDF507B1A067}" destId="{E5EEEB73-B7D6-43C3-B8FD-626C1855420D}" srcOrd="2" destOrd="0" presId="urn:microsoft.com/office/officeart/2005/8/layout/hList1"/>
+    <dgm:cxn modelId="{E366C72F-A1E3-4E1D-88F3-BC37AA636FB7}" type="presParOf" srcId="{E5EEEB73-B7D6-43C3-B8FD-626C1855420D}" destId="{C0B00806-C28D-482C-ABA8-E404759875A2}" srcOrd="0" destOrd="0" presId="urn:microsoft.com/office/officeart/2005/8/layout/hList1"/>
+    <dgm:cxn modelId="{EDA4E4F9-74E5-417F-8222-D1B7C5160B93}" type="presParOf" srcId="{E5EEEB73-B7D6-43C3-B8FD-626C1855420D}" destId="{68B54BB8-F7E5-4542-9A6D-61918DA60243}" srcOrd="1" destOrd="0" presId="urn:microsoft.com/office/officeart/2005/8/layout/hList1"/>
+    <dgm:cxn modelId="{53CD2E6A-EB75-42CF-868C-D09BDD7548ED}" type="presParOf" srcId="{4551940E-364B-462F-AD27-DDF507B1A067}" destId="{9F03F72E-2355-4B70-877E-4307F65BEC1B}" srcOrd="3" destOrd="0" presId="urn:microsoft.com/office/officeart/2005/8/layout/hList1"/>
+    <dgm:cxn modelId="{1DE70311-A9AA-4DF9-95DC-13E55B858D68}" type="presParOf" srcId="{4551940E-364B-462F-AD27-DDF507B1A067}" destId="{B1BF2AF2-6DEF-4E89-8822-7474F958E5B0}" srcOrd="4" destOrd="0" presId="urn:microsoft.com/office/officeart/2005/8/layout/hList1"/>
+    <dgm:cxn modelId="{DA5D209A-F6A8-4D7E-B6D5-35B29075A137}" type="presParOf" srcId="{B1BF2AF2-6DEF-4E89-8822-7474F958E5B0}" destId="{8FA9666F-37A1-408F-A310-79AE9893137D}" srcOrd="0" destOrd="0" presId="urn:microsoft.com/office/officeart/2005/8/layout/hList1"/>
+    <dgm:cxn modelId="{A6486559-2288-4180-A3A9-4F0E160D5DC7}" type="presParOf" srcId="{B1BF2AF2-6DEF-4E89-8822-7474F958E5B0}" destId="{8AEAEBFB-3310-43B8-A19E-37BE4596DAE3}" srcOrd="1" destOrd="0" presId="urn:microsoft.com/office/officeart/2005/8/layout/hList1"/>
+    <dgm:cxn modelId="{6C7377D1-37FD-48DF-9F67-93617A2BCE2E}" type="presParOf" srcId="{4551940E-364B-462F-AD27-DDF507B1A067}" destId="{B1C6255F-57A0-468D-A693-A9726C0C2D30}" srcOrd="5" destOrd="0" presId="urn:microsoft.com/office/officeart/2005/8/layout/hList1"/>
+    <dgm:cxn modelId="{4657F59D-2627-47D2-8F02-C3EE80307B90}" type="presParOf" srcId="{4551940E-364B-462F-AD27-DDF507B1A067}" destId="{BFCB9DA3-5EC6-43CF-BE09-29F862017A6D}" srcOrd="6" destOrd="0" presId="urn:microsoft.com/office/officeart/2005/8/layout/hList1"/>
+    <dgm:cxn modelId="{3FC86D6B-E816-4F38-A296-BF11B173EFEF}" type="presParOf" srcId="{BFCB9DA3-5EC6-43CF-BE09-29F862017A6D}" destId="{846B2601-2552-4B6A-B23F-184F206CCA93}" srcOrd="0" destOrd="0" presId="urn:microsoft.com/office/officeart/2005/8/layout/hList1"/>
+    <dgm:cxn modelId="{04A07F6A-F965-487B-902D-501AE5186464}" type="presParOf" srcId="{BFCB9DA3-5EC6-43CF-BE09-29F862017A6D}" destId="{0F7139EB-BD7E-4CF5-9B4E-6B17E66429B1}" srcOrd="1" destOrd="0" presId="urn:microsoft.com/office/officeart/2005/8/layout/hList1"/>
+    <dgm:cxn modelId="{5B58E7A4-D545-423B-8A10-0856804BBAEB}" type="presParOf" srcId="{4551940E-364B-462F-AD27-DDF507B1A067}" destId="{3320C39C-CB22-451B-9B3A-97B9F9C6B28F}" srcOrd="7" destOrd="0" presId="urn:microsoft.com/office/officeart/2005/8/layout/hList1"/>
+    <dgm:cxn modelId="{84860C34-38AF-46B3-8731-B10B32A479FB}" type="presParOf" srcId="{4551940E-364B-462F-AD27-DDF507B1A067}" destId="{5DB322AD-2C08-4119-9A88-77756BB72DC5}" srcOrd="8" destOrd="0" presId="urn:microsoft.com/office/officeart/2005/8/layout/hList1"/>
+    <dgm:cxn modelId="{956ED8B9-6F4B-4DAA-BF09-AE3F308B3F28}" type="presParOf" srcId="{5DB322AD-2C08-4119-9A88-77756BB72DC5}" destId="{1AD820B3-A82A-4276-B6CC-46731392EAEF}" srcOrd="0" destOrd="0" presId="urn:microsoft.com/office/officeart/2005/8/layout/hList1"/>
+    <dgm:cxn modelId="{74141803-EF62-4544-A053-AFA633E1FAFA}" type="presParOf" srcId="{5DB322AD-2C08-4119-9A88-77756BB72DC5}" destId="{E522ABA4-EFC3-4019-8454-344F60FCBA95}" srcOrd="1" destOrd="0" presId="urn:microsoft.com/office/officeart/2005/8/layout/hList1"/>
+  </dgm:cxnLst>
+  <dgm:bg/>
+  <dgm:whole/>
+  <dgm:extLst>
+    <a:ext uri="http://schemas.microsoft.com/office/drawing/2008/diagram">
+      <dsp:dataModelExt xmlns:dsp="http://schemas.microsoft.com/office/drawing/2008/diagram" relId="rId7" minVer="http://schemas.openxmlformats.org/drawingml/2006/diagram"/>
+    </a:ext>
+  </dgm:extLst>
+</dgm:dataModel>
+</file>
+
+<file path=ppt/diagrams/drawing1.xml><?xml version="1.0" encoding="utf-8"?>
+<dsp:drawing xmlns:dgm="http://schemas.openxmlformats.org/drawingml/2006/diagram" xmlns:dsp="http://schemas.microsoft.com/office/drawing/2008/diagram" xmlns:a="http://schemas.openxmlformats.org/drawingml/2006/main">
+  <dsp:spTree>
+    <dsp:nvGrpSpPr>
+      <dsp:cNvPr id="0" name=""/>
+      <dsp:cNvGrpSpPr/>
+    </dsp:nvGrpSpPr>
+    <dsp:grpSpPr/>
+    <dsp:sp modelId="{483B3306-9E08-493E-B4D1-8F0414F0F3F5}">
+      <dsp:nvSpPr>
+        <dsp:cNvPr id="0" name=""/>
+        <dsp:cNvSpPr/>
+      </dsp:nvSpPr>
+      <dsp:spPr>
+        <a:xfrm>
+          <a:off x="5134" y="1698153"/>
+          <a:ext cx="1591716" cy="955030"/>
+        </a:xfrm>
+        <a:prstGeom prst="roundRect">
+          <a:avLst>
+            <a:gd name="adj" fmla="val 10000"/>
+          </a:avLst>
+        </a:prstGeom>
+        <a:solidFill>
+          <a:schemeClr val="lt1">
+            <a:hueOff val="0"/>
+            <a:satOff val="0"/>
+            <a:lumOff val="0"/>
+            <a:alphaOff val="0"/>
+          </a:schemeClr>
+        </a:solidFill>
+        <a:ln w="19050" cap="flat" cmpd="sng" algn="ctr">
+          <a:solidFill>
+            <a:schemeClr val="dk1">
+              <a:shade val="80000"/>
+              <a:hueOff val="0"/>
+              <a:satOff val="0"/>
+              <a:lumOff val="0"/>
+              <a:alphaOff val="0"/>
+            </a:schemeClr>
+          </a:solidFill>
+          <a:prstDash val="solid"/>
+          <a:miter lim="800000"/>
+        </a:ln>
+        <a:effectLst/>
+      </dsp:spPr>
+      <dsp:style>
+        <a:lnRef idx="2">
+          <a:scrgbClr r="0" g="0" b="0"/>
+        </a:lnRef>
+        <a:fillRef idx="1">
+          <a:scrgbClr r="0" g="0" b="0"/>
+        </a:fillRef>
+        <a:effectRef idx="0">
+          <a:scrgbClr r="0" g="0" b="0"/>
+        </a:effectRef>
+        <a:fontRef idx="minor">
+          <a:schemeClr val="lt1"/>
+        </a:fontRef>
+      </dsp:style>
+      <dsp:txBody>
+        <a:bodyPr spcFirstLastPara="0" vert="horz" wrap="square" lIns="68580" tIns="68580" rIns="68580" bIns="68580" numCol="1" spcCol="1270" anchor="ctr" anchorCtr="0">
+          <a:noAutofit/>
+        </a:bodyPr>
+        <a:lstStyle/>
+        <a:p>
+          <a:pPr marL="0" lvl="0" indent="0" algn="ctr" defTabSz="800100">
+            <a:lnSpc>
+              <a:spcPct val="90000"/>
+            </a:lnSpc>
+            <a:spcBef>
+              <a:spcPct val="0"/>
+            </a:spcBef>
+            <a:spcAft>
+              <a:spcPct val="35000"/>
+            </a:spcAft>
+            <a:buNone/>
+          </a:pPr>
+          <a:r>
+            <a:rPr lang="en-IE" sz="1800" kern="1200" dirty="0"/>
+            <a:t>Race Initialisation</a:t>
+          </a:r>
+        </a:p>
+      </dsp:txBody>
+      <dsp:txXfrm>
+        <a:off x="33106" y="1726125"/>
+        <a:ext cx="1535772" cy="899086"/>
+      </dsp:txXfrm>
+    </dsp:sp>
+    <dsp:sp modelId="{AC35074A-6676-451D-B690-4D7F43554B5E}">
+      <dsp:nvSpPr>
+        <dsp:cNvPr id="0" name=""/>
+        <dsp:cNvSpPr/>
+      </dsp:nvSpPr>
+      <dsp:spPr>
+        <a:xfrm>
+          <a:off x="1756023" y="1978296"/>
+          <a:ext cx="337443" cy="394745"/>
+        </a:xfrm>
+        <a:prstGeom prst="rightArrow">
+          <a:avLst>
+            <a:gd name="adj1" fmla="val 60000"/>
+            <a:gd name="adj2" fmla="val 50000"/>
+          </a:avLst>
+        </a:prstGeom>
+        <a:solidFill>
+          <a:schemeClr val="accent2"/>
+        </a:solidFill>
+        <a:ln>
+          <a:noFill/>
+        </a:ln>
+        <a:effectLst/>
+      </dsp:spPr>
+      <dsp:style>
+        <a:lnRef idx="0">
+          <a:scrgbClr r="0" g="0" b="0"/>
+        </a:lnRef>
+        <a:fillRef idx="1">
+          <a:scrgbClr r="0" g="0" b="0"/>
+        </a:fillRef>
+        <a:effectRef idx="0">
+          <a:scrgbClr r="0" g="0" b="0"/>
+        </a:effectRef>
+        <a:fontRef idx="minor">
+          <a:schemeClr val="lt1"/>
+        </a:fontRef>
+      </dsp:style>
+      <dsp:txBody>
+        <a:bodyPr spcFirstLastPara="0" vert="horz" wrap="square" lIns="0" tIns="0" rIns="0" bIns="0" numCol="1" spcCol="1270" anchor="ctr" anchorCtr="0">
+          <a:noAutofit/>
+        </a:bodyPr>
+        <a:lstStyle/>
+        <a:p>
+          <a:pPr marL="0" lvl="0" indent="0" algn="ctr" defTabSz="622300">
+            <a:lnSpc>
+              <a:spcPct val="90000"/>
+            </a:lnSpc>
+            <a:spcBef>
+              <a:spcPct val="0"/>
+            </a:spcBef>
+            <a:spcAft>
+              <a:spcPct val="35000"/>
+            </a:spcAft>
+            <a:buNone/>
+          </a:pPr>
+          <a:endParaRPr lang="en-IE" sz="1400" kern="1200"/>
+        </a:p>
+      </dsp:txBody>
+      <dsp:txXfrm>
+        <a:off x="1756023" y="2057245"/>
+        <a:ext cx="236210" cy="236847"/>
+      </dsp:txXfrm>
+    </dsp:sp>
+    <dsp:sp modelId="{C1DA1859-ADFE-446E-8AF2-B62D312D6EF6}">
+      <dsp:nvSpPr>
+        <dsp:cNvPr id="0" name=""/>
+        <dsp:cNvSpPr/>
+      </dsp:nvSpPr>
+      <dsp:spPr>
+        <a:xfrm>
+          <a:off x="2233538" y="1698153"/>
+          <a:ext cx="1591716" cy="955030"/>
+        </a:xfrm>
+        <a:prstGeom prst="roundRect">
+          <a:avLst>
+            <a:gd name="adj" fmla="val 10000"/>
+          </a:avLst>
+        </a:prstGeom>
+        <a:solidFill>
+          <a:schemeClr val="lt1">
+            <a:hueOff val="0"/>
+            <a:satOff val="0"/>
+            <a:lumOff val="0"/>
+            <a:alphaOff val="0"/>
+          </a:schemeClr>
+        </a:solidFill>
+        <a:ln w="19050" cap="flat" cmpd="sng" algn="ctr">
+          <a:solidFill>
+            <a:schemeClr val="dk1">
+              <a:shade val="80000"/>
+              <a:hueOff val="0"/>
+              <a:satOff val="0"/>
+              <a:lumOff val="0"/>
+              <a:alphaOff val="0"/>
+            </a:schemeClr>
+          </a:solidFill>
+          <a:prstDash val="solid"/>
+          <a:miter lim="800000"/>
+        </a:ln>
+        <a:effectLst/>
+      </dsp:spPr>
+      <dsp:style>
+        <a:lnRef idx="2">
+          <a:scrgbClr r="0" g="0" b="0"/>
+        </a:lnRef>
+        <a:fillRef idx="1">
+          <a:scrgbClr r="0" g="0" b="0"/>
+        </a:fillRef>
+        <a:effectRef idx="0">
+          <a:scrgbClr r="0" g="0" b="0"/>
+        </a:effectRef>
+        <a:fontRef idx="minor">
+          <a:schemeClr val="lt1"/>
+        </a:fontRef>
+      </dsp:style>
+      <dsp:txBody>
+        <a:bodyPr spcFirstLastPara="0" vert="horz" wrap="square" lIns="68580" tIns="68580" rIns="68580" bIns="68580" numCol="1" spcCol="1270" anchor="ctr" anchorCtr="0">
+          <a:noAutofit/>
+        </a:bodyPr>
+        <a:lstStyle/>
+        <a:p>
+          <a:pPr marL="0" lvl="0" indent="0" algn="ctr" defTabSz="800100">
+            <a:lnSpc>
+              <a:spcPct val="90000"/>
+            </a:lnSpc>
+            <a:spcBef>
+              <a:spcPct val="0"/>
+            </a:spcBef>
+            <a:spcAft>
+              <a:spcPct val="35000"/>
+            </a:spcAft>
+            <a:buNone/>
+          </a:pPr>
+          <a:r>
+            <a:rPr lang="en-IE" sz="1800" kern="1200" dirty="0"/>
+            <a:t>Driver Behaviour Update</a:t>
+          </a:r>
+        </a:p>
+      </dsp:txBody>
+      <dsp:txXfrm>
+        <a:off x="2261510" y="1726125"/>
+        <a:ext cx="1535772" cy="899086"/>
+      </dsp:txXfrm>
+    </dsp:sp>
+    <dsp:sp modelId="{0E0C0A7D-3DD8-4B75-85A5-205A5F9A5CAD}">
+      <dsp:nvSpPr>
+        <dsp:cNvPr id="0" name=""/>
+        <dsp:cNvSpPr/>
+      </dsp:nvSpPr>
+      <dsp:spPr>
+        <a:xfrm>
+          <a:off x="3984426" y="1978296"/>
+          <a:ext cx="337443" cy="394745"/>
+        </a:xfrm>
+        <a:prstGeom prst="rightArrow">
+          <a:avLst>
+            <a:gd name="adj1" fmla="val 60000"/>
+            <a:gd name="adj2" fmla="val 50000"/>
+          </a:avLst>
+        </a:prstGeom>
+        <a:solidFill>
+          <a:srgbClr val="A93044"/>
+        </a:solidFill>
+        <a:ln>
+          <a:noFill/>
+        </a:ln>
+        <a:effectLst/>
+      </dsp:spPr>
+      <dsp:style>
+        <a:lnRef idx="0">
+          <a:scrgbClr r="0" g="0" b="0"/>
+        </a:lnRef>
+        <a:fillRef idx="1">
+          <a:scrgbClr r="0" g="0" b="0"/>
+        </a:fillRef>
+        <a:effectRef idx="0">
+          <a:scrgbClr r="0" g="0" b="0"/>
+        </a:effectRef>
+        <a:fontRef idx="minor">
+          <a:schemeClr val="lt1"/>
+        </a:fontRef>
+      </dsp:style>
+      <dsp:txBody>
+        <a:bodyPr spcFirstLastPara="0" vert="horz" wrap="square" lIns="0" tIns="0" rIns="0" bIns="0" numCol="1" spcCol="1270" anchor="ctr" anchorCtr="0">
+          <a:noAutofit/>
+        </a:bodyPr>
+        <a:lstStyle/>
+        <a:p>
+          <a:pPr marL="0" lvl="0" indent="0" algn="ctr" defTabSz="622300">
+            <a:lnSpc>
+              <a:spcPct val="90000"/>
+            </a:lnSpc>
+            <a:spcBef>
+              <a:spcPct val="0"/>
+            </a:spcBef>
+            <a:spcAft>
+              <a:spcPct val="35000"/>
+            </a:spcAft>
+            <a:buNone/>
+          </a:pPr>
+          <a:endParaRPr lang="en-IE" sz="1400" kern="1200"/>
+        </a:p>
+      </dsp:txBody>
+      <dsp:txXfrm>
+        <a:off x="3984426" y="2057245"/>
+        <a:ext cx="236210" cy="236847"/>
+      </dsp:txXfrm>
+    </dsp:sp>
+    <dsp:sp modelId="{FB3320C9-CCE2-4A09-9D4B-F0C97D609CA6}">
+      <dsp:nvSpPr>
+        <dsp:cNvPr id="0" name=""/>
+        <dsp:cNvSpPr/>
+      </dsp:nvSpPr>
+      <dsp:spPr>
+        <a:xfrm>
+          <a:off x="4461941" y="1698153"/>
+          <a:ext cx="1591716" cy="955030"/>
+        </a:xfrm>
+        <a:prstGeom prst="roundRect">
+          <a:avLst>
+            <a:gd name="adj" fmla="val 10000"/>
+          </a:avLst>
+        </a:prstGeom>
+        <a:solidFill>
+          <a:schemeClr val="lt1">
+            <a:hueOff val="0"/>
+            <a:satOff val="0"/>
+            <a:lumOff val="0"/>
+            <a:alphaOff val="0"/>
+          </a:schemeClr>
+        </a:solidFill>
+        <a:ln w="19050" cap="flat" cmpd="sng" algn="ctr">
+          <a:solidFill>
+            <a:schemeClr val="dk1">
+              <a:shade val="80000"/>
+              <a:hueOff val="0"/>
+              <a:satOff val="0"/>
+              <a:lumOff val="0"/>
+              <a:alphaOff val="0"/>
+            </a:schemeClr>
+          </a:solidFill>
+          <a:prstDash val="solid"/>
+          <a:miter lim="800000"/>
+        </a:ln>
+        <a:effectLst/>
+      </dsp:spPr>
+      <dsp:style>
+        <a:lnRef idx="2">
+          <a:scrgbClr r="0" g="0" b="0"/>
+        </a:lnRef>
+        <a:fillRef idx="1">
+          <a:scrgbClr r="0" g="0" b="0"/>
+        </a:fillRef>
+        <a:effectRef idx="0">
+          <a:scrgbClr r="0" g="0" b="0"/>
+        </a:effectRef>
+        <a:fontRef idx="minor">
+          <a:schemeClr val="lt1"/>
+        </a:fontRef>
+      </dsp:style>
+      <dsp:txBody>
+        <a:bodyPr spcFirstLastPara="0" vert="horz" wrap="square" lIns="68580" tIns="68580" rIns="68580" bIns="68580" numCol="1" spcCol="1270" anchor="ctr" anchorCtr="0">
+          <a:noAutofit/>
+        </a:bodyPr>
+        <a:lstStyle/>
+        <a:p>
+          <a:pPr marL="0" lvl="0" indent="0" algn="ctr" defTabSz="800100">
+            <a:lnSpc>
+              <a:spcPct val="90000"/>
+            </a:lnSpc>
+            <a:spcBef>
+              <a:spcPct val="0"/>
+            </a:spcBef>
+            <a:spcAft>
+              <a:spcPct val="35000"/>
+            </a:spcAft>
+            <a:buNone/>
+          </a:pPr>
+          <a:r>
+            <a:rPr lang="en-IE" sz="1800" kern="1200" dirty="0"/>
+            <a:t>Race Simulation Loop</a:t>
+          </a:r>
+        </a:p>
+      </dsp:txBody>
+      <dsp:txXfrm>
+        <a:off x="4489913" y="1726125"/>
+        <a:ext cx="1535772" cy="899086"/>
+      </dsp:txXfrm>
+    </dsp:sp>
+    <dsp:sp modelId="{1B1207CD-762C-4032-9B85-93FBD354AF22}">
+      <dsp:nvSpPr>
+        <dsp:cNvPr id="0" name=""/>
+        <dsp:cNvSpPr/>
+      </dsp:nvSpPr>
+      <dsp:spPr>
+        <a:xfrm>
+          <a:off x="6212830" y="1978296"/>
+          <a:ext cx="337443" cy="394745"/>
+        </a:xfrm>
+        <a:prstGeom prst="rightArrow">
+          <a:avLst>
+            <a:gd name="adj1" fmla="val 60000"/>
+            <a:gd name="adj2" fmla="val 50000"/>
+          </a:avLst>
+        </a:prstGeom>
+        <a:solidFill>
+          <a:srgbClr val="A93044"/>
+        </a:solidFill>
+        <a:ln>
+          <a:noFill/>
+        </a:ln>
+        <a:effectLst/>
+      </dsp:spPr>
+      <dsp:style>
+        <a:lnRef idx="0">
+          <a:scrgbClr r="0" g="0" b="0"/>
+        </a:lnRef>
+        <a:fillRef idx="1">
+          <a:scrgbClr r="0" g="0" b="0"/>
+        </a:fillRef>
+        <a:effectRef idx="0">
+          <a:scrgbClr r="0" g="0" b="0"/>
+        </a:effectRef>
+        <a:fontRef idx="minor">
+          <a:schemeClr val="lt1"/>
+        </a:fontRef>
+      </dsp:style>
+      <dsp:txBody>
+        <a:bodyPr spcFirstLastPara="0" vert="horz" wrap="square" lIns="0" tIns="0" rIns="0" bIns="0" numCol="1" spcCol="1270" anchor="ctr" anchorCtr="0">
+          <a:noAutofit/>
+        </a:bodyPr>
+        <a:lstStyle/>
+        <a:p>
+          <a:pPr marL="0" lvl="0" indent="0" algn="ctr" defTabSz="622300">
+            <a:lnSpc>
+              <a:spcPct val="90000"/>
+            </a:lnSpc>
+            <a:spcBef>
+              <a:spcPct val="0"/>
+            </a:spcBef>
+            <a:spcAft>
+              <a:spcPct val="35000"/>
+            </a:spcAft>
+            <a:buNone/>
+          </a:pPr>
+          <a:endParaRPr lang="en-IE" sz="1400" kern="1200"/>
+        </a:p>
+      </dsp:txBody>
+      <dsp:txXfrm>
+        <a:off x="6212830" y="2057245"/>
+        <a:ext cx="236210" cy="236847"/>
+      </dsp:txXfrm>
+    </dsp:sp>
+    <dsp:sp modelId="{BA0053AC-5E35-47CA-8098-43C45F42DE77}">
+      <dsp:nvSpPr>
+        <dsp:cNvPr id="0" name=""/>
+        <dsp:cNvSpPr/>
+      </dsp:nvSpPr>
+      <dsp:spPr>
+        <a:xfrm>
+          <a:off x="6690345" y="1698153"/>
+          <a:ext cx="1591716" cy="955030"/>
+        </a:xfrm>
+        <a:prstGeom prst="roundRect">
+          <a:avLst>
+            <a:gd name="adj" fmla="val 10000"/>
+          </a:avLst>
+        </a:prstGeom>
+        <a:solidFill>
+          <a:schemeClr val="lt1">
+            <a:hueOff val="0"/>
+            <a:satOff val="0"/>
+            <a:lumOff val="0"/>
+            <a:alphaOff val="0"/>
+          </a:schemeClr>
+        </a:solidFill>
+        <a:ln w="19050" cap="flat" cmpd="sng" algn="ctr">
+          <a:solidFill>
+            <a:schemeClr val="dk1">
+              <a:shade val="80000"/>
+              <a:hueOff val="0"/>
+              <a:satOff val="0"/>
+              <a:lumOff val="0"/>
+              <a:alphaOff val="0"/>
+            </a:schemeClr>
+          </a:solidFill>
+          <a:prstDash val="solid"/>
+          <a:miter lim="800000"/>
+        </a:ln>
+        <a:effectLst/>
+      </dsp:spPr>
+      <dsp:style>
+        <a:lnRef idx="2">
+          <a:scrgbClr r="0" g="0" b="0"/>
+        </a:lnRef>
+        <a:fillRef idx="1">
+          <a:scrgbClr r="0" g="0" b="0"/>
+        </a:fillRef>
+        <a:effectRef idx="0">
+          <a:scrgbClr r="0" g="0" b="0"/>
+        </a:effectRef>
+        <a:fontRef idx="minor">
+          <a:schemeClr val="lt1"/>
+        </a:fontRef>
+      </dsp:style>
+      <dsp:txBody>
+        <a:bodyPr spcFirstLastPara="0" vert="horz" wrap="square" lIns="68580" tIns="68580" rIns="68580" bIns="68580" numCol="1" spcCol="1270" anchor="ctr" anchorCtr="0">
+          <a:noAutofit/>
+        </a:bodyPr>
+        <a:lstStyle/>
+        <a:p>
+          <a:pPr marL="0" lvl="0" indent="0" algn="ctr" defTabSz="800100">
+            <a:lnSpc>
+              <a:spcPct val="90000"/>
+            </a:lnSpc>
+            <a:spcBef>
+              <a:spcPct val="0"/>
+            </a:spcBef>
+            <a:spcAft>
+              <a:spcPct val="35000"/>
+            </a:spcAft>
+            <a:buNone/>
+          </a:pPr>
+          <a:r>
+            <a:rPr lang="en-IE" sz="1800" kern="1200" dirty="0"/>
+            <a:t>Checkpoint &amp; Position Update</a:t>
+          </a:r>
+        </a:p>
+      </dsp:txBody>
+      <dsp:txXfrm>
+        <a:off x="6718317" y="1726125"/>
+        <a:ext cx="1535772" cy="899086"/>
+      </dsp:txXfrm>
+    </dsp:sp>
+    <dsp:sp modelId="{6D83BE8D-26D3-4FC5-A60B-6AE7DD08ECAE}">
+      <dsp:nvSpPr>
+        <dsp:cNvPr id="0" name=""/>
+        <dsp:cNvSpPr/>
+      </dsp:nvSpPr>
+      <dsp:spPr>
+        <a:xfrm>
+          <a:off x="8441233" y="1978296"/>
+          <a:ext cx="337443" cy="394745"/>
+        </a:xfrm>
+        <a:prstGeom prst="rightArrow">
+          <a:avLst>
+            <a:gd name="adj1" fmla="val 60000"/>
+            <a:gd name="adj2" fmla="val 50000"/>
+          </a:avLst>
+        </a:prstGeom>
+        <a:solidFill>
+          <a:srgbClr val="A93044"/>
+        </a:solidFill>
+        <a:ln>
+          <a:noFill/>
+        </a:ln>
+        <a:effectLst/>
+      </dsp:spPr>
+      <dsp:style>
+        <a:lnRef idx="0">
+          <a:scrgbClr r="0" g="0" b="0"/>
+        </a:lnRef>
+        <a:fillRef idx="1">
+          <a:scrgbClr r="0" g="0" b="0"/>
+        </a:fillRef>
+        <a:effectRef idx="0">
+          <a:scrgbClr r="0" g="0" b="0"/>
+        </a:effectRef>
+        <a:fontRef idx="minor">
+          <a:schemeClr val="lt1"/>
+        </a:fontRef>
+      </dsp:style>
+      <dsp:txBody>
+        <a:bodyPr spcFirstLastPara="0" vert="horz" wrap="square" lIns="0" tIns="0" rIns="0" bIns="0" numCol="1" spcCol="1270" anchor="ctr" anchorCtr="0">
+          <a:noAutofit/>
+        </a:bodyPr>
+        <a:lstStyle/>
+        <a:p>
+          <a:pPr marL="0" lvl="0" indent="0" algn="ctr" defTabSz="622300">
+            <a:lnSpc>
+              <a:spcPct val="90000"/>
+            </a:lnSpc>
+            <a:spcBef>
+              <a:spcPct val="0"/>
+            </a:spcBef>
+            <a:spcAft>
+              <a:spcPct val="35000"/>
+            </a:spcAft>
+            <a:buNone/>
+          </a:pPr>
+          <a:endParaRPr lang="en-IE" sz="1400" kern="1200"/>
+        </a:p>
+      </dsp:txBody>
+      <dsp:txXfrm>
+        <a:off x="8441233" y="2057245"/>
+        <a:ext cx="236210" cy="236847"/>
+      </dsp:txXfrm>
+    </dsp:sp>
+    <dsp:sp modelId="{632D27BE-4310-42B5-B451-A9DDF8B20469}">
+      <dsp:nvSpPr>
+        <dsp:cNvPr id="0" name=""/>
+        <dsp:cNvSpPr/>
+      </dsp:nvSpPr>
+      <dsp:spPr>
+        <a:xfrm>
+          <a:off x="8918748" y="1698153"/>
+          <a:ext cx="1591716" cy="955030"/>
+        </a:xfrm>
+        <a:prstGeom prst="roundRect">
+          <a:avLst>
+            <a:gd name="adj" fmla="val 10000"/>
+          </a:avLst>
+        </a:prstGeom>
+        <a:solidFill>
+          <a:schemeClr val="lt1">
+            <a:hueOff val="0"/>
+            <a:satOff val="0"/>
+            <a:lumOff val="0"/>
+            <a:alphaOff val="0"/>
+          </a:schemeClr>
+        </a:solidFill>
+        <a:ln w="19050" cap="flat" cmpd="sng" algn="ctr">
+          <a:solidFill>
+            <a:schemeClr val="dk1">
+              <a:shade val="80000"/>
+              <a:hueOff val="0"/>
+              <a:satOff val="0"/>
+              <a:lumOff val="0"/>
+              <a:alphaOff val="0"/>
+            </a:schemeClr>
+          </a:solidFill>
+          <a:prstDash val="solid"/>
+          <a:miter lim="800000"/>
+        </a:ln>
+        <a:effectLst/>
+      </dsp:spPr>
+      <dsp:style>
+        <a:lnRef idx="2">
+          <a:scrgbClr r="0" g="0" b="0"/>
+        </a:lnRef>
+        <a:fillRef idx="1">
+          <a:scrgbClr r="0" g="0" b="0"/>
+        </a:fillRef>
+        <a:effectRef idx="0">
+          <a:scrgbClr r="0" g="0" b="0"/>
+        </a:effectRef>
+        <a:fontRef idx="minor">
+          <a:schemeClr val="lt1"/>
+        </a:fontRef>
+      </dsp:style>
+      <dsp:txBody>
+        <a:bodyPr spcFirstLastPara="0" vert="horz" wrap="square" lIns="68580" tIns="68580" rIns="68580" bIns="68580" numCol="1" spcCol="1270" anchor="ctr" anchorCtr="0">
+          <a:noAutofit/>
+        </a:bodyPr>
+        <a:lstStyle/>
+        <a:p>
+          <a:pPr marL="0" lvl="0" indent="0" algn="ctr" defTabSz="800100">
+            <a:lnSpc>
+              <a:spcPct val="90000"/>
+            </a:lnSpc>
+            <a:spcBef>
+              <a:spcPct val="0"/>
+            </a:spcBef>
+            <a:spcAft>
+              <a:spcPct val="35000"/>
+            </a:spcAft>
+            <a:buNone/>
+          </a:pPr>
+          <a:r>
+            <a:rPr lang="en-IE" sz="1800" kern="1200" dirty="0"/>
+            <a:t>Telemetry Generation</a:t>
+          </a:r>
+        </a:p>
+      </dsp:txBody>
+      <dsp:txXfrm>
+        <a:off x="8946720" y="1726125"/>
+        <a:ext cx="1535772" cy="899086"/>
+      </dsp:txXfrm>
+    </dsp:sp>
+  </dsp:spTree>
+</dsp:drawing>
+</file>
+
+<file path=ppt/diagrams/drawing2.xml><?xml version="1.0" encoding="utf-8"?>
+<dsp:drawing xmlns:dgm="http://schemas.openxmlformats.org/drawingml/2006/diagram" xmlns:dsp="http://schemas.microsoft.com/office/drawing/2008/diagram" xmlns:a="http://schemas.openxmlformats.org/drawingml/2006/main">
+  <dsp:spTree>
+    <dsp:nvGrpSpPr>
+      <dsp:cNvPr id="0" name=""/>
+      <dsp:cNvGrpSpPr/>
+    </dsp:nvGrpSpPr>
+    <dsp:grpSpPr/>
+    <dsp:sp modelId="{962A9775-B660-4369-9ECA-76A5B1C77A25}">
+      <dsp:nvSpPr>
+        <dsp:cNvPr id="0" name=""/>
+        <dsp:cNvSpPr/>
+      </dsp:nvSpPr>
+      <dsp:spPr>
+        <a:xfrm>
+          <a:off x="4929" y="399957"/>
+          <a:ext cx="1889521" cy="580647"/>
+        </a:xfrm>
+        <a:prstGeom prst="rect">
+          <a:avLst/>
+        </a:prstGeom>
+        <a:gradFill rotWithShape="0">
+          <a:gsLst>
+            <a:gs pos="0">
+              <a:schemeClr val="lt1">
+                <a:hueOff val="0"/>
+                <a:satOff val="0"/>
+                <a:lumOff val="0"/>
+                <a:alphaOff val="0"/>
+                <a:satMod val="103000"/>
+                <a:lumMod val="102000"/>
+                <a:tint val="94000"/>
+              </a:schemeClr>
+            </a:gs>
+            <a:gs pos="50000">
+              <a:schemeClr val="lt1">
+                <a:hueOff val="0"/>
+                <a:satOff val="0"/>
+                <a:lumOff val="0"/>
+                <a:alphaOff val="0"/>
+                <a:satMod val="110000"/>
+                <a:lumMod val="100000"/>
+                <a:shade val="100000"/>
+              </a:schemeClr>
+            </a:gs>
+            <a:gs pos="100000">
+              <a:schemeClr val="lt1">
+                <a:hueOff val="0"/>
+                <a:satOff val="0"/>
+                <a:lumOff val="0"/>
+                <a:alphaOff val="0"/>
+                <a:lumMod val="99000"/>
+                <a:satMod val="120000"/>
+                <a:shade val="78000"/>
+              </a:schemeClr>
+            </a:gs>
+          </a:gsLst>
+          <a:lin ang="5400000" scaled="0"/>
+        </a:gradFill>
+        <a:ln w="12700" cap="flat" cmpd="sng" algn="ctr">
+          <a:solidFill>
+            <a:schemeClr val="accent1">
+              <a:shade val="80000"/>
+              <a:hueOff val="0"/>
+              <a:satOff val="0"/>
+              <a:lumOff val="0"/>
+              <a:alphaOff val="0"/>
+            </a:schemeClr>
+          </a:solidFill>
+          <a:prstDash val="solid"/>
+          <a:miter lim="800000"/>
+        </a:ln>
+        <a:effectLst/>
+      </dsp:spPr>
+      <dsp:style>
+        <a:lnRef idx="1">
+          <a:scrgbClr r="0" g="0" b="0"/>
+        </a:lnRef>
+        <a:fillRef idx="3">
+          <a:scrgbClr r="0" g="0" b="0"/>
+        </a:fillRef>
+        <a:effectRef idx="2">
+          <a:scrgbClr r="0" g="0" b="0"/>
+        </a:effectRef>
+        <a:fontRef idx="minor">
+          <a:schemeClr val="lt1"/>
+        </a:fontRef>
+      </dsp:style>
+      <dsp:txBody>
+        <a:bodyPr spcFirstLastPara="0" vert="horz" wrap="square" lIns="113792" tIns="65024" rIns="113792" bIns="65024" numCol="1" spcCol="1270" anchor="ctr" anchorCtr="0">
+          <a:noAutofit/>
+        </a:bodyPr>
+        <a:lstStyle/>
+        <a:p>
+          <a:pPr marL="0" lvl="0" indent="0" algn="ctr" defTabSz="711200">
+            <a:lnSpc>
+              <a:spcPct val="90000"/>
+            </a:lnSpc>
+            <a:spcBef>
+              <a:spcPct val="0"/>
+            </a:spcBef>
+            <a:spcAft>
+              <a:spcPct val="35000"/>
+            </a:spcAft>
+            <a:buNone/>
+          </a:pPr>
+          <a:r>
+            <a:rPr lang="en-IE" sz="1600" b="1" kern="1200"/>
+            <a:t>Unit Testing (pytest)</a:t>
+          </a:r>
+          <a:r>
+            <a:rPr lang="en-IE" sz="1600" kern="1200"/>
+            <a:t> </a:t>
+          </a:r>
+          <a:endParaRPr lang="en-US" sz="1600" kern="1200"/>
+        </a:p>
+      </dsp:txBody>
+      <dsp:txXfrm>
+        <a:off x="4929" y="399957"/>
+        <a:ext cx="1889521" cy="580647"/>
+      </dsp:txXfrm>
+    </dsp:sp>
+    <dsp:sp modelId="{D7A13854-8AA3-4625-8C9F-1E35F0AA587A}">
+      <dsp:nvSpPr>
+        <dsp:cNvPr id="0" name=""/>
+        <dsp:cNvSpPr/>
+      </dsp:nvSpPr>
+      <dsp:spPr>
+        <a:xfrm>
+          <a:off x="4929" y="980604"/>
+          <a:ext cx="1889521" cy="2970776"/>
+        </a:xfrm>
+        <a:prstGeom prst="rect">
+          <a:avLst/>
+        </a:prstGeom>
+        <a:solidFill>
+          <a:schemeClr val="lt1">
+            <a:alpha val="90000"/>
+            <a:tint val="40000"/>
+            <a:hueOff val="0"/>
+            <a:satOff val="0"/>
+            <a:lumOff val="0"/>
+            <a:alphaOff val="0"/>
+          </a:schemeClr>
+        </a:solidFill>
+        <a:ln w="12700" cap="flat" cmpd="sng" algn="ctr">
+          <a:solidFill>
+            <a:schemeClr val="accent1">
+              <a:alpha val="90000"/>
+              <a:hueOff val="0"/>
+              <a:satOff val="0"/>
+              <a:lumOff val="0"/>
+              <a:alphaOff val="0"/>
+            </a:schemeClr>
+          </a:solidFill>
+          <a:prstDash val="solid"/>
+          <a:miter lim="800000"/>
+        </a:ln>
+        <a:effectLst/>
+      </dsp:spPr>
+      <dsp:style>
+        <a:lnRef idx="1">
+          <a:scrgbClr r="0" g="0" b="0"/>
+        </a:lnRef>
+        <a:fillRef idx="1">
+          <a:scrgbClr r="0" g="0" b="0"/>
+        </a:fillRef>
+        <a:effectRef idx="0">
+          <a:scrgbClr r="0" g="0" b="0"/>
+        </a:effectRef>
+        <a:fontRef idx="minor"/>
+      </dsp:style>
+      <dsp:txBody>
+        <a:bodyPr spcFirstLastPara="0" vert="horz" wrap="square" lIns="85344" tIns="85344" rIns="113792" bIns="128016" numCol="1" spcCol="1270" anchor="t" anchorCtr="0">
+          <a:noAutofit/>
+        </a:bodyPr>
+        <a:lstStyle/>
+        <a:p>
+          <a:pPr marL="171450" lvl="1" indent="-171450" algn="l" defTabSz="711200">
+            <a:lnSpc>
+              <a:spcPct val="90000"/>
+            </a:lnSpc>
+            <a:spcBef>
+              <a:spcPct val="0"/>
+            </a:spcBef>
+            <a:spcAft>
+              <a:spcPct val="15000"/>
+            </a:spcAft>
+            <a:buChar char="•"/>
+          </a:pPr>
+          <a:r>
+            <a:rPr lang="en-IE" sz="1600" kern="1200"/>
+            <a:t>Verified driver generation logic </a:t>
+          </a:r>
+          <a:endParaRPr lang="en-US" sz="1600" kern="1200"/>
+        </a:p>
+        <a:p>
+          <a:pPr marL="171450" lvl="1" indent="-171450" algn="l" defTabSz="711200">
+            <a:lnSpc>
+              <a:spcPct val="90000"/>
+            </a:lnSpc>
+            <a:spcBef>
+              <a:spcPct val="0"/>
+            </a:spcBef>
+            <a:spcAft>
+              <a:spcPct val="15000"/>
+            </a:spcAft>
+            <a:buChar char="•"/>
+          </a:pPr>
+          <a:r>
+            <a:rPr lang="en-IE" sz="1600" kern="1200"/>
+            <a:t>11 automated tests </a:t>
+          </a:r>
+          <a:endParaRPr lang="en-US" sz="1600" kern="1200"/>
+        </a:p>
+        <a:p>
+          <a:pPr marL="171450" lvl="1" indent="-171450" algn="l" defTabSz="711200">
+            <a:lnSpc>
+              <a:spcPct val="90000"/>
+            </a:lnSpc>
+            <a:spcBef>
+              <a:spcPct val="0"/>
+            </a:spcBef>
+            <a:spcAft>
+              <a:spcPct val="15000"/>
+            </a:spcAft>
+            <a:buChar char="•"/>
+          </a:pPr>
+          <a:r>
+            <a:rPr lang="en-IE" sz="1600" kern="1200"/>
+            <a:t>Validated driver attributes, IDs, names and statistics </a:t>
+          </a:r>
+          <a:endParaRPr lang="en-US" sz="1600" kern="1200"/>
+        </a:p>
+      </dsp:txBody>
+      <dsp:txXfrm>
+        <a:off x="4929" y="980604"/>
+        <a:ext cx="1889521" cy="2970776"/>
+      </dsp:txXfrm>
+    </dsp:sp>
+    <dsp:sp modelId="{C0B00806-C28D-482C-ABA8-E404759875A2}">
+      <dsp:nvSpPr>
+        <dsp:cNvPr id="0" name=""/>
+        <dsp:cNvSpPr/>
+      </dsp:nvSpPr>
+      <dsp:spPr>
+        <a:xfrm>
+          <a:off x="2158984" y="399957"/>
+          <a:ext cx="1889521" cy="580647"/>
+        </a:xfrm>
+        <a:prstGeom prst="rect">
+          <a:avLst/>
+        </a:prstGeom>
+        <a:gradFill rotWithShape="0">
+          <a:gsLst>
+            <a:gs pos="0">
+              <a:schemeClr val="lt1">
+                <a:hueOff val="0"/>
+                <a:satOff val="0"/>
+                <a:lumOff val="0"/>
+                <a:alphaOff val="0"/>
+                <a:satMod val="103000"/>
+                <a:lumMod val="102000"/>
+                <a:tint val="94000"/>
+              </a:schemeClr>
+            </a:gs>
+            <a:gs pos="50000">
+              <a:schemeClr val="lt1">
+                <a:hueOff val="0"/>
+                <a:satOff val="0"/>
+                <a:lumOff val="0"/>
+                <a:alphaOff val="0"/>
+                <a:satMod val="110000"/>
+                <a:lumMod val="100000"/>
+                <a:shade val="100000"/>
+              </a:schemeClr>
+            </a:gs>
+            <a:gs pos="100000">
+              <a:schemeClr val="lt1">
+                <a:hueOff val="0"/>
+                <a:satOff val="0"/>
+                <a:lumOff val="0"/>
+                <a:alphaOff val="0"/>
+                <a:lumMod val="99000"/>
+                <a:satMod val="120000"/>
+                <a:shade val="78000"/>
+              </a:schemeClr>
+            </a:gs>
+          </a:gsLst>
+          <a:lin ang="5400000" scaled="0"/>
+        </a:gradFill>
+        <a:ln w="12700" cap="flat" cmpd="sng" algn="ctr">
+          <a:solidFill>
+            <a:schemeClr val="accent1">
+              <a:shade val="80000"/>
+              <a:hueOff val="0"/>
+              <a:satOff val="0"/>
+              <a:lumOff val="0"/>
+              <a:alphaOff val="0"/>
+            </a:schemeClr>
+          </a:solidFill>
+          <a:prstDash val="solid"/>
+          <a:miter lim="800000"/>
+        </a:ln>
+        <a:effectLst/>
+      </dsp:spPr>
+      <dsp:style>
+        <a:lnRef idx="1">
+          <a:scrgbClr r="0" g="0" b="0"/>
+        </a:lnRef>
+        <a:fillRef idx="3">
+          <a:scrgbClr r="0" g="0" b="0"/>
+        </a:fillRef>
+        <a:effectRef idx="2">
+          <a:scrgbClr r="0" g="0" b="0"/>
+        </a:effectRef>
+        <a:fontRef idx="minor">
+          <a:schemeClr val="lt1"/>
+        </a:fontRef>
+      </dsp:style>
+      <dsp:txBody>
+        <a:bodyPr spcFirstLastPara="0" vert="horz" wrap="square" lIns="113792" tIns="65024" rIns="113792" bIns="65024" numCol="1" spcCol="1270" anchor="ctr" anchorCtr="0">
+          <a:noAutofit/>
+        </a:bodyPr>
+        <a:lstStyle/>
+        <a:p>
+          <a:pPr marL="0" lvl="0" indent="0" algn="ctr" defTabSz="711200">
+            <a:lnSpc>
+              <a:spcPct val="90000"/>
+            </a:lnSpc>
+            <a:spcBef>
+              <a:spcPct val="0"/>
+            </a:spcBef>
+            <a:spcAft>
+              <a:spcPct val="35000"/>
+            </a:spcAft>
+            <a:buNone/>
+          </a:pPr>
+          <a:r>
+            <a:rPr lang="en-IE" sz="1600" b="1" kern="1200"/>
+            <a:t>Class Testing (pytest)</a:t>
+          </a:r>
+          <a:r>
+            <a:rPr lang="en-IE" sz="1600" kern="1200"/>
+            <a:t> </a:t>
+          </a:r>
+          <a:endParaRPr lang="en-US" sz="1600" kern="1200"/>
+        </a:p>
+      </dsp:txBody>
+      <dsp:txXfrm>
+        <a:off x="2158984" y="399957"/>
+        <a:ext cx="1889521" cy="580647"/>
+      </dsp:txXfrm>
+    </dsp:sp>
+    <dsp:sp modelId="{68B54BB8-F7E5-4542-9A6D-61918DA60243}">
+      <dsp:nvSpPr>
+        <dsp:cNvPr id="0" name=""/>
+        <dsp:cNvSpPr/>
+      </dsp:nvSpPr>
+      <dsp:spPr>
+        <a:xfrm>
+          <a:off x="2158984" y="980604"/>
+          <a:ext cx="1889521" cy="2970776"/>
+        </a:xfrm>
+        <a:prstGeom prst="rect">
+          <a:avLst/>
+        </a:prstGeom>
+        <a:solidFill>
+          <a:schemeClr val="lt1">
+            <a:alpha val="90000"/>
+            <a:tint val="40000"/>
+            <a:hueOff val="0"/>
+            <a:satOff val="0"/>
+            <a:lumOff val="0"/>
+            <a:alphaOff val="0"/>
+          </a:schemeClr>
+        </a:solidFill>
+        <a:ln w="12700" cap="flat" cmpd="sng" algn="ctr">
+          <a:solidFill>
+            <a:schemeClr val="accent1">
+              <a:alpha val="90000"/>
+              <a:hueOff val="0"/>
+              <a:satOff val="0"/>
+              <a:lumOff val="0"/>
+              <a:alphaOff val="0"/>
+            </a:schemeClr>
+          </a:solidFill>
+          <a:prstDash val="solid"/>
+          <a:miter lim="800000"/>
+        </a:ln>
+        <a:effectLst/>
+      </dsp:spPr>
+      <dsp:style>
+        <a:lnRef idx="1">
+          <a:scrgbClr r="0" g="0" b="0"/>
+        </a:lnRef>
+        <a:fillRef idx="1">
+          <a:scrgbClr r="0" g="0" b="0"/>
+        </a:fillRef>
+        <a:effectRef idx="0">
+          <a:scrgbClr r="0" g="0" b="0"/>
+        </a:effectRef>
+        <a:fontRef idx="minor"/>
+      </dsp:style>
+      <dsp:txBody>
+        <a:bodyPr spcFirstLastPara="0" vert="horz" wrap="square" lIns="85344" tIns="85344" rIns="113792" bIns="128016" numCol="1" spcCol="1270" anchor="t" anchorCtr="0">
+          <a:noAutofit/>
+        </a:bodyPr>
+        <a:lstStyle/>
+        <a:p>
+          <a:pPr marL="171450" lvl="1" indent="-171450" algn="l" defTabSz="711200">
+            <a:lnSpc>
+              <a:spcPct val="90000"/>
+            </a:lnSpc>
+            <a:spcBef>
+              <a:spcPct val="0"/>
+            </a:spcBef>
+            <a:spcAft>
+              <a:spcPct val="15000"/>
+            </a:spcAft>
+            <a:buChar char="•"/>
+          </a:pPr>
+          <a:r>
+            <a:rPr lang="en-IE" sz="1600" kern="1200"/>
+            <a:t>Tested the RaceController </a:t>
+          </a:r>
+          <a:endParaRPr lang="en-US" sz="1600" kern="1200"/>
+        </a:p>
+        <a:p>
+          <a:pPr marL="171450" lvl="1" indent="-171450" algn="l" defTabSz="711200">
+            <a:lnSpc>
+              <a:spcPct val="90000"/>
+            </a:lnSpc>
+            <a:spcBef>
+              <a:spcPct val="0"/>
+            </a:spcBef>
+            <a:spcAft>
+              <a:spcPct val="15000"/>
+            </a:spcAft>
+            <a:buChar char="•"/>
+          </a:pPr>
+          <a:r>
+            <a:rPr lang="en-IE" sz="1600" kern="1200"/>
+            <a:t>7 automated tests </a:t>
+          </a:r>
+          <a:endParaRPr lang="en-US" sz="1600" kern="1200"/>
+        </a:p>
+        <a:p>
+          <a:pPr marL="171450" lvl="1" indent="-171450" algn="l" defTabSz="711200">
+            <a:lnSpc>
+              <a:spcPct val="90000"/>
+            </a:lnSpc>
+            <a:spcBef>
+              <a:spcPct val="0"/>
+            </a:spcBef>
+            <a:spcAft>
+              <a:spcPct val="15000"/>
+            </a:spcAft>
+            <a:buChar char="•"/>
+          </a:pPr>
+          <a:r>
+            <a:rPr lang="en-IE" sz="1600" kern="1200"/>
+            <a:t>Verified race setup, simulation, telemetry and results generation </a:t>
+          </a:r>
+          <a:endParaRPr lang="en-US" sz="1600" kern="1200"/>
+        </a:p>
+      </dsp:txBody>
+      <dsp:txXfrm>
+        <a:off x="2158984" y="980604"/>
+        <a:ext cx="1889521" cy="2970776"/>
+      </dsp:txXfrm>
+    </dsp:sp>
+    <dsp:sp modelId="{8FA9666F-37A1-408F-A310-79AE9893137D}">
+      <dsp:nvSpPr>
+        <dsp:cNvPr id="0" name=""/>
+        <dsp:cNvSpPr/>
+      </dsp:nvSpPr>
+      <dsp:spPr>
+        <a:xfrm>
+          <a:off x="4313039" y="399957"/>
+          <a:ext cx="1889521" cy="580647"/>
+        </a:xfrm>
+        <a:prstGeom prst="rect">
+          <a:avLst/>
+        </a:prstGeom>
+        <a:gradFill rotWithShape="0">
+          <a:gsLst>
+            <a:gs pos="0">
+              <a:schemeClr val="lt1">
+                <a:hueOff val="0"/>
+                <a:satOff val="0"/>
+                <a:lumOff val="0"/>
+                <a:alphaOff val="0"/>
+                <a:satMod val="103000"/>
+                <a:lumMod val="102000"/>
+                <a:tint val="94000"/>
+              </a:schemeClr>
+            </a:gs>
+            <a:gs pos="50000">
+              <a:schemeClr val="lt1">
+                <a:hueOff val="0"/>
+                <a:satOff val="0"/>
+                <a:lumOff val="0"/>
+                <a:alphaOff val="0"/>
+                <a:satMod val="110000"/>
+                <a:lumMod val="100000"/>
+                <a:shade val="100000"/>
+              </a:schemeClr>
+            </a:gs>
+            <a:gs pos="100000">
+              <a:schemeClr val="lt1">
+                <a:hueOff val="0"/>
+                <a:satOff val="0"/>
+                <a:lumOff val="0"/>
+                <a:alphaOff val="0"/>
+                <a:lumMod val="99000"/>
+                <a:satMod val="120000"/>
+                <a:shade val="78000"/>
+              </a:schemeClr>
+            </a:gs>
+          </a:gsLst>
+          <a:lin ang="5400000" scaled="0"/>
+        </a:gradFill>
+        <a:ln w="12700" cap="flat" cmpd="sng" algn="ctr">
+          <a:solidFill>
+            <a:schemeClr val="accent1">
+              <a:shade val="80000"/>
+              <a:hueOff val="0"/>
+              <a:satOff val="0"/>
+              <a:lumOff val="0"/>
+              <a:alphaOff val="0"/>
+            </a:schemeClr>
+          </a:solidFill>
+          <a:prstDash val="solid"/>
+          <a:miter lim="800000"/>
+        </a:ln>
+        <a:effectLst/>
+      </dsp:spPr>
+      <dsp:style>
+        <a:lnRef idx="1">
+          <a:scrgbClr r="0" g="0" b="0"/>
+        </a:lnRef>
+        <a:fillRef idx="3">
+          <a:scrgbClr r="0" g="0" b="0"/>
+        </a:fillRef>
+        <a:effectRef idx="2">
+          <a:scrgbClr r="0" g="0" b="0"/>
+        </a:effectRef>
+        <a:fontRef idx="minor">
+          <a:schemeClr val="lt1"/>
+        </a:fontRef>
+      </dsp:style>
+      <dsp:txBody>
+        <a:bodyPr spcFirstLastPara="0" vert="horz" wrap="square" lIns="113792" tIns="65024" rIns="113792" bIns="65024" numCol="1" spcCol="1270" anchor="ctr" anchorCtr="0">
+          <a:noAutofit/>
+        </a:bodyPr>
+        <a:lstStyle/>
+        <a:p>
+          <a:pPr marL="0" lvl="0" indent="0" algn="ctr" defTabSz="711200">
+            <a:lnSpc>
+              <a:spcPct val="90000"/>
+            </a:lnSpc>
+            <a:spcBef>
+              <a:spcPct val="0"/>
+            </a:spcBef>
+            <a:spcAft>
+              <a:spcPct val="35000"/>
+            </a:spcAft>
+            <a:buNone/>
+          </a:pPr>
+          <a:r>
+            <a:rPr lang="en-IE" sz="1600" b="1" kern="1200"/>
+            <a:t>Integration Testing (pytest-qt)</a:t>
+          </a:r>
+          <a:r>
+            <a:rPr lang="en-IE" sz="1600" kern="1200"/>
+            <a:t> </a:t>
+          </a:r>
+          <a:endParaRPr lang="en-US" sz="1600" kern="1200"/>
+        </a:p>
+      </dsp:txBody>
+      <dsp:txXfrm>
+        <a:off x="4313039" y="399957"/>
+        <a:ext cx="1889521" cy="580647"/>
+      </dsp:txXfrm>
+    </dsp:sp>
+    <dsp:sp modelId="{8AEAEBFB-3310-43B8-A19E-37BE4596DAE3}">
+      <dsp:nvSpPr>
+        <dsp:cNvPr id="0" name=""/>
+        <dsp:cNvSpPr/>
+      </dsp:nvSpPr>
+      <dsp:spPr>
+        <a:xfrm>
+          <a:off x="4313039" y="980604"/>
+          <a:ext cx="1889521" cy="2970776"/>
+        </a:xfrm>
+        <a:prstGeom prst="rect">
+          <a:avLst/>
+        </a:prstGeom>
+        <a:solidFill>
+          <a:schemeClr val="lt1">
+            <a:alpha val="90000"/>
+            <a:tint val="40000"/>
+            <a:hueOff val="0"/>
+            <a:satOff val="0"/>
+            <a:lumOff val="0"/>
+            <a:alphaOff val="0"/>
+          </a:schemeClr>
+        </a:solidFill>
+        <a:ln w="12700" cap="flat" cmpd="sng" algn="ctr">
+          <a:solidFill>
+            <a:schemeClr val="accent1">
+              <a:alpha val="90000"/>
+              <a:hueOff val="0"/>
+              <a:satOff val="0"/>
+              <a:lumOff val="0"/>
+              <a:alphaOff val="0"/>
+            </a:schemeClr>
+          </a:solidFill>
+          <a:prstDash val="solid"/>
+          <a:miter lim="800000"/>
+        </a:ln>
+        <a:effectLst/>
+      </dsp:spPr>
+      <dsp:style>
+        <a:lnRef idx="1">
+          <a:scrgbClr r="0" g="0" b="0"/>
+        </a:lnRef>
+        <a:fillRef idx="1">
+          <a:scrgbClr r="0" g="0" b="0"/>
+        </a:fillRef>
+        <a:effectRef idx="0">
+          <a:scrgbClr r="0" g="0" b="0"/>
+        </a:effectRef>
+        <a:fontRef idx="minor"/>
+      </dsp:style>
+      <dsp:txBody>
+        <a:bodyPr spcFirstLastPara="0" vert="horz" wrap="square" lIns="85344" tIns="85344" rIns="113792" bIns="128016" numCol="1" spcCol="1270" anchor="t" anchorCtr="0">
+          <a:noAutofit/>
+        </a:bodyPr>
+        <a:lstStyle/>
+        <a:p>
+          <a:pPr marL="171450" lvl="1" indent="-171450" algn="l" defTabSz="711200">
+            <a:lnSpc>
+              <a:spcPct val="90000"/>
+            </a:lnSpc>
+            <a:spcBef>
+              <a:spcPct val="0"/>
+            </a:spcBef>
+            <a:spcAft>
+              <a:spcPct val="15000"/>
+            </a:spcAft>
+            <a:buChar char="•"/>
+          </a:pPr>
+          <a:r>
+            <a:rPr lang="en-IE" sz="1600" kern="1200"/>
+            <a:t>Tested interaction between RaceController and PyQt6 interface </a:t>
+          </a:r>
+          <a:endParaRPr lang="en-US" sz="1600" kern="1200"/>
+        </a:p>
+        <a:p>
+          <a:pPr marL="171450" lvl="1" indent="-171450" algn="l" defTabSz="711200">
+            <a:lnSpc>
+              <a:spcPct val="90000"/>
+            </a:lnSpc>
+            <a:spcBef>
+              <a:spcPct val="0"/>
+            </a:spcBef>
+            <a:spcAft>
+              <a:spcPct val="15000"/>
+            </a:spcAft>
+            <a:buChar char="•"/>
+          </a:pPr>
+          <a:r>
+            <a:rPr lang="en-IE" sz="1600" kern="1200"/>
+            <a:t>Confirmed race data loads correctly and UI controls trigger the correct actions </a:t>
+          </a:r>
+          <a:endParaRPr lang="en-US" sz="1600" kern="1200"/>
+        </a:p>
+      </dsp:txBody>
+      <dsp:txXfrm>
+        <a:off x="4313039" y="980604"/>
+        <a:ext cx="1889521" cy="2970776"/>
+      </dsp:txXfrm>
+    </dsp:sp>
+    <dsp:sp modelId="{846B2601-2552-4B6A-B23F-184F206CCA93}">
+      <dsp:nvSpPr>
+        <dsp:cNvPr id="0" name=""/>
+        <dsp:cNvSpPr/>
+      </dsp:nvSpPr>
+      <dsp:spPr>
+        <a:xfrm>
+          <a:off x="6467094" y="399957"/>
+          <a:ext cx="1889521" cy="580647"/>
+        </a:xfrm>
+        <a:prstGeom prst="rect">
+          <a:avLst/>
+        </a:prstGeom>
+        <a:gradFill rotWithShape="0">
+          <a:gsLst>
+            <a:gs pos="0">
+              <a:schemeClr val="lt1">
+                <a:hueOff val="0"/>
+                <a:satOff val="0"/>
+                <a:lumOff val="0"/>
+                <a:alphaOff val="0"/>
+                <a:satMod val="103000"/>
+                <a:lumMod val="102000"/>
+                <a:tint val="94000"/>
+              </a:schemeClr>
+            </a:gs>
+            <a:gs pos="50000">
+              <a:schemeClr val="lt1">
+                <a:hueOff val="0"/>
+                <a:satOff val="0"/>
+                <a:lumOff val="0"/>
+                <a:alphaOff val="0"/>
+                <a:satMod val="110000"/>
+                <a:lumMod val="100000"/>
+                <a:shade val="100000"/>
+              </a:schemeClr>
+            </a:gs>
+            <a:gs pos="100000">
+              <a:schemeClr val="lt1">
+                <a:hueOff val="0"/>
+                <a:satOff val="0"/>
+                <a:lumOff val="0"/>
+                <a:alphaOff val="0"/>
+                <a:lumMod val="99000"/>
+                <a:satMod val="120000"/>
+                <a:shade val="78000"/>
+              </a:schemeClr>
+            </a:gs>
+          </a:gsLst>
+          <a:lin ang="5400000" scaled="0"/>
+        </a:gradFill>
+        <a:ln w="12700" cap="flat" cmpd="sng" algn="ctr">
+          <a:solidFill>
+            <a:schemeClr val="accent1">
+              <a:shade val="80000"/>
+              <a:hueOff val="0"/>
+              <a:satOff val="0"/>
+              <a:lumOff val="0"/>
+              <a:alphaOff val="0"/>
+            </a:schemeClr>
+          </a:solidFill>
+          <a:prstDash val="solid"/>
+          <a:miter lim="800000"/>
+        </a:ln>
+        <a:effectLst/>
+      </dsp:spPr>
+      <dsp:style>
+        <a:lnRef idx="1">
+          <a:scrgbClr r="0" g="0" b="0"/>
+        </a:lnRef>
+        <a:fillRef idx="3">
+          <a:scrgbClr r="0" g="0" b="0"/>
+        </a:fillRef>
+        <a:effectRef idx="2">
+          <a:scrgbClr r="0" g="0" b="0"/>
+        </a:effectRef>
+        <a:fontRef idx="minor">
+          <a:schemeClr val="lt1"/>
+        </a:fontRef>
+      </dsp:style>
+      <dsp:txBody>
+        <a:bodyPr spcFirstLastPara="0" vert="horz" wrap="square" lIns="113792" tIns="65024" rIns="113792" bIns="65024" numCol="1" spcCol="1270" anchor="ctr" anchorCtr="0">
+          <a:noAutofit/>
+        </a:bodyPr>
+        <a:lstStyle/>
+        <a:p>
+          <a:pPr marL="0" lvl="0" indent="0" algn="ctr" defTabSz="711200">
+            <a:lnSpc>
+              <a:spcPct val="90000"/>
+            </a:lnSpc>
+            <a:spcBef>
+              <a:spcPct val="0"/>
+            </a:spcBef>
+            <a:spcAft>
+              <a:spcPct val="35000"/>
+            </a:spcAft>
+            <a:buNone/>
+          </a:pPr>
+          <a:r>
+            <a:rPr lang="en-IE" sz="1600" b="1" kern="1200"/>
+            <a:t>System Testing (Manual)</a:t>
+          </a:r>
+          <a:r>
+            <a:rPr lang="en-IE" sz="1600" kern="1200"/>
+            <a:t> </a:t>
+          </a:r>
+          <a:endParaRPr lang="en-US" sz="1600" kern="1200"/>
+        </a:p>
+      </dsp:txBody>
+      <dsp:txXfrm>
+        <a:off x="6467094" y="399957"/>
+        <a:ext cx="1889521" cy="580647"/>
+      </dsp:txXfrm>
+    </dsp:sp>
+    <dsp:sp modelId="{0F7139EB-BD7E-4CF5-9B4E-6B17E66429B1}">
+      <dsp:nvSpPr>
+        <dsp:cNvPr id="0" name=""/>
+        <dsp:cNvSpPr/>
+      </dsp:nvSpPr>
+      <dsp:spPr>
+        <a:xfrm>
+          <a:off x="6467094" y="980604"/>
+          <a:ext cx="1889521" cy="2970776"/>
+        </a:xfrm>
+        <a:prstGeom prst="rect">
+          <a:avLst/>
+        </a:prstGeom>
+        <a:solidFill>
+          <a:schemeClr val="lt1">
+            <a:alpha val="90000"/>
+            <a:tint val="40000"/>
+            <a:hueOff val="0"/>
+            <a:satOff val="0"/>
+            <a:lumOff val="0"/>
+            <a:alphaOff val="0"/>
+          </a:schemeClr>
+        </a:solidFill>
+        <a:ln w="12700" cap="flat" cmpd="sng" algn="ctr">
+          <a:solidFill>
+            <a:schemeClr val="accent1">
+              <a:alpha val="90000"/>
+              <a:hueOff val="0"/>
+              <a:satOff val="0"/>
+              <a:lumOff val="0"/>
+              <a:alphaOff val="0"/>
+            </a:schemeClr>
+          </a:solidFill>
+          <a:prstDash val="solid"/>
+          <a:miter lim="800000"/>
+        </a:ln>
+        <a:effectLst/>
+      </dsp:spPr>
+      <dsp:style>
+        <a:lnRef idx="1">
+          <a:scrgbClr r="0" g="0" b="0"/>
+        </a:lnRef>
+        <a:fillRef idx="1">
+          <a:scrgbClr r="0" g="0" b="0"/>
+        </a:fillRef>
+        <a:effectRef idx="0">
+          <a:scrgbClr r="0" g="0" b="0"/>
+        </a:effectRef>
+        <a:fontRef idx="minor"/>
+      </dsp:style>
+      <dsp:txBody>
+        <a:bodyPr spcFirstLastPara="0" vert="horz" wrap="square" lIns="85344" tIns="85344" rIns="113792" bIns="128016" numCol="1" spcCol="1270" anchor="t" anchorCtr="0">
+          <a:noAutofit/>
+        </a:bodyPr>
+        <a:lstStyle/>
+        <a:p>
+          <a:pPr marL="171450" lvl="1" indent="-171450" algn="l" defTabSz="711200">
+            <a:lnSpc>
+              <a:spcPct val="90000"/>
+            </a:lnSpc>
+            <a:spcBef>
+              <a:spcPct val="0"/>
+            </a:spcBef>
+            <a:spcAft>
+              <a:spcPct val="15000"/>
+            </a:spcAft>
+            <a:buChar char="•"/>
+          </a:pPr>
+          <a:r>
+            <a:rPr lang="en-IE" sz="1600" kern="1200"/>
+            <a:t>Validated all functional requirements </a:t>
+          </a:r>
+          <a:endParaRPr lang="en-US" sz="1600" kern="1200"/>
+        </a:p>
+        <a:p>
+          <a:pPr marL="171450" lvl="1" indent="-171450" algn="l" defTabSz="711200">
+            <a:lnSpc>
+              <a:spcPct val="90000"/>
+            </a:lnSpc>
+            <a:spcBef>
+              <a:spcPct val="0"/>
+            </a:spcBef>
+            <a:spcAft>
+              <a:spcPct val="15000"/>
+            </a:spcAft>
+            <a:buChar char="•"/>
+          </a:pPr>
+          <a:r>
+            <a:rPr lang="en-IE" sz="1600" kern="1200"/>
+            <a:t>Race simulation </a:t>
+          </a:r>
+          <a:endParaRPr lang="en-US" sz="1600" kern="1200"/>
+        </a:p>
+        <a:p>
+          <a:pPr marL="171450" lvl="1" indent="-171450" algn="l" defTabSz="711200">
+            <a:lnSpc>
+              <a:spcPct val="90000"/>
+            </a:lnSpc>
+            <a:spcBef>
+              <a:spcPct val="0"/>
+            </a:spcBef>
+            <a:spcAft>
+              <a:spcPct val="15000"/>
+            </a:spcAft>
+            <a:buChar char="•"/>
+          </a:pPr>
+          <a:r>
+            <a:rPr lang="en-IE" sz="1600" kern="1200"/>
+            <a:t>Live race display </a:t>
+          </a:r>
+          <a:endParaRPr lang="en-US" sz="1600" kern="1200"/>
+        </a:p>
+        <a:p>
+          <a:pPr marL="171450" lvl="1" indent="-171450" algn="l" defTabSz="711200">
+            <a:lnSpc>
+              <a:spcPct val="90000"/>
+            </a:lnSpc>
+            <a:spcBef>
+              <a:spcPct val="0"/>
+            </a:spcBef>
+            <a:spcAft>
+              <a:spcPct val="15000"/>
+            </a:spcAft>
+            <a:buChar char="•"/>
+          </a:pPr>
+          <a:r>
+            <a:rPr lang="en-IE" sz="1600" kern="1200"/>
+            <a:t>Driver information </a:t>
+          </a:r>
+          <a:endParaRPr lang="en-US" sz="1600" kern="1200"/>
+        </a:p>
+        <a:p>
+          <a:pPr marL="171450" lvl="1" indent="-171450" algn="l" defTabSz="711200">
+            <a:lnSpc>
+              <a:spcPct val="90000"/>
+            </a:lnSpc>
+            <a:spcBef>
+              <a:spcPct val="0"/>
+            </a:spcBef>
+            <a:spcAft>
+              <a:spcPct val="15000"/>
+            </a:spcAft>
+            <a:buChar char="•"/>
+          </a:pPr>
+          <a:r>
+            <a:rPr lang="en-IE" sz="1600" kern="1200"/>
+            <a:t>Race results </a:t>
+          </a:r>
+          <a:endParaRPr lang="en-US" sz="1600" kern="1200"/>
+        </a:p>
+        <a:p>
+          <a:pPr marL="171450" lvl="1" indent="-171450" algn="l" defTabSz="711200">
+            <a:lnSpc>
+              <a:spcPct val="90000"/>
+            </a:lnSpc>
+            <a:spcBef>
+              <a:spcPct val="0"/>
+            </a:spcBef>
+            <a:spcAft>
+              <a:spcPct val="15000"/>
+            </a:spcAft>
+            <a:buChar char="•"/>
+          </a:pPr>
+          <a:r>
+            <a:rPr lang="en-IE" sz="1600" kern="1200"/>
+            <a:t>Accessibility settings </a:t>
+          </a:r>
+          <a:endParaRPr lang="en-US" sz="1600" kern="1200"/>
+        </a:p>
+      </dsp:txBody>
+      <dsp:txXfrm>
+        <a:off x="6467094" y="980604"/>
+        <a:ext cx="1889521" cy="2970776"/>
+      </dsp:txXfrm>
+    </dsp:sp>
+    <dsp:sp modelId="{1AD820B3-A82A-4276-B6CC-46731392EAEF}">
+      <dsp:nvSpPr>
+        <dsp:cNvPr id="0" name=""/>
+        <dsp:cNvSpPr/>
+      </dsp:nvSpPr>
+      <dsp:spPr>
+        <a:xfrm>
+          <a:off x="8621148" y="399957"/>
+          <a:ext cx="1889521" cy="580647"/>
+        </a:xfrm>
+        <a:prstGeom prst="rect">
+          <a:avLst/>
+        </a:prstGeom>
+        <a:gradFill rotWithShape="0">
+          <a:gsLst>
+            <a:gs pos="0">
+              <a:schemeClr val="lt1">
+                <a:hueOff val="0"/>
+                <a:satOff val="0"/>
+                <a:lumOff val="0"/>
+                <a:alphaOff val="0"/>
+                <a:satMod val="103000"/>
+                <a:lumMod val="102000"/>
+                <a:tint val="94000"/>
+              </a:schemeClr>
+            </a:gs>
+            <a:gs pos="50000">
+              <a:schemeClr val="lt1">
+                <a:hueOff val="0"/>
+                <a:satOff val="0"/>
+                <a:lumOff val="0"/>
+                <a:alphaOff val="0"/>
+                <a:satMod val="110000"/>
+                <a:lumMod val="100000"/>
+                <a:shade val="100000"/>
+              </a:schemeClr>
+            </a:gs>
+            <a:gs pos="100000">
+              <a:schemeClr val="lt1">
+                <a:hueOff val="0"/>
+                <a:satOff val="0"/>
+                <a:lumOff val="0"/>
+                <a:alphaOff val="0"/>
+                <a:lumMod val="99000"/>
+                <a:satMod val="120000"/>
+                <a:shade val="78000"/>
+              </a:schemeClr>
+            </a:gs>
+          </a:gsLst>
+          <a:lin ang="5400000" scaled="0"/>
+        </a:gradFill>
+        <a:ln w="12700" cap="flat" cmpd="sng" algn="ctr">
+          <a:solidFill>
+            <a:schemeClr val="accent1">
+              <a:shade val="80000"/>
+              <a:hueOff val="0"/>
+              <a:satOff val="0"/>
+              <a:lumOff val="0"/>
+              <a:alphaOff val="0"/>
+            </a:schemeClr>
+          </a:solidFill>
+          <a:prstDash val="solid"/>
+          <a:miter lim="800000"/>
+        </a:ln>
+        <a:effectLst/>
+      </dsp:spPr>
+      <dsp:style>
+        <a:lnRef idx="1">
+          <a:scrgbClr r="0" g="0" b="0"/>
+        </a:lnRef>
+        <a:fillRef idx="3">
+          <a:scrgbClr r="0" g="0" b="0"/>
+        </a:fillRef>
+        <a:effectRef idx="2">
+          <a:scrgbClr r="0" g="0" b="0"/>
+        </a:effectRef>
+        <a:fontRef idx="minor">
+          <a:schemeClr val="lt1"/>
+        </a:fontRef>
+      </dsp:style>
+      <dsp:txBody>
+        <a:bodyPr spcFirstLastPara="0" vert="horz" wrap="square" lIns="113792" tIns="65024" rIns="113792" bIns="65024" numCol="1" spcCol="1270" anchor="ctr" anchorCtr="0">
+          <a:noAutofit/>
+        </a:bodyPr>
+        <a:lstStyle/>
+        <a:p>
+          <a:pPr marL="0" lvl="0" indent="0" algn="ctr" defTabSz="711200">
+            <a:lnSpc>
+              <a:spcPct val="90000"/>
+            </a:lnSpc>
+            <a:spcBef>
+              <a:spcPct val="0"/>
+            </a:spcBef>
+            <a:spcAft>
+              <a:spcPct val="35000"/>
+            </a:spcAft>
+            <a:buNone/>
+          </a:pPr>
+          <a:r>
+            <a:rPr lang="en-IE" sz="1600" b="1" kern="1200"/>
+            <a:t>Outcome</a:t>
+          </a:r>
+          <a:endParaRPr lang="en-US" sz="1600" kern="1200"/>
+        </a:p>
+      </dsp:txBody>
+      <dsp:txXfrm>
+        <a:off x="8621148" y="399957"/>
+        <a:ext cx="1889521" cy="580647"/>
+      </dsp:txXfrm>
+    </dsp:sp>
+    <dsp:sp modelId="{E522ABA4-EFC3-4019-8454-344F60FCBA95}">
+      <dsp:nvSpPr>
+        <dsp:cNvPr id="0" name=""/>
+        <dsp:cNvSpPr/>
+      </dsp:nvSpPr>
+      <dsp:spPr>
+        <a:xfrm>
+          <a:off x="8621148" y="980604"/>
+          <a:ext cx="1889521" cy="2970776"/>
+        </a:xfrm>
+        <a:prstGeom prst="rect">
+          <a:avLst/>
+        </a:prstGeom>
+        <a:solidFill>
+          <a:schemeClr val="lt1">
+            <a:alpha val="90000"/>
+            <a:tint val="40000"/>
+            <a:hueOff val="0"/>
+            <a:satOff val="0"/>
+            <a:lumOff val="0"/>
+            <a:alphaOff val="0"/>
+          </a:schemeClr>
+        </a:solidFill>
+        <a:ln w="12700" cap="flat" cmpd="sng" algn="ctr">
+          <a:solidFill>
+            <a:schemeClr val="accent1">
+              <a:alpha val="90000"/>
+              <a:hueOff val="0"/>
+              <a:satOff val="0"/>
+              <a:lumOff val="0"/>
+              <a:alphaOff val="0"/>
+            </a:schemeClr>
+          </a:solidFill>
+          <a:prstDash val="solid"/>
+          <a:miter lim="800000"/>
+        </a:ln>
+        <a:effectLst/>
+      </dsp:spPr>
+      <dsp:style>
+        <a:lnRef idx="1">
+          <a:scrgbClr r="0" g="0" b="0"/>
+        </a:lnRef>
+        <a:fillRef idx="1">
+          <a:scrgbClr r="0" g="0" b="0"/>
+        </a:fillRef>
+        <a:effectRef idx="0">
+          <a:scrgbClr r="0" g="0" b="0"/>
+        </a:effectRef>
+        <a:fontRef idx="minor"/>
+      </dsp:style>
+      <dsp:txBody>
+        <a:bodyPr spcFirstLastPara="0" vert="horz" wrap="square" lIns="85344" tIns="85344" rIns="113792" bIns="128016" numCol="1" spcCol="1270" anchor="t" anchorCtr="0">
+          <a:noAutofit/>
+        </a:bodyPr>
+        <a:lstStyle/>
+        <a:p>
+          <a:pPr marL="171450" lvl="1" indent="-171450" algn="l" defTabSz="711200">
+            <a:lnSpc>
+              <a:spcPct val="90000"/>
+            </a:lnSpc>
+            <a:spcBef>
+              <a:spcPct val="0"/>
+            </a:spcBef>
+            <a:spcAft>
+              <a:spcPct val="15000"/>
+            </a:spcAft>
+            <a:buChar char="•"/>
+          </a:pPr>
+          <a:r>
+            <a:rPr lang="en-IE" sz="1600" kern="1200"/>
+            <a:t>24 automated tests passed </a:t>
+          </a:r>
+          <a:endParaRPr lang="en-US" sz="1600" kern="1200"/>
+        </a:p>
+        <a:p>
+          <a:pPr marL="171450" lvl="1" indent="-171450" algn="l" defTabSz="711200">
+            <a:lnSpc>
+              <a:spcPct val="90000"/>
+            </a:lnSpc>
+            <a:spcBef>
+              <a:spcPct val="0"/>
+            </a:spcBef>
+            <a:spcAft>
+              <a:spcPct val="15000"/>
+            </a:spcAft>
+            <a:buChar char="•"/>
+          </a:pPr>
+          <a:r>
+            <a:rPr lang="en-IE" sz="1600" kern="1200"/>
+            <a:t>All planned system tests passed </a:t>
+          </a:r>
+          <a:endParaRPr lang="en-US" sz="1600" kern="1200"/>
+        </a:p>
+        <a:p>
+          <a:pPr marL="171450" lvl="1" indent="-171450" algn="l" defTabSz="711200">
+            <a:lnSpc>
+              <a:spcPct val="90000"/>
+            </a:lnSpc>
+            <a:spcBef>
+              <a:spcPct val="0"/>
+            </a:spcBef>
+            <a:spcAft>
+              <a:spcPct val="15000"/>
+            </a:spcAft>
+            <a:buChar char="•"/>
+          </a:pPr>
+          <a:r>
+            <a:rPr lang="en-IE" sz="1600" kern="1200"/>
+            <a:t>Application met all functional requirements</a:t>
+          </a:r>
+          <a:endParaRPr lang="en-US" sz="1600" kern="1200"/>
+        </a:p>
+      </dsp:txBody>
+      <dsp:txXfrm>
+        <a:off x="8621148" y="980604"/>
+        <a:ext cx="1889521" cy="2970776"/>
+      </dsp:txXfrm>
+    </dsp:sp>
+  </dsp:spTree>
+</dsp:drawing>
+</file>
+
+<file path=ppt/diagrams/layout1.xml><?xml version="1.0" encoding="utf-8"?>
+<dgm:layoutDef xmlns:dgm="http://schemas.openxmlformats.org/drawingml/2006/diagram" xmlns:a="http://schemas.openxmlformats.org/drawingml/2006/main" uniqueId="urn:microsoft.com/office/officeart/2005/8/layout/process1">
+  <dgm:title val=""/>
+  <dgm:desc val=""/>
+  <dgm:catLst>
+    <dgm:cat type="process" pri="1000"/>
+    <dgm:cat type="convert" pri="15000"/>
+  </dgm:catLst>
+  <dgm:sampData useDef="1">
+    <dgm:dataModel>
+      <dgm:ptLst/>
+      <dgm:bg/>
+      <dgm:whole/>
+    </dgm:dataModel>
+  </dgm:sampData>
+  <dgm:styleData>
+    <dgm:dataModel>
+      <dgm:ptLst>
+        <dgm:pt modelId="0" type="doc"/>
+        <dgm:pt modelId="1"/>
+        <dgm:pt modelId="2"/>
+      </dgm:ptLst>
+      <dgm:cxnLst>
+        <dgm:cxn modelId="3" srcId="0" destId="1" srcOrd="0" destOrd="0"/>
+        <dgm:cxn modelId="4" srcId="0" destId="2" srcOrd="1" destOrd="0"/>
+      </dgm:cxnLst>
+      <dgm:bg/>
+      <dgm:whole/>
+    </dgm:dataModel>
+  </dgm:styleData>
+  <dgm:clrData>
+    <dgm:dataModel>
+      <dgm:ptLst>
+        <dgm:pt modelId="0" type="doc"/>
+        <dgm:pt modelId="1"/>
+        <dgm:pt modelId="2"/>
+        <dgm:pt modelId="3"/>
+        <dgm:pt modelId="4"/>
+      </dgm:ptLst>
+      <dgm:cxnLst>
+        <dgm:cxn modelId="5" srcId="0" destId="1" srcOrd="0" destOrd="0"/>
+        <dgm:cxn modelId="6" srcId="0" destId="2" srcOrd="1" destOrd="0"/>
+        <dgm:cxn modelId="7" srcId="0" destId="3" srcOrd="2" destOrd="0"/>
+        <dgm:cxn modelId="8" srcId="0" destId="4" srcOrd="3" destOrd="0"/>
+      </dgm:cxnLst>
+      <dgm:bg/>
+      <dgm:whole/>
+    </dgm:dataModel>
+  </dgm:clrData>
+  <dgm:layoutNode name="Name0">
+    <dgm:varLst>
+      <dgm:dir/>
+      <dgm:resizeHandles val="exact"/>
+    </dgm:varLst>
+    <dgm:choose name="Name1">
+      <dgm:if name="Name2" func="var" arg="dir" op="equ" val="norm">
+        <dgm:alg type="lin"/>
+      </dgm:if>
+      <dgm:else name="Name3">
+        <dgm:alg type="lin">
+          <dgm:param type="linDir" val="fromR"/>
+        </dgm:alg>
+      </dgm:else>
+    </dgm:choose>
+    <dgm:shape xmlns:r="http://schemas.openxmlformats.org/officeDocument/2006/relationships" r:blip="">
+      <dgm:adjLst/>
+    </dgm:shape>
+    <dgm:presOf/>
+    <dgm:constrLst>
+      <dgm:constr type="w" for="ch" ptType="node" refType="w"/>
+      <dgm:constr type="h" for="ch" ptType="node" op="equ"/>
+      <dgm:constr type="primFontSz" for="ch" ptType="node" op="equ" val="65"/>
+      <dgm:constr type="w" for="ch" ptType="sibTrans" refType="w" refFor="ch" refPtType="node" op="equ" fact="0.4"/>
+      <dgm:constr type="h" for="ch" ptType="sibTrans" op="equ"/>
+      <dgm:constr type="primFontSz" for="des" forName="connectorText" op="equ" val="55"/>
+      <dgm:constr type="primFontSz" for="des" forName="connectorText" refType="primFontSz" refFor="ch" refPtType="node" op="lte" fact="0.8"/>
+    </dgm:constrLst>
+    <dgm:ruleLst/>
+    <dgm:forEach name="nodesForEach" axis="ch" ptType="node">
+      <dgm:layoutNode name="node">
+        <dgm:varLst>
+          <dgm:bulletEnabled val="1"/>
+        </dgm:varLst>
+        <dgm:alg type="tx"/>
+        <dgm:shape xmlns:r="http://schemas.openxmlformats.org/officeDocument/2006/relationships" type="roundRect" r:blip="">
+          <dgm:adjLst>
+            <dgm:adj idx="1" val="0.1"/>
+          </dgm:adjLst>
+        </dgm:shape>
+        <dgm:presOf axis="desOrSelf" ptType="node"/>
+        <dgm:constrLst>
+          <dgm:constr type="h" refType="w" fact="0.6"/>
+          <dgm:constr type="tMarg" refType="primFontSz" fact="0.3"/>
+          <dgm:constr type="bMarg" refType="primFontSz" fact="0.3"/>
+          <dgm:constr type="lMarg" refType="primFontSz" fact="0.3"/>
+          <dgm:constr type="rMarg" refType="primFontSz" fact="0.3"/>
+        </dgm:constrLst>
+        <dgm:ruleLst>
+          <dgm:rule type="primFontSz" val="18" fact="NaN" max="NaN"/>
+          <dgm:rule type="h" val="NaN" fact="1.5" max="NaN"/>
+          <dgm:rule type="primFontSz" val="5" fact="NaN" max="NaN"/>
+          <dgm:rule type="h" val="INF" fact="NaN" max="NaN"/>
+        </dgm:ruleLst>
+      </dgm:layoutNode>
+      <dgm:forEach name="sibTransForEach" axis="followSib" ptType="sibTrans" cnt="1">
+        <dgm:layoutNode name="sibTrans">
+          <dgm:alg type="conn">
+            <dgm:param type="begPts" val="auto"/>
+            <dgm:param type="endPts" val="auto"/>
+          </dgm:alg>
+          <dgm:shape xmlns:r="http://schemas.openxmlformats.org/officeDocument/2006/relationships" type="conn" r:blip="">
+            <dgm:adjLst/>
+          </dgm:shape>
+          <dgm:presOf axis="self"/>
+          <dgm:constrLst>
+            <dgm:constr type="h" refType="w" fact="0.62"/>
+            <dgm:constr type="connDist"/>
+            <dgm:constr type="begPad" refType="connDist" fact="0.25"/>
+            <dgm:constr type="endPad" refType="connDist" fact="0.22"/>
+          </dgm:constrLst>
+          <dgm:ruleLst/>
+          <dgm:layoutNode name="connectorText">
+            <dgm:alg type="tx">
+              <dgm:param type="autoTxRot" val="grav"/>
+            </dgm:alg>
+            <dgm:shape xmlns:r="http://schemas.openxmlformats.org/officeDocument/2006/relationships" type="conn" r:blip="" hideGeom="1">
+              <dgm:adjLst/>
+            </dgm:shape>
+            <dgm:presOf axis="self"/>
+            <dgm:constrLst>
+              <dgm:constr type="lMarg"/>
+              <dgm:constr type="rMarg"/>
+              <dgm:constr type="tMarg"/>
+              <dgm:constr type="bMarg"/>
+            </dgm:constrLst>
+            <dgm:ruleLst>
+              <dgm:rule type="primFontSz" val="5" fact="NaN" max="NaN"/>
+            </dgm:ruleLst>
+          </dgm:layoutNode>
+        </dgm:layoutNode>
+      </dgm:forEach>
+    </dgm:forEach>
+  </dgm:layoutNode>
+</dgm:layoutDef>
+</file>
+
+<file path=ppt/diagrams/layout2.xml><?xml version="1.0" encoding="utf-8"?>
+<dgm:layoutDef xmlns:dgm="http://schemas.openxmlformats.org/drawingml/2006/diagram" xmlns:a="http://schemas.openxmlformats.org/drawingml/2006/main" uniqueId="urn:microsoft.com/office/officeart/2005/8/layout/hList1">
+  <dgm:title val=""/>
+  <dgm:desc val=""/>
+  <dgm:catLst>
+    <dgm:cat type="list" pri="5000"/>
+    <dgm:cat type="convert" pri="5000"/>
+  </dgm:catLst>
+  <dgm:sampData>
+    <dgm:dataModel>
+      <dgm:ptLst>
+        <dgm:pt modelId="0" type="doc"/>
+        <dgm:pt modelId="1">
+          <dgm:prSet phldr="1"/>
+        </dgm:pt>
+        <dgm:pt modelId="11">
+          <dgm:prSet phldr="1"/>
+        </dgm:pt>
+        <dgm:pt modelId="12">
+          <dgm:prSet phldr="1"/>
+        </dgm:pt>
+        <dgm:pt modelId="2">
+          <dgm:prSet phldr="1"/>
+        </dgm:pt>
+        <dgm:pt modelId="21">
+          <dgm:prSet phldr="1"/>
+        </dgm:pt>
+        <dgm:pt modelId="22">
+          <dgm:prSet phldr="1"/>
+        </dgm:pt>
+        <dgm:pt modelId="3">
+          <dgm:prSet phldr="1"/>
+        </dgm:pt>
+        <dgm:pt modelId="31">
+          <dgm:prSet phldr="1"/>
+        </dgm:pt>
+        <dgm:pt modelId="32">
+          <dgm:prSet phldr="1"/>
+        </dgm:pt>
+      </dgm:ptLst>
+      <dgm:cxnLst>
+        <dgm:cxn modelId="4" srcId="0" destId="1" srcOrd="0" destOrd="0"/>
+        <dgm:cxn modelId="5" srcId="0" destId="2" srcOrd="1" destOrd="0"/>
+        <dgm:cxn modelId="6" srcId="0" destId="3" srcOrd="2" destOrd="0"/>
+        <dgm:cxn modelId="13" srcId="1" destId="11" srcOrd="0" destOrd="0"/>
+        <dgm:cxn modelId="14" srcId="1" destId="12" srcOrd="1" destOrd="0"/>
+        <dgm:cxn modelId="23" srcId="2" destId="21" srcOrd="0" destOrd="0"/>
+        <dgm:cxn modelId="24" srcId="2" destId="22" srcOrd="1" destOrd="0"/>
+        <dgm:cxn modelId="33" srcId="3" destId="31" srcOrd="0" destOrd="0"/>
+        <dgm:cxn modelId="34" srcId="3" destId="32" srcOrd="1" destOrd="0"/>
+      </dgm:cxnLst>
+      <dgm:bg/>
+      <dgm:whole/>
+    </dgm:dataModel>
+  </dgm:sampData>
+  <dgm:styleData>
+    <dgm:dataModel>
+      <dgm:ptLst>
+        <dgm:pt modelId="0" type="doc"/>
+        <dgm:pt modelId="1">
+          <dgm:prSet phldr="1"/>
+        </dgm:pt>
+        <dgm:pt modelId="2">
+          <dgm:prSet phldr="1"/>
+        </dgm:pt>
+      </dgm:ptLst>
+      <dgm:cxnLst>
+        <dgm:cxn modelId="3" srcId="0" destId="1" srcOrd="0" destOrd="0"/>
+        <dgm:cxn modelId="4" srcId="0" destId="2" srcOrd="1" destOrd="0"/>
+      </dgm:cxnLst>
+      <dgm:bg/>
+      <dgm:whole/>
+    </dgm:dataModel>
+  </dgm:styleData>
+  <dgm:clrData>
+    <dgm:dataModel>
+      <dgm:ptLst>
+        <dgm:pt modelId="0" type="doc"/>
+        <dgm:pt modelId="1">
+          <dgm:prSet phldr="1"/>
+        </dgm:pt>
+        <dgm:pt modelId="2">
+          <dgm:prSet phldr="1"/>
+        </dgm:pt>
+        <dgm:pt modelId="3">
+          <dgm:prSet phldr="1"/>
+        </dgm:pt>
+        <dgm:pt modelId="4">
+          <dgm:prSet phldr="1"/>
+        </dgm:pt>
+      </dgm:ptLst>
+      <dgm:cxnLst>
+        <dgm:cxn modelId="5" srcId="0" destId="1" srcOrd="0" destOrd="0"/>
+        <dgm:cxn modelId="6" srcId="0" destId="2" srcOrd="1" destOrd="0"/>
+        <dgm:cxn modelId="7" srcId="0" destId="3" srcOrd="2" destOrd="0"/>
+        <dgm:cxn modelId="8" srcId="0" destId="4" srcOrd="3" destOrd="0"/>
+      </dgm:cxnLst>
+      <dgm:bg/>
+      <dgm:whole/>
+    </dgm:dataModel>
+  </dgm:clrData>
+  <dgm:layoutNode name="Name0">
+    <dgm:varLst>
+      <dgm:dir/>
+      <dgm:animLvl val="lvl"/>
+      <dgm:resizeHandles val="exact"/>
+    </dgm:varLst>
+    <dgm:choose name="Name1">
+      <dgm:if name="Name2" func="var" arg="dir" op="equ" val="norm">
+        <dgm:alg type="lin"/>
+      </dgm:if>
+      <dgm:else name="Name3">
+        <dgm:alg type="lin">
+          <dgm:param type="linDir" val="fromR"/>
+        </dgm:alg>
+      </dgm:else>
+    </dgm:choose>
+    <dgm:shape xmlns:r="http://schemas.openxmlformats.org/officeDocument/2006/relationships" r:blip="">
+      <dgm:adjLst/>
+    </dgm:shape>
+    <dgm:presOf/>
+    <dgm:constrLst>
+      <dgm:constr type="h" for="ch" forName="composite" refType="h"/>
+      <dgm:constr type="w" for="ch" forName="composite" refType="w"/>
+      <dgm:constr type="w" for="des" forName="parTx"/>
+      <dgm:constr type="h" for="des" forName="parTx" op="equ"/>
+      <dgm:constr type="w" for="des" forName="desTx"/>
+      <dgm:constr type="h" for="des" forName="desTx" op="equ"/>
+      <dgm:constr type="primFontSz" for="des" forName="parTx" val="65"/>
+      <dgm:constr type="secFontSz" for="des" forName="desTx" refType="primFontSz" refFor="des" refForName="parTx" op="equ"/>
+      <dgm:constr type="h" for="des" forName="parTx" refType="primFontSz" refFor="des" refForName="parTx" fact="0.8"/>
+      <dgm:constr type="h" for="des" forName="desTx" refType="primFontSz" refFor="des" refForName="parTx" fact="1.22"/>
+      <dgm:constr type="w" for="ch" forName="space" refType="w" refFor="ch" refForName="composite" op="equ" fact="0.14"/>
+    </dgm:constrLst>
+    <dgm:ruleLst>
+      <dgm:rule type="w" for="ch" forName="composite" val="0" fact="NaN" max="NaN"/>
+      <dgm:rule type="primFontSz" for="des" forName="parTx" val="5" fact="NaN" max="NaN"/>
+    </dgm:ruleLst>
+    <dgm:forEach name="Name4" axis="ch" ptType="node">
+      <dgm:layoutNode name="composite">
+        <dgm:alg type="composite"/>
+        <dgm:shape xmlns:r="http://schemas.openxmlformats.org/officeDocument/2006/relationships" r:blip="">
+          <dgm:adjLst/>
+        </dgm:shape>
+        <dgm:presOf/>
+        <dgm:constrLst>
+          <dgm:constr type="l" for="ch" forName="parTx"/>
+          <dgm:constr type="w" for="ch" forName="parTx" refType="w"/>
+          <dgm:constr type="t" for="ch" forName="parTx"/>
+          <dgm:constr type="l" for="ch" forName="desTx"/>
+          <dgm:constr type="w" for="ch" forName="desTx" refType="w" refFor="ch" refForName="parTx"/>
+          <dgm:constr type="t" for="ch" forName="desTx" refType="h" refFor="ch" refForName="parTx"/>
+        </dgm:constrLst>
+        <dgm:ruleLst>
+          <dgm:rule type="h" val="INF" fact="NaN" max="NaN"/>
+        </dgm:ruleLst>
+        <dgm:layoutNode name="parTx" styleLbl="alignNode1">
+          <dgm:varLst>
+            <dgm:chMax val="0"/>
+            <dgm:chPref val="0"/>
+            <dgm:bulletEnabled val="1"/>
+          </dgm:varLst>
+          <dgm:alg type="tx"/>
+          <dgm:shape xmlns:r="http://schemas.openxmlformats.org/officeDocument/2006/relationships" type="rect" r:blip="">
+            <dgm:adjLst/>
+          </dgm:shape>
+          <dgm:presOf axis="self" ptType="node"/>
+          <dgm:constrLst>
+            <dgm:constr type="h" refType="w" op="lte" fact="0.4"/>
+            <dgm:constr type="h"/>
+            <dgm:constr type="tMarg" refType="primFontSz" fact="0.32"/>
+            <dgm:constr type="bMarg" refType="primFontSz" fact="0.32"/>
+          </dgm:constrLst>
+          <dgm:ruleLst>
+            <dgm:rule type="h" val="INF" fact="NaN" max="NaN"/>
+          </dgm:ruleLst>
+        </dgm:layoutNode>
+        <dgm:layoutNode name="desTx" styleLbl="alignAccFollowNode1">
+          <dgm:varLst>
+            <dgm:bulletEnabled val="1"/>
+          </dgm:varLst>
+          <dgm:alg type="tx">
+            <dgm:param type="stBulletLvl" val="1"/>
+          </dgm:alg>
+          <dgm:shape xmlns:r="http://schemas.openxmlformats.org/officeDocument/2006/relationships" type="rect" r:blip="">
+            <dgm:adjLst/>
+          </dgm:shape>
+          <dgm:presOf axis="des" ptType="node"/>
+          <dgm:constrLst>
+            <dgm:constr type="secFontSz" val="65"/>
+            <dgm:constr type="primFontSz" refType="secFontSz"/>
+            <dgm:constr type="h"/>
+            <dgm:constr type="lMarg" refType="primFontSz" fact="0.42"/>
+            <dgm:constr type="tMarg" refType="primFontSz" fact="0.42"/>
+            <dgm:constr type="bMarg" refType="primFontSz" fact="0.63"/>
+          </dgm:constrLst>
+          <dgm:ruleLst>
+            <dgm:rule type="h" val="INF" fact="NaN" max="NaN"/>
+          </dgm:ruleLst>
+        </dgm:layoutNode>
+      </dgm:layoutNode>
+      <dgm:forEach name="Name5" axis="followSib" ptType="sibTrans" cnt="1">
+        <dgm:layoutNode name="space">
+          <dgm:alg type="sp"/>
+          <dgm:shape xmlns:r="http://schemas.openxmlformats.org/officeDocument/2006/relationships" r:blip="">
+            <dgm:adjLst/>
+          </dgm:shape>
+          <dgm:presOf/>
+          <dgm:constrLst/>
+          <dgm:ruleLst/>
+        </dgm:layoutNode>
+      </dgm:forEach>
+    </dgm:forEach>
+  </dgm:layoutNode>
+</dgm:layoutDef>
+</file>
+
+<file path=ppt/diagrams/quickStyle1.xml><?xml version="1.0" encoding="utf-8"?>
+<dgm:styleDef xmlns:dgm="http://schemas.openxmlformats.org/drawingml/2006/diagram" xmlns:a="http://schemas.openxmlformats.org/drawingml/2006/main" uniqueId="urn:microsoft.com/office/officeart/2005/8/quickstyle/simple1">
+  <dgm:title val=""/>
+  <dgm:desc val=""/>
+  <dgm:catLst>
+    <dgm:cat type="simple" pri="10100"/>
+  </dgm:catLst>
+  <dgm:scene3d>
+    <a:camera prst="orthographicFront"/>
+    <a:lightRig rig="threePt" dir="t"/>
+  </dgm:scene3d>
+  <dgm:styleLbl name="node0">
+    <dgm:scene3d>
+      <a:camera prst="orthographicFront"/>
+      <a:lightRig rig="threePt" dir="t"/>
+    </dgm:scene3d>
+    <dgm:sp3d/>
+    <dgm:txPr/>
+    <dgm:style>
+      <a:lnRef idx="2">
+        <a:scrgbClr r="0" g="0" b="0"/>
+      </a:lnRef>
+      <a:fillRef idx="1">
+        <a:scrgbClr r="0" g="0" b="0"/>
+      </a:fillRef>
+      <a:effectRef idx="0">
+        <a:scrgbClr r="0" g="0" b="0"/>
+      </a:effectRef>
+      <a:fontRef idx="minor">
+        <a:schemeClr val="lt1"/>
+      </a:fontRef>
+    </dgm:style>
+  </dgm:styleLbl>
+  <dgm:styleLbl name="lnNode1">
+    <dgm:scene3d>
+      <a:camera prst="orthographicFront"/>
+      <a:lightRig rig="threePt" dir="t"/>
+    </dgm:scene3d>
+    <dgm:sp3d/>
+    <dgm:txPr/>
+    <dgm:style>
+      <a:lnRef idx="2">
+        <a:scrgbClr r="0" g="0" b="0"/>
+      </a:lnRef>
+      <a:fillRef idx="1">
+        <a:scrgbClr r="0" g="0" b="0"/>
+      </a:fillRef>
+      <a:effectRef idx="0">
+        <a:scrgbClr r="0" g="0" b="0"/>
+      </a:effectRef>
+      <a:fontRef idx="minor">
+        <a:schemeClr val="lt1"/>
+      </a:fontRef>
+    </dgm:style>
+  </dgm:styleLbl>
+  <dgm:styleLbl name="vennNode1">
+    <dgm:scene3d>
+      <a:camera prst="orthographicFront"/>
+      <a:lightRig rig="threePt" dir="t"/>
+    </dgm:scene3d>
+    <dgm:sp3d/>
+    <dgm:txPr/>
+    <dgm:style>
+      <a:lnRef idx="2">
+        <a:scrgbClr r="0" g="0" b="0"/>
+      </a:lnRef>
+      <a:fillRef idx="1">
+        <a:scrgbClr r="0" g="0" b="0"/>
+      </a:fillRef>
+      <a:effectRef idx="0">
+        <a:scrgbClr r="0" g="0" b="0"/>
+      </a:effectRef>
+      <a:fontRef idx="minor">
+        <a:schemeClr val="tx1"/>
+      </a:fontRef>
+    </dgm:style>
+  </dgm:styleLbl>
+  <dgm:styleLbl name="alignNode1">
+    <dgm:scene3d>
+      <a:camera prst="orthographicFront"/>
+      <a:lightRig rig="threePt" dir="t"/>
+    </dgm:scene3d>
+    <dgm:sp3d/>
+    <dgm:txPr/>
+    <dgm:style>
+      <a:lnRef idx="2">
+        <a:scrgbClr r="0" g="0" b="0"/>
+      </a:lnRef>
+      <a:fillRef idx="1">
+        <a:scrgbClr r="0" g="0" b="0"/>
+      </a:fillRef>
+      <a:effectRef idx="0">
+        <a:scrgbClr r="0" g="0" b="0"/>
+      </a:effectRef>
+      <a:fontRef idx="minor">
+        <a:schemeClr val="lt1"/>
+      </a:fontRef>
+    </dgm:style>
+  </dgm:styleLbl>
+  <dgm:styleLbl name="node1">
+    <dgm:scene3d>
+      <a:camera prst="orthographicFront"/>
+      <a:lightRig rig="threePt" dir="t"/>
+    </dgm:scene3d>
+    <dgm:sp3d/>
+    <dgm:txPr/>
+    <dgm:style>
+      <a:lnRef idx="2">
+        <a:scrgbClr r="0" g="0" b="0"/>
+      </a:lnRef>
+      <a:fillRef idx="1">
+        <a:scrgbClr r="0" g="0" b="0"/>
+      </a:fillRef>
+      <a:effectRef idx="0">
+        <a:scrgbClr r="0" g="0" b="0"/>
+      </a:effectRef>
+      <a:fontRef idx="minor">
+        <a:schemeClr val="lt1"/>
+      </a:fontRef>
+    </dgm:style>
+  </dgm:styleLbl>
+  <dgm:styleLbl name="node2">
+    <dgm:scene3d>
+      <a:camera prst="orthographicFront"/>
+      <a:lightRig rig="threePt" dir="t"/>
+    </dgm:scene3d>
+    <dgm:sp3d/>
+    <dgm:txPr/>
+    <dgm:style>
+      <a:lnRef idx="2">
+        <a:scrgbClr r="0" g="0" b="0"/>
+      </a:lnRef>
+      <a:fillRef idx="1">
+        <a:scrgbClr r="0" g="0" b="0"/>
+      </a:fillRef>
+      <a:effectRef idx="0">
+        <a:scrgbClr r="0" g="0" b="0"/>
+      </a:effectRef>
+      <a:fontRef idx="minor">
+        <a:schemeClr val="lt1"/>
+      </a:fontRef>
+    </dgm:style>
+  </dgm:styleLbl>
+  <dgm:styleLbl name="node3">
+    <dgm:scene3d>
+      <a:camera prst="orthographicFront"/>
+      <a:lightRig rig="threePt" dir="t"/>
+    </dgm:scene3d>
+    <dgm:sp3d/>
+    <dgm:txPr/>
+    <dgm:style>
+      <a:lnRef idx="2">
+        <a:scrgbClr r="0" g="0" b="0"/>
+      </a:lnRef>
+      <a:fillRef idx="1">
+        <a:scrgbClr r="0" g="0" b="0"/>
+      </a:fillRef>
+      <a:effectRef idx="0">
+        <a:scrgbClr r="0" g="0" b="0"/>
+      </a:effectRef>
+      <a:fontRef idx="minor">
+        <a:schemeClr val="lt1"/>
+      </a:fontRef>
+    </dgm:style>
+  </dgm:styleLbl>
+  <dgm:styleLbl name="node4">
+    <dgm:scene3d>
+      <a:camera prst="orthographicFront"/>
+      <a:lightRig rig="threePt" dir="t"/>
+    </dgm:scene3d>
+    <dgm:sp3d/>
+    <dgm:txPr/>
+    <dgm:style>
+      <a:lnRef idx="2">
+        <a:scrgbClr r="0" g="0" b="0"/>
+      </a:lnRef>
+      <a:fillRef idx="1">
+        <a:scrgbClr r="0" g="0" b="0"/>
+      </a:fillRef>
+      <a:effectRef idx="0">
+        <a:scrgbClr r="0" g="0" b="0"/>
+      </a:effectRef>
+      <a:fontRef idx="minor">
+        <a:schemeClr val="lt1"/>
+      </a:fontRef>
+    </dgm:style>
+  </dgm:styleLbl>
+  <dgm:styleLbl name="fgImgPlace1">
+    <dgm:scene3d>
+      <a:camera prst="orthographicFront"/>
+      <a:lightRig rig="threePt" dir="t"/>
+    </dgm:scene3d>
+    <dgm:sp3d/>
+    <dgm:txPr/>
+    <dgm:style>
+      <a:lnRef idx="2">
+        <a:scrgbClr r="0" g="0" b="0"/>
+      </a:lnRef>
+      <a:fillRef idx="1">
+        <a:scrgbClr r="0" g="0" b="0"/>
+      </a:fillRef>
+      <a:effectRef idx="0">
+        <a:scrgbClr r="0" g="0" b="0"/>
+      </a:effectRef>
+      <a:fontRef idx="minor"/>
+    </dgm:style>
+  </dgm:styleLbl>
+  <dgm:styleLbl name="alignImgPlace1">
+    <dgm:scene3d>
+      <a:camera prst="orthographicFront"/>
+      <a:lightRig rig="threePt" dir="t"/>
+    </dgm:scene3d>
+    <dgm:sp3d/>
+    <dgm:txPr/>
+    <dgm:style>
+      <a:lnRef idx="2">
+        <a:scrgbClr r="0" g="0" b="0"/>
+      </a:lnRef>
+      <a:fillRef idx="1">
+        <a:scrgbClr r="0" g="0" b="0"/>
+      </a:fillRef>
+      <a:effectRef idx="0">
+        <a:scrgbClr r="0" g="0" b="0"/>
+      </a:effectRef>
+      <a:fontRef idx="minor"/>
+    </dgm:style>
+  </dgm:styleLbl>
+  <dgm:styleLbl name="bgImgPlace1">
+    <dgm:scene3d>
+      <a:camera prst="orthographicFront"/>
+      <a:lightRig rig="threePt" dir="t"/>
+    </dgm:scene3d>
+    <dgm:sp3d/>
+    <dgm:txPr/>
+    <dgm:style>
+      <a:lnRef idx="2">
+        <a:scrgbClr r="0" g="0" b="0"/>
+      </a:lnRef>
+      <a:fillRef idx="1">
+        <a:scrgbClr r="0" g="0" b="0"/>
+      </a:fillRef>
+      <a:effectRef idx="0">
+        <a:scrgbClr r="0" g="0" b="0"/>
+      </a:effectRef>
+      <a:fontRef idx="minor"/>
+    </dgm:style>
+  </dgm:styleLbl>
+  <dgm:styleLbl name="sibTrans2D1">
+    <dgm:scene3d>
+      <a:camera prst="orthographicFront"/>
+      <a:lightRig rig="threePt" dir="t"/>
+    </dgm:scene3d>
+    <dgm:sp3d/>
+    <dgm:txPr/>
+    <dgm:style>
+      <a:lnRef idx="0">
+        <a:scrgbClr r="0" g="0" b="0"/>
+      </a:lnRef>
+      <a:fillRef idx="1">
+        <a:scrgbClr r="0" g="0" b="0"/>
+      </a:fillRef>
+      <a:effectRef idx="0">
+        <a:scrgbClr r="0" g="0" b="0"/>
+      </a:effectRef>
+      <a:fontRef idx="minor">
+        <a:schemeClr val="lt1"/>
+      </a:fontRef>
+    </dgm:style>
+  </dgm:styleLbl>
+  <dgm:styleLbl name="fgSibTrans2D1">
+    <dgm:scene3d>
+      <a:camera prst="orthographicFront"/>
+      <a:lightRig rig="threePt" dir="t"/>
+    </dgm:scene3d>
+    <dgm:sp3d/>
+    <dgm:txPr/>
+    <dgm:style>
+      <a:lnRef idx="0">
+        <a:scrgbClr r="0" g="0" b="0"/>
+      </a:lnRef>
+      <a:fillRef idx="1">
+        <a:scrgbClr r="0" g="0" b="0"/>
+      </a:fillRef>
+      <a:effectRef idx="0">
+        <a:scrgbClr r="0" g="0" b="0"/>
+      </a:effectRef>
+      <a:fontRef idx="minor">
+        <a:schemeClr val="lt1"/>
+      </a:fontRef>
+    </dgm:style>
+  </dgm:styleLbl>
+  <dgm:styleLbl name="bgSibTrans2D1">
+    <dgm:scene3d>
+      <a:camera prst="orthographicFront"/>
+      <a:lightRig rig="threePt" dir="t"/>
+    </dgm:scene3d>
+    <dgm:sp3d/>
+    <dgm:txPr/>
+    <dgm:style>
+      <a:lnRef idx="0">
+        <a:scrgbClr r="0" g="0" b="0"/>
+      </a:lnRef>
+      <a:fillRef idx="1">
+        <a:scrgbClr r="0" g="0" b="0"/>
+      </a:fillRef>
+      <a:effectRef idx="0">
+        <a:scrgbClr r="0" g="0" b="0"/>
+      </a:effectRef>
+      <a:fontRef idx="minor">
+        <a:schemeClr val="lt1"/>
+      </a:fontRef>
+    </dgm:style>
+  </dgm:styleLbl>
+  <dgm:styleLbl name="sibTrans1D1">
+    <dgm:scene3d>
+      <a:camera prst="orthographicFront"/>
+      <a:lightRig rig="threePt" dir="t"/>
+    </dgm:scene3d>
+    <dgm:sp3d/>
+    <dgm:txPr/>
+    <dgm:style>
+      <a:lnRef idx="1">
+        <a:scrgbClr r="0" g="0" b="0"/>
+      </a:lnRef>
+      <a:fillRef idx="0">
+        <a:scrgbClr r="0" g="0" b="0"/>
+      </a:fillRef>
+      <a:effectRef idx="0">
+        <a:scrgbClr r="0" g="0" b="0"/>
+      </a:effectRef>
+      <a:fontRef idx="minor"/>
+    </dgm:style>
+  </dgm:styleLbl>
+  <dgm:styleLbl name="callout">
+    <dgm:scene3d>
+      <a:camera prst="orthographicFront"/>
+      <a:lightRig rig="threePt" dir="t"/>
+    </dgm:scene3d>
+    <dgm:sp3d/>
+    <dgm:txPr/>
+    <dgm:style>
+      <a:lnRef idx="2">
+        <a:scrgbClr r="0" g="0" b="0"/>
+      </a:lnRef>
+      <a:fillRef idx="1">
+        <a:scrgbClr r="0" g="0" b="0"/>
+      </a:fillRef>
+      <a:effectRef idx="0">
+        <a:scrgbClr r="0" g="0" b="0"/>
+      </a:effectRef>
+      <a:fontRef idx="minor"/>
+    </dgm:style>
+  </dgm:styleLbl>
+  <dgm:styleLbl name="asst0">
+    <dgm:scene3d>
+      <a:camera prst="orthographicFront"/>
+      <a:lightRig rig="threePt" dir="t"/>
+    </dgm:scene3d>
+    <dgm:sp3d/>
+    <dgm:txPr/>
+    <dgm:style>
+      <a:lnRef idx="2">
+        <a:scrgbClr r="0" g="0" b="0"/>
+      </a:lnRef>
+      <a:fillRef idx="1">
+        <a:scrgbClr r="0" g="0" b="0"/>
+      </a:fillRef>
+      <a:effectRef idx="0">
+        <a:scrgbClr r="0" g="0" b="0"/>
+      </a:effectRef>
+      <a:fontRef idx="minor">
+        <a:schemeClr val="lt1"/>
+      </a:fontRef>
+    </dgm:style>
+  </dgm:styleLbl>
+  <dgm:styleLbl name="asst1">
+    <dgm:scene3d>
+      <a:camera prst="orthographicFront"/>
+      <a:lightRig rig="threePt" dir="t"/>
+    </dgm:scene3d>
+    <dgm:sp3d/>
+    <dgm:txPr/>
+    <dgm:style>
+      <a:lnRef idx="2">
+        <a:scrgbClr r="0" g="0" b="0"/>
+      </a:lnRef>
+      <a:fillRef idx="1">
+        <a:scrgbClr r="0" g="0" b="0"/>
+      </a:fillRef>
+      <a:effectRef idx="0">
+        <a:scrgbClr r="0" g="0" b="0"/>
+      </a:effectRef>
+      <a:fontRef idx="minor">
+        <a:schemeClr val="lt1"/>
+      </a:fontRef>
+    </dgm:style>
+  </dgm:styleLbl>
+  <dgm:styleLbl name="asst2">
+    <dgm:scene3d>
+      <a:camera prst="orthographicFront"/>
+      <a:lightRig rig="threePt" dir="t"/>
+    </dgm:scene3d>
+    <dgm:sp3d/>
+    <dgm:txPr/>
+    <dgm:style>
+      <a:lnRef idx="2">
+        <a:scrgbClr r="0" g="0" b="0"/>
+      </a:lnRef>
+      <a:fillRef idx="1">
+        <a:scrgbClr r="0" g="0" b="0"/>
+      </a:fillRef>
+      <a:effectRef idx="0">
+        <a:scrgbClr r="0" g="0" b="0"/>
+      </a:effectRef>
+      <a:fontRef idx="minor">
+        <a:schemeClr val="lt1"/>
+      </a:fontRef>
+    </dgm:style>
+  </dgm:styleLbl>
+  <dgm:styleLbl name="asst3">
+    <dgm:scene3d>
+      <a:camera prst="orthographicFront"/>
+      <a:lightRig rig="threePt" dir="t"/>
+    </dgm:scene3d>
+    <dgm:sp3d/>
+    <dgm:txPr/>
+    <dgm:style>
+      <a:lnRef idx="2">
+        <a:scrgbClr r="0" g="0" b="0"/>
+      </a:lnRef>
+      <a:fillRef idx="1">
+        <a:scrgbClr r="0" g="0" b="0"/>
+      </a:fillRef>
+      <a:effectRef idx="0">
+        <a:scrgbClr r="0" g="0" b="0"/>
+      </a:effectRef>
+      <a:fontRef idx="minor">
+        <a:schemeClr val="lt1"/>
+      </a:fontRef>
+    </dgm:style>
+  </dgm:styleLbl>
+  <dgm:styleLbl name="asst4">
+    <dgm:scene3d>
+      <a:camera prst="orthographicFront"/>
+      <a:lightRig rig="threePt" dir="t"/>
+    </dgm:scene3d>
+    <dgm:sp3d/>
+    <dgm:txPr/>
+    <dgm:style>
+      <a:lnRef idx="2">
+        <a:scrgbClr r="0" g="0" b="0"/>
+      </a:lnRef>
+      <a:fillRef idx="1">
+        <a:scrgbClr r="0" g="0" b="0"/>
+      </a:fillRef>
+      <a:effectRef idx="0">
+        <a:scrgbClr r="0" g="0" b="0"/>
+      </a:effectRef>
+      <a:fontRef idx="minor">
+        <a:schemeClr val="lt1"/>
+      </a:fontRef>
+    </dgm:style>
+  </dgm:styleLbl>
+  <dgm:styleLbl name="parChTrans2D1">
+    <dgm:scene3d>
+      <a:camera prst="orthographicFront"/>
+      <a:lightRig rig="threePt" dir="t"/>
+    </dgm:scene3d>
+    <dgm:sp3d/>
+    <dgm:txPr/>
+    <dgm:style>
+      <a:lnRef idx="2">
+        <a:scrgbClr r="0" g="0" b="0"/>
+      </a:lnRef>
+      <a:fillRef idx="1">
+        <a:scrgbClr r="0" g="0" b="0"/>
+      </a:fillRef>
+      <a:effectRef idx="0">
+        <a:scrgbClr r="0" g="0" b="0"/>
+      </a:effectRef>
+      <a:fontRef idx="minor">
+        <a:schemeClr val="lt1"/>
+      </a:fontRef>
+    </dgm:style>
+  </dgm:styleLbl>
+  <dgm:styleLbl name="parChTrans2D2">
+    <dgm:scene3d>
+      <a:camera prst="orthographicFront"/>
+      <a:lightRig rig="threePt" dir="t"/>
+    </dgm:scene3d>
+    <dgm:sp3d/>
+    <dgm:txPr/>
+    <dgm:style>
+      <a:lnRef idx="2">
+        <a:scrgbClr r="0" g="0" b="0"/>
+      </a:lnRef>
+      <a:fillRef idx="1">
+        <a:scrgbClr r="0" g="0" b="0"/>
+      </a:fillRef>
+      <a:effectRef idx="0">
+        <a:scrgbClr r="0" g="0" b="0"/>
+      </a:effectRef>
+      <a:fontRef idx="minor">
+        <a:schemeClr val="lt1"/>
+      </a:fontRef>
+    </dgm:style>
+  </dgm:styleLbl>
+  <dgm:styleLbl name="parChTrans2D3">
+    <dgm:scene3d>
+      <a:camera prst="orthographicFront"/>
+      <a:lightRig rig="threePt" dir="t"/>
+    </dgm:scene3d>
+    <dgm:sp3d/>
+    <dgm:txPr/>
+    <dgm:style>
+      <a:lnRef idx="2">
+        <a:scrgbClr r="0" g="0" b="0"/>
+      </a:lnRef>
+      <a:fillRef idx="1">
+        <a:scrgbClr r="0" g="0" b="0"/>
+      </a:fillRef>
+      <a:effectRef idx="0">
+        <a:scrgbClr r="0" g="0" b="0"/>
+      </a:effectRef>
+      <a:fontRef idx="minor">
+        <a:schemeClr val="lt1"/>
+      </a:fontRef>
+    </dgm:style>
+  </dgm:styleLbl>
+  <dgm:styleLbl name="parChTrans2D4">
+    <dgm:scene3d>
+      <a:camera prst="orthographicFront"/>
+      <a:lightRig rig="threePt" dir="t"/>
+    </dgm:scene3d>
+    <dgm:sp3d/>
+    <dgm:txPr/>
+    <dgm:style>
+      <a:lnRef idx="2">
+        <a:scrgbClr r="0" g="0" b="0"/>
+      </a:lnRef>
+      <a:fillRef idx="1">
+        <a:scrgbClr r="0" g="0" b="0"/>
+      </a:fillRef>
+      <a:effectRef idx="0">
+        <a:scrgbClr r="0" g="0" b="0"/>
+      </a:effectRef>
+      <a:fontRef idx="minor">
+        <a:schemeClr val="lt1"/>
+      </a:fontRef>
+    </dgm:style>
+  </dgm:styleLbl>
+  <dgm:styleLbl name="parChTrans1D1">
+    <dgm:scene3d>
+      <a:camera prst="orthographicFront"/>
+      <a:lightRig rig="threePt" dir="t"/>
+    </dgm:scene3d>
+    <dgm:sp3d/>
+    <dgm:txPr/>
+    <dgm:style>
+      <a:lnRef idx="2">
+        <a:scrgbClr r="0" g="0" b="0"/>
+      </a:lnRef>
+      <a:fillRef idx="0">
+        <a:scrgbClr r="0" g="0" b="0"/>
+      </a:fillRef>
+      <a:effectRef idx="0">
+        <a:scrgbClr r="0" g="0" b="0"/>
+      </a:effectRef>
+      <a:fontRef idx="minor"/>
+    </dgm:style>
+  </dgm:styleLbl>
+  <dgm:styleLbl name="parChTrans1D2">
+    <dgm:scene3d>
+      <a:camera prst="orthographicFront"/>
+      <a:lightRig rig="threePt" dir="t"/>
+    </dgm:scene3d>
+    <dgm:sp3d/>
+    <dgm:txPr/>
+    <dgm:style>
+      <a:lnRef idx="2">
+        <a:scrgbClr r="0" g="0" b="0"/>
+      </a:lnRef>
+      <a:fillRef idx="0">
+        <a:scrgbClr r="0" g="0" b="0"/>
+      </a:fillRef>
+      <a:effectRef idx="0">
+        <a:scrgbClr r="0" g="0" b="0"/>
+      </a:effectRef>
+      <a:fontRef idx="minor"/>
+    </dgm:style>
+  </dgm:styleLbl>
+  <dgm:styleLbl name="parChTrans1D3">
+    <dgm:scene3d>
+      <a:camera prst="orthographicFront"/>
+      <a:lightRig rig="threePt" dir="t"/>
+    </dgm:scene3d>
+    <dgm:sp3d/>
+    <dgm:txPr/>
+    <dgm:style>
+      <a:lnRef idx="2">
+        <a:scrgbClr r="0" g="0" b="0"/>
+      </a:lnRef>
+      <a:fillRef idx="0">
+        <a:scrgbClr r="0" g="0" b="0"/>
+      </a:fillRef>
+      <a:effectRef idx="0">
+        <a:scrgbClr r="0" g="0" b="0"/>
+      </a:effectRef>
+      <a:fontRef idx="minor"/>
+    </dgm:style>
+  </dgm:styleLbl>
+  <dgm:styleLbl name="parChTrans1D4">
+    <dgm:scene3d>
+      <a:camera prst="orthographicFront"/>
+      <a:lightRig rig="threePt" dir="t"/>
+    </dgm:scene3d>
+    <dgm:sp3d/>
+    <dgm:txPr/>
+    <dgm:style>
+      <a:lnRef idx="2">
+        <a:scrgbClr r="0" g="0" b="0"/>
+      </a:lnRef>
+      <a:fillRef idx="0">
+        <a:scrgbClr r="0" g="0" b="0"/>
+      </a:fillRef>
+      <a:effectRef idx="0">
+        <a:scrgbClr r="0" g="0" b="0"/>
+      </a:effectRef>
+      <a:fontRef idx="minor"/>
+    </dgm:style>
+  </dgm:styleLbl>
+  <dgm:styleLbl name="fgAcc1">
+    <dgm:scene3d>
+      <a:camera prst="orthographicFront"/>
+      <a:lightRig rig="threePt" dir="t"/>
+    </dgm:scene3d>
+    <dgm:sp3d/>
+    <dgm:txPr/>
+    <dgm:style>
+      <a:lnRef idx="2">
+        <a:scrgbClr r="0" g="0" b="0"/>
+      </a:lnRef>
+      <a:fillRef idx="1">
+        <a:scrgbClr r="0" g="0" b="0"/>
+      </a:fillRef>
+      <a:effectRef idx="0">
+        <a:scrgbClr r="0" g="0" b="0"/>
+      </a:effectRef>
+      <a:fontRef idx="minor"/>
+    </dgm:style>
+  </dgm:styleLbl>
+  <dgm:styleLbl name="conFgAcc1">
+    <dgm:scene3d>
+      <a:camera prst="orthographicFront"/>
+      <a:lightRig rig="threePt" dir="t"/>
+    </dgm:scene3d>
+    <dgm:sp3d/>
+    <dgm:txPr/>
+    <dgm:style>
+      <a:lnRef idx="2">
+        <a:scrgbClr r="0" g="0" b="0"/>
+      </a:lnRef>
+      <a:fillRef idx="1">
+        <a:scrgbClr r="0" g="0" b="0"/>
+      </a:fillRef>
+      <a:effectRef idx="0">
+        <a:scrgbClr r="0" g="0" b="0"/>
+      </a:effectRef>
+      <a:fontRef idx="minor"/>
+    </dgm:style>
+  </dgm:styleLbl>
+  <dgm:styleLbl name="alignAcc1">
+    <dgm:scene3d>
+      <a:camera prst="orthographicFront"/>
+      <a:lightRig rig="threePt" dir="t"/>
+    </dgm:scene3d>
+    <dgm:sp3d/>
+    <dgm:txPr/>
+    <dgm:style>
+      <a:lnRef idx="2">
+        <a:scrgbClr r="0" g="0" b="0"/>
+      </a:lnRef>
+      <a:fillRef idx="1">
+        <a:scrgbClr r="0" g="0" b="0"/>
+      </a:fillRef>
+      <a:effectRef idx="0">
+        <a:scrgbClr r="0" g="0" b="0"/>
+      </a:effectRef>
+      <a:fontRef idx="minor"/>
+    </dgm:style>
+  </dgm:styleLbl>
+  <dgm:styleLbl name="trAlignAcc1">
+    <dgm:scene3d>
+      <a:camera prst="orthographicFront"/>
+      <a:lightRig rig="threePt" dir="t"/>
+    </dgm:scene3d>
+    <dgm:sp3d/>
+    <dgm:txPr/>
+    <dgm:style>
+      <a:lnRef idx="1">
+        <a:scrgbClr r="0" g="0" b="0"/>
+      </a:lnRef>
+      <a:fillRef idx="1">
+        <a:scrgbClr r="0" g="0" b="0"/>
+      </a:fillRef>
+      <a:effectRef idx="0">
+        <a:scrgbClr r="0" g="0" b="0"/>
+      </a:effectRef>
+      <a:fontRef idx="minor"/>
+    </dgm:style>
+  </dgm:styleLbl>
+  <dgm:styleLbl name="bgAcc1">
+    <dgm:scene3d>
+      <a:camera prst="orthographicFront"/>
+      <a:lightRig rig="threePt" dir="t"/>
+    </dgm:scene3d>
+    <dgm:sp3d/>
+    <dgm:txPr/>
+    <dgm:style>
+      <a:lnRef idx="2">
+        <a:scrgbClr r="0" g="0" b="0"/>
+      </a:lnRef>
+      <a:fillRef idx="1">
+        <a:scrgbClr r="0" g="0" b="0"/>
+      </a:fillRef>
+      <a:effectRef idx="0">
+        <a:scrgbClr r="0" g="0" b="0"/>
+      </a:effectRef>
+      <a:fontRef idx="minor"/>
+    </dgm:style>
+  </dgm:styleLbl>
+  <dgm:styleLbl name="solidFgAcc1">
+    <dgm:scene3d>
+      <a:camera prst="orthographicFront"/>
+      <a:lightRig rig="threePt" dir="t"/>
+    </dgm:scene3d>
+    <dgm:sp3d/>
+    <dgm:txPr/>
+    <dgm:style>
+      <a:lnRef idx="2">
+        <a:scrgbClr r="0" g="0" b="0"/>
+      </a:lnRef>
+      <a:fillRef idx="1">
+        <a:scrgbClr r="0" g="0" b="0"/>
+      </a:fillRef>
+      <a:effectRef idx="0">
+        <a:scrgbClr r="0" g="0" b="0"/>
+      </a:effectRef>
+      <a:fontRef idx="minor"/>
+    </dgm:style>
+  </dgm:styleLbl>
+  <dgm:styleLbl name="solidAlignAcc1">
+    <dgm:scene3d>
+      <a:camera prst="orthographicFront"/>
+      <a:lightRig rig="threePt" dir="t"/>
+    </dgm:scene3d>
+    <dgm:sp3d/>
+    <dgm:txPr/>
+    <dgm:style>
+      <a:lnRef idx="2">
+        <a:scrgbClr r="0" g="0" b="0"/>
+      </a:lnRef>
+      <a:fillRef idx="1">
+        <a:scrgbClr r="0" g="0" b="0"/>
+      </a:fillRef>
+      <a:effectRef idx="0">
+        <a:scrgbClr r="0" g="0" b="0"/>
+      </a:effectRef>
+      <a:fontRef idx="minor"/>
+    </dgm:style>
+  </dgm:styleLbl>
+  <dgm:styleLbl name="solidBgAcc1">
+    <dgm:scene3d>
+      <a:camera prst="orthographicFront"/>
+      <a:lightRig rig="threePt" dir="t"/>
+    </dgm:scene3d>
+    <dgm:sp3d/>
+    <dgm:txPr/>
+    <dgm:style>
+      <a:lnRef idx="2">
+        <a:scrgbClr r="0" g="0" b="0"/>
+      </a:lnRef>
+      <a:fillRef idx="1">
+        <a:scrgbClr r="0" g="0" b="0"/>
+      </a:fillRef>
+      <a:effectRef idx="0">
+        <a:scrgbClr r="0" g="0" b="0"/>
+      </a:effectRef>
+      <a:fontRef idx="minor"/>
+    </dgm:style>
+  </dgm:styleLbl>
+  <dgm:styleLbl name="fgAccFollowNode1">
+    <dgm:scene3d>
+      <a:camera prst="orthographicFront"/>
+      <a:lightRig rig="threePt" dir="t"/>
+    </dgm:scene3d>
+    <dgm:sp3d/>
+    <dgm:txPr/>
+    <dgm:style>
+      <a:lnRef idx="2">
+        <a:scrgbClr r="0" g="0" b="0"/>
+      </a:lnRef>
+      <a:fillRef idx="1">
+        <a:scrgbClr r="0" g="0" b="0"/>
+      </a:fillRef>
+      <a:effectRef idx="0">
+        <a:scrgbClr r="0" g="0" b="0"/>
+      </a:effectRef>
+      <a:fontRef idx="minor"/>
+    </dgm:style>
+  </dgm:styleLbl>
+  <dgm:styleLbl name="alignAccFollowNode1">
+    <dgm:scene3d>
+      <a:camera prst="orthographicFront"/>
+      <a:lightRig rig="threePt" dir="t"/>
+    </dgm:scene3d>
+    <dgm:sp3d/>
+    <dgm:txPr/>
+    <dgm:style>
+      <a:lnRef idx="2">
+        <a:scrgbClr r="0" g="0" b="0"/>
+      </a:lnRef>
+      <a:fillRef idx="1">
+        <a:scrgbClr r="0" g="0" b="0"/>
+      </a:fillRef>
+      <a:effectRef idx="0">
+        <a:scrgbClr r="0" g="0" b="0"/>
+      </a:effectRef>
+      <a:fontRef idx="minor"/>
+    </dgm:style>
+  </dgm:styleLbl>
+  <dgm:styleLbl name="bgAccFollowNode1">
+    <dgm:scene3d>
+      <a:camera prst="orthographicFront"/>
+      <a:lightRig rig="threePt" dir="t"/>
+    </dgm:scene3d>
+    <dgm:sp3d/>
+    <dgm:txPr/>
+    <dgm:style>
+      <a:lnRef idx="2">
+        <a:scrgbClr r="0" g="0" b="0"/>
+      </a:lnRef>
+      <a:fillRef idx="1">
+        <a:scrgbClr r="0" g="0" b="0"/>
+      </a:fillRef>
+      <a:effectRef idx="0">
+        <a:scrgbClr r="0" g="0" b="0"/>
+      </a:effectRef>
+      <a:fontRef idx="minor"/>
+    </dgm:style>
+  </dgm:styleLbl>
+  <dgm:styleLbl name="fgAcc0">
+    <dgm:scene3d>
+      <a:camera prst="orthographicFront"/>
+      <a:lightRig rig="threePt" dir="t"/>
+    </dgm:scene3d>
+    <dgm:sp3d/>
+    <dgm:txPr/>
+    <dgm:style>
+      <a:lnRef idx="2">
+        <a:scrgbClr r="0" g="0" b="0"/>
+      </a:lnRef>
+      <a:fillRef idx="1">
+        <a:scrgbClr r="0" g="0" b="0"/>
+      </a:fillRef>
+      <a:effectRef idx="0">
+        <a:scrgbClr r="0" g="0" b="0"/>
+      </a:effectRef>
+      <a:fontRef idx="minor"/>
+    </dgm:style>
+  </dgm:styleLbl>
+  <dgm:styleLbl name="fgAcc2">
+    <dgm:scene3d>
+      <a:camera prst="orthographicFront"/>
+      <a:lightRig rig="threePt" dir="t"/>
+    </dgm:scene3d>
+    <dgm:sp3d/>
+    <dgm:txPr/>
+    <dgm:style>
+      <a:lnRef idx="2">
+        <a:scrgbClr r="0" g="0" b="0"/>
+      </a:lnRef>
+      <a:fillRef idx="1">
+        <a:scrgbClr r="0" g="0" b="0"/>
+      </a:fillRef>
+      <a:effectRef idx="0">
+        <a:scrgbClr r="0" g="0" b="0"/>
+      </a:effectRef>
+      <a:fontRef idx="minor"/>
+    </dgm:style>
+  </dgm:styleLbl>
+  <dgm:styleLbl name="fgAcc3">
+    <dgm:scene3d>
+      <a:camera prst="orthographicFront"/>
+      <a:lightRig rig="threePt" dir="t"/>
+    </dgm:scene3d>
+    <dgm:sp3d/>
+    <dgm:txPr/>
+    <dgm:style>
+      <a:lnRef idx="2">
+        <a:scrgbClr r="0" g="0" b="0"/>
+      </a:lnRef>
+      <a:fillRef idx="1">
+        <a:scrgbClr r="0" g="0" b="0"/>
+      </a:fillRef>
+      <a:effectRef idx="0">
+        <a:scrgbClr r="0" g="0" b="0"/>
+      </a:effectRef>
+      <a:fontRef idx="minor"/>
+    </dgm:style>
+  </dgm:styleLbl>
+  <dgm:styleLbl name="fgAcc4">
+    <dgm:scene3d>
+      <a:camera prst="orthographicFront"/>
+      <a:lightRig rig="threePt" dir="t"/>
+    </dgm:scene3d>
+    <dgm:sp3d/>
+    <dgm:txPr/>
+    <dgm:style>
+      <a:lnRef idx="2">
+        <a:scrgbClr r="0" g="0" b="0"/>
+      </a:lnRef>
+      <a:fillRef idx="1">
+        <a:scrgbClr r="0" g="0" b="0"/>
+      </a:fillRef>
+      <a:effectRef idx="0">
+        <a:scrgbClr r="0" g="0" b="0"/>
+      </a:effectRef>
+      <a:fontRef idx="minor"/>
+    </dgm:style>
+  </dgm:styleLbl>
+  <dgm:styleLbl name="bgShp">
+    <dgm:scene3d>
+      <a:camera prst="orthographicFront"/>
+      <a:lightRig rig="threePt" dir="t"/>
+    </dgm:scene3d>
+    <dgm:sp3d/>
+    <dgm:txPr/>
+    <dgm:style>
+      <a:lnRef idx="0">
+        <a:scrgbClr r="0" g="0" b="0"/>
+      </a:lnRef>
+      <a:fillRef idx="1">
+        <a:scrgbClr r="0" g="0" b="0"/>
+      </a:fillRef>
+      <a:effectRef idx="0">
+        <a:scrgbClr r="0" g="0" b="0"/>
+      </a:effectRef>
+      <a:fontRef idx="minor"/>
+    </dgm:style>
+  </dgm:styleLbl>
+  <dgm:styleLbl name="dkBgShp">
+    <dgm:scene3d>
+      <a:camera prst="orthographicFront"/>
+      <a:lightRig rig="threePt" dir="t"/>
+    </dgm:scene3d>
+    <dgm:sp3d/>
+    <dgm:txPr/>
+    <dgm:style>
+      <a:lnRef idx="0">
+        <a:scrgbClr r="0" g="0" b="0"/>
+      </a:lnRef>
+      <a:fillRef idx="1">
+        <a:scrgbClr r="0" g="0" b="0"/>
+      </a:fillRef>
+      <a:effectRef idx="0">
+        <a:scrgbClr r="0" g="0" b="0"/>
+      </a:effectRef>
+      <a:fontRef idx="minor"/>
+    </dgm:style>
+  </dgm:styleLbl>
+  <dgm:styleLbl name="trBgShp">
+    <dgm:scene3d>
+      <a:camera prst="orthographicFront"/>
+      <a:lightRig rig="threePt" dir="t"/>
+    </dgm:scene3d>
+    <dgm:sp3d/>
+    <dgm:txPr/>
+    <dgm:style>
+      <a:lnRef idx="0">
+        <a:scrgbClr r="0" g="0" b="0"/>
+      </a:lnRef>
+      <a:fillRef idx="1">
+        <a:scrgbClr r="0" g="0" b="0"/>
+      </a:fillRef>
+      <a:effectRef idx="0">
+        <a:scrgbClr r="0" g="0" b="0"/>
+      </a:effectRef>
+      <a:fontRef idx="minor"/>
+    </dgm:style>
+  </dgm:styleLbl>
+  <dgm:styleLbl name="fgShp">
+    <dgm:scene3d>
+      <a:camera prst="orthographicFront"/>
+      <a:lightRig rig="threePt" dir="t"/>
+    </dgm:scene3d>
+    <dgm:sp3d/>
+    <dgm:txPr/>
+    <dgm:style>
+      <a:lnRef idx="2">
+        <a:scrgbClr r="0" g="0" b="0"/>
+      </a:lnRef>
+      <a:fillRef idx="1">
+        <a:scrgbClr r="0" g="0" b="0"/>
+      </a:fillRef>
+      <a:effectRef idx="0">
+        <a:scrgbClr r="0" g="0" b="0"/>
+      </a:effectRef>
+      <a:fontRef idx="minor"/>
+    </dgm:style>
+  </dgm:styleLbl>
+  <dgm:styleLbl name="revTx">
+    <dgm:scene3d>
+      <a:camera prst="orthographicFront"/>
+      <a:lightRig rig="threePt" dir="t"/>
+    </dgm:scene3d>
+    <dgm:sp3d/>
+    <dgm:txPr/>
+    <dgm:style>
+      <a:lnRef idx="0">
+        <a:scrgbClr r="0" g="0" b="0"/>
+      </a:lnRef>
+      <a:fillRef idx="0">
+        <a:scrgbClr r="0" g="0" b="0"/>
+      </a:fillRef>
+      <a:effectRef idx="0">
+        <a:scrgbClr r="0" g="0" b="0"/>
+      </a:effectRef>
+      <a:fontRef idx="minor"/>
+    </dgm:style>
+  </dgm:styleLbl>
+</dgm:styleDef>
+</file>
+
+<file path=ppt/diagrams/quickStyle2.xml><?xml version="1.0" encoding="utf-8"?>
+<dgm:styleDef xmlns:dgm="http://schemas.openxmlformats.org/drawingml/2006/diagram" xmlns:a="http://schemas.openxmlformats.org/drawingml/2006/main" uniqueId="urn:microsoft.com/office/officeart/2005/8/quickstyle/simple4">
+  <dgm:title val=""/>
+  <dgm:desc val=""/>
+  <dgm:catLst>
+    <dgm:cat type="simple" pri="10400"/>
+  </dgm:catLst>
+  <dgm:scene3d>
+    <a:camera prst="orthographicFront"/>
+    <a:lightRig rig="threePt" dir="t"/>
+  </dgm:scene3d>
+  <dgm:styleLbl name="node0">
+    <dgm:scene3d>
+      <a:camera prst="orthographicFront"/>
+      <a:lightRig rig="threePt" dir="t"/>
+    </dgm:scene3d>
+    <dgm:sp3d/>
+    <dgm:txPr/>
+    <dgm:style>
+      <a:lnRef idx="0">
+        <a:scrgbClr r="0" g="0" b="0"/>
+      </a:lnRef>
+      <a:fillRef idx="3">
+        <a:scrgbClr r="0" g="0" b="0"/>
+      </a:fillRef>
+      <a:effectRef idx="2">
+        <a:scrgbClr r="0" g="0" b="0"/>
+      </a:effectRef>
+      <a:fontRef idx="minor">
+        <a:schemeClr val="lt1"/>
+      </a:fontRef>
+    </dgm:style>
+  </dgm:styleLbl>
+  <dgm:styleLbl name="lnNode1">
+    <dgm:scene3d>
+      <a:camera prst="orthographicFront"/>
+      <a:lightRig rig="threePt" dir="t"/>
+    </dgm:scene3d>
+    <dgm:sp3d/>
+    <dgm:txPr/>
+    <dgm:style>
+      <a:lnRef idx="1">
+        <a:scrgbClr r="0" g="0" b="0"/>
+      </a:lnRef>
+      <a:fillRef idx="3">
+        <a:scrgbClr r="0" g="0" b="0"/>
+      </a:fillRef>
+      <a:effectRef idx="2">
+        <a:scrgbClr r="0" g="0" b="0"/>
+      </a:effectRef>
+      <a:fontRef idx="minor">
+        <a:schemeClr val="lt1"/>
+      </a:fontRef>
+    </dgm:style>
+  </dgm:styleLbl>
+  <dgm:styleLbl name="vennNode1">
+    <dgm:scene3d>
+      <a:camera prst="orthographicFront"/>
+      <a:lightRig rig="threePt" dir="t"/>
+    </dgm:scene3d>
+    <dgm:sp3d/>
+    <dgm:txPr/>
+    <dgm:style>
+      <a:lnRef idx="0">
+        <a:scrgbClr r="0" g="0" b="0"/>
+      </a:lnRef>
+      <a:fillRef idx="3">
+        <a:scrgbClr r="0" g="0" b="0"/>
+      </a:fillRef>
+      <a:effectRef idx="0">
+        <a:scrgbClr r="0" g="0" b="0"/>
+      </a:effectRef>
+      <a:fontRef idx="minor">
+        <a:schemeClr val="tx1"/>
+      </a:fontRef>
+    </dgm:style>
+  </dgm:styleLbl>
+  <dgm:styleLbl name="alignNode1">
+    <dgm:scene3d>
+      <a:camera prst="orthographicFront"/>
+      <a:lightRig rig="threePt" dir="t"/>
+    </dgm:scene3d>
+    <dgm:sp3d/>
+    <dgm:txPr/>
+    <dgm:style>
+      <a:lnRef idx="1">
+        <a:scrgbClr r="0" g="0" b="0"/>
+      </a:lnRef>
+      <a:fillRef idx="3">
+        <a:scrgbClr r="0" g="0" b="0"/>
+      </a:fillRef>
+      <a:effectRef idx="2">
+        <a:scrgbClr r="0" g="0" b="0"/>
+      </a:effectRef>
+      <a:fontRef idx="minor">
+        <a:schemeClr val="lt1"/>
+      </a:fontRef>
+    </dgm:style>
+  </dgm:styleLbl>
+  <dgm:styleLbl name="node1">
+    <dgm:scene3d>
+      <a:camera prst="orthographicFront"/>
+      <a:lightRig rig="threePt" dir="t"/>
+    </dgm:scene3d>
+    <dgm:sp3d/>
+    <dgm:txPr/>
+    <dgm:style>
+      <a:lnRef idx="0">
+        <a:scrgbClr r="0" g="0" b="0"/>
+      </a:lnRef>
+      <a:fillRef idx="3">
+        <a:scrgbClr r="0" g="0" b="0"/>
+      </a:fillRef>
+      <a:effectRef idx="2">
+        <a:scrgbClr r="0" g="0" b="0"/>
+      </a:effectRef>
+      <a:fontRef idx="minor">
+        <a:schemeClr val="lt1"/>
+      </a:fontRef>
+    </dgm:style>
+  </dgm:styleLbl>
+  <dgm:styleLbl name="node2">
+    <dgm:scene3d>
+      <a:camera prst="orthographicFront"/>
+      <a:lightRig rig="threePt" dir="t"/>
+    </dgm:scene3d>
+    <dgm:sp3d/>
+    <dgm:txPr/>
+    <dgm:style>
+      <a:lnRef idx="0">
+        <a:scrgbClr r="0" g="0" b="0"/>
+      </a:lnRef>
+      <a:fillRef idx="3">
+        <a:scrgbClr r="0" g="0" b="0"/>
+      </a:fillRef>
+      <a:effectRef idx="2">
+        <a:scrgbClr r="0" g="0" b="0"/>
+      </a:effectRef>
+      <a:fontRef idx="minor">
+        <a:schemeClr val="lt1"/>
+      </a:fontRef>
+    </dgm:style>
+  </dgm:styleLbl>
+  <dgm:styleLbl name="node3">
+    <dgm:scene3d>
+      <a:camera prst="orthographicFront"/>
+      <a:lightRig rig="threePt" dir="t"/>
+    </dgm:scene3d>
+    <dgm:sp3d/>
+    <dgm:txPr/>
+    <dgm:style>
+      <a:lnRef idx="0">
+        <a:scrgbClr r="0" g="0" b="0"/>
+      </a:lnRef>
+      <a:fillRef idx="3">
+        <a:scrgbClr r="0" g="0" b="0"/>
+      </a:fillRef>
+      <a:effectRef idx="2">
+        <a:scrgbClr r="0" g="0" b="0"/>
+      </a:effectRef>
+      <a:fontRef idx="minor">
+        <a:schemeClr val="lt1"/>
+      </a:fontRef>
+    </dgm:style>
+  </dgm:styleLbl>
+  <dgm:styleLbl name="node4">
+    <dgm:scene3d>
+      <a:camera prst="orthographicFront"/>
+      <a:lightRig rig="threePt" dir="t"/>
+    </dgm:scene3d>
+    <dgm:sp3d/>
+    <dgm:txPr/>
+    <dgm:style>
+      <a:lnRef idx="0">
+        <a:scrgbClr r="0" g="0" b="0"/>
+      </a:lnRef>
+      <a:fillRef idx="3">
+        <a:scrgbClr r="0" g="0" b="0"/>
+      </a:fillRef>
+      <a:effectRef idx="2">
+        <a:scrgbClr r="0" g="0" b="0"/>
+      </a:effectRef>
+      <a:fontRef idx="minor">
+        <a:schemeClr val="lt1"/>
+      </a:fontRef>
+    </dgm:style>
+  </dgm:styleLbl>
+  <dgm:styleLbl name="fgImgPlace1">
+    <dgm:scene3d>
+      <a:camera prst="orthographicFront"/>
+      <a:lightRig rig="threePt" dir="t"/>
+    </dgm:scene3d>
+    <dgm:sp3d/>
+    <dgm:txPr/>
+    <dgm:style>
+      <a:lnRef idx="0">
+        <a:scrgbClr r="0" g="0" b="0"/>
+      </a:lnRef>
+      <a:fillRef idx="1">
+        <a:scrgbClr r="0" g="0" b="0"/>
+      </a:fillRef>
+      <a:effectRef idx="2">
+        <a:scrgbClr r="0" g="0" b="0"/>
+      </a:effectRef>
+      <a:fontRef idx="minor"/>
+    </dgm:style>
+  </dgm:styleLbl>
+  <dgm:styleLbl name="alignImgPlace1">
+    <dgm:scene3d>
+      <a:camera prst="orthographicFront"/>
+      <a:lightRig rig="threePt" dir="t"/>
+    </dgm:scene3d>
+    <dgm:sp3d/>
+    <dgm:txPr/>
+    <dgm:style>
+      <a:lnRef idx="0">
+        <a:scrgbClr r="0" g="0" b="0"/>
+      </a:lnRef>
+      <a:fillRef idx="1">
+        <a:scrgbClr r="0" g="0" b="0"/>
+      </a:fillRef>
+      <a:effectRef idx="2">
+        <a:scrgbClr r="0" g="0" b="0"/>
+      </a:effectRef>
+      <a:fontRef idx="minor"/>
+    </dgm:style>
+  </dgm:styleLbl>
+  <dgm:styleLbl name="bgImgPlace1">
+    <dgm:scene3d>
+      <a:camera prst="orthographicFront"/>
+      <a:lightRig rig="threePt" dir="t"/>
+    </dgm:scene3d>
+    <dgm:sp3d/>
+    <dgm:txPr/>
+    <dgm:style>
+      <a:lnRef idx="0">
+        <a:scrgbClr r="0" g="0" b="0"/>
+      </a:lnRef>
+      <a:fillRef idx="1">
+        <a:scrgbClr r="0" g="0" b="0"/>
+      </a:fillRef>
+      <a:effectRef idx="2">
+        <a:scrgbClr r="0" g="0" b="0"/>
+      </a:effectRef>
+      <a:fontRef idx="minor"/>
+    </dgm:style>
+  </dgm:styleLbl>
+  <dgm:styleLbl name="sibTrans2D1">
+    <dgm:scene3d>
+      <a:camera prst="orthographicFront"/>
+      <a:lightRig rig="threePt" dir="t"/>
+    </dgm:scene3d>
+    <dgm:sp3d/>
+    <dgm:txPr/>
+    <dgm:style>
+      <a:lnRef idx="0">
+        <a:scrgbClr r="0" g="0" b="0"/>
+      </a:lnRef>
+      <a:fillRef idx="3">
+        <a:scrgbClr r="0" g="0" b="0"/>
+      </a:fillRef>
+      <a:effectRef idx="2">
+        <a:scrgbClr r="0" g="0" b="0"/>
+      </a:effectRef>
+      <a:fontRef idx="minor">
+        <a:schemeClr val="lt1"/>
+      </a:fontRef>
+    </dgm:style>
+  </dgm:styleLbl>
+  <dgm:styleLbl name="fgSibTrans2D1">
+    <dgm:scene3d>
+      <a:camera prst="orthographicFront"/>
+      <a:lightRig rig="threePt" dir="t"/>
+    </dgm:scene3d>
+    <dgm:sp3d/>
+    <dgm:txPr/>
+    <dgm:style>
+      <a:lnRef idx="0">
+        <a:scrgbClr r="0" g="0" b="0"/>
+      </a:lnRef>
+      <a:fillRef idx="3">
+        <a:scrgbClr r="0" g="0" b="0"/>
+      </a:fillRef>
+      <a:effectRef idx="2">
+        <a:scrgbClr r="0" g="0" b="0"/>
+      </a:effectRef>
+      <a:fontRef idx="minor">
+        <a:schemeClr val="lt1"/>
+      </a:fontRef>
+    </dgm:style>
+  </dgm:styleLbl>
+  <dgm:styleLbl name="bgSibTrans2D1">
+    <dgm:scene3d>
+      <a:camera prst="orthographicFront"/>
+      <a:lightRig rig="threePt" dir="t"/>
+    </dgm:scene3d>
+    <dgm:sp3d/>
+    <dgm:txPr/>
+    <dgm:style>
+      <a:lnRef idx="0">
+        <a:scrgbClr r="0" g="0" b="0"/>
+      </a:lnRef>
+      <a:fillRef idx="3">
+        <a:scrgbClr r="0" g="0" b="0"/>
+      </a:fillRef>
+      <a:effectRef idx="2">
+        <a:scrgbClr r="0" g="0" b="0"/>
+      </a:effectRef>
+      <a:fontRef idx="minor">
+        <a:schemeClr val="lt1"/>
+      </a:fontRef>
+    </dgm:style>
+  </dgm:styleLbl>
+  <dgm:styleLbl name="sibTrans1D1">
+    <dgm:scene3d>
+      <a:camera prst="orthographicFront"/>
+      <a:lightRig rig="threePt" dir="t"/>
+    </dgm:scene3d>
+    <dgm:sp3d/>
+    <dgm:txPr/>
+    <dgm:style>
+      <a:lnRef idx="1">
+        <a:scrgbClr r="0" g="0" b="0"/>
+      </a:lnRef>
+      <a:fillRef idx="0">
+        <a:scrgbClr r="0" g="0" b="0"/>
+      </a:fillRef>
+      <a:effectRef idx="0">
+        <a:scrgbClr r="0" g="0" b="0"/>
+      </a:effectRef>
+      <a:fontRef idx="minor"/>
+    </dgm:style>
+  </dgm:styleLbl>
+  <dgm:styleLbl name="callout">
+    <dgm:scene3d>
+      <a:camera prst="orthographicFront"/>
+      <a:lightRig rig="threePt" dir="t"/>
+    </dgm:scene3d>
+    <dgm:sp3d/>
+    <dgm:txPr/>
+    <dgm:style>
+      <a:lnRef idx="2">
+        <a:scrgbClr r="0" g="0" b="0"/>
+      </a:lnRef>
+      <a:fillRef idx="1">
+        <a:scrgbClr r="0" g="0" b="0"/>
+      </a:fillRef>
+      <a:effectRef idx="1">
+        <a:scrgbClr r="0" g="0" b="0"/>
+      </a:effectRef>
+      <a:fontRef idx="minor"/>
+    </dgm:style>
+  </dgm:styleLbl>
+  <dgm:styleLbl name="asst0">
+    <dgm:scene3d>
+      <a:camera prst="orthographicFront"/>
+      <a:lightRig rig="threePt" dir="t"/>
+    </dgm:scene3d>
+    <dgm:sp3d/>
+    <dgm:txPr/>
+    <dgm:style>
+      <a:lnRef idx="0">
+        <a:scrgbClr r="0" g="0" b="0"/>
+      </a:lnRef>
+      <a:fillRef idx="3">
+        <a:scrgbClr r="0" g="0" b="0"/>
+      </a:fillRef>
+      <a:effectRef idx="2">
+        <a:scrgbClr r="0" g="0" b="0"/>
+      </a:effectRef>
+      <a:fontRef idx="minor">
+        <a:schemeClr val="lt1"/>
+      </a:fontRef>
+    </dgm:style>
+  </dgm:styleLbl>
+  <dgm:styleLbl name="asst1">
+    <dgm:scene3d>
+      <a:camera prst="orthographicFront"/>
+      <a:lightRig rig="threePt" dir="t"/>
+    </dgm:scene3d>
+    <dgm:sp3d/>
+    <dgm:txPr/>
+    <dgm:style>
+      <a:lnRef idx="0">
+        <a:scrgbClr r="0" g="0" b="0"/>
+      </a:lnRef>
+      <a:fillRef idx="3">
+        <a:scrgbClr r="0" g="0" b="0"/>
+      </a:fillRef>
+      <a:effectRef idx="2">
+        <a:scrgbClr r="0" g="0" b="0"/>
+      </a:effectRef>
+      <a:fontRef idx="minor">
+        <a:schemeClr val="lt1"/>
+      </a:fontRef>
+    </dgm:style>
+  </dgm:styleLbl>
+  <dgm:styleLbl name="asst2">
+    <dgm:scene3d>
+      <a:camera prst="orthographicFront"/>
+      <a:lightRig rig="threePt" dir="t"/>
+    </dgm:scene3d>
+    <dgm:sp3d/>
+    <dgm:txPr/>
+    <dgm:style>
+      <a:lnRef idx="0">
+        <a:scrgbClr r="0" g="0" b="0"/>
+      </a:lnRef>
+      <a:fillRef idx="3">
+        <a:scrgbClr r="0" g="0" b="0"/>
+      </a:fillRef>
+      <a:effectRef idx="2">
+        <a:scrgbClr r="0" g="0" b="0"/>
+      </a:effectRef>
+      <a:fontRef idx="minor">
+        <a:schemeClr val="lt1"/>
+      </a:fontRef>
+    </dgm:style>
+  </dgm:styleLbl>
+  <dgm:styleLbl name="asst3">
+    <dgm:scene3d>
+      <a:camera prst="orthographicFront"/>
+      <a:lightRig rig="threePt" dir="t"/>
+    </dgm:scene3d>
+    <dgm:sp3d/>
+    <dgm:txPr/>
+    <dgm:style>
+      <a:lnRef idx="0">
+        <a:scrgbClr r="0" g="0" b="0"/>
+      </a:lnRef>
+      <a:fillRef idx="3">
+        <a:scrgbClr r="0" g="0" b="0"/>
+      </a:fillRef>
+      <a:effectRef idx="2">
+        <a:scrgbClr r="0" g="0" b="0"/>
+      </a:effectRef>
+      <a:fontRef idx="minor">
+        <a:schemeClr val="lt1"/>
+      </a:fontRef>
+    </dgm:style>
+  </dgm:styleLbl>
+  <dgm:styleLbl name="asst4">
+    <dgm:scene3d>
+      <a:camera prst="orthographicFront"/>
+      <a:lightRig rig="threePt" dir="t"/>
+    </dgm:scene3d>
+    <dgm:sp3d/>
+    <dgm:txPr/>
+    <dgm:style>
+      <a:lnRef idx="0">
+        <a:scrgbClr r="0" g="0" b="0"/>
+      </a:lnRef>
+      <a:fillRef idx="3">
+        <a:scrgbClr r="0" g="0" b="0"/>
+      </a:fillRef>
+      <a:effectRef idx="2">
+        <a:scrgbClr r="0" g="0" b="0"/>
+      </a:effectRef>
+      <a:fontRef idx="minor">
+        <a:schemeClr val="lt1"/>
+      </a:fontRef>
+    </dgm:style>
+  </dgm:styleLbl>
+  <dgm:styleLbl name="parChTrans2D1">
+    <dgm:scene3d>
+      <a:camera prst="orthographicFront"/>
+      <a:lightRig rig="threePt" dir="t"/>
+    </dgm:scene3d>
+    <dgm:sp3d/>
+    <dgm:txPr/>
+    <dgm:style>
+      <a:lnRef idx="0">
+        <a:scrgbClr r="0" g="0" b="0"/>
+      </a:lnRef>
+      <a:fillRef idx="3">
+        <a:scrgbClr r="0" g="0" b="0"/>
+      </a:fillRef>
+      <a:effectRef idx="2">
+        <a:scrgbClr r="0" g="0" b="0"/>
+      </a:effectRef>
+      <a:fontRef idx="minor">
+        <a:schemeClr val="lt1"/>
+      </a:fontRef>
+    </dgm:style>
+  </dgm:styleLbl>
+  <dgm:styleLbl name="parChTrans2D2">
+    <dgm:scene3d>
+      <a:camera prst="orthographicFront"/>
+      <a:lightRig rig="threePt" dir="t"/>
+    </dgm:scene3d>
+    <dgm:sp3d/>
+    <dgm:txPr/>
+    <dgm:style>
+      <a:lnRef idx="0">
+        <a:scrgbClr r="0" g="0" b="0"/>
+      </a:lnRef>
+      <a:fillRef idx="3">
+        <a:scrgbClr r="0" g="0" b="0"/>
+      </a:fillRef>
+      <a:effectRef idx="2">
+        <a:scrgbClr r="0" g="0" b="0"/>
+      </a:effectRef>
+      <a:fontRef idx="minor">
+        <a:schemeClr val="lt1"/>
+      </a:fontRef>
+    </dgm:style>
+  </dgm:styleLbl>
+  <dgm:styleLbl name="parChTrans2D3">
+    <dgm:scene3d>
+      <a:camera prst="orthographicFront"/>
+      <a:lightRig rig="threePt" dir="t"/>
+    </dgm:scene3d>
+    <dgm:sp3d/>
+    <dgm:txPr/>
+    <dgm:style>
+      <a:lnRef idx="1">
+        <a:scrgbClr r="0" g="0" b="0"/>
+      </a:lnRef>
+      <a:fillRef idx="3">
+        <a:scrgbClr r="0" g="0" b="0"/>
+      </a:fillRef>
+      <a:effectRef idx="2">
+        <a:scrgbClr r="0" g="0" b="0"/>
+      </a:effectRef>
+      <a:fontRef idx="minor">
+        <a:schemeClr val="lt1"/>
+      </a:fontRef>
+    </dgm:style>
+  </dgm:styleLbl>
+  <dgm:styleLbl name="parChTrans2D4">
+    <dgm:scene3d>
+      <a:camera prst="orthographicFront"/>
+      <a:lightRig rig="threePt" dir="t"/>
+    </dgm:scene3d>
+    <dgm:sp3d/>
+    <dgm:txPr/>
+    <dgm:style>
+      <a:lnRef idx="1">
+        <a:scrgbClr r="0" g="0" b="0"/>
+      </a:lnRef>
+      <a:fillRef idx="3">
+        <a:scrgbClr r="0" g="0" b="0"/>
+      </a:fillRef>
+      <a:effectRef idx="2">
+        <a:scrgbClr r="0" g="0" b="0"/>
+      </a:effectRef>
+      <a:fontRef idx="minor">
+        <a:schemeClr val="lt1"/>
+      </a:fontRef>
+    </dgm:style>
+  </dgm:styleLbl>
+  <dgm:styleLbl name="parChTrans1D1">
+    <dgm:scene3d>
+      <a:camera prst="orthographicFront"/>
+      <a:lightRig rig="threePt" dir="t"/>
+    </dgm:scene3d>
+    <dgm:sp3d/>
+    <dgm:txPr/>
+    <dgm:style>
+      <a:lnRef idx="1">
+        <a:scrgbClr r="0" g="0" b="0"/>
+      </a:lnRef>
+      <a:fillRef idx="0">
+        <a:scrgbClr r="0" g="0" b="0"/>
+      </a:fillRef>
+      <a:effectRef idx="0">
+        <a:scrgbClr r="0" g="0" b="0"/>
+      </a:effectRef>
+      <a:fontRef idx="minor"/>
+    </dgm:style>
+  </dgm:styleLbl>
+  <dgm:styleLbl name="parChTrans1D2">
+    <dgm:scene3d>
+      <a:camera prst="orthographicFront"/>
+      <a:lightRig rig="threePt" dir="t"/>
+    </dgm:scene3d>
+    <dgm:sp3d/>
+    <dgm:txPr/>
+    <dgm:style>
+      <a:lnRef idx="1">
+        <a:scrgbClr r="0" g="0" b="0"/>
+      </a:lnRef>
+      <a:fillRef idx="0">
+        <a:scrgbClr r="0" g="0" b="0"/>
+      </a:fillRef>
+      <a:effectRef idx="0">
+        <a:scrgbClr r="0" g="0" b="0"/>
+      </a:effectRef>
+      <a:fontRef idx="minor"/>
+    </dgm:style>
+  </dgm:styleLbl>
+  <dgm:styleLbl name="parChTrans1D3">
+    <dgm:scene3d>
+      <a:camera prst="orthographicFront"/>
+      <a:lightRig rig="threePt" dir="t"/>
+    </dgm:scene3d>
+    <dgm:sp3d/>
+    <dgm:txPr/>
+    <dgm:style>
+      <a:lnRef idx="1">
+        <a:scrgbClr r="0" g="0" b="0"/>
+      </a:lnRef>
+      <a:fillRef idx="0">
+        <a:scrgbClr r="0" g="0" b="0"/>
+      </a:fillRef>
+      <a:effectRef idx="0">
+        <a:scrgbClr r="0" g="0" b="0"/>
+      </a:effectRef>
+      <a:fontRef idx="minor"/>
+    </dgm:style>
+  </dgm:styleLbl>
+  <dgm:styleLbl name="parChTrans1D4">
+    <dgm:scene3d>
+      <a:camera prst="orthographicFront"/>
+      <a:lightRig rig="threePt" dir="t"/>
+    </dgm:scene3d>
+    <dgm:sp3d/>
+    <dgm:txPr/>
+    <dgm:style>
+      <a:lnRef idx="1">
+        <a:scrgbClr r="0" g="0" b="0"/>
+      </a:lnRef>
+      <a:fillRef idx="0">
+        <a:scrgbClr r="0" g="0" b="0"/>
+      </a:fillRef>
+      <a:effectRef idx="0">
+        <a:scrgbClr r="0" g="0" b="0"/>
+      </a:effectRef>
+      <a:fontRef idx="minor"/>
+    </dgm:style>
+  </dgm:styleLbl>
+  <dgm:styleLbl name="fgAcc1">
+    <dgm:scene3d>
+      <a:camera prst="orthographicFront"/>
+      <a:lightRig rig="threePt" dir="t"/>
+    </dgm:scene3d>
+    <dgm:sp3d/>
+    <dgm:txPr/>
+    <dgm:style>
+      <a:lnRef idx="1">
+        <a:scrgbClr r="0" g="0" b="0"/>
+      </a:lnRef>
+      <a:fillRef idx="1">
+        <a:scrgbClr r="0" g="0" b="0"/>
+      </a:fillRef>
+      <a:effectRef idx="0">
+        <a:scrgbClr r="0" g="0" b="0"/>
+      </a:effectRef>
+      <a:fontRef idx="minor"/>
+    </dgm:style>
+  </dgm:styleLbl>
+  <dgm:styleLbl name="conFgAcc1">
+    <dgm:scene3d>
+      <a:camera prst="orthographicFront"/>
+      <a:lightRig rig="threePt" dir="t"/>
+    </dgm:scene3d>
+    <dgm:sp3d/>
+    <dgm:txPr/>
+    <dgm:style>
+      <a:lnRef idx="1">
+        <a:scrgbClr r="0" g="0" b="0"/>
+      </a:lnRef>
+      <a:fillRef idx="1">
+        <a:scrgbClr r="0" g="0" b="0"/>
+      </a:fillRef>
+      <a:effectRef idx="0">
+        <a:scrgbClr r="0" g="0" b="0"/>
+      </a:effectRef>
+      <a:fontRef idx="minor"/>
+    </dgm:style>
+  </dgm:styleLbl>
+  <dgm:styleLbl name="alignAcc1">
+    <dgm:scene3d>
+      <a:camera prst="orthographicFront"/>
+      <a:lightRig rig="threePt" dir="t"/>
+    </dgm:scene3d>
+    <dgm:sp3d/>
+    <dgm:txPr/>
+    <dgm:style>
+      <a:lnRef idx="1">
+        <a:scrgbClr r="0" g="0" b="0"/>
+      </a:lnRef>
+      <a:fillRef idx="1">
+        <a:scrgbClr r="0" g="0" b="0"/>
+      </a:fillRef>
+      <a:effectRef idx="0">
+        <a:scrgbClr r="0" g="0" b="0"/>
+      </a:effectRef>
+      <a:fontRef idx="minor"/>
+    </dgm:style>
+  </dgm:styleLbl>
+  <dgm:styleLbl name="trAlignAcc1">
+    <dgm:scene3d>
+      <a:camera prst="orthographicFront"/>
+      <a:lightRig rig="threePt" dir="t"/>
+    </dgm:scene3d>
+    <dgm:sp3d/>
+    <dgm:txPr/>
+    <dgm:style>
+      <a:lnRef idx="1">
+        <a:scrgbClr r="0" g="0" b="0"/>
+      </a:lnRef>
+      <a:fillRef idx="1">
+        <a:scrgbClr r="0" g="0" b="0"/>
+      </a:fillRef>
+      <a:effectRef idx="0">
+        <a:scrgbClr r="0" g="0" b="0"/>
+      </a:effectRef>
+      <a:fontRef idx="minor"/>
+    </dgm:style>
+  </dgm:styleLbl>
+  <dgm:styleLbl name="bgAcc1">
+    <dgm:scene3d>
+      <a:camera prst="orthographicFront"/>
+      <a:lightRig rig="threePt" dir="t"/>
+    </dgm:scene3d>
+    <dgm:sp3d/>
+    <dgm:txPr/>
+    <dgm:style>
+      <a:lnRef idx="1">
+        <a:scrgbClr r="0" g="0" b="0"/>
+      </a:lnRef>
+      <a:fillRef idx="1">
+        <a:scrgbClr r="0" g="0" b="0"/>
+      </a:fillRef>
+      <a:effectRef idx="0">
+        <a:scrgbClr r="0" g="0" b="0"/>
+      </a:effectRef>
+      <a:fontRef idx="minor"/>
+    </dgm:style>
+  </dgm:styleLbl>
+  <dgm:styleLbl name="solidFgAcc1">
+    <dgm:scene3d>
+      <a:camera prst="orthographicFront"/>
+      <a:lightRig rig="threePt" dir="t"/>
+    </dgm:scene3d>
+    <dgm:sp3d/>
+    <dgm:txPr/>
+    <dgm:style>
+      <a:lnRef idx="1">
+        <a:scrgbClr r="0" g="0" b="0"/>
+      </a:lnRef>
+      <a:fillRef idx="1">
+        <a:scrgbClr r="0" g="0" b="0"/>
+      </a:fillRef>
+      <a:effectRef idx="0">
+        <a:scrgbClr r="0" g="0" b="0"/>
+      </a:effectRef>
+      <a:fontRef idx="minor"/>
+    </dgm:style>
+  </dgm:styleLbl>
+  <dgm:styleLbl name="solidAlignAcc1">
+    <dgm:scene3d>
+      <a:camera prst="orthographicFront"/>
+      <a:lightRig rig="threePt" dir="t"/>
+    </dgm:scene3d>
+    <dgm:sp3d/>
+    <dgm:txPr/>
+    <dgm:style>
+      <a:lnRef idx="1">
+        <a:scrgbClr r="0" g="0" b="0"/>
+      </a:lnRef>
+      <a:fillRef idx="1">
+        <a:scrgbClr r="0" g="0" b="0"/>
+      </a:fillRef>
+      <a:effectRef idx="0">
+        <a:scrgbClr r="0" g="0" b="0"/>
+      </a:effectRef>
+      <a:fontRef idx="minor"/>
+    </dgm:style>
+  </dgm:styleLbl>
+  <dgm:styleLbl name="solidBgAcc1">
+    <dgm:scene3d>
+      <a:camera prst="orthographicFront"/>
+      <a:lightRig rig="threePt" dir="t"/>
+    </dgm:scene3d>
+    <dgm:sp3d/>
+    <dgm:txPr/>
+    <dgm:style>
+      <a:lnRef idx="1">
+        <a:scrgbClr r="0" g="0" b="0"/>
+      </a:lnRef>
+      <a:fillRef idx="1">
+        <a:scrgbClr r="0" g="0" b="0"/>
+      </a:fillRef>
+      <a:effectRef idx="0">
+        <a:scrgbClr r="0" g="0" b="0"/>
+      </a:effectRef>
+      <a:fontRef idx="minor"/>
+    </dgm:style>
+  </dgm:styleLbl>
+  <dgm:styleLbl name="fgAccFollowNode1">
+    <dgm:scene3d>
+      <a:camera prst="orthographicFront"/>
+      <a:lightRig rig="threePt" dir="t"/>
+    </dgm:scene3d>
+    <dgm:sp3d/>
+    <dgm:txPr/>
+    <dgm:style>
+      <a:lnRef idx="1">
+        <a:scrgbClr r="0" g="0" b="0"/>
+      </a:lnRef>
+      <a:fillRef idx="1">
+        <a:scrgbClr r="0" g="0" b="0"/>
+      </a:fillRef>
+      <a:effectRef idx="0">
+        <a:scrgbClr r="0" g="0" b="0"/>
+      </a:effectRef>
+      <a:fontRef idx="minor"/>
+    </dgm:style>
+  </dgm:styleLbl>
+  <dgm:styleLbl name="alignAccFollowNode1">
+    <dgm:scene3d>
+      <a:camera prst="orthographicFront"/>
+      <a:lightRig rig="threePt" dir="t"/>
+    </dgm:scene3d>
+    <dgm:sp3d/>
+    <dgm:txPr/>
+    <dgm:style>
+      <a:lnRef idx="1">
+        <a:scrgbClr r="0" g="0" b="0"/>
+      </a:lnRef>
+      <a:fillRef idx="1">
+        <a:scrgbClr r="0" g="0" b="0"/>
+      </a:fillRef>
+      <a:effectRef idx="0">
+        <a:scrgbClr r="0" g="0" b="0"/>
+      </a:effectRef>
+      <a:fontRef idx="minor"/>
+    </dgm:style>
+  </dgm:styleLbl>
+  <dgm:styleLbl name="bgAccFollowNode1">
+    <dgm:scene3d>
+      <a:camera prst="orthographicFront"/>
+      <a:lightRig rig="threePt" dir="t"/>
+    </dgm:scene3d>
+    <dgm:sp3d/>
+    <dgm:txPr/>
+    <dgm:style>
+      <a:lnRef idx="1">
+        <a:scrgbClr r="0" g="0" b="0"/>
+      </a:lnRef>
+      <a:fillRef idx="1">
+        <a:scrgbClr r="0" g="0" b="0"/>
+      </a:fillRef>
+      <a:effectRef idx="0">
+        <a:scrgbClr r="0" g="0" b="0"/>
+      </a:effectRef>
+      <a:fontRef idx="minor"/>
+    </dgm:style>
+  </dgm:styleLbl>
+  <dgm:styleLbl name="fgAcc0">
+    <dgm:scene3d>
+      <a:camera prst="orthographicFront"/>
+      <a:lightRig rig="threePt" dir="t"/>
+    </dgm:scene3d>
+    <dgm:sp3d/>
+    <dgm:txPr/>
+    <dgm:style>
+      <a:lnRef idx="1">
+        <a:scrgbClr r="0" g="0" b="0"/>
+      </a:lnRef>
+      <a:fillRef idx="1">
+        <a:scrgbClr r="0" g="0" b="0"/>
+      </a:fillRef>
+      <a:effectRef idx="0">
+        <a:scrgbClr r="0" g="0" b="0"/>
+      </a:effectRef>
+      <a:fontRef idx="minor"/>
+    </dgm:style>
+  </dgm:styleLbl>
+  <dgm:styleLbl name="fgAcc2">
+    <dgm:scene3d>
+      <a:camera prst="orthographicFront"/>
+      <a:lightRig rig="threePt" dir="t"/>
+    </dgm:scene3d>
+    <dgm:sp3d/>
+    <dgm:txPr/>
+    <dgm:style>
+      <a:lnRef idx="1">
+        <a:scrgbClr r="0" g="0" b="0"/>
+      </a:lnRef>
+      <a:fillRef idx="1">
+        <a:scrgbClr r="0" g="0" b="0"/>
+      </a:fillRef>
+      <a:effectRef idx="0">
+        <a:scrgbClr r="0" g="0" b="0"/>
+      </a:effectRef>
+      <a:fontRef idx="minor"/>
+    </dgm:style>
+  </dgm:styleLbl>
+  <dgm:styleLbl name="fgAcc3">
+    <dgm:scene3d>
+      <a:camera prst="orthographicFront"/>
+      <a:lightRig rig="threePt" dir="t"/>
+    </dgm:scene3d>
+    <dgm:sp3d/>
+    <dgm:txPr/>
+    <dgm:style>
+      <a:lnRef idx="1">
+        <a:scrgbClr r="0" g="0" b="0"/>
+      </a:lnRef>
+      <a:fillRef idx="1">
+        <a:scrgbClr r="0" g="0" b="0"/>
+      </a:fillRef>
+      <a:effectRef idx="0">
+        <a:scrgbClr r="0" g="0" b="0"/>
+      </a:effectRef>
+      <a:fontRef idx="minor"/>
+    </dgm:style>
+  </dgm:styleLbl>
+  <dgm:styleLbl name="fgAcc4">
+    <dgm:scene3d>
+      <a:camera prst="orthographicFront"/>
+      <a:lightRig rig="threePt" dir="t"/>
+    </dgm:scene3d>
+    <dgm:sp3d/>
+    <dgm:txPr/>
+    <dgm:style>
+      <a:lnRef idx="1">
+        <a:scrgbClr r="0" g="0" b="0"/>
+      </a:lnRef>
+      <a:fillRef idx="1">
+        <a:scrgbClr r="0" g="0" b="0"/>
+      </a:fillRef>
+      <a:effectRef idx="0">
+        <a:scrgbClr r="0" g="0" b="0"/>
+      </a:effectRef>
+      <a:fontRef idx="minor"/>
+    </dgm:style>
+  </dgm:styleLbl>
+  <dgm:styleLbl name="bgShp">
+    <dgm:scene3d>
+      <a:camera prst="orthographicFront"/>
+      <a:lightRig rig="threePt" dir="t"/>
+    </dgm:scene3d>
+    <dgm:sp3d/>
+    <dgm:txPr/>
+    <dgm:style>
+      <a:lnRef idx="0">
+        <a:scrgbClr r="0" g="0" b="0"/>
+      </a:lnRef>
+      <a:fillRef idx="1">
+        <a:scrgbClr r="0" g="0" b="0"/>
+      </a:fillRef>
+      <a:effectRef idx="2">
+        <a:scrgbClr r="0" g="0" b="0"/>
+      </a:effectRef>
+      <a:fontRef idx="minor"/>
+    </dgm:style>
+  </dgm:styleLbl>
+  <dgm:styleLbl name="dkBgShp">
+    <dgm:scene3d>
+      <a:camera prst="orthographicFront"/>
+      <a:lightRig rig="threePt" dir="t"/>
+    </dgm:scene3d>
+    <dgm:sp3d/>
+    <dgm:txPr/>
+    <dgm:style>
+      <a:lnRef idx="0">
+        <a:scrgbClr r="0" g="0" b="0"/>
+      </a:lnRef>
+      <a:fillRef idx="1">
+        <a:scrgbClr r="0" g="0" b="0"/>
+      </a:fillRef>
+      <a:effectRef idx="2">
+        <a:scrgbClr r="0" g="0" b="0"/>
+      </a:effectRef>
+      <a:fontRef idx="minor"/>
+    </dgm:style>
+  </dgm:styleLbl>
+  <dgm:styleLbl name="trBgShp">
+    <dgm:scene3d>
+      <a:camera prst="orthographicFront"/>
+      <a:lightRig rig="threePt" dir="t"/>
+    </dgm:scene3d>
+    <dgm:sp3d/>
+    <dgm:txPr/>
+    <dgm:style>
+      <a:lnRef idx="0">
+        <a:scrgbClr r="0" g="0" b="0"/>
+      </a:lnRef>
+      <a:fillRef idx="1">
+        <a:scrgbClr r="0" g="0" b="0"/>
+      </a:fillRef>
+      <a:effectRef idx="0">
+        <a:scrgbClr r="0" g="0" b="0"/>
+      </a:effectRef>
+      <a:fontRef idx="minor"/>
+    </dgm:style>
+  </dgm:styleLbl>
+  <dgm:styleLbl name="fgShp">
+    <dgm:scene3d>
+      <a:camera prst="orthographicFront"/>
+      <a:lightRig rig="threePt" dir="t"/>
+    </dgm:scene3d>
+    <dgm:sp3d/>
+    <dgm:txPr/>
+    <dgm:style>
+      <a:lnRef idx="0">
+        <a:scrgbClr r="0" g="0" b="0"/>
+      </a:lnRef>
+      <a:fillRef idx="3">
+        <a:scrgbClr r="0" g="0" b="0"/>
+      </a:fillRef>
+      <a:effectRef idx="2">
+        <a:scrgbClr r="0" g="0" b="0"/>
+      </a:effectRef>
+      <a:fontRef idx="minor"/>
+    </dgm:style>
+  </dgm:styleLbl>
+  <dgm:styleLbl name="revTx">
+    <dgm:scene3d>
+      <a:camera prst="orthographicFront"/>
+      <a:lightRig rig="threePt" dir="t"/>
+    </dgm:scene3d>
+    <dgm:sp3d/>
+    <dgm:txPr/>
+    <dgm:style>
+      <a:lnRef idx="0">
+        <a:scrgbClr r="0" g="0" b="0"/>
+      </a:lnRef>
+      <a:fillRef idx="0">
+        <a:scrgbClr r="0" g="0" b="0"/>
+      </a:fillRef>
+      <a:effectRef idx="0">
+        <a:scrgbClr r="0" g="0" b="0"/>
+      </a:effectRef>
+      <a:fontRef idx="minor"/>
+    </dgm:style>
+  </dgm:styleLbl>
+</dgm:styleDef>
 </file>
 
 <file path=ppt/notesMasters/notesMaster1.xml><?xml version="1.0" encoding="utf-8"?>
@@ -689,9 +8015,220 @@
 </p:notes>
 </file>
 
+<file path=ppt/notesSlides/notesSlide3.xml><?xml version="1.0" encoding="utf-8"?>
+<p:notes xmlns:a="http://schemas.openxmlformats.org/drawingml/2006/main" xmlns:r="http://schemas.openxmlformats.org/officeDocument/2006/relationships" xmlns:p="http://schemas.openxmlformats.org/presentationml/2006/main">
+  <p:cSld>
+    <p:spTree>
+      <p:nvGrpSpPr>
+        <p:cNvPr id="1" name=""/>
+        <p:cNvGrpSpPr/>
+        <p:nvPr/>
+      </p:nvGrpSpPr>
+      <p:grpSpPr>
+        <a:xfrm>
+          <a:off x="0" y="0"/>
+          <a:ext cx="0" cy="0"/>
+          <a:chOff x="0" y="0"/>
+          <a:chExt cx="0" cy="0"/>
+        </a:xfrm>
+      </p:grpSpPr>
+      <p:sp>
+        <p:nvSpPr>
+          <p:cNvPr id="2" name="Slide Image Placeholder 1"/>
+          <p:cNvSpPr>
+            <a:spLocks noGrp="1" noRot="1" noChangeAspect="1"/>
+          </p:cNvSpPr>
+          <p:nvPr>
+            <p:ph type="sldImg"/>
+          </p:nvPr>
+        </p:nvSpPr>
+        <p:spPr/>
+      </p:sp>
+      <p:sp>
+        <p:nvSpPr>
+          <p:cNvPr id="3" name="Notes Placeholder 2"/>
+          <p:cNvSpPr>
+            <a:spLocks noGrp="1"/>
+          </p:cNvSpPr>
+          <p:nvPr>
+            <p:ph type="body" idx="1"/>
+          </p:nvPr>
+        </p:nvSpPr>
+        <p:spPr/>
+        <p:txBody>
+          <a:bodyPr/>
+          <a:lstStyle/>
+          <a:p>
+            <a:r>
+              <a:rPr lang="en-IE" dirty="0"/>
+              <a:t>The Race Controller is built around a discrete-time simulation loop. At the start of a race, drivers and vehicles are generated and the race state is initialised.</a:t>
+            </a:r>
+          </a:p>
+          <a:p>
+            <a:r>
+              <a:rPr lang="en-IE" dirty="0"/>
+              <a:t>During each simulation tick, the controller calculates the movement of every active driver using their performance statistics, vehicle characteristics and a small amount of random variation.</a:t>
+            </a:r>
+          </a:p>
+          <a:p>
+            <a:r>
+              <a:rPr lang="en-IE" dirty="0"/>
+              <a:t>Vehicle progress and lap information are then updated, checkpoints are recalculated, and the cars are reordered to produce the current race standings.</a:t>
+            </a:r>
+          </a:p>
+          <a:p>
+            <a:r>
+              <a:rPr lang="en-IE" dirty="0"/>
+              <a:t>Finally, telemetry is generated and sent to the user interface, allowing the leaderboard and race display to update in real time. This process repeats until the race distance has been completed.</a:t>
+            </a:r>
+          </a:p>
+          <a:p>
+            <a:endParaRPr lang="en-IE" dirty="0"/>
+          </a:p>
+        </p:txBody>
+      </p:sp>
+      <p:sp>
+        <p:nvSpPr>
+          <p:cNvPr id="4" name="Slide Number Placeholder 3"/>
+          <p:cNvSpPr>
+            <a:spLocks noGrp="1"/>
+          </p:cNvSpPr>
+          <p:nvPr>
+            <p:ph type="sldNum" sz="quarter" idx="5"/>
+          </p:nvPr>
+        </p:nvSpPr>
+        <p:spPr/>
+        <p:txBody>
+          <a:bodyPr/>
+          <a:lstStyle/>
+          <a:p>
+            <a:fld id="{C439C384-FEF2-4015-9B8A-9427217FDE2D}" type="slidenum">
+              <a:rPr lang="en-IE" smtClean="0"/>
+              <a:t>4</a:t>
+            </a:fld>
+            <a:endParaRPr lang="en-IE"/>
+          </a:p>
+        </p:txBody>
+      </p:sp>
+    </p:spTree>
+    <p:extLst>
+      <p:ext uri="{BB962C8B-B14F-4D97-AF65-F5344CB8AC3E}">
+        <p14:creationId xmlns:p14="http://schemas.microsoft.com/office/powerpoint/2010/main" val="2769924171"/>
+      </p:ext>
+    </p:extLst>
+  </p:cSld>
+  <p:clrMapOvr>
+    <a:masterClrMapping/>
+  </p:clrMapOvr>
+</p:notes>
+</file>
+
+<file path=ppt/notesSlides/notesSlide4.xml><?xml version="1.0" encoding="utf-8"?>
+<p:notes xmlns:a="http://schemas.openxmlformats.org/drawingml/2006/main" xmlns:r="http://schemas.openxmlformats.org/officeDocument/2006/relationships" xmlns:p="http://schemas.openxmlformats.org/presentationml/2006/main">
+  <p:cSld>
+    <p:spTree>
+      <p:nvGrpSpPr>
+        <p:cNvPr id="1" name=""/>
+        <p:cNvGrpSpPr/>
+        <p:nvPr/>
+      </p:nvGrpSpPr>
+      <p:grpSpPr>
+        <a:xfrm>
+          <a:off x="0" y="0"/>
+          <a:ext cx="0" cy="0"/>
+          <a:chOff x="0" y="0"/>
+          <a:chExt cx="0" cy="0"/>
+        </a:xfrm>
+      </p:grpSpPr>
+      <p:sp>
+        <p:nvSpPr>
+          <p:cNvPr id="2" name="Slide Image Placeholder 1"/>
+          <p:cNvSpPr>
+            <a:spLocks noGrp="1" noRot="1" noChangeAspect="1"/>
+          </p:cNvSpPr>
+          <p:nvPr>
+            <p:ph type="sldImg"/>
+          </p:nvPr>
+        </p:nvSpPr>
+        <p:spPr/>
+      </p:sp>
+      <p:sp>
+        <p:nvSpPr>
+          <p:cNvPr id="3" name="Notes Placeholder 2"/>
+          <p:cNvSpPr>
+            <a:spLocks noGrp="1"/>
+          </p:cNvSpPr>
+          <p:nvPr>
+            <p:ph type="body" idx="1"/>
+          </p:nvPr>
+        </p:nvSpPr>
+        <p:spPr/>
+        <p:txBody>
+          <a:bodyPr/>
+          <a:lstStyle/>
+          <a:p>
+            <a:r>
+              <a:rPr lang="en-IE" dirty="0"/>
+              <a:t>The project was tested at four levels. Unit tests validated the driver generation logic, while class tests focused on the </a:t>
+            </a:r>
+            <a:r>
+              <a:rPr lang="en-IE" dirty="0" err="1"/>
+              <a:t>RaceController</a:t>
+            </a:r>
+            <a:r>
+              <a:rPr lang="en-IE" dirty="0"/>
+              <a:t>, which contains the core simulation logic. Integration testing used pytest-qt to ensure the backend and PyQt6 user interface communicated correctly. Finally, manual system testing verified each functional requirement, including race simulation, results, driver information and accessibility features. In total, 24 automated tests passed alongside all planned system tests, providing confidence that the application behaves as intended.</a:t>
+            </a:r>
+          </a:p>
+        </p:txBody>
+      </p:sp>
+      <p:sp>
+        <p:nvSpPr>
+          <p:cNvPr id="4" name="Slide Number Placeholder 3"/>
+          <p:cNvSpPr>
+            <a:spLocks noGrp="1"/>
+          </p:cNvSpPr>
+          <p:nvPr>
+            <p:ph type="sldNum" sz="quarter" idx="5"/>
+          </p:nvPr>
+        </p:nvSpPr>
+        <p:spPr/>
+        <p:txBody>
+          <a:bodyPr/>
+          <a:lstStyle/>
+          <a:p>
+            <a:fld id="{C439C384-FEF2-4015-9B8A-9427217FDE2D}" type="slidenum">
+              <a:rPr lang="en-IE" smtClean="0"/>
+              <a:t>5</a:t>
+            </a:fld>
+            <a:endParaRPr lang="en-IE"/>
+          </a:p>
+        </p:txBody>
+      </p:sp>
+    </p:spTree>
+    <p:extLst>
+      <p:ext uri="{BB962C8B-B14F-4D97-AF65-F5344CB8AC3E}">
+        <p14:creationId xmlns:p14="http://schemas.microsoft.com/office/powerpoint/2010/main" val="267433592"/>
+      </p:ext>
+    </p:extLst>
+  </p:cSld>
+  <p:clrMapOvr>
+    <a:masterClrMapping/>
+  </p:clrMapOvr>
+</p:notes>
+</file>
+
 <file path=ppt/slideLayouts/slideLayout1.xml><?xml version="1.0" encoding="utf-8"?>
 <p:sldLayout xmlns:a="http://schemas.openxmlformats.org/drawingml/2006/main" xmlns:r="http://schemas.openxmlformats.org/officeDocument/2006/relationships" xmlns:p="http://schemas.openxmlformats.org/presentationml/2006/main" type="title" preserve="1">
   <p:cSld name="Title Slide">
+    <p:bg>
+      <p:bgPr>
+        <a:solidFill>
+          <a:srgbClr val="353839"/>
+        </a:solidFill>
+        <a:effectLst/>
+      </p:bgPr>
+    </p:bg>
     <p:spTree>
       <p:nvGrpSpPr>
         <p:cNvPr id="1" name=""/>
@@ -4603,7 +12140,46 @@
           <a:bodyPr/>
           <a:lstStyle/>
           <a:p>
-            <a:endParaRPr lang="en-IE"/>
+            <a:pPr lvl="0"/>
+            <a:r>
+              <a:rPr lang="en-IE" dirty="0"/>
+              <a:t>Technologies</a:t>
+            </a:r>
+          </a:p>
+          <a:p>
+            <a:pPr lvl="1"/>
+            <a:r>
+              <a:rPr lang="en-IE" dirty="0"/>
+              <a:t>Python</a:t>
+            </a:r>
+          </a:p>
+          <a:p>
+            <a:pPr lvl="1"/>
+            <a:r>
+              <a:rPr lang="en-IE" dirty="0"/>
+              <a:t>PyQt6 for the GUI</a:t>
+            </a:r>
+          </a:p>
+          <a:p>
+            <a:pPr lvl="1"/>
+            <a:r>
+              <a:rPr lang="en-IE" dirty="0"/>
+              <a:t>JSON for track/accessibility configuration</a:t>
+            </a:r>
+          </a:p>
+          <a:p>
+            <a:pPr lvl="0"/>
+            <a:r>
+              <a:rPr lang="en-IE" dirty="0"/>
+              <a:t>Layered architecture</a:t>
+            </a:r>
+          </a:p>
+          <a:p>
+            <a:pPr lvl="1"/>
+            <a:r>
+              <a:rPr lang="en-IE" dirty="0"/>
+              <a:t>UI, simulation logic, data/configuration</a:t>
+            </a:r>
           </a:p>
         </p:txBody>
       </p:sp>
@@ -4665,31 +12241,37 @@
           </a:p>
         </p:txBody>
       </p:sp>
-      <p:sp>
-        <p:nvSpPr>
-          <p:cNvPr id="3" name="Content Placeholder 2">
+      <p:graphicFrame>
+        <p:nvGraphicFramePr>
+          <p:cNvPr id="4" name="Content Placeholder 3">
             <a:extLst>
               <a:ext uri="{FF2B5EF4-FFF2-40B4-BE49-F238E27FC236}">
-                <a16:creationId xmlns:a16="http://schemas.microsoft.com/office/drawing/2014/main" id="{2FB42E34-9B36-3EBF-7912-56426A687633}"/>
+                <a16:creationId xmlns:a16="http://schemas.microsoft.com/office/drawing/2014/main" id="{467BB6A2-DD62-CDC2-AD41-F99B434D14C0}"/>
               </a:ext>
             </a:extLst>
           </p:cNvPr>
-          <p:cNvSpPr>
-            <a:spLocks noGrp="1"/>
-          </p:cNvSpPr>
+          <p:cNvGraphicFramePr>
+            <a:graphicFrameLocks noGrp="1"/>
+          </p:cNvGraphicFramePr>
           <p:nvPr>
             <p:ph idx="1"/>
+            <p:extLst>
+              <p:ext uri="{D42A27DB-BD31-4B8C-83A1-F6EECF244321}">
+                <p14:modId xmlns:p14="http://schemas.microsoft.com/office/powerpoint/2010/main" val="2347318408"/>
+              </p:ext>
+            </p:extLst>
           </p:nvPr>
-        </p:nvSpPr>
-        <p:spPr/>
-        <p:txBody>
-          <a:bodyPr/>
-          <a:lstStyle/>
-          <a:p>
-            <a:endParaRPr lang="en-IE"/>
-          </a:p>
-        </p:txBody>
-      </p:sp>
+        </p:nvGraphicFramePr>
+        <p:xfrm>
+          <a:off x="838200" y="1825625"/>
+          <a:ext cx="10515600" cy="4351338"/>
+        </p:xfrm>
+        <a:graphic>
+          <a:graphicData uri="http://schemas.openxmlformats.org/drawingml/2006/diagram">
+            <dgm:relIds xmlns:dgm="http://schemas.openxmlformats.org/drawingml/2006/diagram" xmlns:r="http://schemas.openxmlformats.org/officeDocument/2006/relationships" r:dm="rId3" r:lo="rId4" r:qs="rId5" r:cs="rId6"/>
+          </a:graphicData>
+        </a:graphic>
+      </p:graphicFrame>
     </p:spTree>
     <p:extLst>
       <p:ext uri="{BB962C8B-B14F-4D97-AF65-F5344CB8AC3E}">
@@ -4736,9 +12318,16 @@
             <p:ph type="title"/>
           </p:nvPr>
         </p:nvSpPr>
-        <p:spPr/>
+        <p:spPr>
+          <a:xfrm>
+            <a:off x="838200" y="365125"/>
+            <a:ext cx="10515600" cy="1325563"/>
+          </a:xfrm>
+        </p:spPr>
         <p:txBody>
-          <a:bodyPr/>
+          <a:bodyPr anchor="ctr">
+            <a:normAutofit/>
+          </a:bodyPr>
           <a:lstStyle/>
           <a:p>
             <a:r>
@@ -4748,12 +12337,73 @@
           </a:p>
         </p:txBody>
       </p:sp>
+      <p:graphicFrame>
+        <p:nvGraphicFramePr>
+          <p:cNvPr id="5" name="Content Placeholder 2">
+            <a:extLst>
+              <a:ext uri="{FF2B5EF4-FFF2-40B4-BE49-F238E27FC236}">
+                <a16:creationId xmlns:a16="http://schemas.microsoft.com/office/drawing/2014/main" id="{2FCCEEA8-3C64-F854-06A7-1C17D12D22F0}"/>
+              </a:ext>
+            </a:extLst>
+          </p:cNvPr>
+          <p:cNvGraphicFramePr>
+            <a:graphicFrameLocks noGrp="1"/>
+          </p:cNvGraphicFramePr>
+          <p:nvPr>
+            <p:ph idx="1"/>
+            <p:extLst>
+              <p:ext uri="{D42A27DB-BD31-4B8C-83A1-F6EECF244321}">
+                <p14:modId xmlns:p14="http://schemas.microsoft.com/office/powerpoint/2010/main" val="2668840411"/>
+              </p:ext>
+            </p:extLst>
+          </p:nvPr>
+        </p:nvGraphicFramePr>
+        <p:xfrm>
+          <a:off x="838200" y="1825625"/>
+          <a:ext cx="10515600" cy="4351338"/>
+        </p:xfrm>
+        <a:graphic>
+          <a:graphicData uri="http://schemas.openxmlformats.org/drawingml/2006/diagram">
+            <dgm:relIds xmlns:dgm="http://schemas.openxmlformats.org/drawingml/2006/diagram" xmlns:r="http://schemas.openxmlformats.org/officeDocument/2006/relationships" r:dm="rId3" r:lo="rId4" r:qs="rId5" r:cs="rId6"/>
+          </a:graphicData>
+        </a:graphic>
+      </p:graphicFrame>
+    </p:spTree>
+    <p:extLst>
+      <p:ext uri="{BB962C8B-B14F-4D97-AF65-F5344CB8AC3E}">
+        <p14:creationId xmlns:p14="http://schemas.microsoft.com/office/powerpoint/2010/main" val="1509408172"/>
+      </p:ext>
+    </p:extLst>
+  </p:cSld>
+  <p:clrMapOvr>
+    <a:masterClrMapping/>
+  </p:clrMapOvr>
+</p:sld>
+</file>
+
+<file path=ppt/slides/slide6.xml><?xml version="1.0" encoding="utf-8"?>
+<p:sld xmlns:a="http://schemas.openxmlformats.org/drawingml/2006/main" xmlns:r="http://schemas.openxmlformats.org/officeDocument/2006/relationships" xmlns:p="http://schemas.openxmlformats.org/presentationml/2006/main">
+  <p:cSld>
+    <p:spTree>
+      <p:nvGrpSpPr>
+        <p:cNvPr id="1" name=""/>
+        <p:cNvGrpSpPr/>
+        <p:nvPr/>
+      </p:nvGrpSpPr>
+      <p:grpSpPr>
+        <a:xfrm>
+          <a:off x="0" y="0"/>
+          <a:ext cx="0" cy="0"/>
+          <a:chOff x="0" y="0"/>
+          <a:chExt cx="0" cy="0"/>
+        </a:xfrm>
+      </p:grpSpPr>
       <p:sp>
         <p:nvSpPr>
-          <p:cNvPr id="3" name="Content Placeholder 2">
+          <p:cNvPr id="2" name="Title 1">
             <a:extLst>
               <a:ext uri="{FF2B5EF4-FFF2-40B4-BE49-F238E27FC236}">
-                <a16:creationId xmlns:a16="http://schemas.microsoft.com/office/drawing/2014/main" id="{EACC85F6-9639-453A-20AA-647B05582C85}"/>
+                <a16:creationId xmlns:a16="http://schemas.microsoft.com/office/drawing/2014/main" id="{01B44AFE-C59A-0CCA-EBD0-5F3C4764A371}"/>
               </a:ext>
             </a:extLst>
           </p:cNvPr>
@@ -4761,7 +12411,7 @@
             <a:spLocks noGrp="1"/>
           </p:cNvSpPr>
           <p:nvPr>
-            <p:ph idx="1"/>
+            <p:ph type="ctrTitle"/>
           </p:nvPr>
         </p:nvSpPr>
         <p:spPr/>
@@ -4769,14 +12419,59 @@
           <a:bodyPr/>
           <a:lstStyle/>
           <a:p>
-            <a:endParaRPr lang="en-IE"/>
+            <a:r>
+              <a:rPr lang="en-GB" dirty="0"/>
+              <a:t>Demonstration</a:t>
+            </a:r>
+            <a:endParaRPr lang="en-IE" dirty="0"/>
+          </a:p>
+        </p:txBody>
+      </p:sp>
+      <p:sp>
+        <p:nvSpPr>
+          <p:cNvPr id="3" name="Subtitle 2">
+            <a:extLst>
+              <a:ext uri="{FF2B5EF4-FFF2-40B4-BE49-F238E27FC236}">
+                <a16:creationId xmlns:a16="http://schemas.microsoft.com/office/drawing/2014/main" id="{3C2169F1-5F8C-B2A6-A902-1307E61D0E52}"/>
+              </a:ext>
+            </a:extLst>
+          </p:cNvPr>
+          <p:cNvSpPr>
+            <a:spLocks noGrp="1"/>
+          </p:cNvSpPr>
+          <p:nvPr>
+            <p:ph type="subTitle" idx="1"/>
+          </p:nvPr>
+        </p:nvSpPr>
+        <p:spPr/>
+        <p:txBody>
+          <a:bodyPr/>
+          <a:lstStyle/>
+          <a:p>
+            <a:r>
+              <a:rPr lang="en-GB" dirty="0"/>
+              <a:t>Set up a race</a:t>
+            </a:r>
+          </a:p>
+          <a:p>
+            <a:r>
+              <a:rPr lang="en-GB" dirty="0"/>
+              <a:t>View the telemetry</a:t>
+            </a:r>
+          </a:p>
+          <a:p>
+            <a:r>
+              <a:rPr lang="en-GB" dirty="0"/>
+              <a:t>View the results</a:t>
+            </a:r>
+            <a:endParaRPr lang="en-IE" dirty="0"/>
           </a:p>
         </p:txBody>
       </p:sp>
     </p:spTree>
     <p:extLst>
       <p:ext uri="{BB962C8B-B14F-4D97-AF65-F5344CB8AC3E}">
-        <p14:creationId xmlns:p14="http://schemas.microsoft.com/office/powerpoint/2010/main" val="1509408172"/>
+        <p14:creationId xmlns:p14="http://schemas.microsoft.com/office/powerpoint/2010/main" val="2845539825"/>
       </p:ext>
     </p:extLst>
   </p:cSld>
